--- a/Project Overview.pptx
+++ b/Project Overview.pptx
@@ -1,18 +1,18 @@
 
 <file path=ppt/presentation.xml><?xml version="1.0" encoding="utf-8"?>
-<p:presentation xmlns:a="http://schemas.openxmlformats.org/drawingml/2006/main" xmlns:r="http://schemas.openxmlformats.org/officeDocument/2006/relationships" xmlns:p="http://schemas.openxmlformats.org/presentationml/2006/main" saveSubsetFonts="1" autoCompressPictures="0">
+<p:presentation xmlns:a="http://schemas.openxmlformats.org/drawingml/2006/main" xmlns:r="http://schemas.openxmlformats.org/officeDocument/2006/relationships" xmlns:p="http://schemas.openxmlformats.org/presentationml/2006/main" autoCompressPictures="0">
   <p:sldMasterIdLst>
     <p:sldMasterId id="2147483648" r:id="rId1"/>
   </p:sldMasterIdLst>
   <p:notesMasterIdLst>
-    <p:notesMasterId r:id="rId12"/>
+    <p:notesMasterId r:id="rId4"/>
   </p:notesMasterIdLst>
   <p:sldIdLst>
-    <p:sldId id="256" r:id="rId7"/>
-    <p:sldId id="257" r:id="rId8"/>
-    <p:sldId id="258" r:id="rId9"/>
-    <p:sldId id="259" r:id="rId10"/>
-    <p:sldId id="260" r:id="rId11"/>
+    <p:sldId id="256" r:id="rId3"/>
+    <p:sldId id="257" r:id="rId5"/>
+    <p:sldId id="258" r:id="rId6"/>
+    <p:sldId id="259" r:id="rId7"/>
+    <p:sldId id="260" r:id="rId8"/>
   </p:sldIdLst>
   <p:sldSz cx="12192000" cy="7620000" type="screen4x3"/>
   <p:notesSz cx="6858000" cy="9144000"/>
@@ -111,12 +111,33 @@
       </a:defRPr>
     </a:lvl9pPr>
   </p:defaultTextStyle>
+  <p:extLst>
+    <p:ext uri="{EFAFB233-063F-42B5-8137-9DF3F51BA10A}">
+      <p15:sldGuideLst xmlns:p15="http://schemas.microsoft.com/office/powerpoint/2012/main">
+        <p15:guide id="1" orient="horz" pos="2160" userDrawn="1">
+          <p15:clr>
+            <a:srgbClr val="A4A3A4"/>
+          </p15:clr>
+        </p15:guide>
+        <p15:guide id="2" pos="2880" userDrawn="1">
+          <p15:clr>
+            <a:srgbClr val="A4A3A4"/>
+          </p15:clr>
+        </p15:guide>
+      </p15:sldGuideLst>
+    </p:ext>
+  </p:extLst>
 </p:presentation>
 </file>
 
 <file path=ppt/notesMasters/notesMaster1.xml><?xml version="1.0" encoding="utf-8"?>
 <p:notesMaster xmlns:a="http://schemas.openxmlformats.org/drawingml/2006/main" xmlns:r="http://schemas.openxmlformats.org/officeDocument/2006/relationships" xmlns:p="http://schemas.openxmlformats.org/presentationml/2006/main">
   <p:cSld>
+    <p:bg>
+      <p:bgRef idx="1001">
+        <a:schemeClr val="bg1"/>
+      </p:bgRef>
+    </p:bg>
     <p:spTree>
       <p:nvGrpSpPr>
         <p:cNvPr id="1" name=""/>
@@ -244,7 +265,7 @@
   <p:hf/>
   <p:notesStyle>
     <a:lvl1pPr marL="0" algn="l">
-      <a:defRPr sz="1200" lang="en-US"/>
+      <a:defRPr lang="en-US" sz="1200"/>
     </a:lvl1pPr>
   </p:notesStyle>
 </p:notesMaster>
@@ -298,6 +319,7 @@
               <a:rPr lang="zh-CN" dirty="0"/>
               <a:t>各位评委好，今天介绍我们的梅特勒托利多 AI 竞赛项目方案——青霉素发酵稳定期目标变量预测。我们最终在排行榜上取得了平均绝对误差三点六七的成绩，这个结果源于我们对控制类型异质性的深入分析和针对性的建模策略。接下来从问题背景、数据探索、方案流程和最终性能四个方面展开介绍。</a:t>
             </a:r>
+            <a:endParaRPr lang="zh-CN" dirty="0"/>
           </a:p>
         </p:txBody>
       </p:sp>
@@ -357,6 +379,7 @@
               <a:rPr lang="zh-CN" dirty="0"/>
               <a:t>在明确了项目目标之后，来看我们面临的问题。任务是要预测青霉素发酵批次在稳定期的目标变量均值，这是一个回归任务，用平均绝对误差来评价。训练集只有一百零五个样本，测试集二十个样本，特征维度却高达九十七维，而且每个批次的时间序列长度不等，有五种、十种、二十种和三十五种时间点这四种情况。更关键的是，数据包含三种不同的控制类型——固定配方、操作员人工干预和自动过程控制，它们的工艺逻辑完全不同。这就构成了三大核心挑战：小样本高维容易过拟合，不等长时间序列需要压缩成固定长度，以及控制类型的异质性要求差异化处理。</a:t>
             </a:r>
+            <a:endParaRPr lang="zh-CN" dirty="0"/>
           </a:p>
         </p:txBody>
       </p:sp>
@@ -416,6 +439,7 @@
               <a:rPr lang="zh-CN" dirty="0"/>
               <a:t>带着这三大挑战，我们对数据进行了深入探索，最重要的发现是三类控制类型的目标分布显著不同。从对比表可以看到，固定配方控制有大约五十二个样本，目标均值二十四点八四；操作员控制约四十七个样本，均值二十五点零五；而自动过程控制只有六个样本，均值却高达二十八点一六。这个分布差异是整个方案的核心决策点——它直接决定了我们不能用同一个模型来处理所有样本，而必须按控制类型分别建模。此外我们还发现，六十四个拉曼光谱通道中只有八到十二个与目标强相关，需要特征选择；而温度、酸碱度等过程变量在交叉验证中并没有带来性能提升，所以最终方案只使用了光谱特征。</a:t>
             </a:r>
+            <a:endParaRPr lang="zh-CN" dirty="0"/>
           </a:p>
         </p:txBody>
       </p:sp>
@@ -475,6 +499,7 @@
               <a:rPr lang="zh-CN" dirty="0"/>
               <a:t>基于这些发现，我们设计了五阶段流水线方案。第一阶段是数据预处理，用前向和后向填充处理缺失值。第二阶段是特征工程，对六十四个通道分别计算均值、标准差、偏度、中位数和变异系数五个统计量，生成三百二十个候选特征。第三阶段是控制类型特异性的特征选择，按各自的相关性排名分别选取，固定配方选十四个，操作员选二十二个，自动控制因为样本太少只选三个而且用全局排名。第四阶段是 Ridge 回归建模，用 alpha 等于零点一的 L2 正则化，配合标准化、样本加权和三十次随机种子集成。第五阶段是分层校准，根据每种控制类型的交叉验证 R 平方来差异化设置收缩比例，R 平方越低收缩越多，最终输出提交文件。整个流程在 GroupKFold 五折交叉验证下取得了三点七一的成绩。</a:t>
             </a:r>
+            <a:endParaRPr lang="zh-CN" dirty="0"/>
           </a:p>
         </p:txBody>
       </p:sp>
@@ -534,6 +559,7 @@
               <a:rPr lang="zh-CN" dirty="0"/>
               <a:t>最后来看最终性能。我们在排行榜上取得了平均绝对误差三点六七的成绩，交叉验证成绩三点七一。校准的改善路径非常清晰：从基线的四点零六，加上固定配方校准降到三点八九，再加操作员校准降到三点八一，最后加自动控制校准降到三点六七，累计改善了零点三九。这个成绩源于四大创新：第一，控制类型特异性建模，充分捕捉工艺差异；第二，自适应特征选择，小样本类型更激进地降维防止过拟合；第三，分层校准，根据置信度差异化收缩；第四，样本加权，让模型聚焦目标分布。以上就是我们的项目方案，谢谢各位评委。</a:t>
             </a:r>
+            <a:endParaRPr lang="zh-CN" dirty="0"/>
           </a:p>
         </p:txBody>
       </p:sp>
@@ -726,7 +752,6 @@
           <a:p>
             <a:fld id="{5BCAD085-E8A6-8845-BD4E-CB4CCA059FC4}" type="datetimeFigureOut">
               <a:rPr lang="en-US" smtClean="0"/>
-              <a:t>1/27/13</a:t>
             </a:fld>
             <a:endParaRPr lang="en-US"/>
           </a:p>
@@ -768,18 +793,12 @@
           <a:p>
             <a:fld id="{C1FF6DA9-008F-8B48-92A6-B652298478BF}" type="slidenum">
               <a:rPr lang="en-US" smtClean="0"/>
-              <a:t>‹#›</a:t>
             </a:fld>
             <a:endParaRPr lang="en-US"/>
           </a:p>
         </p:txBody>
       </p:sp>
     </p:spTree>
-    <p:extLst>
-      <p:ext uri="{BB962C8B-B14F-4D97-AF65-F5344CB8AC3E}">
-        <p14:creationId xmlns:p14="http://schemas.microsoft.com/office/powerpoint/2010/main" val="3168075583"/>
-      </p:ext>
-    </p:extLst>
   </p:cSld>
   <p:clrMapOvr>
     <a:masterClrMapping/>
@@ -847,6 +866,7 @@
               <a:rPr lang="en-US" smtClean="0"/>
               <a:t>Click to edit Master text styles</a:t>
             </a:r>
+            <a:endParaRPr lang="en-US" smtClean="0"/>
           </a:p>
           <a:p>
             <a:pPr lvl="1"/>
@@ -854,6 +874,7 @@
               <a:rPr lang="en-US" smtClean="0"/>
               <a:t>Second level</a:t>
             </a:r>
+            <a:endParaRPr lang="en-US" smtClean="0"/>
           </a:p>
           <a:p>
             <a:pPr lvl="2"/>
@@ -861,6 +882,7 @@
               <a:rPr lang="en-US" smtClean="0"/>
               <a:t>Third level</a:t>
             </a:r>
+            <a:endParaRPr lang="en-US" smtClean="0"/>
           </a:p>
           <a:p>
             <a:pPr lvl="3"/>
@@ -868,6 +890,7 @@
               <a:rPr lang="en-US" smtClean="0"/>
               <a:t>Fourth level</a:t>
             </a:r>
+            <a:endParaRPr lang="en-US" smtClean="0"/>
           </a:p>
           <a:p>
             <a:pPr lvl="4"/>
@@ -896,7 +919,6 @@
           <a:p>
             <a:fld id="{5BCAD085-E8A6-8845-BD4E-CB4CCA059FC4}" type="datetimeFigureOut">
               <a:rPr lang="en-US" smtClean="0"/>
-              <a:t>1/27/13</a:t>
             </a:fld>
             <a:endParaRPr lang="en-US"/>
           </a:p>
@@ -938,18 +960,12 @@
           <a:p>
             <a:fld id="{C1FF6DA9-008F-8B48-92A6-B652298478BF}" type="slidenum">
               <a:rPr lang="en-US" smtClean="0"/>
-              <a:t>‹#›</a:t>
             </a:fld>
             <a:endParaRPr lang="en-US"/>
           </a:p>
         </p:txBody>
       </p:sp>
     </p:spTree>
-    <p:extLst>
-      <p:ext uri="{BB962C8B-B14F-4D97-AF65-F5344CB8AC3E}">
-        <p14:creationId xmlns:p14="http://schemas.microsoft.com/office/powerpoint/2010/main" val="2910927964"/>
-      </p:ext>
-    </p:extLst>
   </p:cSld>
   <p:clrMapOvr>
     <a:masterClrMapping/>
@@ -1027,6 +1043,7 @@
               <a:rPr lang="en-US" smtClean="0"/>
               <a:t>Click to edit Master text styles</a:t>
             </a:r>
+            <a:endParaRPr lang="en-US" smtClean="0"/>
           </a:p>
           <a:p>
             <a:pPr lvl="1"/>
@@ -1034,6 +1051,7 @@
               <a:rPr lang="en-US" smtClean="0"/>
               <a:t>Second level</a:t>
             </a:r>
+            <a:endParaRPr lang="en-US" smtClean="0"/>
           </a:p>
           <a:p>
             <a:pPr lvl="2"/>
@@ -1041,6 +1059,7 @@
               <a:rPr lang="en-US" smtClean="0"/>
               <a:t>Third level</a:t>
             </a:r>
+            <a:endParaRPr lang="en-US" smtClean="0"/>
           </a:p>
           <a:p>
             <a:pPr lvl="3"/>
@@ -1048,6 +1067,7 @@
               <a:rPr lang="en-US" smtClean="0"/>
               <a:t>Fourth level</a:t>
             </a:r>
+            <a:endParaRPr lang="en-US" smtClean="0"/>
           </a:p>
           <a:p>
             <a:pPr lvl="4"/>
@@ -1076,7 +1096,6 @@
           <a:p>
             <a:fld id="{5BCAD085-E8A6-8845-BD4E-CB4CCA059FC4}" type="datetimeFigureOut">
               <a:rPr lang="en-US" smtClean="0"/>
-              <a:t>1/27/13</a:t>
             </a:fld>
             <a:endParaRPr lang="en-US"/>
           </a:p>
@@ -1118,18 +1137,12 @@
           <a:p>
             <a:fld id="{C1FF6DA9-008F-8B48-92A6-B652298478BF}" type="slidenum">
               <a:rPr lang="en-US" smtClean="0"/>
-              <a:t>‹#›</a:t>
             </a:fld>
             <a:endParaRPr lang="en-US"/>
           </a:p>
         </p:txBody>
       </p:sp>
     </p:spTree>
-    <p:extLst>
-      <p:ext uri="{BB962C8B-B14F-4D97-AF65-F5344CB8AC3E}">
-        <p14:creationId xmlns:p14="http://schemas.microsoft.com/office/powerpoint/2010/main" val="3612223792"/>
-      </p:ext>
-    </p:extLst>
   </p:cSld>
   <p:clrMapOvr>
     <a:masterClrMapping/>
@@ -1197,6 +1210,7 @@
               <a:rPr lang="en-US" smtClean="0"/>
               <a:t>Click to edit Master text styles</a:t>
             </a:r>
+            <a:endParaRPr lang="en-US" smtClean="0"/>
           </a:p>
           <a:p>
             <a:pPr lvl="1"/>
@@ -1204,6 +1218,7 @@
               <a:rPr lang="en-US" smtClean="0"/>
               <a:t>Second level</a:t>
             </a:r>
+            <a:endParaRPr lang="en-US" smtClean="0"/>
           </a:p>
           <a:p>
             <a:pPr lvl="2"/>
@@ -1211,6 +1226,7 @@
               <a:rPr lang="en-US" smtClean="0"/>
               <a:t>Third level</a:t>
             </a:r>
+            <a:endParaRPr lang="en-US" smtClean="0"/>
           </a:p>
           <a:p>
             <a:pPr lvl="3"/>
@@ -1218,6 +1234,7 @@
               <a:rPr lang="en-US" smtClean="0"/>
               <a:t>Fourth level</a:t>
             </a:r>
+            <a:endParaRPr lang="en-US" smtClean="0"/>
           </a:p>
           <a:p>
             <a:pPr lvl="4"/>
@@ -1246,7 +1263,6 @@
           <a:p>
             <a:fld id="{5BCAD085-E8A6-8845-BD4E-CB4CCA059FC4}" type="datetimeFigureOut">
               <a:rPr lang="en-US" smtClean="0"/>
-              <a:t>1/27/13</a:t>
             </a:fld>
             <a:endParaRPr lang="en-US"/>
           </a:p>
@@ -1288,18 +1304,12 @@
           <a:p>
             <a:fld id="{C1FF6DA9-008F-8B48-92A6-B652298478BF}" type="slidenum">
               <a:rPr lang="en-US" smtClean="0"/>
-              <a:t>‹#›</a:t>
             </a:fld>
             <a:endParaRPr lang="en-US"/>
           </a:p>
         </p:txBody>
       </p:sp>
     </p:spTree>
-    <p:extLst>
-      <p:ext uri="{BB962C8B-B14F-4D97-AF65-F5344CB8AC3E}">
-        <p14:creationId xmlns:p14="http://schemas.microsoft.com/office/powerpoint/2010/main" val="2614314258"/>
-      </p:ext>
-    </p:extLst>
   </p:cSld>
   <p:clrMapOvr>
     <a:masterClrMapping/>
@@ -1472,6 +1482,7 @@
               <a:rPr lang="en-US" smtClean="0"/>
               <a:t>Click to edit Master text styles</a:t>
             </a:r>
+            <a:endParaRPr lang="en-US" smtClean="0"/>
           </a:p>
         </p:txBody>
       </p:sp>
@@ -1492,7 +1503,6 @@
           <a:p>
             <a:fld id="{5BCAD085-E8A6-8845-BD4E-CB4CCA059FC4}" type="datetimeFigureOut">
               <a:rPr lang="en-US" smtClean="0"/>
-              <a:t>1/27/13</a:t>
             </a:fld>
             <a:endParaRPr lang="en-US"/>
           </a:p>
@@ -1534,18 +1544,12 @@
           <a:p>
             <a:fld id="{C1FF6DA9-008F-8B48-92A6-B652298478BF}" type="slidenum">
               <a:rPr lang="en-US" smtClean="0"/>
-              <a:t>‹#›</a:t>
             </a:fld>
             <a:endParaRPr lang="en-US"/>
           </a:p>
         </p:txBody>
       </p:sp>
     </p:spTree>
-    <p:extLst>
-      <p:ext uri="{BB962C8B-B14F-4D97-AF65-F5344CB8AC3E}">
-        <p14:creationId xmlns:p14="http://schemas.microsoft.com/office/powerpoint/2010/main" val="960648375"/>
-      </p:ext>
-    </p:extLst>
   </p:cSld>
   <p:clrMapOvr>
     <a:masterClrMapping/>
@@ -1646,6 +1650,7 @@
               <a:rPr lang="en-US" smtClean="0"/>
               <a:t>Click to edit Master text styles</a:t>
             </a:r>
+            <a:endParaRPr lang="en-US" smtClean="0"/>
           </a:p>
           <a:p>
             <a:pPr lvl="1"/>
@@ -1653,6 +1658,7 @@
               <a:rPr lang="en-US" smtClean="0"/>
               <a:t>Second level</a:t>
             </a:r>
+            <a:endParaRPr lang="en-US" smtClean="0"/>
           </a:p>
           <a:p>
             <a:pPr lvl="2"/>
@@ -1660,6 +1666,7 @@
               <a:rPr lang="en-US" smtClean="0"/>
               <a:t>Third level</a:t>
             </a:r>
+            <a:endParaRPr lang="en-US" smtClean="0"/>
           </a:p>
           <a:p>
             <a:pPr lvl="3"/>
@@ -1667,6 +1674,7 @@
               <a:rPr lang="en-US" smtClean="0"/>
               <a:t>Fourth level</a:t>
             </a:r>
+            <a:endParaRPr lang="en-US" smtClean="0"/>
           </a:p>
           <a:p>
             <a:pPr lvl="4"/>
@@ -1731,6 +1739,7 @@
               <a:rPr lang="en-US" smtClean="0"/>
               <a:t>Click to edit Master text styles</a:t>
             </a:r>
+            <a:endParaRPr lang="en-US" smtClean="0"/>
           </a:p>
           <a:p>
             <a:pPr lvl="1"/>
@@ -1738,6 +1747,7 @@
               <a:rPr lang="en-US" smtClean="0"/>
               <a:t>Second level</a:t>
             </a:r>
+            <a:endParaRPr lang="en-US" smtClean="0"/>
           </a:p>
           <a:p>
             <a:pPr lvl="2"/>
@@ -1745,6 +1755,7 @@
               <a:rPr lang="en-US" smtClean="0"/>
               <a:t>Third level</a:t>
             </a:r>
+            <a:endParaRPr lang="en-US" smtClean="0"/>
           </a:p>
           <a:p>
             <a:pPr lvl="3"/>
@@ -1752,6 +1763,7 @@
               <a:rPr lang="en-US" smtClean="0"/>
               <a:t>Fourth level</a:t>
             </a:r>
+            <a:endParaRPr lang="en-US" smtClean="0"/>
           </a:p>
           <a:p>
             <a:pPr lvl="4"/>
@@ -1780,7 +1792,6 @@
           <a:p>
             <a:fld id="{5BCAD085-E8A6-8845-BD4E-CB4CCA059FC4}" type="datetimeFigureOut">
               <a:rPr lang="en-US" smtClean="0"/>
-              <a:t>1/27/13</a:t>
             </a:fld>
             <a:endParaRPr lang="en-US"/>
           </a:p>
@@ -1822,18 +1833,12 @@
           <a:p>
             <a:fld id="{C1FF6DA9-008F-8B48-92A6-B652298478BF}" type="slidenum">
               <a:rPr lang="en-US" smtClean="0"/>
-              <a:t>‹#›</a:t>
             </a:fld>
             <a:endParaRPr lang="en-US"/>
           </a:p>
         </p:txBody>
       </p:sp>
     </p:spTree>
-    <p:extLst>
-      <p:ext uri="{BB962C8B-B14F-4D97-AF65-F5344CB8AC3E}">
-        <p14:creationId xmlns:p14="http://schemas.microsoft.com/office/powerpoint/2010/main" val="2782244947"/>
-      </p:ext>
-    </p:extLst>
   </p:cSld>
   <p:clrMapOvr>
     <a:masterClrMapping/>
@@ -1947,6 +1952,7 @@
               <a:rPr lang="en-US" smtClean="0"/>
               <a:t>Click to edit Master text styles</a:t>
             </a:r>
+            <a:endParaRPr lang="en-US" smtClean="0"/>
           </a:p>
         </p:txBody>
       </p:sp>
@@ -2003,6 +2009,7 @@
               <a:rPr lang="en-US" smtClean="0"/>
               <a:t>Click to edit Master text styles</a:t>
             </a:r>
+            <a:endParaRPr lang="en-US" smtClean="0"/>
           </a:p>
           <a:p>
             <a:pPr lvl="1"/>
@@ -2010,6 +2017,7 @@
               <a:rPr lang="en-US" smtClean="0"/>
               <a:t>Second level</a:t>
             </a:r>
+            <a:endParaRPr lang="en-US" smtClean="0"/>
           </a:p>
           <a:p>
             <a:pPr lvl="2"/>
@@ -2017,6 +2025,7 @@
               <a:rPr lang="en-US" smtClean="0"/>
               <a:t>Third level</a:t>
             </a:r>
+            <a:endParaRPr lang="en-US" smtClean="0"/>
           </a:p>
           <a:p>
             <a:pPr lvl="3"/>
@@ -2024,6 +2033,7 @@
               <a:rPr lang="en-US" smtClean="0"/>
               <a:t>Fourth level</a:t>
             </a:r>
+            <a:endParaRPr lang="en-US" smtClean="0"/>
           </a:p>
           <a:p>
             <a:pPr lvl="4"/>
@@ -2097,6 +2107,7 @@
               <a:rPr lang="en-US" smtClean="0"/>
               <a:t>Click to edit Master text styles</a:t>
             </a:r>
+            <a:endParaRPr lang="en-US" smtClean="0"/>
           </a:p>
         </p:txBody>
       </p:sp>
@@ -2153,6 +2164,7 @@
               <a:rPr lang="en-US" smtClean="0"/>
               <a:t>Click to edit Master text styles</a:t>
             </a:r>
+            <a:endParaRPr lang="en-US" smtClean="0"/>
           </a:p>
           <a:p>
             <a:pPr lvl="1"/>
@@ -2160,6 +2172,7 @@
               <a:rPr lang="en-US" smtClean="0"/>
               <a:t>Second level</a:t>
             </a:r>
+            <a:endParaRPr lang="en-US" smtClean="0"/>
           </a:p>
           <a:p>
             <a:pPr lvl="2"/>
@@ -2167,6 +2180,7 @@
               <a:rPr lang="en-US" smtClean="0"/>
               <a:t>Third level</a:t>
             </a:r>
+            <a:endParaRPr lang="en-US" smtClean="0"/>
           </a:p>
           <a:p>
             <a:pPr lvl="3"/>
@@ -2174,6 +2188,7 @@
               <a:rPr lang="en-US" smtClean="0"/>
               <a:t>Fourth level</a:t>
             </a:r>
+            <a:endParaRPr lang="en-US" smtClean="0"/>
           </a:p>
           <a:p>
             <a:pPr lvl="4"/>
@@ -2202,7 +2217,6 @@
           <a:p>
             <a:fld id="{5BCAD085-E8A6-8845-BD4E-CB4CCA059FC4}" type="datetimeFigureOut">
               <a:rPr lang="en-US" smtClean="0"/>
-              <a:t>1/27/13</a:t>
             </a:fld>
             <a:endParaRPr lang="en-US"/>
           </a:p>
@@ -2244,18 +2258,12 @@
           <a:p>
             <a:fld id="{C1FF6DA9-008F-8B48-92A6-B652298478BF}" type="slidenum">
               <a:rPr lang="en-US" smtClean="0"/>
-              <a:t>‹#›</a:t>
             </a:fld>
             <a:endParaRPr lang="en-US"/>
           </a:p>
         </p:txBody>
       </p:sp>
     </p:spTree>
-    <p:extLst>
-      <p:ext uri="{BB962C8B-B14F-4D97-AF65-F5344CB8AC3E}">
-        <p14:creationId xmlns:p14="http://schemas.microsoft.com/office/powerpoint/2010/main" val="990158736"/>
-      </p:ext>
-    </p:extLst>
   </p:cSld>
   <p:clrMapOvr>
     <a:masterClrMapping/>
@@ -2320,7 +2328,6 @@
           <a:p>
             <a:fld id="{5BCAD085-E8A6-8845-BD4E-CB4CCA059FC4}" type="datetimeFigureOut">
               <a:rPr lang="en-US" smtClean="0"/>
-              <a:t>1/27/13</a:t>
             </a:fld>
             <a:endParaRPr lang="en-US"/>
           </a:p>
@@ -2362,18 +2369,12 @@
           <a:p>
             <a:fld id="{C1FF6DA9-008F-8B48-92A6-B652298478BF}" type="slidenum">
               <a:rPr lang="en-US" smtClean="0"/>
-              <a:t>‹#›</a:t>
             </a:fld>
             <a:endParaRPr lang="en-US"/>
           </a:p>
         </p:txBody>
       </p:sp>
     </p:spTree>
-    <p:extLst>
-      <p:ext uri="{BB962C8B-B14F-4D97-AF65-F5344CB8AC3E}">
-        <p14:creationId xmlns:p14="http://schemas.microsoft.com/office/powerpoint/2010/main" val="727027711"/>
-      </p:ext>
-    </p:extLst>
   </p:cSld>
   <p:clrMapOvr>
     <a:masterClrMapping/>
@@ -2415,7 +2416,6 @@
           <a:p>
             <a:fld id="{5BCAD085-E8A6-8845-BD4E-CB4CCA059FC4}" type="datetimeFigureOut">
               <a:rPr lang="en-US" smtClean="0"/>
-              <a:t>1/27/13</a:t>
             </a:fld>
             <a:endParaRPr lang="en-US"/>
           </a:p>
@@ -2457,18 +2457,12 @@
           <a:p>
             <a:fld id="{C1FF6DA9-008F-8B48-92A6-B652298478BF}" type="slidenum">
               <a:rPr lang="en-US" smtClean="0"/>
-              <a:t>‹#›</a:t>
             </a:fld>
             <a:endParaRPr lang="en-US"/>
           </a:p>
         </p:txBody>
       </p:sp>
     </p:spTree>
-    <p:extLst>
-      <p:ext uri="{BB962C8B-B14F-4D97-AF65-F5344CB8AC3E}">
-        <p14:creationId xmlns:p14="http://schemas.microsoft.com/office/powerpoint/2010/main" val="1212999818"/>
-      </p:ext>
-    </p:extLst>
   </p:cSld>
   <p:clrMapOvr>
     <a:masterClrMapping/>
@@ -2578,6 +2572,7 @@
               <a:rPr lang="en-US" smtClean="0"/>
               <a:t>Click to edit Master text styles</a:t>
             </a:r>
+            <a:endParaRPr lang="en-US" smtClean="0"/>
           </a:p>
           <a:p>
             <a:pPr lvl="1"/>
@@ -2585,6 +2580,7 @@
               <a:rPr lang="en-US" smtClean="0"/>
               <a:t>Second level</a:t>
             </a:r>
+            <a:endParaRPr lang="en-US" smtClean="0"/>
           </a:p>
           <a:p>
             <a:pPr lvl="2"/>
@@ -2592,6 +2588,7 @@
               <a:rPr lang="en-US" smtClean="0"/>
               <a:t>Third level</a:t>
             </a:r>
+            <a:endParaRPr lang="en-US" smtClean="0"/>
           </a:p>
           <a:p>
             <a:pPr lvl="3"/>
@@ -2599,6 +2596,7 @@
               <a:rPr lang="en-US" smtClean="0"/>
               <a:t>Fourth level</a:t>
             </a:r>
+            <a:endParaRPr lang="en-US" smtClean="0"/>
           </a:p>
           <a:p>
             <a:pPr lvl="4"/>
@@ -2672,6 +2670,7 @@
               <a:rPr lang="en-US" smtClean="0"/>
               <a:t>Click to edit Master text styles</a:t>
             </a:r>
+            <a:endParaRPr lang="en-US" smtClean="0"/>
           </a:p>
         </p:txBody>
       </p:sp>
@@ -2692,7 +2691,6 @@
           <a:p>
             <a:fld id="{5BCAD085-E8A6-8845-BD4E-CB4CCA059FC4}" type="datetimeFigureOut">
               <a:rPr lang="en-US" smtClean="0"/>
-              <a:t>1/27/13</a:t>
             </a:fld>
             <a:endParaRPr lang="en-US"/>
           </a:p>
@@ -2734,18 +2732,12 @@
           <a:p>
             <a:fld id="{C1FF6DA9-008F-8B48-92A6-B652298478BF}" type="slidenum">
               <a:rPr lang="en-US" smtClean="0"/>
-              <a:t>‹#›</a:t>
             </a:fld>
             <a:endParaRPr lang="en-US"/>
           </a:p>
         </p:txBody>
       </p:sp>
     </p:spTree>
-    <p:extLst>
-      <p:ext uri="{BB962C8B-B14F-4D97-AF65-F5344CB8AC3E}">
-        <p14:creationId xmlns:p14="http://schemas.microsoft.com/office/powerpoint/2010/main" val="1840726560"/>
-      </p:ext>
-    </p:extLst>
   </p:cSld>
   <p:clrMapOvr>
     <a:masterClrMapping/>
@@ -2925,6 +2917,7 @@
               <a:rPr lang="en-US" smtClean="0"/>
               <a:t>Click to edit Master text styles</a:t>
             </a:r>
+            <a:endParaRPr lang="en-US" smtClean="0"/>
           </a:p>
         </p:txBody>
       </p:sp>
@@ -2945,7 +2938,6 @@
           <a:p>
             <a:fld id="{5BCAD085-E8A6-8845-BD4E-CB4CCA059FC4}" type="datetimeFigureOut">
               <a:rPr lang="en-US" smtClean="0"/>
-              <a:t>1/27/13</a:t>
             </a:fld>
             <a:endParaRPr lang="en-US"/>
           </a:p>
@@ -2987,18 +2979,12 @@
           <a:p>
             <a:fld id="{C1FF6DA9-008F-8B48-92A6-B652298478BF}" type="slidenum">
               <a:rPr lang="en-US" smtClean="0"/>
-              <a:t>‹#›</a:t>
             </a:fld>
             <a:endParaRPr lang="en-US"/>
           </a:p>
         </p:txBody>
       </p:sp>
     </p:spTree>
-    <p:extLst>
-      <p:ext uri="{BB962C8B-B14F-4D97-AF65-F5344CB8AC3E}">
-        <p14:creationId xmlns:p14="http://schemas.microsoft.com/office/powerpoint/2010/main" val="3889236939"/>
-      </p:ext>
-    </p:extLst>
   </p:cSld>
   <p:clrMapOvr>
     <a:masterClrMapping/>
@@ -3091,6 +3077,7 @@
               <a:rPr lang="en-US" smtClean="0"/>
               <a:t>Click to edit Master text styles</a:t>
             </a:r>
+            <a:endParaRPr lang="en-US" smtClean="0"/>
           </a:p>
           <a:p>
             <a:pPr lvl="1"/>
@@ -3098,6 +3085,7 @@
               <a:rPr lang="en-US" smtClean="0"/>
               <a:t>Second level</a:t>
             </a:r>
+            <a:endParaRPr lang="en-US" smtClean="0"/>
           </a:p>
           <a:p>
             <a:pPr lvl="2"/>
@@ -3105,6 +3093,7 @@
               <a:rPr lang="en-US" smtClean="0"/>
               <a:t>Third level</a:t>
             </a:r>
+            <a:endParaRPr lang="en-US" smtClean="0"/>
           </a:p>
           <a:p>
             <a:pPr lvl="3"/>
@@ -3112,6 +3101,7 @@
               <a:rPr lang="en-US" smtClean="0"/>
               <a:t>Fourth level</a:t>
             </a:r>
+            <a:endParaRPr lang="en-US" smtClean="0"/>
           </a:p>
           <a:p>
             <a:pPr lvl="4"/>
@@ -3158,7 +3148,6 @@
           <a:p>
             <a:fld id="{5BCAD085-E8A6-8845-BD4E-CB4CCA059FC4}" type="datetimeFigureOut">
               <a:rPr lang="en-US" smtClean="0"/>
-              <a:t>1/27/13</a:t>
             </a:fld>
             <a:endParaRPr lang="en-US"/>
           </a:p>
@@ -3236,18 +3225,12 @@
           <a:p>
             <a:fld id="{C1FF6DA9-008F-8B48-92A6-B652298478BF}" type="slidenum">
               <a:rPr lang="en-US" smtClean="0"/>
-              <a:t>‹#›</a:t>
             </a:fld>
             <a:endParaRPr lang="en-US"/>
           </a:p>
         </p:txBody>
       </p:sp>
     </p:spTree>
-    <p:extLst>
-      <p:ext uri="{BB962C8B-B14F-4D97-AF65-F5344CB8AC3E}">
-        <p14:creationId xmlns:p14="http://schemas.microsoft.com/office/powerpoint/2010/main" val="2209977519"/>
-      </p:ext>
-    </p:extLst>
   </p:cSld>
   <p:clrMap bg1="lt1" tx1="dk1" bg2="lt2" tx2="dk2" accent1="accent1" accent2="accent2" accent3="accent3" accent4="accent4" accent5="accent5" accent6="accent6" hlink="hlink" folHlink="folHlink"/>
   <p:sldLayoutIdLst>
@@ -3285,7 +3268,7 @@
         <a:spcBef>
           <a:spcPct val="20000"/>
         </a:spcBef>
-        <a:buFont typeface="Arial"/>
+        <a:buFont typeface="Arial" panose="020B0604020202020204"/>
         <a:buChar char="•"/>
         <a:defRPr sz="3200" kern="1200">
           <a:solidFill>
@@ -3300,7 +3283,7 @@
         <a:spcBef>
           <a:spcPct val="20000"/>
         </a:spcBef>
-        <a:buFont typeface="Arial"/>
+        <a:buFont typeface="Arial" panose="020B0604020202020204"/>
         <a:buChar char="–"/>
         <a:defRPr sz="2800" kern="1200">
           <a:solidFill>
@@ -3315,7 +3298,7 @@
         <a:spcBef>
           <a:spcPct val="20000"/>
         </a:spcBef>
-        <a:buFont typeface="Arial"/>
+        <a:buFont typeface="Arial" panose="020B0604020202020204"/>
         <a:buChar char="•"/>
         <a:defRPr sz="2400" kern="1200">
           <a:solidFill>
@@ -3330,7 +3313,7 @@
         <a:spcBef>
           <a:spcPct val="20000"/>
         </a:spcBef>
-        <a:buFont typeface="Arial"/>
+        <a:buFont typeface="Arial" panose="020B0604020202020204"/>
         <a:buChar char="–"/>
         <a:defRPr sz="2000" kern="1200">
           <a:solidFill>
@@ -3345,7 +3328,7 @@
         <a:spcBef>
           <a:spcPct val="20000"/>
         </a:spcBef>
-        <a:buFont typeface="Arial"/>
+        <a:buFont typeface="Arial" panose="020B0604020202020204"/>
         <a:buChar char="»"/>
         <a:defRPr sz="2000" kern="1200">
           <a:solidFill>
@@ -3360,7 +3343,7 @@
         <a:spcBef>
           <a:spcPct val="20000"/>
         </a:spcBef>
-        <a:buFont typeface="Arial"/>
+        <a:buFont typeface="Arial" panose="020B0604020202020204"/>
         <a:buChar char="•"/>
         <a:defRPr sz="2000" kern="1200">
           <a:solidFill>
@@ -3375,7 +3358,7 @@
         <a:spcBef>
           <a:spcPct val="20000"/>
         </a:spcBef>
-        <a:buFont typeface="Arial"/>
+        <a:buFont typeface="Arial" panose="020B0604020202020204"/>
         <a:buChar char="•"/>
         <a:defRPr sz="2000" kern="1200">
           <a:solidFill>
@@ -3390,7 +3373,7 @@
         <a:spcBef>
           <a:spcPct val="20000"/>
         </a:spcBef>
-        <a:buFont typeface="Arial"/>
+        <a:buFont typeface="Arial" panose="020B0604020202020204"/>
         <a:buChar char="•"/>
         <a:defRPr sz="2000" kern="1200">
           <a:solidFill>
@@ -3405,7 +3388,7 @@
         <a:spcBef>
           <a:spcPct val="20000"/>
         </a:spcBef>
-        <a:buFont typeface="Arial"/>
+        <a:buFont typeface="Arial" panose="020B0604020202020204"/>
         <a:buChar char="•"/>
         <a:defRPr sz="2000" kern="1200">
           <a:solidFill>
@@ -3673,12 +3656,20 @@
                   <a:solidFill>
                     <a:srgbClr val="C9962B"/>
                   </a:solidFill>
-                  <a:latin typeface="Times New Roman"/>
-                  <a:ea typeface="Microsoft YaHei"/>
-                  <a:cs typeface="Times New Roman"/>
+                  <a:latin typeface="Times New Roman" panose="02020603050405020304"/>
+                  <a:ea typeface="微软雅黑" panose="020B0503020204020204" charset="-122"/>
+                  <a:cs typeface="Times New Roman" panose="02020603050405020304"/>
                 </a:rPr>
                 <a:t>MTL AI CHALLENGE · 项目方案</a:t>
               </a:r>
+              <a:endParaRPr lang="zh-CN" sz="1350" b="1" spc="75" dirty="0">
+                <a:solidFill>
+                  <a:srgbClr val="C9962B"/>
+                </a:solidFill>
+                <a:latin typeface="Times New Roman" panose="02020603050405020304"/>
+                <a:ea typeface="微软雅黑" panose="020B0503020204020204" charset="-122"/>
+                <a:cs typeface="Times New Roman" panose="02020603050405020304"/>
+              </a:endParaRPr>
             </a:p>
           </p:txBody>
         </p:sp>
@@ -4093,12 +4084,20 @@
                   <a:solidFill>
                     <a:srgbClr val="5A6478"/>
                   </a:solidFill>
-                  <a:latin typeface="Times New Roman"/>
-                  <a:ea typeface="Times New Roman"/>
-                  <a:cs typeface="Times New Roman"/>
+                  <a:latin typeface="Times New Roman" panose="02020603050405020304"/>
+                  <a:ea typeface="Times New Roman" panose="02020603050405020304"/>
+                  <a:cs typeface="Times New Roman" panose="02020603050405020304"/>
                 </a:rPr>
                 <a:t>LEADERBOARD MAE</a:t>
               </a:r>
+              <a:endParaRPr lang="en-US" sz="1350" b="1" spc="75" dirty="0">
+                <a:solidFill>
+                  <a:srgbClr val="5A6478"/>
+                </a:solidFill>
+                <a:latin typeface="Times New Roman" panose="02020603050405020304"/>
+                <a:ea typeface="Times New Roman" panose="02020603050405020304"/>
+                <a:cs typeface="Times New Roman" panose="02020603050405020304"/>
+              </a:endParaRPr>
             </a:p>
           </p:txBody>
         </p:sp>
@@ -4133,12 +4132,20 @@
                   <a:solidFill>
                     <a:srgbClr val="1A3A6B"/>
                   </a:solidFill>
-                  <a:latin typeface="Times New Roman"/>
-                  <a:ea typeface="Times New Roman"/>
-                  <a:cs typeface="Times New Roman"/>
+                  <a:latin typeface="Times New Roman" panose="02020603050405020304"/>
+                  <a:ea typeface="Times New Roman" panose="02020603050405020304"/>
+                  <a:cs typeface="Times New Roman" panose="02020603050405020304"/>
                 </a:rPr>
                 <a:t>3.67</a:t>
               </a:r>
+              <a:endParaRPr lang="en-US" sz="11250" b="1" dirty="0">
+                <a:solidFill>
+                  <a:srgbClr val="1A3A6B"/>
+                </a:solidFill>
+                <a:latin typeface="Times New Roman" panose="02020603050405020304"/>
+                <a:ea typeface="Times New Roman" panose="02020603050405020304"/>
+                <a:cs typeface="Times New Roman" panose="02020603050405020304"/>
+              </a:endParaRPr>
             </a:p>
           </p:txBody>
         </p:sp>
@@ -4173,9 +4180,9 @@
                   <a:solidFill>
                     <a:srgbClr val="1D2430"/>
                   </a:solidFill>
-                  <a:latin typeface="Arial"/>
-                  <a:ea typeface="Microsoft YaHei"/>
-                  <a:cs typeface="Arial"/>
+                  <a:latin typeface="Arial" panose="020B0604020202020204"/>
+                  <a:ea typeface="微软雅黑" panose="020B0503020204020204" charset="-122"/>
+                  <a:cs typeface="Arial" panose="020B0604020202020204"/>
                 </a:rPr>
                 <a:t>最终</a:t>
               </a:r>
@@ -4184,23 +4191,31 @@
                   <a:solidFill>
                     <a:srgbClr val="C9962B"/>
                   </a:solidFill>
-                  <a:latin typeface="Arial"/>
-                  <a:ea typeface="Arial"/>
-                  <a:cs typeface="Arial"/>
+                  <a:latin typeface="Arial" panose="020B0604020202020204"/>
+                  <a:ea typeface="Arial" panose="020B0604020202020204"/>
+                  <a:cs typeface="Arial" panose="020B0604020202020204"/>
                 </a:rPr>
-                <a:t xml:space="preserve"> leaderboard </a:t>
+                <a:t> leaderboard </a:t>
               </a:r>
               <a:r>
                 <a:rPr lang="zh-CN" sz="1800" dirty="0">
                   <a:solidFill>
                     <a:srgbClr val="1D2430"/>
                   </a:solidFill>
-                  <a:latin typeface="Arial"/>
-                  <a:ea typeface="Microsoft YaHei"/>
-                  <a:cs typeface="Arial"/>
+                  <a:latin typeface="Arial" panose="020B0604020202020204"/>
+                  <a:ea typeface="微软雅黑" panose="020B0503020204020204" charset="-122"/>
+                  <a:cs typeface="Arial" panose="020B0604020202020204"/>
                 </a:rPr>
                 <a:t>成绩</a:t>
               </a:r>
+              <a:endParaRPr lang="zh-CN" sz="1800" dirty="0">
+                <a:solidFill>
+                  <a:srgbClr val="1D2430"/>
+                </a:solidFill>
+                <a:latin typeface="Arial" panose="020B0604020202020204"/>
+                <a:ea typeface="微软雅黑" panose="020B0503020204020204" charset="-122"/>
+                <a:cs typeface="Arial" panose="020B0604020202020204"/>
+              </a:endParaRPr>
             </a:p>
           </p:txBody>
         </p:sp>
@@ -4213,7 +4228,7 @@
           <p:spPr>
             <a:xfrm>
               <a:off x="717042" y="4378642"/>
-              <a:ext cx="2285429" cy="264033"/>
+              <a:ext cx="2085975" cy="207645"/>
             </a:xfrm>
             <a:prstGeom prst="rect">
               <a:avLst/>
@@ -4235,12 +4250,42 @@
                   <a:solidFill>
                     <a:srgbClr val="5A6478"/>
                   </a:solidFill>
-                  <a:latin typeface="Arial"/>
-                  <a:ea typeface="Microsoft YaHei"/>
-                  <a:cs typeface="Arial"/>
+                  <a:latin typeface="Arial" panose="020B0604020202020204"/>
+                  <a:ea typeface="微软雅黑" panose="020B0503020204020204" charset="-122"/>
+                  <a:cs typeface="Arial" panose="020B0604020202020204"/>
                 </a:rPr>
-                <a:t>105 样本训练 / 20 样本测试</a:t>
+                <a:t>1</a:t>
               </a:r>
+              <a:r>
+                <a:rPr lang="en-US" altLang="zh-CN" sz="1350" dirty="0">
+                  <a:solidFill>
+                    <a:srgbClr val="5A6478"/>
+                  </a:solidFill>
+                  <a:latin typeface="Arial" panose="020B0604020202020204"/>
+                  <a:ea typeface="微软雅黑" panose="020B0503020204020204" charset="-122"/>
+                  <a:cs typeface="Arial" panose="020B0604020202020204"/>
+                </a:rPr>
+                <a:t>80</a:t>
+              </a:r>
+              <a:r>
+                <a:rPr lang="zh-CN" sz="1350" dirty="0">
+                  <a:solidFill>
+                    <a:srgbClr val="5A6478"/>
+                  </a:solidFill>
+                  <a:latin typeface="Arial" panose="020B0604020202020204"/>
+                  <a:ea typeface="微软雅黑" panose="020B0503020204020204" charset="-122"/>
+                  <a:cs typeface="Arial" panose="020B0604020202020204"/>
+                </a:rPr>
+                <a:t> 样本训练 / 20 样本测试</a:t>
+              </a:r>
+              <a:endParaRPr lang="zh-CN" sz="1350" dirty="0">
+                <a:solidFill>
+                  <a:srgbClr val="5A6478"/>
+                </a:solidFill>
+                <a:latin typeface="Arial" panose="020B0604020202020204"/>
+                <a:ea typeface="微软雅黑" panose="020B0503020204020204" charset="-122"/>
+                <a:cs typeface="Arial" panose="020B0604020202020204"/>
+              </a:endParaRPr>
             </a:p>
           </p:txBody>
         </p:sp>
@@ -4326,12 +4371,20 @@
                   <a:solidFill>
                     <a:srgbClr val="C9962B"/>
                   </a:solidFill>
-                  <a:latin typeface="Times New Roman"/>
-                  <a:ea typeface="Times New Roman"/>
-                  <a:cs typeface="Times New Roman"/>
+                  <a:latin typeface="Times New Roman" panose="02020603050405020304"/>
+                  <a:ea typeface="Times New Roman" panose="02020603050405020304"/>
+                  <a:cs typeface="Times New Roman" panose="02020603050405020304"/>
                 </a:rPr>
                 <a:t>PROJECT BRIEF</a:t>
               </a:r>
+              <a:endParaRPr lang="en-US" sz="1350" b="1" spc="75" dirty="0">
+                <a:solidFill>
+                  <a:srgbClr val="C9962B"/>
+                </a:solidFill>
+                <a:latin typeface="Times New Roman" panose="02020603050405020304"/>
+                <a:ea typeface="Times New Roman" panose="02020603050405020304"/>
+                <a:cs typeface="Times New Roman" panose="02020603050405020304"/>
+              </a:endParaRPr>
             </a:p>
           </p:txBody>
         </p:sp>
@@ -4366,12 +4419,20 @@
                   <a:solidFill>
                     <a:srgbClr val="1A3A6B"/>
                   </a:solidFill>
-                  <a:latin typeface="Times New Roman"/>
-                  <a:ea typeface="Microsoft YaHei"/>
-                  <a:cs typeface="Times New Roman"/>
+                  <a:latin typeface="Times New Roman" panose="02020603050405020304"/>
+                  <a:ea typeface="微软雅黑" panose="020B0503020204020204" charset="-122"/>
+                  <a:cs typeface="Times New Roman" panose="02020603050405020304"/>
                 </a:rPr>
                 <a:t>青霉素发酵</a:t>
               </a:r>
+              <a:endParaRPr lang="zh-CN" sz="4500" b="1" dirty="0">
+                <a:solidFill>
+                  <a:srgbClr val="1A3A6B"/>
+                </a:solidFill>
+                <a:latin typeface="Times New Roman" panose="02020603050405020304"/>
+                <a:ea typeface="微软雅黑" panose="020B0503020204020204" charset="-122"/>
+                <a:cs typeface="Times New Roman" panose="02020603050405020304"/>
+              </a:endParaRPr>
             </a:p>
           </p:txBody>
         </p:sp>
@@ -4406,12 +4467,20 @@
                   <a:solidFill>
                     <a:srgbClr val="1A3A6B"/>
                   </a:solidFill>
-                  <a:latin typeface="Times New Roman"/>
-                  <a:ea typeface="Microsoft YaHei"/>
-                  <a:cs typeface="Times New Roman"/>
+                  <a:latin typeface="Times New Roman" panose="02020603050405020304"/>
+                  <a:ea typeface="微软雅黑" panose="020B0503020204020204" charset="-122"/>
+                  <a:cs typeface="Times New Roman" panose="02020603050405020304"/>
                 </a:rPr>
                 <a:t>稳定期目标变量预测</a:t>
               </a:r>
+              <a:endParaRPr lang="zh-CN" sz="4500" b="1" dirty="0">
+                <a:solidFill>
+                  <a:srgbClr val="1A3A6B"/>
+                </a:solidFill>
+                <a:latin typeface="Times New Roman" panose="02020603050405020304"/>
+                <a:ea typeface="微软雅黑" panose="020B0503020204020204" charset="-122"/>
+                <a:cs typeface="Times New Roman" panose="02020603050405020304"/>
+              </a:endParaRPr>
             </a:p>
           </p:txBody>
         </p:sp>
@@ -4482,9 +4551,9 @@
                   <a:solidFill>
                     <a:srgbClr val="5A6478"/>
                   </a:solidFill>
-                  <a:latin typeface="Arial"/>
-                  <a:ea typeface="Microsoft YaHei"/>
-                  <a:cs typeface="Arial"/>
+                  <a:latin typeface="Arial" panose="020B0604020202020204"/>
+                  <a:ea typeface="微软雅黑" panose="020B0503020204020204" charset="-122"/>
+                  <a:cs typeface="Arial" panose="020B0604020202020204"/>
                 </a:rPr>
                 <a:t>基于</a:t>
               </a:r>
@@ -4493,20 +4562,20 @@
                   <a:solidFill>
                     <a:srgbClr val="1A3A6B"/>
                   </a:solidFill>
-                  <a:latin typeface="Arial"/>
-                  <a:ea typeface="Microsoft YaHei"/>
-                  <a:cs typeface="Arial"/>
+                  <a:latin typeface="Arial" panose="020B0604020202020204"/>
+                  <a:ea typeface="微软雅黑" panose="020B0503020204020204" charset="-122"/>
+                  <a:cs typeface="Arial" panose="020B0604020202020204"/>
                 </a:rPr>
-                <a:t xml:space="preserve"> CT 特异性建模</a:t>
+                <a:t> CT 特异性建模</a:t>
               </a:r>
               <a:r>
                 <a:rPr lang="zh-CN" sz="1800" dirty="0">
                   <a:solidFill>
                     <a:srgbClr val="5A6478"/>
                   </a:solidFill>
-                  <a:latin typeface="Arial"/>
-                  <a:ea typeface="Microsoft YaHei"/>
-                  <a:cs typeface="Arial"/>
+                  <a:latin typeface="Arial" panose="020B0604020202020204"/>
+                  <a:ea typeface="微软雅黑" panose="020B0503020204020204" charset="-122"/>
+                  <a:cs typeface="Arial" panose="020B0604020202020204"/>
                 </a:rPr>
                 <a:t>与</a:t>
               </a:r>
@@ -4515,9 +4584,9 @@
                   <a:solidFill>
                     <a:srgbClr val="1A3A6B"/>
                   </a:solidFill>
-                  <a:latin typeface="Arial"/>
-                  <a:ea typeface="Microsoft YaHei"/>
-                  <a:cs typeface="Arial"/>
+                  <a:latin typeface="Arial" panose="020B0604020202020204"/>
+                  <a:ea typeface="微软雅黑" panose="020B0503020204020204" charset="-122"/>
+                  <a:cs typeface="Arial" panose="020B0604020202020204"/>
                 </a:rPr>
                 <a:t>分层校准</a:t>
               </a:r>
@@ -4526,12 +4595,20 @@
                   <a:solidFill>
                     <a:srgbClr val="5A6478"/>
                   </a:solidFill>
-                  <a:latin typeface="Arial"/>
-                  <a:ea typeface="Microsoft YaHei"/>
-                  <a:cs typeface="Arial"/>
+                  <a:latin typeface="Arial" panose="020B0604020202020204"/>
+                  <a:ea typeface="微软雅黑" panose="020B0503020204020204" charset="-122"/>
+                  <a:cs typeface="Arial" panose="020B0604020202020204"/>
                 </a:rPr>
                 <a:t>的小样本回归方案</a:t>
               </a:r>
+              <a:endParaRPr lang="zh-CN" sz="1800" dirty="0">
+                <a:solidFill>
+                  <a:srgbClr val="5A6478"/>
+                </a:solidFill>
+                <a:latin typeface="Arial" panose="020B0604020202020204"/>
+                <a:ea typeface="微软雅黑" panose="020B0503020204020204" charset="-122"/>
+                <a:cs typeface="Arial" panose="020B0604020202020204"/>
+              </a:endParaRPr>
             </a:p>
           </p:txBody>
         </p:sp>
@@ -4617,12 +4694,20 @@
                   <a:solidFill>
                     <a:srgbClr val="000000"/>
                   </a:solidFill>
-                  <a:latin typeface="Arial"/>
-                  <a:ea typeface="Microsoft YaHei"/>
-                  <a:cs typeface="Arial"/>
+                  <a:latin typeface="Arial" panose="020B0604020202020204"/>
+                  <a:ea typeface="微软雅黑" panose="020B0503020204020204" charset="-122"/>
+                  <a:cs typeface="Arial" panose="020B0604020202020204"/>
                 </a:rPr>
                 <a:t>梅特勒托利多 AI 竞赛 · 项目方案介绍 · 2026.07</a:t>
               </a:r>
+              <a:endParaRPr lang="zh-CN" sz="1200" dirty="0">
+                <a:solidFill>
+                  <a:srgbClr val="000000"/>
+                </a:solidFill>
+                <a:latin typeface="Arial" panose="020B0604020202020204"/>
+                <a:ea typeface="微软雅黑" panose="020B0503020204020204" charset="-122"/>
+                <a:cs typeface="Arial" panose="020B0604020202020204"/>
+              </a:endParaRPr>
             </a:p>
           </p:txBody>
         </p:sp>
@@ -4657,12 +4742,20 @@
                   <a:solidFill>
                     <a:srgbClr val="8A92A0"/>
                   </a:solidFill>
-                  <a:latin typeface="Times New Roman"/>
-                  <a:ea typeface="Times New Roman"/>
-                  <a:cs typeface="Times New Roman"/>
+                  <a:latin typeface="Times New Roman" panose="02020603050405020304"/>
+                  <a:ea typeface="Times New Roman" panose="02020603050405020304"/>
+                  <a:cs typeface="Times New Roman" panose="02020603050405020304"/>
                 </a:rPr>
                 <a:t>01 / 05</a:t>
               </a:r>
+              <a:endParaRPr lang="en-US" sz="1200" dirty="0">
+                <a:solidFill>
+                  <a:srgbClr val="8A92A0"/>
+                </a:solidFill>
+                <a:latin typeface="Times New Roman" panose="02020603050405020304"/>
+                <a:ea typeface="Times New Roman" panose="02020603050405020304"/>
+                <a:cs typeface="Times New Roman" panose="02020603050405020304"/>
+              </a:endParaRPr>
             </a:p>
           </p:txBody>
         </p:sp>
@@ -4672,9 +4765,18 @@
   <p:clrMapOvr>
     <a:masterClrMapping/>
   </p:clrMapOvr>
-  <p:transition xmlns:p14="http://schemas.microsoft.com/office/powerpoint/2010/main" p14:dur="400">
-    <p:fade/>
-  </p:transition>
+  <mc:AlternateContent xmlns:mc="http://schemas.openxmlformats.org/markup-compatibility/2006">
+    <mc:Choice xmlns:p14="http://schemas.microsoft.com/office/powerpoint/2010/main" Requires="p14">
+      <p:transition p14:dur="400">
+        <p:fade/>
+      </p:transition>
+    </mc:Choice>
+    <mc:Fallback>
+      <p:transition>
+        <p:fade/>
+      </p:transition>
+    </mc:Fallback>
+  </mc:AlternateContent>
 </p:sld>
 </file>
 
@@ -4784,12 +4886,20 @@
                   <a:solidFill>
                     <a:srgbClr val="C9962B"/>
                   </a:solidFill>
-                  <a:latin typeface="Times New Roman"/>
-                  <a:ea typeface="Times New Roman"/>
-                  <a:cs typeface="Times New Roman"/>
+                  <a:latin typeface="Times New Roman" panose="02020603050405020304"/>
+                  <a:ea typeface="Times New Roman" panose="02020603050405020304"/>
+                  <a:cs typeface="Times New Roman" panose="02020603050405020304"/>
                 </a:rPr>
                 <a:t>02 · BACKGROUND</a:t>
               </a:r>
+              <a:endParaRPr lang="en-US" sz="1350" b="1" spc="75" dirty="0">
+                <a:solidFill>
+                  <a:srgbClr val="C9962B"/>
+                </a:solidFill>
+                <a:latin typeface="Times New Roman" panose="02020603050405020304"/>
+                <a:ea typeface="Times New Roman" panose="02020603050405020304"/>
+                <a:cs typeface="Times New Roman" panose="02020603050405020304"/>
+              </a:endParaRPr>
             </a:p>
           </p:txBody>
         </p:sp>
@@ -4824,12 +4934,20 @@
                   <a:solidFill>
                     <a:srgbClr val="1A3A6B"/>
                   </a:solidFill>
-                  <a:latin typeface="Times New Roman"/>
-                  <a:ea typeface="Microsoft YaHei"/>
-                  <a:cs typeface="Times New Roman"/>
+                  <a:latin typeface="Times New Roman" panose="02020603050405020304"/>
+                  <a:ea typeface="微软雅黑" panose="020B0503020204020204" charset="-122"/>
+                  <a:cs typeface="Times New Roman" panose="02020603050405020304"/>
                 </a:rPr>
                 <a:t>问题背景与挑战</a:t>
               </a:r>
+              <a:endParaRPr lang="zh-CN" sz="3150" b="1" dirty="0">
+                <a:solidFill>
+                  <a:srgbClr val="1A3A6B"/>
+                </a:solidFill>
+                <a:latin typeface="Times New Roman" panose="02020603050405020304"/>
+                <a:ea typeface="微软雅黑" panose="020B0503020204020204" charset="-122"/>
+                <a:cs typeface="Times New Roman" panose="02020603050405020304"/>
+              </a:endParaRPr>
             </a:p>
           </p:txBody>
         </p:sp>
@@ -5095,12 +5213,20 @@
                     <a:solidFill>
                       <a:srgbClr val="5A6478"/>
                     </a:solidFill>
-                    <a:latin typeface="Arial"/>
-                    <a:ea typeface="Microsoft YaHei"/>
-                    <a:cs typeface="Arial"/>
+                    <a:latin typeface="Arial" panose="020B0604020202020204"/>
+                    <a:ea typeface="微软雅黑" panose="020B0503020204020204" charset="-122"/>
+                    <a:cs typeface="Arial" panose="020B0604020202020204"/>
                   </a:rPr>
                   <a:t>任务定义</a:t>
                 </a:r>
+                <a:endParaRPr lang="zh-CN" sz="1350" b="1" spc="75" dirty="0">
+                  <a:solidFill>
+                    <a:srgbClr val="5A6478"/>
+                  </a:solidFill>
+                  <a:latin typeface="Arial" panose="020B0604020202020204"/>
+                  <a:ea typeface="微软雅黑" panose="020B0503020204020204" charset="-122"/>
+                  <a:cs typeface="Arial" panose="020B0604020202020204"/>
+                </a:endParaRPr>
               </a:p>
             </p:txBody>
           </p:sp>
@@ -5135,9 +5261,9 @@
                     <a:solidFill>
                       <a:srgbClr val="1D2430"/>
                     </a:solidFill>
-                    <a:latin typeface="Arial"/>
-                    <a:ea typeface="Microsoft YaHei"/>
-                    <a:cs typeface="Arial"/>
+                    <a:latin typeface="Arial" panose="020B0604020202020204"/>
+                    <a:ea typeface="微软雅黑" panose="020B0503020204020204" charset="-122"/>
+                    <a:cs typeface="Arial" panose="020B0604020202020204"/>
                   </a:rPr>
                   <a:t>预测青霉素发酵批次</a:t>
                 </a:r>
@@ -5146,12 +5272,20 @@
                     <a:solidFill>
                       <a:srgbClr val="1A3A6B"/>
                     </a:solidFill>
-                    <a:latin typeface="Arial"/>
-                    <a:ea typeface="Microsoft YaHei"/>
-                    <a:cs typeface="Arial"/>
+                    <a:latin typeface="Arial" panose="020B0604020202020204"/>
+                    <a:ea typeface="微软雅黑" panose="020B0503020204020204" charset="-122"/>
+                    <a:cs typeface="Arial" panose="020B0604020202020204"/>
                   </a:rPr>
                   <a:t>稳定期目标变量均值</a:t>
                 </a:r>
+                <a:endParaRPr lang="zh-CN" sz="1800" b="1" dirty="0">
+                  <a:solidFill>
+                    <a:srgbClr val="1A3A6B"/>
+                  </a:solidFill>
+                  <a:latin typeface="Arial" panose="020B0604020202020204"/>
+                  <a:ea typeface="微软雅黑" panose="020B0503020204020204" charset="-122"/>
+                  <a:cs typeface="Arial" panose="020B0604020202020204"/>
+                </a:endParaRPr>
               </a:p>
             </p:txBody>
           </p:sp>
@@ -5186,12 +5320,20 @@
                     <a:solidFill>
                       <a:srgbClr val="5A6478"/>
                     </a:solidFill>
-                    <a:latin typeface="Arial"/>
-                    <a:ea typeface="Microsoft YaHei"/>
-                    <a:cs typeface="Arial"/>
+                    <a:latin typeface="Arial" panose="020B0604020202020204"/>
+                    <a:ea typeface="微软雅黑" panose="020B0503020204020204" charset="-122"/>
+                    <a:cs typeface="Arial" panose="020B0604020202020204"/>
                   </a:rPr>
                   <a:t>回归任务 · MAE 评价 · 输入：SPC 拉曼光谱（64 通道）+ 过程变量（33 列）</a:t>
                 </a:r>
+                <a:endParaRPr lang="zh-CN" sz="1350" dirty="0">
+                  <a:solidFill>
+                    <a:srgbClr val="5A6478"/>
+                  </a:solidFill>
+                  <a:latin typeface="Arial" panose="020B0604020202020204"/>
+                  <a:ea typeface="微软雅黑" panose="020B0503020204020204" charset="-122"/>
+                  <a:cs typeface="Arial" panose="020B0604020202020204"/>
+                </a:endParaRPr>
               </a:p>
             </p:txBody>
           </p:sp>
@@ -5277,12 +5419,20 @@
                     <a:solidFill>
                       <a:srgbClr val="5A6478"/>
                     </a:solidFill>
-                    <a:latin typeface="Arial"/>
-                    <a:ea typeface="Microsoft YaHei"/>
-                    <a:cs typeface="Arial"/>
+                    <a:latin typeface="Arial" panose="020B0604020202020204"/>
+                    <a:ea typeface="微软雅黑" panose="020B0503020204020204" charset="-122"/>
+                    <a:cs typeface="Arial" panose="020B0604020202020204"/>
                   </a:rPr>
                   <a:t>数据规模</a:t>
                 </a:r>
+                <a:endParaRPr lang="zh-CN" sz="1350" b="1" spc="75" dirty="0">
+                  <a:solidFill>
+                    <a:srgbClr val="5A6478"/>
+                  </a:solidFill>
+                  <a:latin typeface="Arial" panose="020B0604020202020204"/>
+                  <a:ea typeface="微软雅黑" panose="020B0503020204020204" charset="-122"/>
+                  <a:cs typeface="Arial" panose="020B0604020202020204"/>
+                </a:endParaRPr>
               </a:p>
             </p:txBody>
           </p:sp>
@@ -5295,7 +5445,7 @@
             <p:spPr>
               <a:xfrm>
                 <a:off x="7132320" y="1871662"/>
-                <a:ext cx="1018985" cy="440055"/>
+                <a:ext cx="814705" cy="346075"/>
               </a:xfrm>
               <a:prstGeom prst="rect">
                 <a:avLst/>
@@ -5317,23 +5467,31 @@
                     <a:solidFill>
                       <a:srgbClr val="1A3A6B"/>
                     </a:solidFill>
-                    <a:latin typeface="Times New Roman"/>
-                    <a:ea typeface="Times New Roman"/>
-                    <a:cs typeface="Times New Roman"/>
+                    <a:latin typeface="Times New Roman" panose="02020603050405020304"/>
+                    <a:ea typeface="Times New Roman" panose="02020603050405020304"/>
+                    <a:cs typeface="Times New Roman" panose="02020603050405020304"/>
                   </a:rPr>
-                  <a:t>105</a:t>
+                  <a:t>180</a:t>
                 </a:r>
                 <a:r>
                   <a:rPr lang="zh-CN" sz="1350" dirty="0">
                     <a:solidFill>
                       <a:srgbClr val="8A92A0"/>
                     </a:solidFill>
-                    <a:latin typeface="Times New Roman"/>
-                    <a:ea typeface="Microsoft YaHei"/>
-                    <a:cs typeface="Times New Roman"/>
+                    <a:latin typeface="Times New Roman" panose="02020603050405020304"/>
+                    <a:ea typeface="微软雅黑" panose="020B0503020204020204" charset="-122"/>
+                    <a:cs typeface="Times New Roman" panose="02020603050405020304"/>
                   </a:rPr>
-                  <a:t xml:space="preserve"> 训练</a:t>
+                  <a:t> 训练</a:t>
                 </a:r>
+                <a:endParaRPr lang="zh-CN" sz="1350" dirty="0">
+                  <a:solidFill>
+                    <a:srgbClr val="8A92A0"/>
+                  </a:solidFill>
+                  <a:latin typeface="Times New Roman" panose="02020603050405020304"/>
+                  <a:ea typeface="微软雅黑" panose="020B0503020204020204" charset="-122"/>
+                  <a:cs typeface="Times New Roman" panose="02020603050405020304"/>
+                </a:endParaRPr>
               </a:p>
             </p:txBody>
           </p:sp>
@@ -5368,9 +5526,9 @@
                     <a:solidFill>
                       <a:srgbClr val="1A3A6B"/>
                     </a:solidFill>
-                    <a:latin typeface="Times New Roman"/>
-                    <a:ea typeface="Times New Roman"/>
-                    <a:cs typeface="Times New Roman"/>
+                    <a:latin typeface="Times New Roman" panose="02020603050405020304"/>
+                    <a:ea typeface="Times New Roman" panose="02020603050405020304"/>
+                    <a:cs typeface="Times New Roman" panose="02020603050405020304"/>
                   </a:rPr>
                   <a:t>20</a:t>
                 </a:r>
@@ -5379,12 +5537,20 @@
                     <a:solidFill>
                       <a:srgbClr val="8A92A0"/>
                     </a:solidFill>
-                    <a:latin typeface="Times New Roman"/>
-                    <a:ea typeface="Microsoft YaHei"/>
-                    <a:cs typeface="Times New Roman"/>
+                    <a:latin typeface="Times New Roman" panose="02020603050405020304"/>
+                    <a:ea typeface="微软雅黑" panose="020B0503020204020204" charset="-122"/>
+                    <a:cs typeface="Times New Roman" panose="02020603050405020304"/>
                   </a:rPr>
-                  <a:t xml:space="preserve"> 测试</a:t>
+                  <a:t> 测试</a:t>
                 </a:r>
+                <a:endParaRPr lang="zh-CN" sz="1350" dirty="0">
+                  <a:solidFill>
+                    <a:srgbClr val="8A92A0"/>
+                  </a:solidFill>
+                  <a:latin typeface="Times New Roman" panose="02020603050405020304"/>
+                  <a:ea typeface="微软雅黑" panose="020B0503020204020204" charset="-122"/>
+                  <a:cs typeface="Times New Roman" panose="02020603050405020304"/>
+                </a:endParaRPr>
               </a:p>
             </p:txBody>
           </p:sp>
@@ -5419,9 +5585,9 @@
                     <a:solidFill>
                       <a:srgbClr val="C9962B"/>
                     </a:solidFill>
-                    <a:latin typeface="Times New Roman"/>
-                    <a:ea typeface="Times New Roman"/>
-                    <a:cs typeface="Times New Roman"/>
+                    <a:latin typeface="Times New Roman" panose="02020603050405020304"/>
+                    <a:ea typeface="Times New Roman" panose="02020603050405020304"/>
+                    <a:cs typeface="Times New Roman" panose="02020603050405020304"/>
                   </a:rPr>
                   <a:t>97</a:t>
                 </a:r>
@@ -5430,12 +5596,20 @@
                     <a:solidFill>
                       <a:srgbClr val="8A92A0"/>
                     </a:solidFill>
-                    <a:latin typeface="Times New Roman"/>
-                    <a:ea typeface="Microsoft YaHei"/>
-                    <a:cs typeface="Times New Roman"/>
+                    <a:latin typeface="Times New Roman" panose="02020603050405020304"/>
+                    <a:ea typeface="微软雅黑" panose="020B0503020204020204" charset="-122"/>
+                    <a:cs typeface="Times New Roman" panose="02020603050405020304"/>
                   </a:rPr>
-                  <a:t xml:space="preserve"> 维特征</a:t>
+                  <a:t> 维特征</a:t>
                 </a:r>
+                <a:endParaRPr lang="zh-CN" sz="1350" dirty="0">
+                  <a:solidFill>
+                    <a:srgbClr val="8A92A0"/>
+                  </a:solidFill>
+                  <a:latin typeface="Times New Roman" panose="02020603050405020304"/>
+                  <a:ea typeface="微软雅黑" panose="020B0503020204020204" charset="-122"/>
+                  <a:cs typeface="Times New Roman" panose="02020603050405020304"/>
+                </a:endParaRPr>
               </a:p>
             </p:txBody>
           </p:sp>
@@ -5470,12 +5644,20 @@
                     <a:solidFill>
                       <a:srgbClr val="8A92A0"/>
                     </a:solidFill>
-                    <a:latin typeface="Arial"/>
-                    <a:ea typeface="Microsoft YaHei"/>
-                    <a:cs typeface="Arial"/>
+                    <a:latin typeface="Arial" panose="020B0604020202020204"/>
+                    <a:ea typeface="微软雅黑" panose="020B0503020204020204" charset="-122"/>
+                    <a:cs typeface="Arial" panose="020B0604020202020204"/>
                   </a:rPr>
                   <a:t>时间点</a:t>
                 </a:r>
+                <a:endParaRPr lang="zh-CN" sz="1200" dirty="0">
+                  <a:solidFill>
+                    <a:srgbClr val="8A92A0"/>
+                  </a:solidFill>
+                  <a:latin typeface="Arial" panose="020B0604020202020204"/>
+                  <a:ea typeface="微软雅黑" panose="020B0503020204020204" charset="-122"/>
+                  <a:cs typeface="Arial" panose="020B0604020202020204"/>
+                </a:endParaRPr>
               </a:p>
             </p:txBody>
           </p:sp>
@@ -5510,12 +5692,20 @@
                     <a:solidFill>
                       <a:srgbClr val="C9962B"/>
                     </a:solidFill>
-                    <a:latin typeface="Times New Roman"/>
-                    <a:ea typeface="Times New Roman"/>
-                    <a:cs typeface="Times New Roman"/>
+                    <a:latin typeface="Times New Roman" panose="02020603050405020304"/>
+                    <a:ea typeface="Times New Roman" panose="02020603050405020304"/>
+                    <a:cs typeface="Times New Roman" panose="02020603050405020304"/>
                   </a:rPr>
                   <a:t>5/10/20/35</a:t>
                 </a:r>
+                <a:endParaRPr lang="en-US" sz="2250" b="1" dirty="0">
+                  <a:solidFill>
+                    <a:srgbClr val="C9962B"/>
+                  </a:solidFill>
+                  <a:latin typeface="Times New Roman" panose="02020603050405020304"/>
+                  <a:ea typeface="Times New Roman" panose="02020603050405020304"/>
+                  <a:cs typeface="Times New Roman" panose="02020603050405020304"/>
+                </a:endParaRPr>
               </a:p>
             </p:txBody>
           </p:sp>
@@ -5588,12 +5778,20 @@
                 <a:solidFill>
                   <a:srgbClr val="C9962B"/>
                 </a:solidFill>
-                <a:latin typeface="Times New Roman"/>
-                <a:ea typeface="Microsoft YaHei"/>
-                <a:cs typeface="Times New Roman"/>
+                <a:latin typeface="Times New Roman" panose="02020603050405020304"/>
+                <a:ea typeface="微软雅黑" panose="020B0503020204020204" charset="-122"/>
+                <a:cs typeface="Times New Roman" panose="02020603050405020304"/>
               </a:rPr>
               <a:t>CORE CHALLENGES · 三大核心挑战</a:t>
             </a:r>
+            <a:endParaRPr lang="zh-CN" sz="1350" b="1" spc="75" dirty="0">
+              <a:solidFill>
+                <a:srgbClr val="C9962B"/>
+              </a:solidFill>
+              <a:latin typeface="Times New Roman" panose="02020603050405020304"/>
+              <a:ea typeface="微软雅黑" panose="020B0503020204020204" charset="-122"/>
+              <a:cs typeface="Times New Roman" panose="02020603050405020304"/>
+            </a:endParaRPr>
           </a:p>
         </p:txBody>
       </p:sp>
@@ -5656,9 +5854,9 @@
           <p:grpSpPr>
             <a:xfrm>
               <a:off x="723900" y="3124200"/>
-              <a:ext cx="10896600" cy="632651"/>
+              <a:ext cx="10896600" cy="609600"/>
               <a:chOff x="723900" y="3124200"/>
-              <a:chExt cx="10896600" cy="632651"/>
+              <a:chExt cx="10896600" cy="609600"/>
             </a:xfrm>
           </p:grpSpPr>
           <p:sp>
@@ -5714,12 +5912,20 @@
                     <a:solidFill>
                       <a:srgbClr val="FFFFFF"/>
                     </a:solidFill>
-                    <a:latin typeface="Arial"/>
-                    <a:ea typeface="Arial"/>
-                    <a:cs typeface="Arial"/>
+                    <a:latin typeface="Arial" panose="020B0604020202020204"/>
+                    <a:ea typeface="Arial" panose="020B0604020202020204"/>
+                    <a:cs typeface="Arial" panose="020B0604020202020204"/>
                   </a:rPr>
                   <a:t>01</a:t>
                 </a:r>
+                <a:endParaRPr lang="en-US" sz="1350" b="1" dirty="0">
+                  <a:solidFill>
+                    <a:srgbClr val="FFFFFF"/>
+                  </a:solidFill>
+                  <a:latin typeface="Arial" panose="020B0604020202020204"/>
+                  <a:ea typeface="Arial" panose="020B0604020202020204"/>
+                  <a:cs typeface="Arial" panose="020B0604020202020204"/>
+                </a:endParaRPr>
               </a:p>
             </p:txBody>
           </p:sp>
@@ -6000,12 +6206,20 @@
                     <a:solidFill>
                       <a:srgbClr val="1A3A6B"/>
                     </a:solidFill>
-                    <a:latin typeface="Arial"/>
-                    <a:ea typeface="Microsoft YaHei"/>
-                    <a:cs typeface="Arial"/>
+                    <a:latin typeface="Arial" panose="020B0604020202020204"/>
+                    <a:ea typeface="微软雅黑" panose="020B0503020204020204" charset="-122"/>
+                    <a:cs typeface="Arial" panose="020B0604020202020204"/>
                   </a:rPr>
                   <a:t>小样本高维</a:t>
                 </a:r>
+                <a:endParaRPr lang="zh-CN" sz="1800" b="1" dirty="0">
+                  <a:solidFill>
+                    <a:srgbClr val="1A3A6B"/>
+                  </a:solidFill>
+                  <a:latin typeface="Arial" panose="020B0604020202020204"/>
+                  <a:ea typeface="微软雅黑" panose="020B0503020204020204" charset="-122"/>
+                  <a:cs typeface="Arial" panose="020B0604020202020204"/>
+                </a:endParaRPr>
               </a:p>
             </p:txBody>
           </p:sp>
@@ -6018,7 +6232,7 @@
             <p:spPr>
               <a:xfrm>
                 <a:off x="2145792" y="3492818"/>
-                <a:ext cx="5356784" cy="264033"/>
+                <a:ext cx="5039360" cy="207645"/>
               </a:xfrm>
               <a:prstGeom prst="rect">
                 <a:avLst/>
@@ -6040,12 +6254,86 @@
                     <a:solidFill>
                       <a:srgbClr val="5A6478"/>
                     </a:solidFill>
-                    <a:latin typeface="Arial"/>
-                    <a:ea typeface="Microsoft YaHei"/>
-                    <a:cs typeface="Arial"/>
+                    <a:latin typeface="Arial" panose="020B0604020202020204"/>
+                    <a:ea typeface="微软雅黑" panose="020B0503020204020204" charset="-122"/>
+                    <a:cs typeface="Arial" panose="020B0604020202020204"/>
                   </a:rPr>
-                  <a:t>仅 105 个训练样本 + 97 维特征，样本/特征比 =1.08，极易过拟合</a:t>
+                  <a:t>仅 1</a:t>
                 </a:r>
+                <a:r>
+                  <a:rPr lang="en-US" altLang="zh-CN" sz="1350" dirty="0">
+                    <a:solidFill>
+                      <a:srgbClr val="5A6478"/>
+                    </a:solidFill>
+                    <a:latin typeface="Arial" panose="020B0604020202020204"/>
+                    <a:ea typeface="微软雅黑" panose="020B0503020204020204" charset="-122"/>
+                    <a:cs typeface="Arial" panose="020B0604020202020204"/>
+                  </a:rPr>
+                  <a:t>80</a:t>
+                </a:r>
+                <a:r>
+                  <a:rPr lang="zh-CN" sz="1350" dirty="0">
+                    <a:solidFill>
+                      <a:srgbClr val="5A6478"/>
+                    </a:solidFill>
+                    <a:latin typeface="Arial" panose="020B0604020202020204"/>
+                    <a:ea typeface="微软雅黑" panose="020B0503020204020204" charset="-122"/>
+                    <a:cs typeface="Arial" panose="020B0604020202020204"/>
+                  </a:rPr>
+                  <a:t> 个训练样本 + </a:t>
+                </a:r>
+                <a:r>
+                  <a:rPr lang="en-US" altLang="zh-CN" sz="1350" dirty="0">
+                    <a:solidFill>
+                      <a:srgbClr val="5A6478"/>
+                    </a:solidFill>
+                    <a:latin typeface="Arial" panose="020B0604020202020204"/>
+                    <a:ea typeface="微软雅黑" panose="020B0503020204020204" charset="-122"/>
+                    <a:cs typeface="Arial" panose="020B0604020202020204"/>
+                  </a:rPr>
+                  <a:t>103</a:t>
+                </a:r>
+                <a:r>
+                  <a:rPr lang="zh-CN" sz="1350" dirty="0">
+                    <a:solidFill>
+                      <a:srgbClr val="5A6478"/>
+                    </a:solidFill>
+                    <a:latin typeface="Arial" panose="020B0604020202020204"/>
+                    <a:ea typeface="微软雅黑" panose="020B0503020204020204" charset="-122"/>
+                    <a:cs typeface="Arial" panose="020B0604020202020204"/>
+                  </a:rPr>
+                  <a:t> 维特征，样本/特征比 =1.</a:t>
+                </a:r>
+                <a:r>
+                  <a:rPr lang="en-US" altLang="zh-CN" sz="1350" dirty="0">
+                    <a:solidFill>
+                      <a:srgbClr val="5A6478"/>
+                    </a:solidFill>
+                    <a:latin typeface="Arial" panose="020B0604020202020204"/>
+                    <a:ea typeface="微软雅黑" panose="020B0503020204020204" charset="-122"/>
+                    <a:cs typeface="Arial" panose="020B0604020202020204"/>
+                  </a:rPr>
+                  <a:t>74</a:t>
+                </a:r>
+                <a:r>
+                  <a:rPr lang="zh-CN" sz="1350" dirty="0">
+                    <a:solidFill>
+                      <a:srgbClr val="5A6478"/>
+                    </a:solidFill>
+                    <a:latin typeface="Arial" panose="020B0604020202020204"/>
+                    <a:ea typeface="微软雅黑" panose="020B0503020204020204" charset="-122"/>
+                    <a:cs typeface="Arial" panose="020B0604020202020204"/>
+                  </a:rPr>
+                  <a:t>，极易过拟合</a:t>
+                </a:r>
+                <a:endParaRPr lang="zh-CN" sz="1350" dirty="0">
+                  <a:solidFill>
+                    <a:srgbClr val="5A6478"/>
+                  </a:solidFill>
+                  <a:latin typeface="Arial" panose="020B0604020202020204"/>
+                  <a:ea typeface="微软雅黑" panose="020B0503020204020204" charset="-122"/>
+                  <a:cs typeface="Arial" panose="020B0604020202020204"/>
+                </a:endParaRPr>
               </a:p>
             </p:txBody>
           </p:sp>
@@ -6117,12 +6405,20 @@
                     <a:solidFill>
                       <a:srgbClr val="FFFFFF"/>
                     </a:solidFill>
-                    <a:latin typeface="Times New Roman"/>
-                    <a:ea typeface="Times New Roman"/>
-                    <a:cs typeface="Times New Roman"/>
+                    <a:latin typeface="Times New Roman" panose="02020603050405020304"/>
+                    <a:ea typeface="Times New Roman" panose="02020603050405020304"/>
+                    <a:cs typeface="Times New Roman" panose="02020603050405020304"/>
                   </a:rPr>
                   <a:t>02</a:t>
                 </a:r>
+                <a:endParaRPr lang="en-US" sz="1350" b="1" dirty="0">
+                  <a:solidFill>
+                    <a:srgbClr val="FFFFFF"/>
+                  </a:solidFill>
+                  <a:latin typeface="Times New Roman" panose="02020603050405020304"/>
+                  <a:ea typeface="Times New Roman" panose="02020603050405020304"/>
+                  <a:cs typeface="Times New Roman" panose="02020603050405020304"/>
+                </a:endParaRPr>
               </a:p>
             </p:txBody>
           </p:sp>
@@ -6340,12 +6636,20 @@
                     <a:solidFill>
                       <a:srgbClr val="1A3A6B"/>
                     </a:solidFill>
-                    <a:latin typeface="Arial"/>
-                    <a:ea typeface="Microsoft YaHei"/>
-                    <a:cs typeface="Arial"/>
+                    <a:latin typeface="Arial" panose="020B0604020202020204"/>
+                    <a:ea typeface="微软雅黑" panose="020B0503020204020204" charset="-122"/>
+                    <a:cs typeface="Arial" panose="020B0604020202020204"/>
                   </a:rPr>
                   <a:t>不等长时间序列</a:t>
                 </a:r>
+                <a:endParaRPr lang="zh-CN" sz="1800" b="1" dirty="0">
+                  <a:solidFill>
+                    <a:srgbClr val="1A3A6B"/>
+                  </a:solidFill>
+                  <a:latin typeface="Arial" panose="020B0604020202020204"/>
+                  <a:ea typeface="微软雅黑" panose="020B0503020204020204" charset="-122"/>
+                  <a:cs typeface="Arial" panose="020B0604020202020204"/>
+                </a:endParaRPr>
               </a:p>
             </p:txBody>
           </p:sp>
@@ -6380,12 +6684,20 @@
                     <a:solidFill>
                       <a:srgbClr val="5A6478"/>
                     </a:solidFill>
-                    <a:latin typeface="Arial"/>
-                    <a:ea typeface="Microsoft YaHei"/>
-                    <a:cs typeface="Arial"/>
+                    <a:latin typeface="Arial" panose="020B0604020202020204"/>
+                    <a:ea typeface="微软雅黑" panose="020B0503020204020204" charset="-122"/>
+                    <a:cs typeface="Arial" panose="020B0604020202020204"/>
                   </a:rPr>
                   <a:t>批次时长不一致（5/10/20/35 个时间点），需压缩为固定长度特征向量</a:t>
                 </a:r>
+                <a:endParaRPr lang="zh-CN" sz="1350" dirty="0">
+                  <a:solidFill>
+                    <a:srgbClr val="5A6478"/>
+                  </a:solidFill>
+                  <a:latin typeface="Arial" panose="020B0604020202020204"/>
+                  <a:ea typeface="微软雅黑" panose="020B0503020204020204" charset="-122"/>
+                  <a:cs typeface="Arial" panose="020B0604020202020204"/>
+                </a:endParaRPr>
               </a:p>
             </p:txBody>
           </p:sp>
@@ -6457,12 +6769,20 @@
                     <a:solidFill>
                       <a:srgbClr val="FFFFFF"/>
                     </a:solidFill>
-                    <a:latin typeface="Times New Roman"/>
-                    <a:ea typeface="Times New Roman"/>
-                    <a:cs typeface="Times New Roman"/>
+                    <a:latin typeface="Times New Roman" panose="02020603050405020304"/>
+                    <a:ea typeface="Times New Roman" panose="02020603050405020304"/>
+                    <a:cs typeface="Times New Roman" panose="02020603050405020304"/>
                   </a:rPr>
                   <a:t>03</a:t>
                 </a:r>
+                <a:endParaRPr lang="en-US" sz="1350" b="1" dirty="0">
+                  <a:solidFill>
+                    <a:srgbClr val="FFFFFF"/>
+                  </a:solidFill>
+                  <a:latin typeface="Times New Roman" panose="02020603050405020304"/>
+                  <a:ea typeface="Times New Roman" panose="02020603050405020304"/>
+                  <a:cs typeface="Times New Roman" panose="02020603050405020304"/>
+                </a:endParaRPr>
               </a:p>
             </p:txBody>
           </p:sp>
@@ -6869,12 +7189,20 @@
                     <a:solidFill>
                       <a:srgbClr val="1A3A6B"/>
                     </a:solidFill>
-                    <a:latin typeface="Arial"/>
-                    <a:ea typeface="Microsoft YaHei"/>
-                    <a:cs typeface="Arial"/>
+                    <a:latin typeface="Arial" panose="020B0604020202020204"/>
+                    <a:ea typeface="微软雅黑" panose="020B0503020204020204" charset="-122"/>
+                    <a:cs typeface="Arial" panose="020B0604020202020204"/>
                   </a:rPr>
                   <a:t>CT 异质性</a:t>
                 </a:r>
+                <a:endParaRPr lang="zh-CN" sz="1800" b="1" dirty="0">
+                  <a:solidFill>
+                    <a:srgbClr val="1A3A6B"/>
+                  </a:solidFill>
+                  <a:latin typeface="Arial" panose="020B0604020202020204"/>
+                  <a:ea typeface="微软雅黑" panose="020B0503020204020204" charset="-122"/>
+                  <a:cs typeface="Arial" panose="020B0604020202020204"/>
+                </a:endParaRPr>
               </a:p>
             </p:txBody>
           </p:sp>
@@ -6909,12 +7237,20 @@
                     <a:solidFill>
                       <a:srgbClr val="5A6478"/>
                     </a:solidFill>
-                    <a:latin typeface="Arial"/>
-                    <a:ea typeface="Microsoft YaHei"/>
-                    <a:cs typeface="Arial"/>
+                    <a:latin typeface="Arial" panose="020B0604020202020204"/>
+                    <a:ea typeface="微软雅黑" panose="020B0503020204020204" charset="-122"/>
+                    <a:cs typeface="Arial" panose="020B0604020202020204"/>
                   </a:rPr>
                   <a:t>三种控制类型（recipe / operator / apc）工艺逻辑不同，目标分布差异大</a:t>
                 </a:r>
+                <a:endParaRPr lang="zh-CN" sz="1350" dirty="0">
+                  <a:solidFill>
+                    <a:srgbClr val="5A6478"/>
+                  </a:solidFill>
+                  <a:latin typeface="Arial" panose="020B0604020202020204"/>
+                  <a:ea typeface="微软雅黑" panose="020B0503020204020204" charset="-122"/>
+                  <a:cs typeface="Arial" panose="020B0604020202020204"/>
+                </a:endParaRPr>
               </a:p>
             </p:txBody>
           </p:sp>
@@ -7001,12 +7337,20 @@
                   <a:solidFill>
                     <a:srgbClr val="000000"/>
                   </a:solidFill>
-                  <a:latin typeface="Arial"/>
-                  <a:ea typeface="Microsoft YaHei"/>
-                  <a:cs typeface="Arial"/>
+                  <a:latin typeface="Arial" panose="020B0604020202020204"/>
+                  <a:ea typeface="微软雅黑" panose="020B0503020204020204" charset="-122"/>
+                  <a:cs typeface="Arial" panose="020B0604020202020204"/>
                 </a:rPr>
                 <a:t>青霉素发酵稳定期目标变量预测 · 项目方案</a:t>
               </a:r>
+              <a:endParaRPr lang="zh-CN" sz="1200" dirty="0">
+                <a:solidFill>
+                  <a:srgbClr val="000000"/>
+                </a:solidFill>
+                <a:latin typeface="Arial" panose="020B0604020202020204"/>
+                <a:ea typeface="微软雅黑" panose="020B0503020204020204" charset="-122"/>
+                <a:cs typeface="Arial" panose="020B0604020202020204"/>
+              </a:endParaRPr>
             </a:p>
           </p:txBody>
         </p:sp>
@@ -7041,12 +7385,20 @@
                   <a:solidFill>
                     <a:srgbClr val="8A92A0"/>
                   </a:solidFill>
-                  <a:latin typeface="Times New Roman"/>
-                  <a:ea typeface="Times New Roman"/>
-                  <a:cs typeface="Times New Roman"/>
+                  <a:latin typeface="Times New Roman" panose="02020603050405020304"/>
+                  <a:ea typeface="Times New Roman" panose="02020603050405020304"/>
+                  <a:cs typeface="Times New Roman" panose="02020603050405020304"/>
                 </a:rPr>
                 <a:t>02 / 05</a:t>
               </a:r>
+              <a:endParaRPr lang="en-US" sz="1200" dirty="0">
+                <a:solidFill>
+                  <a:srgbClr val="8A92A0"/>
+                </a:solidFill>
+                <a:latin typeface="Times New Roman" panose="02020603050405020304"/>
+                <a:ea typeface="Times New Roman" panose="02020603050405020304"/>
+                <a:cs typeface="Times New Roman" panose="02020603050405020304"/>
+              </a:endParaRPr>
             </a:p>
           </p:txBody>
         </p:sp>
@@ -7056,9 +7408,18 @@
   <p:clrMapOvr>
     <a:masterClrMapping/>
   </p:clrMapOvr>
-  <p:transition xmlns:p14="http://schemas.microsoft.com/office/powerpoint/2010/main" p14:dur="400">
-    <p:fade/>
-  </p:transition>
+  <mc:AlternateContent xmlns:mc="http://schemas.openxmlformats.org/markup-compatibility/2006">
+    <mc:Choice xmlns:p14="http://schemas.microsoft.com/office/powerpoint/2010/main" Requires="p14">
+      <p:transition p14:dur="400">
+        <p:fade/>
+      </p:transition>
+    </mc:Choice>
+    <mc:Fallback>
+      <p:transition>
+        <p:fade/>
+      </p:transition>
+    </mc:Fallback>
+  </mc:AlternateContent>
 </p:sld>
 </file>
 
@@ -7168,12 +7529,20 @@
                   <a:solidFill>
                     <a:srgbClr val="C9962B"/>
                   </a:solidFill>
-                  <a:latin typeface="Times New Roman"/>
-                  <a:ea typeface="Times New Roman"/>
-                  <a:cs typeface="Times New Roman"/>
+                  <a:latin typeface="Times New Roman" panose="02020603050405020304"/>
+                  <a:ea typeface="Times New Roman" panose="02020603050405020304"/>
+                  <a:cs typeface="Times New Roman" panose="02020603050405020304"/>
                 </a:rPr>
                 <a:t>03 · DATA EXPLORATION</a:t>
               </a:r>
+              <a:endParaRPr lang="en-US" sz="1350" b="1" spc="75" dirty="0">
+                <a:solidFill>
+                  <a:srgbClr val="C9962B"/>
+                </a:solidFill>
+                <a:latin typeface="Times New Roman" panose="02020603050405020304"/>
+                <a:ea typeface="Times New Roman" panose="02020603050405020304"/>
+                <a:cs typeface="Times New Roman" panose="02020603050405020304"/>
+              </a:endParaRPr>
             </a:p>
           </p:txBody>
         </p:sp>
@@ -7208,12 +7577,20 @@
                   <a:solidFill>
                     <a:srgbClr val="1A3A6B"/>
                   </a:solidFill>
-                  <a:latin typeface="Times New Roman"/>
-                  <a:ea typeface="Microsoft YaHei"/>
-                  <a:cs typeface="Times New Roman"/>
+                  <a:latin typeface="Times New Roman" panose="02020603050405020304"/>
+                  <a:ea typeface="微软雅黑" panose="020B0503020204020204" charset="-122"/>
+                  <a:cs typeface="Times New Roman" panose="02020603050405020304"/>
                 </a:rPr>
                 <a:t>数据探索与核心发现</a:t>
               </a:r>
+              <a:endParaRPr lang="zh-CN" sz="3150" b="1" dirty="0">
+                <a:solidFill>
+                  <a:srgbClr val="1A3A6B"/>
+                </a:solidFill>
+                <a:latin typeface="Times New Roman" panose="02020603050405020304"/>
+                <a:ea typeface="微软雅黑" panose="020B0503020204020204" charset="-122"/>
+                <a:cs typeface="Times New Roman" panose="02020603050405020304"/>
+              </a:endParaRPr>
             </a:p>
           </p:txBody>
         </p:sp>
@@ -7248,9 +7625,9 @@
                   <a:solidFill>
                     <a:srgbClr val="1D2430"/>
                   </a:solidFill>
-                  <a:latin typeface="Arial"/>
-                  <a:ea typeface="Microsoft YaHei"/>
-                  <a:cs typeface="Arial"/>
+                  <a:latin typeface="Arial" panose="020B0604020202020204"/>
+                  <a:ea typeface="微软雅黑" panose="020B0503020204020204" charset="-122"/>
+                  <a:cs typeface="Arial" panose="020B0604020202020204"/>
                 </a:rPr>
                 <a:t>三类控制类型目标分布</a:t>
               </a:r>
@@ -7259,9 +7636,9 @@
                   <a:solidFill>
                     <a:srgbClr val="C9962B"/>
                   </a:solidFill>
-                  <a:latin typeface="Arial"/>
-                  <a:ea typeface="Microsoft YaHei"/>
-                  <a:cs typeface="Arial"/>
+                  <a:latin typeface="Arial" panose="020B0604020202020204"/>
+                  <a:ea typeface="微软雅黑" panose="020B0503020204020204" charset="-122"/>
+                  <a:cs typeface="Arial" panose="020B0604020202020204"/>
                 </a:rPr>
                 <a:t>显著不同</a:t>
               </a:r>
@@ -7270,9 +7647,9 @@
                   <a:solidFill>
                     <a:srgbClr val="1D2430"/>
                   </a:solidFill>
-                  <a:latin typeface="Arial"/>
-                  <a:ea typeface="Microsoft YaHei"/>
-                  <a:cs typeface="Arial"/>
+                  <a:latin typeface="Arial" panose="020B0604020202020204"/>
+                  <a:ea typeface="微软雅黑" panose="020B0503020204020204" charset="-122"/>
+                  <a:cs typeface="Arial" panose="020B0604020202020204"/>
                 </a:rPr>
                 <a:t>——这是整个方案的</a:t>
               </a:r>
@@ -7281,9 +7658,9 @@
                   <a:solidFill>
                     <a:srgbClr val="1A3A6B"/>
                   </a:solidFill>
-                  <a:latin typeface="Arial"/>
-                  <a:ea typeface="Microsoft YaHei"/>
-                  <a:cs typeface="Arial"/>
+                  <a:latin typeface="Arial" panose="020B0604020202020204"/>
+                  <a:ea typeface="微软雅黑" panose="020B0503020204020204" charset="-122"/>
+                  <a:cs typeface="Arial" panose="020B0604020202020204"/>
                 </a:rPr>
                 <a:t>核心决策点</a:t>
               </a:r>
@@ -7292,12 +7669,20 @@
                   <a:solidFill>
                     <a:srgbClr val="1D2430"/>
                   </a:solidFill>
-                  <a:latin typeface="Arial"/>
-                  <a:ea typeface="Microsoft YaHei"/>
-                  <a:cs typeface="Arial"/>
+                  <a:latin typeface="Arial" panose="020B0604020202020204"/>
+                  <a:ea typeface="微软雅黑" panose="020B0503020204020204" charset="-122"/>
+                  <a:cs typeface="Arial" panose="020B0604020202020204"/>
                 </a:rPr>
                 <a:t>，决定按 CT 分别建模</a:t>
               </a:r>
+              <a:endParaRPr lang="zh-CN" sz="1800" dirty="0">
+                <a:solidFill>
+                  <a:srgbClr val="1D2430"/>
+                </a:solidFill>
+                <a:latin typeface="Arial" panose="020B0604020202020204"/>
+                <a:ea typeface="微软雅黑" panose="020B0503020204020204" charset="-122"/>
+                <a:cs typeface="Arial" panose="020B0604020202020204"/>
+              </a:endParaRPr>
             </a:p>
           </p:txBody>
         </p:sp>
@@ -7441,12 +7826,20 @@
                     <a:solidFill>
                       <a:srgbClr val="FFFFFF"/>
                     </a:solidFill>
-                    <a:latin typeface="Arial"/>
-                    <a:ea typeface="Microsoft YaHei"/>
-                    <a:cs typeface="Arial"/>
+                    <a:latin typeface="Arial" panose="020B0604020202020204"/>
+                    <a:ea typeface="微软雅黑" panose="020B0503020204020204" charset="-122"/>
+                    <a:cs typeface="Arial" panose="020B0604020202020204"/>
                   </a:rPr>
                   <a:t>CT 类型</a:t>
                 </a:r>
+                <a:endParaRPr lang="zh-CN" sz="1200" b="1" spc="75" dirty="0">
+                  <a:solidFill>
+                    <a:srgbClr val="FFFFFF"/>
+                  </a:solidFill>
+                  <a:latin typeface="Arial" panose="020B0604020202020204"/>
+                  <a:ea typeface="微软雅黑" panose="020B0503020204020204" charset="-122"/>
+                  <a:cs typeface="Arial" panose="020B0604020202020204"/>
+                </a:endParaRPr>
               </a:p>
             </p:txBody>
           </p:sp>
@@ -7481,12 +7874,20 @@
                     <a:solidFill>
                       <a:srgbClr val="FFFFFF"/>
                     </a:solidFill>
-                    <a:latin typeface="Arial"/>
-                    <a:ea typeface="Microsoft YaHei"/>
-                    <a:cs typeface="Arial"/>
+                    <a:latin typeface="Arial" panose="020B0604020202020204"/>
+                    <a:ea typeface="微软雅黑" panose="020B0503020204020204" charset="-122"/>
+                    <a:cs typeface="Arial" panose="020B0604020202020204"/>
                   </a:rPr>
                   <a:t>样本数</a:t>
                 </a:r>
+                <a:endParaRPr lang="zh-CN" sz="1200" b="1" spc="75" dirty="0">
+                  <a:solidFill>
+                    <a:srgbClr val="FFFFFF"/>
+                  </a:solidFill>
+                  <a:latin typeface="Arial" panose="020B0604020202020204"/>
+                  <a:ea typeface="微软雅黑" panose="020B0503020204020204" charset="-122"/>
+                  <a:cs typeface="Arial" panose="020B0604020202020204"/>
+                </a:endParaRPr>
               </a:p>
             </p:txBody>
           </p:sp>
@@ -7521,12 +7922,20 @@
                     <a:solidFill>
                       <a:srgbClr val="FFFFFF"/>
                     </a:solidFill>
-                    <a:latin typeface="Arial"/>
-                    <a:ea typeface="Microsoft YaHei"/>
-                    <a:cs typeface="Arial"/>
+                    <a:latin typeface="Arial" panose="020B0604020202020204"/>
+                    <a:ea typeface="微软雅黑" panose="020B0503020204020204" charset="-122"/>
+                    <a:cs typeface="Arial" panose="020B0604020202020204"/>
                   </a:rPr>
                   <a:t>工艺含义</a:t>
                 </a:r>
+                <a:endParaRPr lang="zh-CN" sz="1200" b="1" spc="75" dirty="0">
+                  <a:solidFill>
+                    <a:srgbClr val="FFFFFF"/>
+                  </a:solidFill>
+                  <a:latin typeface="Arial" panose="020B0604020202020204"/>
+                  <a:ea typeface="微软雅黑" panose="020B0503020204020204" charset="-122"/>
+                  <a:cs typeface="Arial" panose="020B0604020202020204"/>
+                </a:endParaRPr>
               </a:p>
             </p:txBody>
           </p:sp>
@@ -7561,12 +7970,20 @@
                     <a:solidFill>
                       <a:srgbClr val="FFFFFF"/>
                     </a:solidFill>
-                    <a:latin typeface="Arial"/>
-                    <a:ea typeface="Microsoft YaHei"/>
-                    <a:cs typeface="Arial"/>
+                    <a:latin typeface="Arial" panose="020B0604020202020204"/>
+                    <a:ea typeface="微软雅黑" panose="020B0503020204020204" charset="-122"/>
+                    <a:cs typeface="Arial" panose="020B0604020202020204"/>
                   </a:rPr>
                   <a:t>目标均值</a:t>
                 </a:r>
+                <a:endParaRPr lang="zh-CN" sz="1200" b="1" spc="75" dirty="0">
+                  <a:solidFill>
+                    <a:srgbClr val="FFFFFF"/>
+                  </a:solidFill>
+                  <a:latin typeface="Arial" panose="020B0604020202020204"/>
+                  <a:ea typeface="微软雅黑" panose="020B0503020204020204" charset="-122"/>
+                  <a:cs typeface="Arial" panose="020B0604020202020204"/>
+                </a:endParaRPr>
               </a:p>
             </p:txBody>
           </p:sp>
@@ -7601,12 +8018,20 @@
                     <a:solidFill>
                       <a:srgbClr val="FFFFFF"/>
                     </a:solidFill>
-                    <a:latin typeface="Arial"/>
-                    <a:ea typeface="Microsoft YaHei"/>
-                    <a:cs typeface="Arial"/>
+                    <a:latin typeface="Arial" panose="020B0604020202020204"/>
+                    <a:ea typeface="微软雅黑" panose="020B0503020204020204" charset="-122"/>
+                    <a:cs typeface="Arial" panose="020B0604020202020204"/>
                   </a:rPr>
                   <a:t>标准差</a:t>
                 </a:r>
+                <a:endParaRPr lang="zh-CN" sz="1200" b="1" spc="75" dirty="0">
+                  <a:solidFill>
+                    <a:srgbClr val="FFFFFF"/>
+                  </a:solidFill>
+                  <a:latin typeface="Arial" panose="020B0604020202020204"/>
+                  <a:ea typeface="微软雅黑" panose="020B0503020204020204" charset="-122"/>
+                  <a:cs typeface="Arial" panose="020B0604020202020204"/>
+                </a:endParaRPr>
               </a:p>
             </p:txBody>
           </p:sp>
@@ -7785,12 +8210,20 @@
                     <a:solidFill>
                       <a:srgbClr val="1A3A6B"/>
                     </a:solidFill>
-                    <a:latin typeface="Arial"/>
-                    <a:ea typeface="Arial"/>
-                    <a:cs typeface="Arial"/>
+                    <a:latin typeface="Arial" panose="020B0604020202020204"/>
+                    <a:ea typeface="Arial" panose="020B0604020202020204"/>
+                    <a:cs typeface="Arial" panose="020B0604020202020204"/>
                   </a:rPr>
                   <a:t>recipe</a:t>
                 </a:r>
+                <a:endParaRPr lang="en-US" sz="1500" b="1" dirty="0">
+                  <a:solidFill>
+                    <a:srgbClr val="1A3A6B"/>
+                  </a:solidFill>
+                  <a:latin typeface="Arial" panose="020B0604020202020204"/>
+                  <a:ea typeface="Arial" panose="020B0604020202020204"/>
+                  <a:cs typeface="Arial" panose="020B0604020202020204"/>
+                </a:endParaRPr>
               </a:p>
             </p:txBody>
           </p:sp>
@@ -7802,8 +8235,8 @@
             </p:nvSpPr>
             <p:spPr>
               <a:xfrm>
-                <a:off x="1712557" y="2552700"/>
-                <a:ext cx="384886" cy="293370"/>
+                <a:off x="1809750" y="2552700"/>
+                <a:ext cx="190500" cy="230505"/>
               </a:xfrm>
               <a:prstGeom prst="rect">
                 <a:avLst/>
@@ -7825,12 +8258,20 @@
                     <a:solidFill>
                       <a:srgbClr val="000000"/>
                     </a:solidFill>
-                    <a:latin typeface="Times New Roman"/>
-                    <a:ea typeface="Times New Roman"/>
-                    <a:cs typeface="Times New Roman"/>
+                    <a:latin typeface="Times New Roman" panose="02020603050405020304"/>
+                    <a:ea typeface="Times New Roman" panose="02020603050405020304"/>
+                    <a:cs typeface="Times New Roman" panose="02020603050405020304"/>
                   </a:rPr>
-                  <a:t>~52</a:t>
+                  <a:t>60</a:t>
                 </a:r>
+                <a:endParaRPr lang="en-US" sz="1500" b="1" dirty="0">
+                  <a:solidFill>
+                    <a:srgbClr val="000000"/>
+                  </a:solidFill>
+                  <a:latin typeface="Times New Roman" panose="02020603050405020304"/>
+                  <a:ea typeface="Times New Roman" panose="02020603050405020304"/>
+                  <a:cs typeface="Times New Roman" panose="02020603050405020304"/>
+                </a:endParaRPr>
               </a:p>
             </p:txBody>
           </p:sp>
@@ -7865,12 +8306,20 @@
                     <a:solidFill>
                       <a:srgbClr val="1D2430"/>
                     </a:solidFill>
-                    <a:latin typeface="Arial"/>
-                    <a:ea typeface="Microsoft YaHei"/>
-                    <a:cs typeface="Arial"/>
+                    <a:latin typeface="Arial" panose="020B0604020202020204"/>
+                    <a:ea typeface="微软雅黑" panose="020B0503020204020204" charset="-122"/>
+                    <a:cs typeface="Arial" panose="020B0604020202020204"/>
                   </a:rPr>
                   <a:t>固定配方控制</a:t>
                 </a:r>
+                <a:endParaRPr lang="zh-CN" sz="1350" spc="150" dirty="0">
+                  <a:solidFill>
+                    <a:srgbClr val="1D2430"/>
+                  </a:solidFill>
+                  <a:latin typeface="Arial" panose="020B0604020202020204"/>
+                  <a:ea typeface="微软雅黑" panose="020B0503020204020204" charset="-122"/>
+                  <a:cs typeface="Arial" panose="020B0604020202020204"/>
+                </a:endParaRPr>
               </a:p>
             </p:txBody>
           </p:sp>
@@ -7905,12 +8354,20 @@
                     <a:solidFill>
                       <a:srgbClr val="1A3A6B"/>
                     </a:solidFill>
-                    <a:latin typeface="Times New Roman"/>
-                    <a:ea typeface="Times New Roman"/>
-                    <a:cs typeface="Times New Roman"/>
+                    <a:latin typeface="Times New Roman" panose="02020603050405020304"/>
+                    <a:ea typeface="Times New Roman" panose="02020603050405020304"/>
+                    <a:cs typeface="Times New Roman" panose="02020603050405020304"/>
                   </a:rPr>
                   <a:t>24.84</a:t>
                 </a:r>
+                <a:endParaRPr lang="en-US" sz="1650" b="1" spc="75" dirty="0">
+                  <a:solidFill>
+                    <a:srgbClr val="1A3A6B"/>
+                  </a:solidFill>
+                  <a:latin typeface="Times New Roman" panose="02020603050405020304"/>
+                  <a:ea typeface="Times New Roman" panose="02020603050405020304"/>
+                  <a:cs typeface="Times New Roman" panose="02020603050405020304"/>
+                </a:endParaRPr>
               </a:p>
             </p:txBody>
           </p:sp>
@@ -7945,12 +8402,20 @@
                     <a:solidFill>
                       <a:srgbClr val="8A92A0"/>
                     </a:solidFill>
-                    <a:latin typeface="Arial"/>
-                    <a:ea typeface="Arial"/>
-                    <a:cs typeface="Arial"/>
+                    <a:latin typeface="Arial" panose="020B0604020202020204"/>
+                    <a:ea typeface="Arial" panose="020B0604020202020204"/>
+                    <a:cs typeface="Arial" panose="020B0604020202020204"/>
                   </a:rPr>
                   <a:t>±4.56</a:t>
                 </a:r>
+                <a:endParaRPr lang="en-US" sz="1050" dirty="0">
+                  <a:solidFill>
+                    <a:srgbClr val="8A92A0"/>
+                  </a:solidFill>
+                  <a:latin typeface="Arial" panose="020B0604020202020204"/>
+                  <a:ea typeface="Arial" panose="020B0604020202020204"/>
+                  <a:cs typeface="Arial" panose="020B0604020202020204"/>
+                </a:endParaRPr>
               </a:p>
             </p:txBody>
           </p:sp>
@@ -8021,12 +8486,20 @@
                     <a:solidFill>
                       <a:srgbClr val="4A7BB5"/>
                     </a:solidFill>
-                    <a:latin typeface="Arial"/>
-                    <a:ea typeface="Arial"/>
-                    <a:cs typeface="Arial"/>
+                    <a:latin typeface="Arial" panose="020B0604020202020204"/>
+                    <a:ea typeface="Arial" panose="020B0604020202020204"/>
+                    <a:cs typeface="Arial" panose="020B0604020202020204"/>
                   </a:rPr>
                   <a:t>operator</a:t>
                 </a:r>
+                <a:endParaRPr lang="en-US" sz="1500" b="1" dirty="0">
+                  <a:solidFill>
+                    <a:srgbClr val="4A7BB5"/>
+                  </a:solidFill>
+                  <a:latin typeface="Arial" panose="020B0604020202020204"/>
+                  <a:ea typeface="Arial" panose="020B0604020202020204"/>
+                  <a:cs typeface="Arial" panose="020B0604020202020204"/>
+                </a:endParaRPr>
               </a:p>
             </p:txBody>
           </p:sp>
@@ -8038,8 +8511,8 @@
             </p:nvSpPr>
             <p:spPr>
               <a:xfrm>
-                <a:off x="1712557" y="3219450"/>
-                <a:ext cx="384886" cy="293370"/>
+                <a:off x="1809750" y="3219450"/>
+                <a:ext cx="190500" cy="230505"/>
               </a:xfrm>
               <a:prstGeom prst="rect">
                 <a:avLst/>
@@ -8061,12 +8534,20 @@
                     <a:solidFill>
                       <a:srgbClr val="000000"/>
                     </a:solidFill>
-                    <a:latin typeface="Times New Roman"/>
-                    <a:ea typeface="Times New Roman"/>
-                    <a:cs typeface="Times New Roman"/>
+                    <a:latin typeface="Times New Roman" panose="02020603050405020304"/>
+                    <a:ea typeface="Times New Roman" panose="02020603050405020304"/>
+                    <a:cs typeface="Times New Roman" panose="02020603050405020304"/>
                   </a:rPr>
-                  <a:t>~47</a:t>
+                  <a:t>60</a:t>
                 </a:r>
+                <a:endParaRPr lang="en-US" sz="1500" b="1" dirty="0">
+                  <a:solidFill>
+                    <a:srgbClr val="000000"/>
+                  </a:solidFill>
+                  <a:latin typeface="Times New Roman" panose="02020603050405020304"/>
+                  <a:ea typeface="Times New Roman" panose="02020603050405020304"/>
+                  <a:cs typeface="Times New Roman" panose="02020603050405020304"/>
+                </a:endParaRPr>
               </a:p>
             </p:txBody>
           </p:sp>
@@ -8101,12 +8582,20 @@
                     <a:solidFill>
                       <a:srgbClr val="1D2430"/>
                     </a:solidFill>
-                    <a:latin typeface="Arial"/>
-                    <a:ea typeface="Microsoft YaHei"/>
-                    <a:cs typeface="Arial"/>
+                    <a:latin typeface="Arial" panose="020B0604020202020204"/>
+                    <a:ea typeface="微软雅黑" panose="020B0503020204020204" charset="-122"/>
+                    <a:cs typeface="Arial" panose="020B0604020202020204"/>
                   </a:rPr>
                   <a:t>操作员人工干预</a:t>
                 </a:r>
+                <a:endParaRPr lang="zh-CN" sz="1350" dirty="0">
+                  <a:solidFill>
+                    <a:srgbClr val="1D2430"/>
+                  </a:solidFill>
+                  <a:latin typeface="Arial" panose="020B0604020202020204"/>
+                  <a:ea typeface="微软雅黑" panose="020B0503020204020204" charset="-122"/>
+                  <a:cs typeface="Arial" panose="020B0604020202020204"/>
+                </a:endParaRPr>
               </a:p>
             </p:txBody>
           </p:sp>
@@ -8141,12 +8630,20 @@
                     <a:solidFill>
                       <a:srgbClr val="4A7BB5"/>
                     </a:solidFill>
-                    <a:latin typeface="Times New Roman"/>
-                    <a:ea typeface="Times New Roman"/>
-                    <a:cs typeface="Times New Roman"/>
+                    <a:latin typeface="Times New Roman" panose="02020603050405020304"/>
+                    <a:ea typeface="Times New Roman" panose="02020603050405020304"/>
+                    <a:cs typeface="Times New Roman" panose="02020603050405020304"/>
                   </a:rPr>
                   <a:t>25.05</a:t>
                 </a:r>
+                <a:endParaRPr lang="en-US" sz="1650" b="1" dirty="0">
+                  <a:solidFill>
+                    <a:srgbClr val="4A7BB5"/>
+                  </a:solidFill>
+                  <a:latin typeface="Times New Roman" panose="02020603050405020304"/>
+                  <a:ea typeface="Times New Roman" panose="02020603050405020304"/>
+                  <a:cs typeface="Times New Roman" panose="02020603050405020304"/>
+                </a:endParaRPr>
               </a:p>
             </p:txBody>
           </p:sp>
@@ -8181,12 +8678,20 @@
                     <a:solidFill>
                       <a:srgbClr val="8A92A0"/>
                     </a:solidFill>
-                    <a:latin typeface="Arial"/>
-                    <a:ea typeface="Arial"/>
-                    <a:cs typeface="Arial"/>
+                    <a:latin typeface="Arial" panose="020B0604020202020204"/>
+                    <a:ea typeface="Arial" panose="020B0604020202020204"/>
+                    <a:cs typeface="Arial" panose="020B0604020202020204"/>
                   </a:rPr>
                   <a:t>±4.89</a:t>
                 </a:r>
+                <a:endParaRPr lang="en-US" sz="1050" dirty="0">
+                  <a:solidFill>
+                    <a:srgbClr val="8A92A0"/>
+                  </a:solidFill>
+                  <a:latin typeface="Arial" panose="020B0604020202020204"/>
+                  <a:ea typeface="Arial" panose="020B0604020202020204"/>
+                  <a:cs typeface="Arial" panose="020B0604020202020204"/>
+                </a:endParaRPr>
               </a:p>
             </p:txBody>
           </p:sp>
@@ -8281,12 +8786,20 @@
                     <a:solidFill>
                       <a:srgbClr val="C9962B"/>
                     </a:solidFill>
-                    <a:latin typeface="Arial"/>
-                    <a:ea typeface="Arial"/>
-                    <a:cs typeface="Arial"/>
+                    <a:latin typeface="Arial" panose="020B0604020202020204"/>
+                    <a:ea typeface="Arial" panose="020B0604020202020204"/>
+                    <a:cs typeface="Arial" panose="020B0604020202020204"/>
                   </a:rPr>
                   <a:t>apc</a:t>
                 </a:r>
+                <a:endParaRPr lang="en-US" sz="1500" b="1" dirty="0">
+                  <a:solidFill>
+                    <a:srgbClr val="C9962B"/>
+                  </a:solidFill>
+                  <a:latin typeface="Arial" panose="020B0604020202020204"/>
+                  <a:ea typeface="Arial" panose="020B0604020202020204"/>
+                  <a:cs typeface="Arial" panose="020B0604020202020204"/>
+                </a:endParaRPr>
               </a:p>
             </p:txBody>
           </p:sp>
@@ -8298,8 +8811,8 @@
             </p:nvSpPr>
             <p:spPr>
               <a:xfrm>
-                <a:off x="1835772" y="3886200"/>
-                <a:ext cx="138455" cy="293370"/>
+                <a:off x="1809749" y="3886200"/>
+                <a:ext cx="190500" cy="230505"/>
               </a:xfrm>
               <a:prstGeom prst="rect">
                 <a:avLst/>
@@ -8321,12 +8834,20 @@
                     <a:solidFill>
                       <a:srgbClr val="000000"/>
                     </a:solidFill>
-                    <a:latin typeface="Times New Roman"/>
-                    <a:ea typeface="Times New Roman"/>
-                    <a:cs typeface="Times New Roman"/>
+                    <a:latin typeface="Times New Roman" panose="02020603050405020304"/>
+                    <a:ea typeface="Times New Roman" panose="02020603050405020304"/>
+                    <a:cs typeface="Times New Roman" panose="02020603050405020304"/>
                   </a:rPr>
-                  <a:t>6</a:t>
+                  <a:t>60</a:t>
                 </a:r>
+                <a:endParaRPr lang="en-US" sz="1500" b="1" dirty="0">
+                  <a:solidFill>
+                    <a:srgbClr val="000000"/>
+                  </a:solidFill>
+                  <a:latin typeface="Times New Roman" panose="02020603050405020304"/>
+                  <a:ea typeface="Times New Roman" panose="02020603050405020304"/>
+                  <a:cs typeface="Times New Roman" panose="02020603050405020304"/>
+                </a:endParaRPr>
               </a:p>
             </p:txBody>
           </p:sp>
@@ -8361,12 +8882,20 @@
                     <a:solidFill>
                       <a:srgbClr val="1D2430"/>
                     </a:solidFill>
-                    <a:latin typeface="Arial"/>
-                    <a:ea typeface="Microsoft YaHei"/>
-                    <a:cs typeface="Arial"/>
+                    <a:latin typeface="Arial" panose="020B0604020202020204"/>
+                    <a:ea typeface="微软雅黑" panose="020B0503020204020204" charset="-122"/>
+                    <a:cs typeface="Arial" panose="020B0604020202020204"/>
                   </a:rPr>
                   <a:t>自动过程控制</a:t>
                 </a:r>
+                <a:endParaRPr lang="zh-CN" sz="1350" dirty="0">
+                  <a:solidFill>
+                    <a:srgbClr val="1D2430"/>
+                  </a:solidFill>
+                  <a:latin typeface="Arial" panose="020B0604020202020204"/>
+                  <a:ea typeface="微软雅黑" panose="020B0503020204020204" charset="-122"/>
+                  <a:cs typeface="Arial" panose="020B0604020202020204"/>
+                </a:endParaRPr>
               </a:p>
             </p:txBody>
           </p:sp>
@@ -8401,12 +8930,20 @@
                     <a:solidFill>
                       <a:srgbClr val="C9962B"/>
                     </a:solidFill>
-                    <a:latin typeface="Times New Roman"/>
-                    <a:ea typeface="Times New Roman"/>
-                    <a:cs typeface="Times New Roman"/>
+                    <a:latin typeface="Times New Roman" panose="02020603050405020304"/>
+                    <a:ea typeface="Times New Roman" panose="02020603050405020304"/>
+                    <a:cs typeface="Times New Roman" panose="02020603050405020304"/>
                   </a:rPr>
                   <a:t>28.16</a:t>
                 </a:r>
+                <a:endParaRPr lang="en-US" sz="1650" b="1" dirty="0">
+                  <a:solidFill>
+                    <a:srgbClr val="C9962B"/>
+                  </a:solidFill>
+                  <a:latin typeface="Times New Roman" panose="02020603050405020304"/>
+                  <a:ea typeface="Times New Roman" panose="02020603050405020304"/>
+                  <a:cs typeface="Times New Roman" panose="02020603050405020304"/>
+                </a:endParaRPr>
               </a:p>
             </p:txBody>
           </p:sp>
@@ -8441,12 +8978,20 @@
                     <a:solidFill>
                       <a:srgbClr val="8A92A0"/>
                     </a:solidFill>
-                    <a:latin typeface="Arial"/>
-                    <a:ea typeface="Arial"/>
-                    <a:cs typeface="Arial"/>
+                    <a:latin typeface="Arial" panose="020B0604020202020204"/>
+                    <a:ea typeface="Arial" panose="020B0604020202020204"/>
+                    <a:cs typeface="Arial" panose="020B0604020202020204"/>
                   </a:rPr>
                   <a:t>±3.14</a:t>
                 </a:r>
+                <a:endParaRPr lang="en-US" sz="1050" dirty="0">
+                  <a:solidFill>
+                    <a:srgbClr val="8A92A0"/>
+                  </a:solidFill>
+                  <a:latin typeface="Arial" panose="020B0604020202020204"/>
+                  <a:ea typeface="Arial" panose="020B0604020202020204"/>
+                  <a:cs typeface="Arial" panose="020B0604020202020204"/>
+                </a:endParaRPr>
               </a:p>
             </p:txBody>
           </p:sp>
@@ -8482,12 +9027,20 @@
                   <a:solidFill>
                     <a:srgbClr val="8A92A0"/>
                   </a:solidFill>
-                  <a:latin typeface="Arial"/>
-                  <a:ea typeface="Microsoft YaHei"/>
-                  <a:cs typeface="Arial"/>
+                  <a:latin typeface="Arial" panose="020B0604020202020204"/>
+                  <a:ea typeface="微软雅黑" panose="020B0503020204020204" charset="-122"/>
+                  <a:cs typeface="Arial" panose="020B0604020202020204"/>
                 </a:rPr>
                 <a:t>注：apc 仅 6 个样本但均值最高（28.16），分布差异驱动 CT 特异性建模策略</a:t>
               </a:r>
+              <a:endParaRPr lang="zh-CN" sz="1200" b="1" dirty="0">
+                <a:solidFill>
+                  <a:srgbClr val="8A92A0"/>
+                </a:solidFill>
+                <a:latin typeface="Arial" panose="020B0604020202020204"/>
+                <a:ea typeface="微软雅黑" panose="020B0503020204020204" charset="-122"/>
+                <a:cs typeface="Arial" panose="020B0604020202020204"/>
+              </a:endParaRPr>
             </a:p>
           </p:txBody>
         </p:sp>
@@ -8537,12 +9090,20 @@
                   <a:solidFill>
                     <a:srgbClr val="C9962B"/>
                   </a:solidFill>
-                  <a:latin typeface="Times New Roman"/>
-                  <a:ea typeface="Microsoft YaHei"/>
-                  <a:cs typeface="Times New Roman"/>
+                  <a:latin typeface="Times New Roman" panose="02020603050405020304"/>
+                  <a:ea typeface="微软雅黑" panose="020B0503020204020204" charset="-122"/>
+                  <a:cs typeface="Times New Roman" panose="02020603050405020304"/>
                 </a:rPr>
                 <a:t>KEY FINDINGS · 关键发现</a:t>
               </a:r>
+              <a:endParaRPr lang="zh-CN" sz="1350" b="1" spc="75" dirty="0">
+                <a:solidFill>
+                  <a:srgbClr val="C9962B"/>
+                </a:solidFill>
+                <a:latin typeface="Times New Roman" panose="02020603050405020304"/>
+                <a:ea typeface="微软雅黑" panose="020B0503020204020204" charset="-122"/>
+                <a:cs typeface="Times New Roman" panose="02020603050405020304"/>
+              </a:endParaRPr>
             </a:p>
           </p:txBody>
         </p:sp>
@@ -8746,12 +9307,20 @@
                     <a:solidFill>
                       <a:srgbClr val="1A3A6B"/>
                     </a:solidFill>
-                    <a:latin typeface="Arial"/>
-                    <a:ea typeface="Microsoft YaHei"/>
-                    <a:cs typeface="Arial"/>
+                    <a:latin typeface="Arial" panose="020B0604020202020204"/>
+                    <a:ea typeface="微软雅黑" panose="020B0503020204020204" charset="-122"/>
+                    <a:cs typeface="Arial" panose="020B0604020202020204"/>
                   </a:rPr>
                   <a:t>CT 分布差异 → 分别建模</a:t>
                 </a:r>
+                <a:endParaRPr lang="zh-CN" sz="1800" b="1" dirty="0">
+                  <a:solidFill>
+                    <a:srgbClr val="1A3A6B"/>
+                  </a:solidFill>
+                  <a:latin typeface="Arial" panose="020B0604020202020204"/>
+                  <a:ea typeface="微软雅黑" panose="020B0503020204020204" charset="-122"/>
+                  <a:cs typeface="Arial" panose="020B0604020202020204"/>
+                </a:endParaRPr>
               </a:p>
             </p:txBody>
           </p:sp>
@@ -8786,12 +9355,20 @@
                     <a:solidFill>
                       <a:srgbClr val="5A6478"/>
                     </a:solidFill>
-                    <a:latin typeface="Arial"/>
-                    <a:ea typeface="Microsoft YaHei"/>
-                    <a:cs typeface="Arial"/>
+                    <a:latin typeface="Arial" panose="020B0604020202020204"/>
+                    <a:ea typeface="微软雅黑" panose="020B0503020204020204" charset="-122"/>
+                    <a:cs typeface="Arial" panose="020B0604020202020204"/>
                   </a:rPr>
                   <a:t>三类 CT 目标均值跨度 3.32（24.84→28.16），</a:t>
                 </a:r>
+                <a:endParaRPr lang="zh-CN" sz="1350" dirty="0">
+                  <a:solidFill>
+                    <a:srgbClr val="5A6478"/>
+                  </a:solidFill>
+                  <a:latin typeface="Arial" panose="020B0604020202020204"/>
+                  <a:ea typeface="微软雅黑" panose="020B0503020204020204" charset="-122"/>
+                  <a:cs typeface="Arial" panose="020B0604020202020204"/>
+                </a:endParaRPr>
               </a:p>
             </p:txBody>
           </p:sp>
@@ -8826,23 +9403,31 @@
                     <a:solidFill>
                       <a:srgbClr val="5A6478"/>
                     </a:solidFill>
-                    <a:latin typeface="Arial"/>
-                    <a:ea typeface="Microsoft YaHei"/>
-                    <a:cs typeface="Arial"/>
+                    <a:latin typeface="Arial" panose="020B0604020202020204"/>
+                    <a:ea typeface="微软雅黑" panose="020B0503020204020204" charset="-122"/>
+                    <a:cs typeface="Arial" panose="020B0604020202020204"/>
                   </a:rPr>
-                  <a:t xml:space="preserve">不应该使用同一模型建模 — </a:t>
+                  <a:t>不应该使用同一模型建模 — </a:t>
                 </a:r>
                 <a:r>
                   <a:rPr lang="zh-CN" sz="1350" b="1" dirty="0">
                     <a:solidFill>
                       <a:srgbClr val="C9962B"/>
                     </a:solidFill>
-                    <a:latin typeface="Arial"/>
-                    <a:ea typeface="Microsoft YaHei"/>
-                    <a:cs typeface="Arial"/>
+                    <a:latin typeface="Arial" panose="020B0604020202020204"/>
+                    <a:ea typeface="微软雅黑" panose="020B0503020204020204" charset="-122"/>
+                    <a:cs typeface="Arial" panose="020B0604020202020204"/>
                   </a:rPr>
                   <a:t>核心决策点</a:t>
                 </a:r>
+                <a:endParaRPr lang="zh-CN" sz="1350" b="1" dirty="0">
+                  <a:solidFill>
+                    <a:srgbClr val="C9962B"/>
+                  </a:solidFill>
+                  <a:latin typeface="Arial" panose="020B0604020202020204"/>
+                  <a:ea typeface="微软雅黑" panose="020B0503020204020204" charset="-122"/>
+                  <a:cs typeface="Arial" panose="020B0604020202020204"/>
+                </a:endParaRPr>
               </a:p>
             </p:txBody>
           </p:sp>
@@ -9007,12 +9592,20 @@
                     <a:solidFill>
                       <a:srgbClr val="1A3A6B"/>
                     </a:solidFill>
-                    <a:latin typeface="Arial"/>
-                    <a:ea typeface="Microsoft YaHei"/>
-                    <a:cs typeface="Arial"/>
+                    <a:latin typeface="Arial" panose="020B0604020202020204"/>
+                    <a:ea typeface="微软雅黑" panose="020B0503020204020204" charset="-122"/>
+                    <a:cs typeface="Arial" panose="020B0604020202020204"/>
                   </a:rPr>
                   <a:t>SPC 通道需特征选择</a:t>
                 </a:r>
+                <a:endParaRPr lang="zh-CN" sz="1800" b="1" dirty="0">
+                  <a:solidFill>
+                    <a:srgbClr val="1A3A6B"/>
+                  </a:solidFill>
+                  <a:latin typeface="Arial" panose="020B0604020202020204"/>
+                  <a:ea typeface="微软雅黑" panose="020B0503020204020204" charset="-122"/>
+                  <a:cs typeface="Arial" panose="020B0604020202020204"/>
+                </a:endParaRPr>
               </a:p>
             </p:txBody>
           </p:sp>
@@ -9047,20 +9640,20 @@
                     <a:solidFill>
                       <a:srgbClr val="5A6478"/>
                     </a:solidFill>
-                    <a:latin typeface="Arial"/>
-                    <a:ea typeface="Microsoft YaHei"/>
-                    <a:cs typeface="Arial"/>
+                    <a:latin typeface="Arial" panose="020B0604020202020204"/>
+                    <a:ea typeface="微软雅黑" panose="020B0503020204020204" charset="-122"/>
+                    <a:cs typeface="Arial" panose="020B0604020202020204"/>
                   </a:rPr>
-                  <a:t xml:space="preserve">64 通道中仅 </a:t>
+                  <a:t>64 通道中仅 </a:t>
                 </a:r>
                 <a:r>
                   <a:rPr lang="zh-CN" sz="1350" b="1" dirty="0">
                     <a:solidFill>
                       <a:srgbClr val="1A3A6B"/>
                     </a:solidFill>
-                    <a:latin typeface="Arial"/>
-                    <a:ea typeface="Microsoft YaHei"/>
-                    <a:cs typeface="Arial"/>
+                    <a:latin typeface="Arial" panose="020B0604020202020204"/>
+                    <a:ea typeface="微软雅黑" panose="020B0503020204020204" charset="-122"/>
+                    <a:cs typeface="Arial" panose="020B0604020202020204"/>
                   </a:rPr>
                   <a:t>8-12 个强相关</a:t>
                 </a:r>
@@ -9069,12 +9662,20 @@
                     <a:solidFill>
                       <a:srgbClr val="5A6478"/>
                     </a:solidFill>
-                    <a:latin typeface="Arial"/>
-                    <a:ea typeface="Microsoft YaHei"/>
-                    <a:cs typeface="Arial"/>
+                    <a:latin typeface="Arial" panose="020B0604020202020204"/>
+                    <a:ea typeface="微软雅黑" panose="020B0503020204020204" charset="-122"/>
+                    <a:cs typeface="Arial" panose="020B0604020202020204"/>
                   </a:rPr>
                   <a:t>（|r| &gt; 0.3），</a:t>
                 </a:r>
+                <a:endParaRPr lang="zh-CN" sz="1350" dirty="0">
+                  <a:solidFill>
+                    <a:srgbClr val="5A6478"/>
+                  </a:solidFill>
+                  <a:latin typeface="Arial" panose="020B0604020202020204"/>
+                  <a:ea typeface="微软雅黑" panose="020B0503020204020204" charset="-122"/>
+                  <a:cs typeface="Arial" panose="020B0604020202020204"/>
+                </a:endParaRPr>
               </a:p>
             </p:txBody>
           </p:sp>
@@ -9109,12 +9710,20 @@
                     <a:solidFill>
                       <a:srgbClr val="5A6478"/>
                     </a:solidFill>
-                    <a:latin typeface="Arial"/>
-                    <a:ea typeface="Microsoft YaHei"/>
-                    <a:cs typeface="Arial"/>
+                    <a:latin typeface="Arial" panose="020B0604020202020204"/>
+                    <a:ea typeface="微软雅黑" panose="020B0503020204020204" charset="-122"/>
+                    <a:cs typeface="Arial" panose="020B0604020202020204"/>
                   </a:rPr>
                   <a:t>20-30 个弱相关 — 需按 CT 分别筛选</a:t>
                 </a:r>
+                <a:endParaRPr lang="zh-CN" sz="1350" dirty="0">
+                  <a:solidFill>
+                    <a:srgbClr val="5A6478"/>
+                  </a:solidFill>
+                  <a:latin typeface="Arial" panose="020B0604020202020204"/>
+                  <a:ea typeface="微软雅黑" panose="020B0503020204020204" charset="-122"/>
+                  <a:cs typeface="Arial" panose="020B0604020202020204"/>
+                </a:endParaRPr>
               </a:p>
             </p:txBody>
           </p:sp>
@@ -9458,12 +10067,20 @@
                     <a:solidFill>
                       <a:srgbClr val="1A3A6B"/>
                     </a:solidFill>
-                    <a:latin typeface="Arial"/>
-                    <a:ea typeface="Microsoft YaHei"/>
-                    <a:cs typeface="Arial"/>
+                    <a:latin typeface="Arial" panose="020B0604020202020204"/>
+                    <a:ea typeface="微软雅黑" panose="020B0503020204020204" charset="-122"/>
+                    <a:cs typeface="Arial" panose="020B0604020202020204"/>
                   </a:rPr>
                   <a:t>过程变量未提升性能</a:t>
                 </a:r>
+                <a:endParaRPr lang="zh-CN" sz="1800" b="1" dirty="0">
+                  <a:solidFill>
+                    <a:srgbClr val="1A3A6B"/>
+                  </a:solidFill>
+                  <a:latin typeface="Arial" panose="020B0604020202020204"/>
+                  <a:ea typeface="微软雅黑" panose="020B0503020204020204" charset="-122"/>
+                  <a:cs typeface="Arial" panose="020B0604020202020204"/>
+                </a:endParaRPr>
               </a:p>
             </p:txBody>
           </p:sp>
@@ -9498,12 +10115,20 @@
                     <a:solidFill>
                       <a:srgbClr val="5A6478"/>
                     </a:solidFill>
-                    <a:latin typeface="Arial"/>
-                    <a:ea typeface="Microsoft YaHei"/>
-                    <a:cs typeface="Arial"/>
+                    <a:latin typeface="Arial" panose="020B0604020202020204"/>
+                    <a:ea typeface="微软雅黑" panose="020B0503020204020204" charset="-122"/>
+                    <a:cs typeface="Arial" panose="020B0604020202020204"/>
                   </a:rPr>
                   <a:t>温度/pH/DO 等在 CV 实验中无增益，</a:t>
                 </a:r>
+                <a:endParaRPr lang="zh-CN" sz="1350" dirty="0">
+                  <a:solidFill>
+                    <a:srgbClr val="5A6478"/>
+                  </a:solidFill>
+                  <a:latin typeface="Arial" panose="020B0604020202020204"/>
+                  <a:ea typeface="微软雅黑" panose="020B0503020204020204" charset="-122"/>
+                  <a:cs typeface="Arial" panose="020B0604020202020204"/>
+                </a:endParaRPr>
               </a:p>
             </p:txBody>
           </p:sp>
@@ -9538,9 +10163,9 @@
                     <a:solidFill>
                       <a:srgbClr val="5A6478"/>
                     </a:solidFill>
-                    <a:latin typeface="Arial"/>
-                    <a:ea typeface="Microsoft YaHei"/>
-                    <a:cs typeface="Arial"/>
+                    <a:latin typeface="Arial" panose="020B0604020202020204"/>
+                    <a:ea typeface="微软雅黑" panose="020B0503020204020204" charset="-122"/>
+                    <a:cs typeface="Arial" panose="020B0604020202020204"/>
                   </a:rPr>
                   <a:t>最终方案</a:t>
                 </a:r>
@@ -9549,12 +10174,20 @@
                     <a:solidFill>
                       <a:srgbClr val="4A7BB5"/>
                     </a:solidFill>
-                    <a:latin typeface="Arial"/>
-                    <a:ea typeface="Microsoft YaHei"/>
-                    <a:cs typeface="Arial"/>
+                    <a:latin typeface="Arial" panose="020B0604020202020204"/>
+                    <a:ea typeface="微软雅黑" panose="020B0503020204020204" charset="-122"/>
+                    <a:cs typeface="Arial" panose="020B0604020202020204"/>
                   </a:rPr>
                   <a:t>仅使用 SPC 特征</a:t>
                 </a:r>
+                <a:endParaRPr lang="zh-CN" sz="1350" b="1" dirty="0">
+                  <a:solidFill>
+                    <a:srgbClr val="4A7BB5"/>
+                  </a:solidFill>
+                  <a:latin typeface="Arial" panose="020B0604020202020204"/>
+                  <a:ea typeface="微软雅黑" panose="020B0503020204020204" charset="-122"/>
+                  <a:cs typeface="Arial" panose="020B0604020202020204"/>
+                </a:endParaRPr>
               </a:p>
             </p:txBody>
           </p:sp>
@@ -9641,12 +10274,20 @@
                   <a:solidFill>
                     <a:srgbClr val="000000"/>
                   </a:solidFill>
-                  <a:latin typeface="Arial"/>
-                  <a:ea typeface="Microsoft YaHei"/>
-                  <a:cs typeface="Arial"/>
+                  <a:latin typeface="Arial" panose="020B0604020202020204"/>
+                  <a:ea typeface="微软雅黑" panose="020B0503020204020204" charset="-122"/>
+                  <a:cs typeface="Arial" panose="020B0604020202020204"/>
                 </a:rPr>
                 <a:t>数据来源：训练集 105 样本 EDA · target_stable_mean 统计</a:t>
               </a:r>
+              <a:endParaRPr lang="zh-CN" sz="1200" dirty="0">
+                <a:solidFill>
+                  <a:srgbClr val="000000"/>
+                </a:solidFill>
+                <a:latin typeface="Arial" panose="020B0604020202020204"/>
+                <a:ea typeface="微软雅黑" panose="020B0503020204020204" charset="-122"/>
+                <a:cs typeface="Arial" panose="020B0604020202020204"/>
+              </a:endParaRPr>
             </a:p>
           </p:txBody>
         </p:sp>
@@ -9681,12 +10322,20 @@
                   <a:solidFill>
                     <a:srgbClr val="8A92A0"/>
                   </a:solidFill>
-                  <a:latin typeface="Times New Roman"/>
-                  <a:ea typeface="Times New Roman"/>
-                  <a:cs typeface="Times New Roman"/>
+                  <a:latin typeface="Times New Roman" panose="02020603050405020304"/>
+                  <a:ea typeface="Times New Roman" panose="02020603050405020304"/>
+                  <a:cs typeface="Times New Roman" panose="02020603050405020304"/>
                 </a:rPr>
                 <a:t>03 / 05</a:t>
               </a:r>
+              <a:endParaRPr lang="en-US" sz="1200" dirty="0">
+                <a:solidFill>
+                  <a:srgbClr val="8A92A0"/>
+                </a:solidFill>
+                <a:latin typeface="Times New Roman" panose="02020603050405020304"/>
+                <a:ea typeface="Times New Roman" panose="02020603050405020304"/>
+                <a:cs typeface="Times New Roman" panose="02020603050405020304"/>
+              </a:endParaRPr>
             </a:p>
           </p:txBody>
         </p:sp>
@@ -9696,9 +10345,18 @@
   <p:clrMapOvr>
     <a:masterClrMapping/>
   </p:clrMapOvr>
-  <p:transition xmlns:p14="http://schemas.microsoft.com/office/powerpoint/2010/main" p14:dur="400">
-    <p:fade/>
-  </p:transition>
+  <mc:AlternateContent xmlns:mc="http://schemas.openxmlformats.org/markup-compatibility/2006">
+    <mc:Choice xmlns:p14="http://schemas.microsoft.com/office/powerpoint/2010/main" Requires="p14">
+      <p:transition p14:dur="400">
+        <p:fade/>
+      </p:transition>
+    </mc:Choice>
+    <mc:Fallback>
+      <p:transition>
+        <p:fade/>
+      </p:transition>
+    </mc:Fallback>
+  </mc:AlternateContent>
 </p:sld>
 </file>
 
@@ -9808,12 +10466,20 @@
                   <a:solidFill>
                     <a:srgbClr val="C9962B"/>
                   </a:solidFill>
-                  <a:latin typeface="Times New Roman"/>
-                  <a:ea typeface="Times New Roman"/>
-                  <a:cs typeface="Times New Roman"/>
+                  <a:latin typeface="Times New Roman" panose="02020603050405020304"/>
+                  <a:ea typeface="Times New Roman" panose="02020603050405020304"/>
+                  <a:cs typeface="Times New Roman" panose="02020603050405020304"/>
                 </a:rPr>
                 <a:t>04 · SOLUTION PIPELINE</a:t>
               </a:r>
+              <a:endParaRPr lang="en-US" sz="1350" b="1" spc="75" dirty="0">
+                <a:solidFill>
+                  <a:srgbClr val="C9962B"/>
+                </a:solidFill>
+                <a:latin typeface="Times New Roman" panose="02020603050405020304"/>
+                <a:ea typeface="Times New Roman" panose="02020603050405020304"/>
+                <a:cs typeface="Times New Roman" panose="02020603050405020304"/>
+              </a:endParaRPr>
             </a:p>
           </p:txBody>
         </p:sp>
@@ -9848,12 +10514,20 @@
                   <a:solidFill>
                     <a:srgbClr val="1A3A6B"/>
                   </a:solidFill>
-                  <a:latin typeface="Times New Roman"/>
-                  <a:ea typeface="Microsoft YaHei"/>
-                  <a:cs typeface="Times New Roman"/>
+                  <a:latin typeface="Times New Roman" panose="02020603050405020304"/>
+                  <a:ea typeface="微软雅黑" panose="020B0503020204020204" charset="-122"/>
+                  <a:cs typeface="Times New Roman" panose="02020603050405020304"/>
                 </a:rPr>
                 <a:t>整体方案流程</a:t>
               </a:r>
+              <a:endParaRPr lang="zh-CN" sz="3150" b="1" dirty="0">
+                <a:solidFill>
+                  <a:srgbClr val="1A3A6B"/>
+                </a:solidFill>
+                <a:latin typeface="Times New Roman" panose="02020603050405020304"/>
+                <a:ea typeface="微软雅黑" panose="020B0503020204020204" charset="-122"/>
+                <a:cs typeface="Times New Roman" panose="02020603050405020304"/>
+              </a:endParaRPr>
             </a:p>
           </p:txBody>
         </p:sp>
@@ -9888,20 +10562,20 @@
                   <a:solidFill>
                     <a:srgbClr val="1D2430"/>
                   </a:solidFill>
-                  <a:latin typeface="Arial"/>
-                  <a:ea typeface="Microsoft YaHei"/>
-                  <a:cs typeface="Arial"/>
+                  <a:latin typeface="Arial" panose="020B0604020202020204"/>
+                  <a:ea typeface="微软雅黑" panose="020B0503020204020204" charset="-122"/>
+                  <a:cs typeface="Arial" panose="020B0604020202020204"/>
                 </a:rPr>
-                <a:t xml:space="preserve">五阶段流水线——从 </a:t>
+                <a:t>五阶段流水线——从 </a:t>
               </a:r>
               <a:r>
                 <a:rPr lang="zh-CN" sz="1800" b="1" dirty="0">
                   <a:solidFill>
                     <a:srgbClr val="C9962B"/>
                   </a:solidFill>
-                  <a:latin typeface="Arial"/>
-                  <a:ea typeface="Microsoft YaHei"/>
-                  <a:cs typeface="Arial"/>
+                  <a:latin typeface="Arial" panose="020B0604020202020204"/>
+                  <a:ea typeface="微软雅黑" panose="020B0503020204020204" charset="-122"/>
+                  <a:cs typeface="Arial" panose="020B0604020202020204"/>
                 </a:rPr>
                 <a:t>320 候选特征</a:t>
               </a:r>
@@ -9910,9 +10584,9 @@
                   <a:solidFill>
                     <a:srgbClr val="1D2430"/>
                   </a:solidFill>
-                  <a:latin typeface="Arial"/>
-                  <a:ea typeface="Microsoft YaHei"/>
-                  <a:cs typeface="Arial"/>
+                  <a:latin typeface="Arial" panose="020B0604020202020204"/>
+                  <a:ea typeface="微软雅黑" panose="020B0503020204020204" charset="-122"/>
+                  <a:cs typeface="Arial" panose="020B0604020202020204"/>
                 </a:rPr>
                 <a:t>到</a:t>
               </a:r>
@@ -9921,20 +10595,20 @@
                   <a:solidFill>
                     <a:srgbClr val="1A3A6B"/>
                   </a:solidFill>
-                  <a:latin typeface="Arial"/>
-                  <a:ea typeface="Microsoft YaHei"/>
-                  <a:cs typeface="Arial"/>
+                  <a:latin typeface="Arial" panose="020B0604020202020204"/>
+                  <a:ea typeface="微软雅黑" panose="020B0503020204020204" charset="-122"/>
+                  <a:cs typeface="Arial" panose="020B0604020202020204"/>
                 </a:rPr>
-                <a:t xml:space="preserve"> CT 特异性建模</a:t>
+                <a:t> CT 特异性建模</a:t>
               </a:r>
               <a:r>
                 <a:rPr lang="zh-CN" sz="1800" dirty="0">
                   <a:solidFill>
                     <a:srgbClr val="1D2430"/>
                   </a:solidFill>
-                  <a:latin typeface="Arial"/>
-                  <a:ea typeface="Microsoft YaHei"/>
-                  <a:cs typeface="Arial"/>
+                  <a:latin typeface="Arial" panose="020B0604020202020204"/>
+                  <a:ea typeface="微软雅黑" panose="020B0503020204020204" charset="-122"/>
+                  <a:cs typeface="Arial" panose="020B0604020202020204"/>
                 </a:rPr>
                 <a:t>再到</a:t>
               </a:r>
@@ -9943,9 +10617,9 @@
                   <a:solidFill>
                     <a:srgbClr val="1A3A6B"/>
                   </a:solidFill>
-                  <a:latin typeface="Arial"/>
-                  <a:ea typeface="Microsoft YaHei"/>
-                  <a:cs typeface="Arial"/>
+                  <a:latin typeface="Arial" panose="020B0604020202020204"/>
+                  <a:ea typeface="微软雅黑" panose="020B0503020204020204" charset="-122"/>
+                  <a:cs typeface="Arial" panose="020B0604020202020204"/>
                 </a:rPr>
                 <a:t>分层校准</a:t>
               </a:r>
@@ -9954,12 +10628,20 @@
                   <a:solidFill>
                     <a:srgbClr val="1D2430"/>
                   </a:solidFill>
-                  <a:latin typeface="Arial"/>
-                  <a:ea typeface="Microsoft YaHei"/>
-                  <a:cs typeface="Arial"/>
+                  <a:latin typeface="Arial" panose="020B0604020202020204"/>
+                  <a:ea typeface="微软雅黑" panose="020B0503020204020204" charset="-122"/>
+                  <a:cs typeface="Arial" panose="020B0604020202020204"/>
                 </a:rPr>
                 <a:t>，每阶段针对小样本精心设计</a:t>
               </a:r>
+              <a:endParaRPr lang="zh-CN" sz="1800" dirty="0">
+                <a:solidFill>
+                  <a:srgbClr val="1D2430"/>
+                </a:solidFill>
+                <a:latin typeface="Arial" panose="020B0604020202020204"/>
+                <a:ea typeface="微软雅黑" panose="020B0503020204020204" charset="-122"/>
+                <a:cs typeface="Arial" panose="020B0604020202020204"/>
+              </a:endParaRPr>
             </a:p>
           </p:txBody>
         </p:sp>
@@ -10131,12 +10813,20 @@
                     <a:solidFill>
                       <a:srgbClr val="FFFFFF"/>
                     </a:solidFill>
-                    <a:latin typeface="Times New Roman"/>
-                    <a:ea typeface="Times New Roman"/>
-                    <a:cs typeface="Times New Roman"/>
+                    <a:latin typeface="Times New Roman" panose="02020603050405020304"/>
+                    <a:ea typeface="Times New Roman" panose="02020603050405020304"/>
+                    <a:cs typeface="Times New Roman" panose="02020603050405020304"/>
                   </a:rPr>
                   <a:t>01</a:t>
                 </a:r>
+                <a:endParaRPr lang="en-US" sz="1350" b="1" dirty="0">
+                  <a:solidFill>
+                    <a:srgbClr val="FFFFFF"/>
+                  </a:solidFill>
+                  <a:latin typeface="Times New Roman" panose="02020603050405020304"/>
+                  <a:ea typeface="Times New Roman" panose="02020603050405020304"/>
+                  <a:cs typeface="Times New Roman" panose="02020603050405020304"/>
+                </a:endParaRPr>
               </a:p>
             </p:txBody>
           </p:sp>
@@ -10171,12 +10861,20 @@
                     <a:solidFill>
                       <a:srgbClr val="FFFFFF"/>
                     </a:solidFill>
-                    <a:latin typeface="Arial"/>
-                    <a:ea typeface="Microsoft YaHei"/>
-                    <a:cs typeface="Arial"/>
+                    <a:latin typeface="Arial" panose="020B0604020202020204"/>
+                    <a:ea typeface="微软雅黑" panose="020B0503020204020204" charset="-122"/>
+                    <a:cs typeface="Arial" panose="020B0604020202020204"/>
                   </a:rPr>
                   <a:t>预处理</a:t>
                 </a:r>
+                <a:endParaRPr lang="zh-CN" sz="1500" b="1" dirty="0">
+                  <a:solidFill>
+                    <a:srgbClr val="FFFFFF"/>
+                  </a:solidFill>
+                  <a:latin typeface="Arial" panose="020B0604020202020204"/>
+                  <a:ea typeface="微软雅黑" panose="020B0503020204020204" charset="-122"/>
+                  <a:cs typeface="Arial" panose="020B0604020202020204"/>
+                </a:endParaRPr>
               </a:p>
             </p:txBody>
           </p:sp>
@@ -10623,12 +11321,20 @@
                     <a:solidFill>
                       <a:srgbClr val="1A3A6B"/>
                     </a:solidFill>
-                    <a:latin typeface="Arial"/>
-                    <a:ea typeface="Microsoft YaHei"/>
-                    <a:cs typeface="Arial"/>
+                    <a:latin typeface="Arial" panose="020B0604020202020204"/>
+                    <a:ea typeface="微软雅黑" panose="020B0503020204020204" charset="-122"/>
+                    <a:cs typeface="Arial" panose="020B0604020202020204"/>
                   </a:rPr>
                   <a:t>缺失值填充</a:t>
                 </a:r>
+                <a:endParaRPr lang="zh-CN" sz="1200" b="1" dirty="0">
+                  <a:solidFill>
+                    <a:srgbClr val="1A3A6B"/>
+                  </a:solidFill>
+                  <a:latin typeface="Arial" panose="020B0604020202020204"/>
+                  <a:ea typeface="微软雅黑" panose="020B0503020204020204" charset="-122"/>
+                  <a:cs typeface="Arial" panose="020B0604020202020204"/>
+                </a:endParaRPr>
               </a:p>
             </p:txBody>
           </p:sp>
@@ -10685,12 +11391,20 @@
                     <a:solidFill>
                       <a:srgbClr val="1D2430"/>
                     </a:solidFill>
-                    <a:latin typeface="Arial"/>
-                    <a:ea typeface="Microsoft YaHei"/>
-                    <a:cs typeface="Arial"/>
+                    <a:latin typeface="Arial" panose="020B0604020202020204"/>
+                    <a:ea typeface="微软雅黑" panose="020B0503020204020204" charset="-122"/>
+                    <a:cs typeface="Arial" panose="020B0604020202020204"/>
                   </a:rPr>
                   <a:t>前向/后向填充</a:t>
                 </a:r>
+                <a:endParaRPr lang="zh-CN" sz="1350" dirty="0">
+                  <a:solidFill>
+                    <a:srgbClr val="1D2430"/>
+                  </a:solidFill>
+                  <a:latin typeface="Arial" panose="020B0604020202020204"/>
+                  <a:ea typeface="微软雅黑" panose="020B0503020204020204" charset="-122"/>
+                  <a:cs typeface="Arial" panose="020B0604020202020204"/>
+                </a:endParaRPr>
               </a:p>
             </p:txBody>
           </p:sp>
@@ -10747,12 +11461,20 @@
                     <a:solidFill>
                       <a:srgbClr val="1D2430"/>
                     </a:solidFill>
-                    <a:latin typeface="Arial"/>
-                    <a:ea typeface="Microsoft YaHei"/>
-                    <a:cs typeface="Arial"/>
+                    <a:latin typeface="Arial" panose="020B0604020202020204"/>
+                    <a:ea typeface="微软雅黑" panose="020B0503020204020204" charset="-122"/>
+                    <a:cs typeface="Arial" panose="020B0604020202020204"/>
                   </a:rPr>
                   <a:t>剩余缺失填 0</a:t>
                 </a:r>
+                <a:endParaRPr lang="zh-CN" sz="1350" dirty="0">
+                  <a:solidFill>
+                    <a:srgbClr val="1D2430"/>
+                  </a:solidFill>
+                  <a:latin typeface="Arial" panose="020B0604020202020204"/>
+                  <a:ea typeface="微软雅黑" panose="020B0503020204020204" charset="-122"/>
+                  <a:cs typeface="Arial" panose="020B0604020202020204"/>
+                </a:endParaRPr>
               </a:p>
             </p:txBody>
           </p:sp>
@@ -10809,12 +11531,20 @@
                     <a:solidFill>
                       <a:srgbClr val="1D2430"/>
                     </a:solidFill>
-                    <a:latin typeface="Arial"/>
-                    <a:ea typeface="Microsoft YaHei"/>
-                    <a:cs typeface="Arial"/>
+                    <a:latin typeface="Arial" panose="020B0604020202020204"/>
+                    <a:ea typeface="微软雅黑" panose="020B0503020204020204" charset="-122"/>
+                    <a:cs typeface="Arial" panose="020B0604020202020204"/>
                   </a:rPr>
                   <a:t>按 sample_id 分组</a:t>
                 </a:r>
+                <a:endParaRPr lang="zh-CN" sz="1350" dirty="0">
+                  <a:solidFill>
+                    <a:srgbClr val="1D2430"/>
+                  </a:solidFill>
+                  <a:latin typeface="Arial" panose="020B0604020202020204"/>
+                  <a:ea typeface="微软雅黑" panose="020B0503020204020204" charset="-122"/>
+                  <a:cs typeface="Arial" panose="020B0604020202020204"/>
+                </a:endParaRPr>
               </a:p>
             </p:txBody>
           </p:sp>
@@ -10914,12 +11644,20 @@
                     <a:solidFill>
                       <a:srgbClr val="8A92A0"/>
                     </a:solidFill>
-                    <a:latin typeface="Arial"/>
-                    <a:ea typeface="Arial"/>
-                    <a:cs typeface="Arial"/>
+                    <a:latin typeface="Arial" panose="020B0604020202020204"/>
+                    <a:ea typeface="Arial" panose="020B0604020202020204"/>
+                    <a:cs typeface="Arial" panose="020B0604020202020204"/>
                   </a:rPr>
                   <a:t>STAGE OUTPUT</a:t>
                 </a:r>
+                <a:endParaRPr lang="en-US" sz="1050" b="1" spc="75" dirty="0">
+                  <a:solidFill>
+                    <a:srgbClr val="8A92A0"/>
+                  </a:solidFill>
+                  <a:latin typeface="Arial" panose="020B0604020202020204"/>
+                  <a:ea typeface="Arial" panose="020B0604020202020204"/>
+                  <a:cs typeface="Arial" panose="020B0604020202020204"/>
+                </a:endParaRPr>
               </a:p>
             </p:txBody>
           </p:sp>
@@ -10954,12 +11692,20 @@
                     <a:solidFill>
                       <a:srgbClr val="1A3A6B"/>
                     </a:solidFill>
-                    <a:latin typeface="Arial"/>
-                    <a:ea typeface="Microsoft YaHei"/>
-                    <a:cs typeface="Arial"/>
+                    <a:latin typeface="Arial" panose="020B0604020202020204"/>
+                    <a:ea typeface="微软雅黑" panose="020B0503020204020204" charset="-122"/>
+                    <a:cs typeface="Arial" panose="020B0604020202020204"/>
                   </a:rPr>
                   <a:t>完整时序数据</a:t>
                 </a:r>
+                <a:endParaRPr lang="zh-CN" sz="1350" b="1" dirty="0">
+                  <a:solidFill>
+                    <a:srgbClr val="1A3A6B"/>
+                  </a:solidFill>
+                  <a:latin typeface="Arial" panose="020B0604020202020204"/>
+                  <a:ea typeface="微软雅黑" panose="020B0503020204020204" charset="-122"/>
+                  <a:cs typeface="Arial" panose="020B0604020202020204"/>
+                </a:endParaRPr>
               </a:p>
             </p:txBody>
           </p:sp>
@@ -11121,12 +11867,20 @@
                     <a:solidFill>
                       <a:srgbClr val="FFFFFF"/>
                     </a:solidFill>
-                    <a:latin typeface="Times New Roman"/>
-                    <a:ea typeface="Times New Roman"/>
-                    <a:cs typeface="Times New Roman"/>
+                    <a:latin typeface="Times New Roman" panose="02020603050405020304"/>
+                    <a:ea typeface="Times New Roman" panose="02020603050405020304"/>
+                    <a:cs typeface="Times New Roman" panose="02020603050405020304"/>
                   </a:rPr>
                   <a:t>02</a:t>
                 </a:r>
+                <a:endParaRPr lang="en-US" sz="1350" b="1" dirty="0">
+                  <a:solidFill>
+                    <a:srgbClr val="FFFFFF"/>
+                  </a:solidFill>
+                  <a:latin typeface="Times New Roman" panose="02020603050405020304"/>
+                  <a:ea typeface="Times New Roman" panose="02020603050405020304"/>
+                  <a:cs typeface="Times New Roman" panose="02020603050405020304"/>
+                </a:endParaRPr>
               </a:p>
             </p:txBody>
           </p:sp>
@@ -11161,12 +11915,20 @@
                     <a:solidFill>
                       <a:srgbClr val="FFFFFF"/>
                     </a:solidFill>
-                    <a:latin typeface="Arial"/>
-                    <a:ea typeface="Microsoft YaHei"/>
-                    <a:cs typeface="Arial"/>
+                    <a:latin typeface="Arial" panose="020B0604020202020204"/>
+                    <a:ea typeface="微软雅黑" panose="020B0503020204020204" charset="-122"/>
+                    <a:cs typeface="Arial" panose="020B0604020202020204"/>
                   </a:rPr>
                   <a:t>特征工程</a:t>
                 </a:r>
+                <a:endParaRPr lang="zh-CN" sz="1500" b="1" dirty="0">
+                  <a:solidFill>
+                    <a:srgbClr val="FFFFFF"/>
+                  </a:solidFill>
+                  <a:latin typeface="Arial" panose="020B0604020202020204"/>
+                  <a:ea typeface="微软雅黑" panose="020B0503020204020204" charset="-122"/>
+                  <a:cs typeface="Arial" panose="020B0604020202020204"/>
+                </a:endParaRPr>
               </a:p>
             </p:txBody>
           </p:sp>
@@ -11469,12 +12231,20 @@
                     <a:solidFill>
                       <a:srgbClr val="1A3A6B"/>
                     </a:solidFill>
-                    <a:latin typeface="Arial"/>
-                    <a:ea typeface="Microsoft YaHei"/>
-                    <a:cs typeface="Arial"/>
+                    <a:latin typeface="Arial" panose="020B0604020202020204"/>
+                    <a:ea typeface="微软雅黑" panose="020B0503020204020204" charset="-122"/>
+                    <a:cs typeface="Arial" panose="020B0604020202020204"/>
                   </a:rPr>
                   <a:t>SPC 统计聚合</a:t>
                 </a:r>
+                <a:endParaRPr lang="zh-CN" sz="1200" b="1" dirty="0">
+                  <a:solidFill>
+                    <a:srgbClr val="1A3A6B"/>
+                  </a:solidFill>
+                  <a:latin typeface="Arial" panose="020B0604020202020204"/>
+                  <a:ea typeface="微软雅黑" panose="020B0503020204020204" charset="-122"/>
+                  <a:cs typeface="Arial" panose="020B0604020202020204"/>
+                </a:endParaRPr>
               </a:p>
             </p:txBody>
           </p:sp>
@@ -11531,12 +12301,20 @@
                     <a:solidFill>
                       <a:srgbClr val="1D2430"/>
                     </a:solidFill>
-                    <a:latin typeface="Arial"/>
-                    <a:ea typeface="Microsoft YaHei"/>
-                    <a:cs typeface="Arial"/>
+                    <a:latin typeface="Arial" panose="020B0604020202020204"/>
+                    <a:ea typeface="微软雅黑" panose="020B0503020204020204" charset="-122"/>
+                    <a:cs typeface="Arial" panose="020B0604020202020204"/>
                   </a:rPr>
                   <a:t>64 通道 × 5 统计量</a:t>
                 </a:r>
+                <a:endParaRPr lang="zh-CN" sz="1350" dirty="0">
+                  <a:solidFill>
+                    <a:srgbClr val="1D2430"/>
+                  </a:solidFill>
+                  <a:latin typeface="Arial" panose="020B0604020202020204"/>
+                  <a:ea typeface="微软雅黑" panose="020B0503020204020204" charset="-122"/>
+                  <a:cs typeface="Arial" panose="020B0604020202020204"/>
+                </a:endParaRPr>
               </a:p>
             </p:txBody>
           </p:sp>
@@ -11593,12 +12371,20 @@
                     <a:solidFill>
                       <a:srgbClr val="1D2430"/>
                     </a:solidFill>
-                    <a:latin typeface="Arial"/>
-                    <a:ea typeface="Arial"/>
-                    <a:cs typeface="Arial"/>
+                    <a:latin typeface="Arial" panose="020B0604020202020204"/>
+                    <a:ea typeface="Arial" panose="020B0604020202020204"/>
+                    <a:cs typeface="Arial" panose="020B0604020202020204"/>
                   </a:rPr>
                   <a:t>mean/std/skew/</a:t>
                 </a:r>
+                <a:endParaRPr lang="en-US" sz="1350" dirty="0">
+                  <a:solidFill>
+                    <a:srgbClr val="1D2430"/>
+                  </a:solidFill>
+                  <a:latin typeface="Arial" panose="020B0604020202020204"/>
+                  <a:ea typeface="Arial" panose="020B0604020202020204"/>
+                  <a:cs typeface="Arial" panose="020B0604020202020204"/>
+                </a:endParaRPr>
               </a:p>
             </p:txBody>
           </p:sp>
@@ -11633,12 +12419,20 @@
                     <a:solidFill>
                       <a:srgbClr val="1D2430"/>
                     </a:solidFill>
-                    <a:latin typeface="Arial"/>
-                    <a:ea typeface="Arial"/>
-                    <a:cs typeface="Arial"/>
+                    <a:latin typeface="Arial" panose="020B0604020202020204"/>
+                    <a:ea typeface="Arial" panose="020B0604020202020204"/>
+                    <a:cs typeface="Arial" panose="020B0604020202020204"/>
                   </a:rPr>
                   <a:t>median/cv</a:t>
                 </a:r>
+                <a:endParaRPr lang="en-US" sz="1350" dirty="0">
+                  <a:solidFill>
+                    <a:srgbClr val="1D2430"/>
+                  </a:solidFill>
+                  <a:latin typeface="Arial" panose="020B0604020202020204"/>
+                  <a:ea typeface="Arial" panose="020B0604020202020204"/>
+                  <a:cs typeface="Arial" panose="020B0604020202020204"/>
+                </a:endParaRPr>
               </a:p>
             </p:txBody>
           </p:sp>
@@ -11695,12 +12489,20 @@
                     <a:solidFill>
                       <a:srgbClr val="C9962B"/>
                     </a:solidFill>
-                    <a:latin typeface="Arial"/>
-                    <a:ea typeface="Microsoft YaHei"/>
-                    <a:cs typeface="Arial"/>
+                    <a:latin typeface="Arial" panose="020B0604020202020204"/>
+                    <a:ea typeface="微软雅黑" panose="020B0503020204020204" charset="-122"/>
+                    <a:cs typeface="Arial" panose="020B0604020202020204"/>
                   </a:rPr>
                   <a:t>320 候选特征</a:t>
                 </a:r>
+                <a:endParaRPr lang="zh-CN" sz="1350" b="1" dirty="0">
+                  <a:solidFill>
+                    <a:srgbClr val="C9962B"/>
+                  </a:solidFill>
+                  <a:latin typeface="Arial" panose="020B0604020202020204"/>
+                  <a:ea typeface="微软雅黑" panose="020B0503020204020204" charset="-122"/>
+                  <a:cs typeface="Arial" panose="020B0604020202020204"/>
+                </a:endParaRPr>
               </a:p>
             </p:txBody>
           </p:sp>
@@ -11800,12 +12602,20 @@
                     <a:solidFill>
                       <a:srgbClr val="8A92A0"/>
                     </a:solidFill>
-                    <a:latin typeface="Arial"/>
-                    <a:ea typeface="Arial"/>
-                    <a:cs typeface="Arial"/>
+                    <a:latin typeface="Arial" panose="020B0604020202020204"/>
+                    <a:ea typeface="Arial" panose="020B0604020202020204"/>
+                    <a:cs typeface="Arial" panose="020B0604020202020204"/>
                   </a:rPr>
                   <a:t>STAGE OUTPUT</a:t>
                 </a:r>
+                <a:endParaRPr lang="en-US" sz="1050" b="1" spc="75" dirty="0">
+                  <a:solidFill>
+                    <a:srgbClr val="8A92A0"/>
+                  </a:solidFill>
+                  <a:latin typeface="Arial" panose="020B0604020202020204"/>
+                  <a:ea typeface="Arial" panose="020B0604020202020204"/>
+                  <a:cs typeface="Arial" panose="020B0604020202020204"/>
+                </a:endParaRPr>
               </a:p>
             </p:txBody>
           </p:sp>
@@ -11840,12 +12650,20 @@
                     <a:solidFill>
                       <a:srgbClr val="C9962B"/>
                     </a:solidFill>
-                    <a:latin typeface="Arial"/>
-                    <a:ea typeface="Microsoft YaHei"/>
-                    <a:cs typeface="Arial"/>
+                    <a:latin typeface="Arial" panose="020B0604020202020204"/>
+                    <a:ea typeface="微软雅黑" panose="020B0503020204020204" charset="-122"/>
+                    <a:cs typeface="Arial" panose="020B0604020202020204"/>
                   </a:rPr>
                   <a:t>特征矩阵</a:t>
                 </a:r>
+                <a:endParaRPr lang="zh-CN" sz="1350" b="1" dirty="0">
+                  <a:solidFill>
+                    <a:srgbClr val="C9962B"/>
+                  </a:solidFill>
+                  <a:latin typeface="Arial" panose="020B0604020202020204"/>
+                  <a:ea typeface="微软雅黑" panose="020B0503020204020204" charset="-122"/>
+                  <a:cs typeface="Arial" panose="020B0604020202020204"/>
+                </a:endParaRPr>
               </a:p>
             </p:txBody>
           </p:sp>
@@ -12007,12 +12825,20 @@
                     <a:solidFill>
                       <a:srgbClr val="FFFFFF"/>
                     </a:solidFill>
-                    <a:latin typeface="Times New Roman"/>
-                    <a:ea typeface="Times New Roman"/>
-                    <a:cs typeface="Times New Roman"/>
+                    <a:latin typeface="Times New Roman" panose="02020603050405020304"/>
+                    <a:ea typeface="Times New Roman" panose="02020603050405020304"/>
+                    <a:cs typeface="Times New Roman" panose="02020603050405020304"/>
                   </a:rPr>
                   <a:t>03</a:t>
                 </a:r>
+                <a:endParaRPr lang="en-US" sz="1350" b="1" dirty="0">
+                  <a:solidFill>
+                    <a:srgbClr val="FFFFFF"/>
+                  </a:solidFill>
+                  <a:latin typeface="Times New Roman" panose="02020603050405020304"/>
+                  <a:ea typeface="Times New Roman" panose="02020603050405020304"/>
+                  <a:cs typeface="Times New Roman" panose="02020603050405020304"/>
+                </a:endParaRPr>
               </a:p>
             </p:txBody>
           </p:sp>
@@ -12047,12 +12873,20 @@
                     <a:solidFill>
                       <a:srgbClr val="FFFFFF"/>
                     </a:solidFill>
-                    <a:latin typeface="Arial"/>
-                    <a:ea typeface="Microsoft YaHei"/>
-                    <a:cs typeface="Arial"/>
+                    <a:latin typeface="Arial" panose="020B0604020202020204"/>
+                    <a:ea typeface="微软雅黑" panose="020B0503020204020204" charset="-122"/>
+                    <a:cs typeface="Arial" panose="020B0604020202020204"/>
                   </a:rPr>
                   <a:t>特征选择</a:t>
                 </a:r>
+                <a:endParaRPr lang="zh-CN" sz="1500" b="1" dirty="0">
+                  <a:solidFill>
+                    <a:srgbClr val="FFFFFF"/>
+                  </a:solidFill>
+                  <a:latin typeface="Arial" panose="020B0604020202020204"/>
+                  <a:ea typeface="微软雅黑" panose="020B0503020204020204" charset="-122"/>
+                  <a:cs typeface="Arial" panose="020B0604020202020204"/>
+                </a:endParaRPr>
               </a:p>
             </p:txBody>
           </p:sp>
@@ -12176,12 +13010,20 @@
                     <a:solidFill>
                       <a:srgbClr val="1A3A6B"/>
                     </a:solidFill>
-                    <a:latin typeface="Arial"/>
-                    <a:ea typeface="Microsoft YaHei"/>
-                    <a:cs typeface="Arial"/>
+                    <a:latin typeface="Arial" panose="020B0604020202020204"/>
+                    <a:ea typeface="微软雅黑" panose="020B0503020204020204" charset="-122"/>
+                    <a:cs typeface="Arial" panose="020B0604020202020204"/>
                   </a:rPr>
                   <a:t>CT 特异性筛选</a:t>
                 </a:r>
+                <a:endParaRPr lang="zh-CN" sz="1200" b="1" dirty="0">
+                  <a:solidFill>
+                    <a:srgbClr val="1A3A6B"/>
+                  </a:solidFill>
+                  <a:latin typeface="Arial" panose="020B0604020202020204"/>
+                  <a:ea typeface="微软雅黑" panose="020B0503020204020204" charset="-122"/>
+                  <a:cs typeface="Arial" panose="020B0604020202020204"/>
+                </a:endParaRPr>
               </a:p>
             </p:txBody>
           </p:sp>
@@ -12238,12 +13080,20 @@
                     <a:solidFill>
                       <a:srgbClr val="1D2430"/>
                     </a:solidFill>
-                    <a:latin typeface="Arial"/>
-                    <a:ea typeface="Microsoft YaHei"/>
-                    <a:cs typeface="Arial"/>
+                    <a:latin typeface="Arial" panose="020B0604020202020204"/>
+                    <a:ea typeface="微软雅黑" panose="020B0503020204020204" charset="-122"/>
+                    <a:cs typeface="Arial" panose="020B0604020202020204"/>
                   </a:rPr>
                   <a:t>Pearson 相关性</a:t>
                 </a:r>
+                <a:endParaRPr lang="zh-CN" sz="1350" dirty="0">
+                  <a:solidFill>
+                    <a:srgbClr val="1D2430"/>
+                  </a:solidFill>
+                  <a:latin typeface="Arial" panose="020B0604020202020204"/>
+                  <a:ea typeface="微软雅黑" panose="020B0503020204020204" charset="-122"/>
+                  <a:cs typeface="Arial" panose="020B0604020202020204"/>
+                </a:endParaRPr>
               </a:p>
             </p:txBody>
           </p:sp>
@@ -12300,12 +13150,20 @@
                     <a:solidFill>
                       <a:srgbClr val="1D2430"/>
                     </a:solidFill>
-                    <a:latin typeface="Arial"/>
-                    <a:ea typeface="Microsoft YaHei"/>
-                    <a:cs typeface="Arial"/>
+                    <a:latin typeface="Arial" panose="020B0604020202020204"/>
+                    <a:ea typeface="微软雅黑" panose="020B0503020204020204" charset="-122"/>
+                    <a:cs typeface="Arial" panose="020B0604020202020204"/>
                   </a:rPr>
                   <a:t>按 CT 分别取 Top-K</a:t>
                 </a:r>
+                <a:endParaRPr lang="zh-CN" sz="1350" dirty="0">
+                  <a:solidFill>
+                    <a:srgbClr val="1D2430"/>
+                  </a:solidFill>
+                  <a:latin typeface="Arial" panose="020B0604020202020204"/>
+                  <a:ea typeface="微软雅黑" panose="020B0503020204020204" charset="-122"/>
+                  <a:cs typeface="Arial" panose="020B0604020202020204"/>
+                </a:endParaRPr>
               </a:p>
             </p:txBody>
           </p:sp>
@@ -12340,12 +13198,20 @@
                     <a:solidFill>
                       <a:srgbClr val="5A6478"/>
                     </a:solidFill>
-                    <a:latin typeface="Arial"/>
-                    <a:ea typeface="Arial"/>
-                    <a:cs typeface="Arial"/>
+                    <a:latin typeface="Arial" panose="020B0604020202020204"/>
+                    <a:ea typeface="Arial" panose="020B0604020202020204"/>
+                    <a:cs typeface="Arial" panose="020B0604020202020204"/>
                   </a:rPr>
                   <a:t>recipe: 14 · op: 22</a:t>
                 </a:r>
+                <a:endParaRPr lang="en-US" sz="1350" dirty="0">
+                  <a:solidFill>
+                    <a:srgbClr val="5A6478"/>
+                  </a:solidFill>
+                  <a:latin typeface="Arial" panose="020B0604020202020204"/>
+                  <a:ea typeface="Arial" panose="020B0604020202020204"/>
+                  <a:cs typeface="Arial" panose="020B0604020202020204"/>
+                </a:endParaRPr>
               </a:p>
             </p:txBody>
           </p:sp>
@@ -12380,12 +13246,20 @@
                     <a:solidFill>
                       <a:srgbClr val="5A6478"/>
                     </a:solidFill>
-                    <a:latin typeface="Arial"/>
-                    <a:ea typeface="Microsoft YaHei"/>
-                    <a:cs typeface="Arial"/>
+                    <a:latin typeface="Arial" panose="020B0604020202020204"/>
+                    <a:ea typeface="微软雅黑" panose="020B0503020204020204" charset="-122"/>
+                    <a:cs typeface="Arial" panose="020B0604020202020204"/>
                   </a:rPr>
                   <a:t>apc: 3（全局排名）</a:t>
                 </a:r>
+                <a:endParaRPr lang="zh-CN" sz="1350" dirty="0">
+                  <a:solidFill>
+                    <a:srgbClr val="5A6478"/>
+                  </a:solidFill>
+                  <a:latin typeface="Arial" panose="020B0604020202020204"/>
+                  <a:ea typeface="微软雅黑" panose="020B0503020204020204" charset="-122"/>
+                  <a:cs typeface="Arial" panose="020B0604020202020204"/>
+                </a:endParaRPr>
               </a:p>
             </p:txBody>
           </p:sp>
@@ -12485,12 +13359,20 @@
                     <a:solidFill>
                       <a:srgbClr val="8A92A0"/>
                     </a:solidFill>
-                    <a:latin typeface="Arial"/>
-                    <a:ea typeface="Arial"/>
-                    <a:cs typeface="Arial"/>
+                    <a:latin typeface="Arial" panose="020B0604020202020204"/>
+                    <a:ea typeface="Arial" panose="020B0604020202020204"/>
+                    <a:cs typeface="Arial" panose="020B0604020202020204"/>
                   </a:rPr>
                   <a:t>STAGE OUTPUT</a:t>
                 </a:r>
+                <a:endParaRPr lang="en-US" sz="1050" b="1" spc="75" dirty="0">
+                  <a:solidFill>
+                    <a:srgbClr val="8A92A0"/>
+                  </a:solidFill>
+                  <a:latin typeface="Arial" panose="020B0604020202020204"/>
+                  <a:ea typeface="Arial" panose="020B0604020202020204"/>
+                  <a:cs typeface="Arial" panose="020B0604020202020204"/>
+                </a:endParaRPr>
               </a:p>
             </p:txBody>
           </p:sp>
@@ -12525,12 +13407,20 @@
                     <a:solidFill>
                       <a:srgbClr val="1A3A6B"/>
                     </a:solidFill>
-                    <a:latin typeface="Arial"/>
-                    <a:ea typeface="Microsoft YaHei"/>
-                    <a:cs typeface="Arial"/>
+                    <a:latin typeface="Arial" panose="020B0604020202020204"/>
+                    <a:ea typeface="微软雅黑" panose="020B0503020204020204" charset="-122"/>
+                    <a:cs typeface="Arial" panose="020B0604020202020204"/>
                   </a:rPr>
                   <a:t>精选特征</a:t>
                 </a:r>
+                <a:endParaRPr lang="zh-CN" sz="1350" b="1" dirty="0">
+                  <a:solidFill>
+                    <a:srgbClr val="1A3A6B"/>
+                  </a:solidFill>
+                  <a:latin typeface="Arial" panose="020B0604020202020204"/>
+                  <a:ea typeface="微软雅黑" panose="020B0503020204020204" charset="-122"/>
+                  <a:cs typeface="Arial" panose="020B0604020202020204"/>
+                </a:endParaRPr>
               </a:p>
             </p:txBody>
           </p:sp>
@@ -12692,12 +13582,20 @@
                     <a:solidFill>
                       <a:srgbClr val="FFFFFF"/>
                     </a:solidFill>
-                    <a:latin typeface="Times New Roman"/>
-                    <a:ea typeface="Times New Roman"/>
-                    <a:cs typeface="Times New Roman"/>
+                    <a:latin typeface="Times New Roman" panose="02020603050405020304"/>
+                    <a:ea typeface="Times New Roman" panose="02020603050405020304"/>
+                    <a:cs typeface="Times New Roman" panose="02020603050405020304"/>
                   </a:rPr>
                   <a:t>04</a:t>
                 </a:r>
+                <a:endParaRPr lang="en-US" sz="1350" b="1" dirty="0">
+                  <a:solidFill>
+                    <a:srgbClr val="FFFFFF"/>
+                  </a:solidFill>
+                  <a:latin typeface="Times New Roman" panose="02020603050405020304"/>
+                  <a:ea typeface="Times New Roman" panose="02020603050405020304"/>
+                  <a:cs typeface="Times New Roman" panose="02020603050405020304"/>
+                </a:endParaRPr>
               </a:p>
             </p:txBody>
           </p:sp>
@@ -12732,12 +13630,20 @@
                     <a:solidFill>
                       <a:srgbClr val="FFFFFF"/>
                     </a:solidFill>
-                    <a:latin typeface="Arial"/>
-                    <a:ea typeface="Microsoft YaHei"/>
-                    <a:cs typeface="Arial"/>
+                    <a:latin typeface="Arial" panose="020B0604020202020204"/>
+                    <a:ea typeface="微软雅黑" panose="020B0503020204020204" charset="-122"/>
+                    <a:cs typeface="Arial" panose="020B0604020202020204"/>
                   </a:rPr>
                   <a:t>建模</a:t>
                 </a:r>
+                <a:endParaRPr lang="zh-CN" sz="1500" b="1" dirty="0">
+                  <a:solidFill>
+                    <a:srgbClr val="FFFFFF"/>
+                  </a:solidFill>
+                  <a:latin typeface="Arial" panose="020B0604020202020204"/>
+                  <a:ea typeface="微软雅黑" panose="020B0503020204020204" charset="-122"/>
+                  <a:cs typeface="Arial" panose="020B0604020202020204"/>
+                </a:endParaRPr>
               </a:p>
             </p:txBody>
           </p:sp>
@@ -13104,12 +14010,20 @@
                     <a:solidFill>
                       <a:srgbClr val="C9962B"/>
                     </a:solidFill>
-                    <a:latin typeface="Arial"/>
-                    <a:ea typeface="Microsoft YaHei"/>
-                    <a:cs typeface="Arial"/>
+                    <a:latin typeface="Arial" panose="020B0604020202020204"/>
+                    <a:ea typeface="微软雅黑" panose="020B0503020204020204" charset="-122"/>
+                    <a:cs typeface="Arial" panose="020B0604020202020204"/>
                   </a:rPr>
                   <a:t>Ridge 回归</a:t>
                 </a:r>
+                <a:endParaRPr lang="zh-CN" sz="1200" b="1" dirty="0">
+                  <a:solidFill>
+                    <a:srgbClr val="C9962B"/>
+                  </a:solidFill>
+                  <a:latin typeface="Arial" panose="020B0604020202020204"/>
+                  <a:ea typeface="微软雅黑" panose="020B0503020204020204" charset="-122"/>
+                  <a:cs typeface="Arial" panose="020B0604020202020204"/>
+                </a:endParaRPr>
               </a:p>
             </p:txBody>
           </p:sp>
@@ -13166,12 +14080,20 @@
                     <a:solidFill>
                       <a:srgbClr val="1D2430"/>
                     </a:solidFill>
-                    <a:latin typeface="Arial"/>
-                    <a:ea typeface="Microsoft YaHei"/>
-                    <a:cs typeface="Arial"/>
+                    <a:latin typeface="Arial" panose="020B0604020202020204"/>
+                    <a:ea typeface="微软雅黑" panose="020B0503020204020204" charset="-122"/>
+                    <a:cs typeface="Arial" panose="020B0604020202020204"/>
                   </a:rPr>
                   <a:t>alpha=0.1, L2 正则</a:t>
                 </a:r>
+                <a:endParaRPr lang="zh-CN" sz="1350" dirty="0">
+                  <a:solidFill>
+                    <a:srgbClr val="1D2430"/>
+                  </a:solidFill>
+                  <a:latin typeface="Arial" panose="020B0604020202020204"/>
+                  <a:ea typeface="微软雅黑" panose="020B0503020204020204" charset="-122"/>
+                  <a:cs typeface="Arial" panose="020B0604020202020204"/>
+                </a:endParaRPr>
               </a:p>
             </p:txBody>
           </p:sp>
@@ -13228,12 +14150,20 @@
                     <a:solidFill>
                       <a:srgbClr val="1D2430"/>
                     </a:solidFill>
-                    <a:latin typeface="Arial"/>
-                    <a:ea typeface="Arial"/>
-                    <a:cs typeface="Arial"/>
+                    <a:latin typeface="Arial" panose="020B0604020202020204"/>
+                    <a:ea typeface="Arial" panose="020B0604020202020204"/>
+                    <a:cs typeface="Arial" panose="020B0604020202020204"/>
                   </a:rPr>
                   <a:t>StandardScaler</a:t>
                 </a:r>
+                <a:endParaRPr lang="en-US" sz="1350" dirty="0">
+                  <a:solidFill>
+                    <a:srgbClr val="1D2430"/>
+                  </a:solidFill>
+                  <a:latin typeface="Arial" panose="020B0604020202020204"/>
+                  <a:ea typeface="Arial" panose="020B0604020202020204"/>
+                  <a:cs typeface="Arial" panose="020B0604020202020204"/>
+                </a:endParaRPr>
               </a:p>
             </p:txBody>
           </p:sp>
@@ -13290,12 +14220,20 @@
                     <a:solidFill>
                       <a:srgbClr val="1D2430"/>
                     </a:solidFill>
-                    <a:latin typeface="Arial"/>
-                    <a:ea typeface="Microsoft YaHei"/>
-                    <a:cs typeface="Arial"/>
+                    <a:latin typeface="Arial" panose="020B0604020202020204"/>
+                    <a:ea typeface="微软雅黑" panose="020B0503020204020204" charset="-122"/>
+                    <a:cs typeface="Arial" panose="020B0604020202020204"/>
                   </a:rPr>
                   <a:t>CT 样本加权=2</a:t>
                 </a:r>
+                <a:endParaRPr lang="zh-CN" sz="1350" dirty="0">
+                  <a:solidFill>
+                    <a:srgbClr val="1D2430"/>
+                  </a:solidFill>
+                  <a:latin typeface="Arial" panose="020B0604020202020204"/>
+                  <a:ea typeface="微软雅黑" panose="020B0503020204020204" charset="-122"/>
+                  <a:cs typeface="Arial" panose="020B0604020202020204"/>
+                </a:endParaRPr>
               </a:p>
             </p:txBody>
           </p:sp>
@@ -13352,12 +14290,20 @@
                     <a:solidFill>
                       <a:srgbClr val="1D2430"/>
                     </a:solidFill>
-                    <a:latin typeface="Arial"/>
-                    <a:ea typeface="Arial"/>
-                    <a:cs typeface="Arial"/>
+                    <a:latin typeface="Arial" panose="020B0604020202020204"/>
+                    <a:ea typeface="Arial" panose="020B0604020202020204"/>
+                    <a:cs typeface="Arial" panose="020B0604020202020204"/>
                   </a:rPr>
                   <a:t>30 seed Ensemble</a:t>
                 </a:r>
+                <a:endParaRPr lang="en-US" sz="1350" dirty="0">
+                  <a:solidFill>
+                    <a:srgbClr val="1D2430"/>
+                  </a:solidFill>
+                  <a:latin typeface="Arial" panose="020B0604020202020204"/>
+                  <a:ea typeface="Arial" panose="020B0604020202020204"/>
+                  <a:cs typeface="Arial" panose="020B0604020202020204"/>
+                </a:endParaRPr>
               </a:p>
             </p:txBody>
           </p:sp>
@@ -13457,12 +14403,20 @@
                     <a:solidFill>
                       <a:srgbClr val="8A92A0"/>
                     </a:solidFill>
-                    <a:latin typeface="Arial"/>
-                    <a:ea typeface="Arial"/>
-                    <a:cs typeface="Arial"/>
+                    <a:latin typeface="Arial" panose="020B0604020202020204"/>
+                    <a:ea typeface="Arial" panose="020B0604020202020204"/>
+                    <a:cs typeface="Arial" panose="020B0604020202020204"/>
                   </a:rPr>
                   <a:t>STAGE OUTPUT</a:t>
                 </a:r>
+                <a:endParaRPr lang="en-US" sz="1050" b="1" spc="75" dirty="0">
+                  <a:solidFill>
+                    <a:srgbClr val="8A92A0"/>
+                  </a:solidFill>
+                  <a:latin typeface="Arial" panose="020B0604020202020204"/>
+                  <a:ea typeface="Arial" panose="020B0604020202020204"/>
+                  <a:cs typeface="Arial" panose="020B0604020202020204"/>
+                </a:endParaRPr>
               </a:p>
             </p:txBody>
           </p:sp>
@@ -13497,12 +14451,20 @@
                     <a:solidFill>
                       <a:srgbClr val="C9962B"/>
                     </a:solidFill>
-                    <a:latin typeface="Arial"/>
-                    <a:ea typeface="Microsoft YaHei"/>
-                    <a:cs typeface="Arial"/>
+                    <a:latin typeface="Arial" panose="020B0604020202020204"/>
+                    <a:ea typeface="微软雅黑" panose="020B0503020204020204" charset="-122"/>
+                    <a:cs typeface="Arial" panose="020B0604020202020204"/>
                   </a:rPr>
                   <a:t>预测模型</a:t>
                 </a:r>
+                <a:endParaRPr lang="zh-CN" sz="1350" b="1" dirty="0">
+                  <a:solidFill>
+                    <a:srgbClr val="C9962B"/>
+                  </a:solidFill>
+                  <a:latin typeface="Arial" panose="020B0604020202020204"/>
+                  <a:ea typeface="微软雅黑" panose="020B0503020204020204" charset="-122"/>
+                  <a:cs typeface="Arial" panose="020B0604020202020204"/>
+                </a:endParaRPr>
               </a:p>
             </p:txBody>
           </p:sp>
@@ -13664,12 +14626,20 @@
                     <a:solidFill>
                       <a:srgbClr val="FFFFFF"/>
                     </a:solidFill>
-                    <a:latin typeface="Times New Roman"/>
-                    <a:ea typeface="Times New Roman"/>
-                    <a:cs typeface="Times New Roman"/>
+                    <a:latin typeface="Times New Roman" panose="02020603050405020304"/>
+                    <a:ea typeface="Times New Roman" panose="02020603050405020304"/>
+                    <a:cs typeface="Times New Roman" panose="02020603050405020304"/>
                   </a:rPr>
                   <a:t>05</a:t>
                 </a:r>
+                <a:endParaRPr lang="en-US" sz="1350" b="1" dirty="0">
+                  <a:solidFill>
+                    <a:srgbClr val="FFFFFF"/>
+                  </a:solidFill>
+                  <a:latin typeface="Times New Roman" panose="02020603050405020304"/>
+                  <a:ea typeface="Times New Roman" panose="02020603050405020304"/>
+                  <a:cs typeface="Times New Roman" panose="02020603050405020304"/>
+                </a:endParaRPr>
               </a:p>
             </p:txBody>
           </p:sp>
@@ -13704,12 +14674,20 @@
                     <a:solidFill>
                       <a:srgbClr val="FFFFFF"/>
                     </a:solidFill>
-                    <a:latin typeface="Arial"/>
-                    <a:ea typeface="Microsoft YaHei"/>
-                    <a:cs typeface="Arial"/>
+                    <a:latin typeface="Arial" panose="020B0604020202020204"/>
+                    <a:ea typeface="微软雅黑" panose="020B0503020204020204" charset="-122"/>
+                    <a:cs typeface="Arial" panose="020B0604020202020204"/>
                   </a:rPr>
                   <a:t>校准</a:t>
                 </a:r>
+                <a:endParaRPr lang="zh-CN" sz="1500" b="1" dirty="0">
+                  <a:solidFill>
+                    <a:srgbClr val="FFFFFF"/>
+                  </a:solidFill>
+                  <a:latin typeface="Arial" panose="020B0604020202020204"/>
+                  <a:ea typeface="微软雅黑" panose="020B0503020204020204" charset="-122"/>
+                  <a:cs typeface="Arial" panose="020B0604020202020204"/>
+                </a:endParaRPr>
               </a:p>
             </p:txBody>
           </p:sp>
@@ -13990,12 +14968,20 @@
                     <a:solidFill>
                       <a:srgbClr val="1A3A6B"/>
                     </a:solidFill>
-                    <a:latin typeface="Arial"/>
-                    <a:ea typeface="Microsoft YaHei"/>
-                    <a:cs typeface="Arial"/>
+                    <a:latin typeface="Arial" panose="020B0604020202020204"/>
+                    <a:ea typeface="微软雅黑" panose="020B0503020204020204" charset="-122"/>
+                    <a:cs typeface="Arial" panose="020B0604020202020204"/>
                   </a:rPr>
                   <a:t>CT 分层校准</a:t>
                 </a:r>
+                <a:endParaRPr lang="zh-CN" sz="1200" b="1" dirty="0">
+                  <a:solidFill>
+                    <a:srgbClr val="1A3A6B"/>
+                  </a:solidFill>
+                  <a:latin typeface="Arial" panose="020B0604020202020204"/>
+                  <a:ea typeface="微软雅黑" panose="020B0503020204020204" charset="-122"/>
+                  <a:cs typeface="Arial" panose="020B0604020202020204"/>
+                </a:endParaRPr>
               </a:p>
             </p:txBody>
           </p:sp>
@@ -14052,12 +15038,20 @@
                     <a:solidFill>
                       <a:srgbClr val="1D2430"/>
                     </a:solidFill>
-                    <a:latin typeface="Arial"/>
-                    <a:ea typeface="Microsoft YaHei"/>
-                    <a:cs typeface="Arial"/>
+                    <a:latin typeface="Arial" panose="020B0604020202020204"/>
+                    <a:ea typeface="微软雅黑" panose="020B0503020204020204" charset="-122"/>
+                    <a:cs typeface="Arial" panose="020B0604020202020204"/>
                   </a:rPr>
                   <a:t>收缩: recipe 35%</a:t>
                 </a:r>
+                <a:endParaRPr lang="zh-CN" sz="1350" dirty="0">
+                  <a:solidFill>
+                    <a:srgbClr val="1D2430"/>
+                  </a:solidFill>
+                  <a:latin typeface="Arial" panose="020B0604020202020204"/>
+                  <a:ea typeface="微软雅黑" panose="020B0503020204020204" charset="-122"/>
+                  <a:cs typeface="Arial" panose="020B0604020202020204"/>
+                </a:endParaRPr>
               </a:p>
             </p:txBody>
           </p:sp>
@@ -14114,12 +15108,20 @@
                     <a:solidFill>
                       <a:srgbClr val="1D2430"/>
                     </a:solidFill>
-                    <a:latin typeface="Arial"/>
-                    <a:ea typeface="Arial"/>
-                    <a:cs typeface="Arial"/>
+                    <a:latin typeface="Arial" panose="020B0604020202020204"/>
+                    <a:ea typeface="Arial" panose="020B0604020202020204"/>
+                    <a:cs typeface="Arial" panose="020B0604020202020204"/>
                   </a:rPr>
                   <a:t>operator 20%</a:t>
                 </a:r>
+                <a:endParaRPr lang="en-US" sz="1350" dirty="0">
+                  <a:solidFill>
+                    <a:srgbClr val="1D2430"/>
+                  </a:solidFill>
+                  <a:latin typeface="Arial" panose="020B0604020202020204"/>
+                  <a:ea typeface="Arial" panose="020B0604020202020204"/>
+                  <a:cs typeface="Arial" panose="020B0604020202020204"/>
+                </a:endParaRPr>
               </a:p>
             </p:txBody>
           </p:sp>
@@ -14176,12 +15178,20 @@
                     <a:solidFill>
                       <a:srgbClr val="1D2430"/>
                     </a:solidFill>
-                    <a:latin typeface="Arial"/>
-                    <a:ea typeface="Microsoft YaHei"/>
-                    <a:cs typeface="Arial"/>
+                    <a:latin typeface="Arial" panose="020B0604020202020204"/>
+                    <a:ea typeface="微软雅黑" panose="020B0503020204020204" charset="-122"/>
+                    <a:cs typeface="Arial" panose="020B0604020202020204"/>
                   </a:rPr>
                   <a:t>apc 70%（R²低）</a:t>
                 </a:r>
+                <a:endParaRPr lang="zh-CN" sz="1350" dirty="0">
+                  <a:solidFill>
+                    <a:srgbClr val="1D2430"/>
+                  </a:solidFill>
+                  <a:latin typeface="Arial" panose="020B0604020202020204"/>
+                  <a:ea typeface="微软雅黑" panose="020B0503020204020204" charset="-122"/>
+                  <a:cs typeface="Arial" panose="020B0604020202020204"/>
+                </a:endParaRPr>
               </a:p>
             </p:txBody>
           </p:sp>
@@ -14216,12 +15226,20 @@
                     <a:solidFill>
                       <a:srgbClr val="5A6478"/>
                     </a:solidFill>
-                    <a:latin typeface="Times New Roman"/>
-                    <a:ea typeface="SimSun"/>
-                    <a:cs typeface="Times New Roman"/>
+                    <a:latin typeface="Times New Roman" panose="02020603050405020304"/>
+                    <a:ea typeface="宋体" panose="02010600030101010101" pitchFamily="2" charset="-122"/>
+                    <a:cs typeface="Times New Roman" panose="02020603050405020304"/>
                   </a:rPr>
                   <a:t>参考点 + 预测偏移</a:t>
                 </a:r>
+                <a:endParaRPr lang="zh-CN" sz="1200" i="1" dirty="0">
+                  <a:solidFill>
+                    <a:srgbClr val="5A6478"/>
+                  </a:solidFill>
+                  <a:latin typeface="Times New Roman" panose="02020603050405020304"/>
+                  <a:ea typeface="宋体" panose="02010600030101010101" pitchFamily="2" charset="-122"/>
+                  <a:cs typeface="Times New Roman" panose="02020603050405020304"/>
+                </a:endParaRPr>
               </a:p>
             </p:txBody>
           </p:sp>
@@ -14321,12 +15339,20 @@
                     <a:solidFill>
                       <a:srgbClr val="8A92A0"/>
                     </a:solidFill>
-                    <a:latin typeface="Arial"/>
-                    <a:ea typeface="Arial"/>
-                    <a:cs typeface="Arial"/>
+                    <a:latin typeface="Arial" panose="020B0604020202020204"/>
+                    <a:ea typeface="Arial" panose="020B0604020202020204"/>
+                    <a:cs typeface="Arial" panose="020B0604020202020204"/>
                   </a:rPr>
                   <a:t>STAGE OUTPUT</a:t>
                 </a:r>
+                <a:endParaRPr lang="en-US" sz="1050" b="1" spc="75" dirty="0">
+                  <a:solidFill>
+                    <a:srgbClr val="8A92A0"/>
+                  </a:solidFill>
+                  <a:latin typeface="Arial" panose="020B0604020202020204"/>
+                  <a:ea typeface="Arial" panose="020B0604020202020204"/>
+                  <a:cs typeface="Arial" panose="020B0604020202020204"/>
+                </a:endParaRPr>
               </a:p>
             </p:txBody>
           </p:sp>
@@ -14361,12 +15387,20 @@
                     <a:solidFill>
                       <a:srgbClr val="1A3A6B"/>
                     </a:solidFill>
-                    <a:latin typeface="Arial"/>
-                    <a:ea typeface="Arial"/>
-                    <a:cs typeface="Arial"/>
+                    <a:latin typeface="Arial" panose="020B0604020202020204"/>
+                    <a:ea typeface="Arial" panose="020B0604020202020204"/>
+                    <a:cs typeface="Arial" panose="020B0604020202020204"/>
                   </a:rPr>
                   <a:t>submission.csv</a:t>
                 </a:r>
+                <a:endParaRPr lang="en-US" sz="1350" b="1" dirty="0">
+                  <a:solidFill>
+                    <a:srgbClr val="1A3A6B"/>
+                  </a:solidFill>
+                  <a:latin typeface="Arial" panose="020B0604020202020204"/>
+                  <a:ea typeface="Arial" panose="020B0604020202020204"/>
+                  <a:cs typeface="Arial" panose="020B0604020202020204"/>
+                </a:endParaRPr>
               </a:p>
             </p:txBody>
           </p:sp>
@@ -14453,12 +15487,20 @@
                   <a:solidFill>
                     <a:srgbClr val="C9962B"/>
                   </a:solidFill>
-                  <a:latin typeface="Times New Roman"/>
-                  <a:ea typeface="Microsoft YaHei"/>
-                  <a:cs typeface="Times New Roman"/>
+                  <a:latin typeface="Times New Roman" panose="02020603050405020304"/>
+                  <a:ea typeface="微软雅黑" panose="020B0503020204020204" charset="-122"/>
+                  <a:cs typeface="Times New Roman" panose="02020603050405020304"/>
                 </a:rPr>
                 <a:t>KEY PARAMETERS · 关键参数</a:t>
               </a:r>
+              <a:endParaRPr lang="zh-CN" sz="1350" b="1" spc="75" dirty="0">
+                <a:solidFill>
+                  <a:srgbClr val="C9962B"/>
+                </a:solidFill>
+                <a:latin typeface="Times New Roman" panose="02020603050405020304"/>
+                <a:ea typeface="微软雅黑" panose="020B0503020204020204" charset="-122"/>
+                <a:cs typeface="Times New Roman" panose="02020603050405020304"/>
+              </a:endParaRPr>
             </a:p>
           </p:txBody>
         </p:sp>
@@ -14555,12 +15597,20 @@
                   <a:solidFill>
                     <a:srgbClr val="5A6478"/>
                   </a:solidFill>
-                  <a:latin typeface="Arial"/>
-                  <a:ea typeface="Arial"/>
-                  <a:cs typeface="Arial"/>
+                  <a:latin typeface="Arial" panose="020B0604020202020204"/>
+                  <a:ea typeface="Arial" panose="020B0604020202020204"/>
+                  <a:cs typeface="Arial" panose="020B0604020202020204"/>
                 </a:rPr>
                 <a:t>CROSS-VALIDATION</a:t>
               </a:r>
+              <a:endParaRPr lang="en-US" sz="1200" b="1" spc="75" dirty="0">
+                <a:solidFill>
+                  <a:srgbClr val="5A6478"/>
+                </a:solidFill>
+                <a:latin typeface="Arial" panose="020B0604020202020204"/>
+                <a:ea typeface="Arial" panose="020B0604020202020204"/>
+                <a:cs typeface="Arial" panose="020B0604020202020204"/>
+              </a:endParaRPr>
             </a:p>
           </p:txBody>
         </p:sp>
@@ -14595,9 +15645,9 @@
                   <a:solidFill>
                     <a:srgbClr val="1A3A6B"/>
                   </a:solidFill>
-                  <a:latin typeface="Times New Roman"/>
-                  <a:ea typeface="Times New Roman"/>
-                  <a:cs typeface="Times New Roman"/>
+                  <a:latin typeface="Times New Roman" panose="02020603050405020304"/>
+                  <a:ea typeface="Times New Roman" panose="02020603050405020304"/>
+                  <a:cs typeface="Times New Roman" panose="02020603050405020304"/>
                 </a:rPr>
                 <a:t>GroupKFold</a:t>
               </a:r>
@@ -14606,12 +15656,20 @@
                   <a:solidFill>
                     <a:srgbClr val="8A92A0"/>
                   </a:solidFill>
-                  <a:latin typeface="Times New Roman"/>
-                  <a:ea typeface="SimSun"/>
-                  <a:cs typeface="Times New Roman"/>
+                  <a:latin typeface="Times New Roman" panose="02020603050405020304"/>
+                  <a:ea typeface="宋体" panose="02010600030101010101" pitchFamily="2" charset="-122"/>
+                  <a:cs typeface="Times New Roman" panose="02020603050405020304"/>
                 </a:rPr>
-                <a:t xml:space="preserve"> 按 batch_id 分组</a:t>
+                <a:t> 按 batch_id 分组</a:t>
               </a:r>
+              <a:endParaRPr lang="zh-CN" sz="1200" dirty="0">
+                <a:solidFill>
+                  <a:srgbClr val="8A92A0"/>
+                </a:solidFill>
+                <a:latin typeface="Times New Roman" panose="02020603050405020304"/>
+                <a:ea typeface="宋体" panose="02010600030101010101" pitchFamily="2" charset="-122"/>
+                <a:cs typeface="Times New Roman" panose="02020603050405020304"/>
+              </a:endParaRPr>
             </a:p>
           </p:txBody>
         </p:sp>
@@ -14646,12 +15704,20 @@
                   <a:solidFill>
                     <a:srgbClr val="5A6478"/>
                   </a:solidFill>
-                  <a:latin typeface="Arial"/>
-                  <a:ea typeface="Microsoft YaHei"/>
-                  <a:cs typeface="Arial"/>
+                  <a:latin typeface="Arial" panose="020B0604020202020204"/>
+                  <a:ea typeface="微软雅黑" panose="020B0503020204020204" charset="-122"/>
+                  <a:cs typeface="Arial" panose="020B0604020202020204"/>
                 </a:rPr>
                 <a:t>5-fold × 10 runs · 防批次泄漏</a:t>
               </a:r>
+              <a:endParaRPr lang="zh-CN" sz="1350" dirty="0">
+                <a:solidFill>
+                  <a:srgbClr val="5A6478"/>
+                </a:solidFill>
+                <a:latin typeface="Arial" panose="020B0604020202020204"/>
+                <a:ea typeface="微软雅黑" panose="020B0503020204020204" charset="-122"/>
+                <a:cs typeface="Arial" panose="020B0604020202020204"/>
+              </a:endParaRPr>
             </a:p>
           </p:txBody>
         </p:sp>
@@ -14722,12 +15788,20 @@
                   <a:solidFill>
                     <a:srgbClr val="5A6478"/>
                   </a:solidFill>
-                  <a:latin typeface="Arial"/>
-                  <a:ea typeface="Arial"/>
-                  <a:cs typeface="Arial"/>
+                  <a:latin typeface="Arial" panose="020B0604020202020204"/>
+                  <a:ea typeface="Arial" panose="020B0604020202020204"/>
+                  <a:cs typeface="Arial" panose="020B0604020202020204"/>
                 </a:rPr>
                 <a:t>MODEL</a:t>
               </a:r>
+              <a:endParaRPr lang="en-US" sz="1200" b="1" spc="75" dirty="0">
+                <a:solidFill>
+                  <a:srgbClr val="5A6478"/>
+                </a:solidFill>
+                <a:latin typeface="Arial" panose="020B0604020202020204"/>
+                <a:ea typeface="Arial" panose="020B0604020202020204"/>
+                <a:cs typeface="Arial" panose="020B0604020202020204"/>
+              </a:endParaRPr>
             </a:p>
           </p:txBody>
         </p:sp>
@@ -14762,12 +15836,20 @@
                   <a:solidFill>
                     <a:srgbClr val="1A3A6B"/>
                   </a:solidFill>
-                  <a:latin typeface="Times New Roman"/>
-                  <a:ea typeface="Times New Roman"/>
-                  <a:cs typeface="Times New Roman"/>
+                  <a:latin typeface="Times New Roman" panose="02020603050405020304"/>
+                  <a:ea typeface="Times New Roman" panose="02020603050405020304"/>
+                  <a:cs typeface="Times New Roman" panose="02020603050405020304"/>
                 </a:rPr>
                 <a:t>Ridge alpha=0.1</a:t>
               </a:r>
+              <a:endParaRPr lang="en-US" sz="1800" b="1" dirty="0">
+                <a:solidFill>
+                  <a:srgbClr val="1A3A6B"/>
+                </a:solidFill>
+                <a:latin typeface="Times New Roman" panose="02020603050405020304"/>
+                <a:ea typeface="Times New Roman" panose="02020603050405020304"/>
+                <a:cs typeface="Times New Roman" panose="02020603050405020304"/>
+              </a:endParaRPr>
             </a:p>
           </p:txBody>
         </p:sp>
@@ -14802,12 +15884,20 @@
                   <a:solidFill>
                     <a:srgbClr val="5A6478"/>
                   </a:solidFill>
-                  <a:latin typeface="Arial"/>
-                  <a:ea typeface="Microsoft YaHei"/>
-                  <a:cs typeface="Arial"/>
+                  <a:latin typeface="Arial" panose="020B0604020202020204"/>
+                  <a:ea typeface="微软雅黑" panose="020B0503020204020204" charset="-122"/>
+                  <a:cs typeface="Arial" panose="020B0604020202020204"/>
                 </a:rPr>
                 <a:t>L2 正则 · 适合小样本防过拟合</a:t>
               </a:r>
+              <a:endParaRPr lang="zh-CN" sz="1350" dirty="0">
+                <a:solidFill>
+                  <a:srgbClr val="5A6478"/>
+                </a:solidFill>
+                <a:latin typeface="Arial" panose="020B0604020202020204"/>
+                <a:ea typeface="微软雅黑" panose="020B0503020204020204" charset="-122"/>
+                <a:cs typeface="Arial" panose="020B0604020202020204"/>
+              </a:endParaRPr>
             </a:p>
           </p:txBody>
         </p:sp>
@@ -14842,12 +15932,20 @@
                   <a:solidFill>
                     <a:srgbClr val="5A6478"/>
                   </a:solidFill>
-                  <a:latin typeface="Arial"/>
-                  <a:ea typeface="Arial"/>
-                  <a:cs typeface="Arial"/>
+                  <a:latin typeface="Arial" panose="020B0604020202020204"/>
+                  <a:ea typeface="Arial" panose="020B0604020202020204"/>
+                  <a:cs typeface="Arial" panose="020B0604020202020204"/>
                 </a:rPr>
                 <a:t>OOF R² (OUT-OF-FOLD)</a:t>
               </a:r>
+              <a:endParaRPr lang="en-US" sz="1200" b="1" spc="75" dirty="0">
+                <a:solidFill>
+                  <a:srgbClr val="5A6478"/>
+                </a:solidFill>
+                <a:latin typeface="Arial" panose="020B0604020202020204"/>
+                <a:ea typeface="Arial" panose="020B0604020202020204"/>
+                <a:cs typeface="Arial" panose="020B0604020202020204"/>
+              </a:endParaRPr>
             </a:p>
           </p:txBody>
         </p:sp>
@@ -14882,20 +15980,20 @@
                   <a:solidFill>
                     <a:srgbClr val="1D2430"/>
                   </a:solidFill>
-                  <a:latin typeface="Arial"/>
-                  <a:ea typeface="Arial"/>
-                  <a:cs typeface="Arial"/>
+                  <a:latin typeface="Arial" panose="020B0604020202020204"/>
+                  <a:ea typeface="Arial" panose="020B0604020202020204"/>
+                  <a:cs typeface="Arial" panose="020B0604020202020204"/>
                 </a:rPr>
-                <a:t xml:space="preserve">recipe </a:t>
+                <a:t>recipe </a:t>
               </a:r>
               <a:r>
                 <a:rPr lang="en-US" sz="1500" b="1" dirty="0">
                   <a:solidFill>
                     <a:srgbClr val="1A3A6B"/>
                   </a:solidFill>
-                  <a:latin typeface="Arial"/>
-                  <a:ea typeface="Arial"/>
-                  <a:cs typeface="Arial"/>
+                  <a:latin typeface="Arial" panose="020B0604020202020204"/>
+                  <a:ea typeface="Arial" panose="020B0604020202020204"/>
+                  <a:cs typeface="Arial" panose="020B0604020202020204"/>
                 </a:rPr>
                 <a:t>0.40</a:t>
               </a:r>
@@ -14904,20 +16002,20 @@
                   <a:solidFill>
                     <a:srgbClr val="1D2430"/>
                   </a:solidFill>
-                  <a:latin typeface="Arial"/>
-                  <a:ea typeface="Arial"/>
-                  <a:cs typeface="Arial"/>
+                  <a:latin typeface="Arial" panose="020B0604020202020204"/>
+                  <a:ea typeface="Arial" panose="020B0604020202020204"/>
+                  <a:cs typeface="Arial" panose="020B0604020202020204"/>
                 </a:rPr>
-                <a:t xml:space="preserve"> </a:t>
+                <a:t> </a:t>
               </a:r>
               <a:r>
                 <a:rPr lang="en-US" sz="1120" dirty="0">
                   <a:solidFill>
                     <a:srgbClr val="8A92A0"/>
                   </a:solidFill>
-                  <a:latin typeface="Arial"/>
-                  <a:ea typeface="Arial"/>
-                  <a:cs typeface="Arial"/>
+                  <a:latin typeface="Arial" panose="020B0604020202020204"/>
+                  <a:ea typeface="Arial" panose="020B0604020202020204"/>
+                  <a:cs typeface="Arial" panose="020B0604020202020204"/>
                 </a:rPr>
                 <a:t>·</a:t>
               </a:r>
@@ -14926,20 +16024,20 @@
                   <a:solidFill>
                     <a:srgbClr val="1D2430"/>
                   </a:solidFill>
-                  <a:latin typeface="Arial"/>
-                  <a:ea typeface="Arial"/>
-                  <a:cs typeface="Arial"/>
+                  <a:latin typeface="Arial" panose="020B0604020202020204"/>
+                  <a:ea typeface="Arial" panose="020B0604020202020204"/>
+                  <a:cs typeface="Arial" panose="020B0604020202020204"/>
                 </a:rPr>
-                <a:t xml:space="preserve"> operator </a:t>
+                <a:t> operator </a:t>
               </a:r>
               <a:r>
                 <a:rPr lang="en-US" sz="1500" b="1" dirty="0">
                   <a:solidFill>
                     <a:srgbClr val="4A7BB5"/>
                   </a:solidFill>
-                  <a:latin typeface="Arial"/>
-                  <a:ea typeface="Arial"/>
-                  <a:cs typeface="Arial"/>
+                  <a:latin typeface="Arial" panose="020B0604020202020204"/>
+                  <a:ea typeface="Arial" panose="020B0604020202020204"/>
+                  <a:cs typeface="Arial" panose="020B0604020202020204"/>
                 </a:rPr>
                 <a:t>0.48</a:t>
               </a:r>
@@ -14948,20 +16046,20 @@
                   <a:solidFill>
                     <a:srgbClr val="1D2430"/>
                   </a:solidFill>
-                  <a:latin typeface="Arial"/>
-                  <a:ea typeface="Arial"/>
-                  <a:cs typeface="Arial"/>
+                  <a:latin typeface="Arial" panose="020B0604020202020204"/>
+                  <a:ea typeface="Arial" panose="020B0604020202020204"/>
+                  <a:cs typeface="Arial" panose="020B0604020202020204"/>
                 </a:rPr>
-                <a:t xml:space="preserve"> </a:t>
+                <a:t> </a:t>
               </a:r>
               <a:r>
                 <a:rPr lang="en-US" sz="1120" dirty="0">
                   <a:solidFill>
                     <a:srgbClr val="8A92A0"/>
                   </a:solidFill>
-                  <a:latin typeface="Arial"/>
-                  <a:ea typeface="Arial"/>
-                  <a:cs typeface="Arial"/>
+                  <a:latin typeface="Arial" panose="020B0604020202020204"/>
+                  <a:ea typeface="Arial" panose="020B0604020202020204"/>
+                  <a:cs typeface="Arial" panose="020B0604020202020204"/>
                 </a:rPr>
                 <a:t>·</a:t>
               </a:r>
@@ -14970,20 +16068,20 @@
                   <a:solidFill>
                     <a:srgbClr val="1D2430"/>
                   </a:solidFill>
-                  <a:latin typeface="Arial"/>
-                  <a:ea typeface="Arial"/>
-                  <a:cs typeface="Arial"/>
+                  <a:latin typeface="Arial" panose="020B0604020202020204"/>
+                  <a:ea typeface="Arial" panose="020B0604020202020204"/>
+                  <a:cs typeface="Arial" panose="020B0604020202020204"/>
                 </a:rPr>
-                <a:t xml:space="preserve"> apc </a:t>
+                <a:t> apc </a:t>
               </a:r>
               <a:r>
                 <a:rPr lang="en-US" sz="1500" b="1" dirty="0">
                   <a:solidFill>
                     <a:srgbClr val="C62828"/>
                   </a:solidFill>
-                  <a:latin typeface="Arial"/>
-                  <a:ea typeface="Arial"/>
-                  <a:cs typeface="Arial"/>
+                  <a:latin typeface="Arial" panose="020B0604020202020204"/>
+                  <a:ea typeface="Arial" panose="020B0604020202020204"/>
+                  <a:cs typeface="Arial" panose="020B0604020202020204"/>
                 </a:rPr>
                 <a:t>0.00</a:t>
               </a:r>
@@ -14992,23 +16090,31 @@
                   <a:solidFill>
                     <a:srgbClr val="1D2430"/>
                   </a:solidFill>
-                  <a:latin typeface="Arial"/>
-                  <a:ea typeface="Arial"/>
-                  <a:cs typeface="Arial"/>
+                  <a:latin typeface="Arial" panose="020B0604020202020204"/>
+                  <a:ea typeface="Arial" panose="020B0604020202020204"/>
+                  <a:cs typeface="Arial" panose="020B0604020202020204"/>
                 </a:rPr>
-                <a:t xml:space="preserve"> </a:t>
+                <a:t> </a:t>
               </a:r>
               <a:r>
                 <a:rPr lang="zh-CN" sz="1200" dirty="0">
                   <a:solidFill>
                     <a:srgbClr val="8A92A0"/>
                   </a:solidFill>
-                  <a:latin typeface="Arial"/>
-                  <a:ea typeface="Microsoft YaHei"/>
-                  <a:cs typeface="Arial"/>
+                  <a:latin typeface="Arial" panose="020B0604020202020204"/>
+                  <a:ea typeface="微软雅黑" panose="020B0503020204020204" charset="-122"/>
+                  <a:cs typeface="Arial" panose="020B0604020202020204"/>
                 </a:rPr>
                 <a:t>CV 拟合优度</a:t>
               </a:r>
+              <a:endParaRPr lang="zh-CN" sz="1200" dirty="0">
+                <a:solidFill>
+                  <a:srgbClr val="8A92A0"/>
+                </a:solidFill>
+                <a:latin typeface="Arial" panose="020B0604020202020204"/>
+                <a:ea typeface="微软雅黑" panose="020B0503020204020204" charset="-122"/>
+                <a:cs typeface="Arial" panose="020B0604020202020204"/>
+              </a:endParaRPr>
             </a:p>
           </p:txBody>
         </p:sp>
@@ -15043,12 +16149,20 @@
                   <a:solidFill>
                     <a:srgbClr val="8A92A0"/>
                   </a:solidFill>
-                  <a:latin typeface="Arial"/>
-                  <a:ea typeface="Microsoft YaHei"/>
-                  <a:cs typeface="Arial"/>
+                  <a:latin typeface="Arial" panose="020B0604020202020204"/>
+                  <a:ea typeface="微软雅黑" panose="020B0503020204020204" charset="-122"/>
+                  <a:cs typeface="Arial" panose="020B0604020202020204"/>
                 </a:rPr>
                 <a:t>apc R²≈0 驱动 70% 收缩比例（R² 越低 → 收缩越多）</a:t>
               </a:r>
+              <a:endParaRPr lang="zh-CN" sz="1200" dirty="0">
+                <a:solidFill>
+                  <a:srgbClr val="8A92A0"/>
+                </a:solidFill>
+                <a:latin typeface="Arial" panose="020B0604020202020204"/>
+                <a:ea typeface="微软雅黑" panose="020B0503020204020204" charset="-122"/>
+                <a:cs typeface="Arial" panose="020B0604020202020204"/>
+              </a:endParaRPr>
             </a:p>
           </p:txBody>
         </p:sp>
@@ -15098,12 +16212,20 @@
                   <a:solidFill>
                     <a:srgbClr val="000000"/>
                   </a:solidFill>
-                  <a:latin typeface="Arial"/>
-                  <a:ea typeface="Microsoft YaHei"/>
-                  <a:cs typeface="Arial"/>
+                  <a:latin typeface="Arial" panose="020B0604020202020204"/>
+                  <a:ea typeface="微软雅黑" panose="020B0503020204020204" charset="-122"/>
+                  <a:cs typeface="Arial" panose="020B0604020202020204"/>
                 </a:rPr>
                 <a:t>校准公式：校准后 = 参考点 + (模型预测 − 参考点) × (1 − 收缩比例)</a:t>
               </a:r>
+              <a:endParaRPr lang="zh-CN" sz="1200" dirty="0">
+                <a:solidFill>
+                  <a:srgbClr val="000000"/>
+                </a:solidFill>
+                <a:latin typeface="Arial" panose="020B0604020202020204"/>
+                <a:ea typeface="微软雅黑" panose="020B0503020204020204" charset="-122"/>
+                <a:cs typeface="Arial" panose="020B0604020202020204"/>
+              </a:endParaRPr>
             </a:p>
           </p:txBody>
         </p:sp>
@@ -15138,12 +16260,20 @@
                   <a:solidFill>
                     <a:srgbClr val="8A92A0"/>
                   </a:solidFill>
-                  <a:latin typeface="Times New Roman"/>
-                  <a:ea typeface="Times New Roman"/>
-                  <a:cs typeface="Times New Roman"/>
+                  <a:latin typeface="Times New Roman" panose="02020603050405020304"/>
+                  <a:ea typeface="Times New Roman" panose="02020603050405020304"/>
+                  <a:cs typeface="Times New Roman" panose="02020603050405020304"/>
                 </a:rPr>
                 <a:t>04 / 05</a:t>
               </a:r>
+              <a:endParaRPr lang="en-US" sz="1200" dirty="0">
+                <a:solidFill>
+                  <a:srgbClr val="8A92A0"/>
+                </a:solidFill>
+                <a:latin typeface="Times New Roman" panose="02020603050405020304"/>
+                <a:ea typeface="Times New Roman" panose="02020603050405020304"/>
+                <a:cs typeface="Times New Roman" panose="02020603050405020304"/>
+              </a:endParaRPr>
             </a:p>
           </p:txBody>
         </p:sp>
@@ -15153,9 +16283,18 @@
   <p:clrMapOvr>
     <a:masterClrMapping/>
   </p:clrMapOvr>
-  <p:transition xmlns:p14="http://schemas.microsoft.com/office/powerpoint/2010/main" p14:dur="400">
-    <p:fade/>
-  </p:transition>
+  <mc:AlternateContent xmlns:mc="http://schemas.openxmlformats.org/markup-compatibility/2006">
+    <mc:Choice xmlns:p14="http://schemas.microsoft.com/office/powerpoint/2010/main" Requires="p14">
+      <p:transition p14:dur="400">
+        <p:fade/>
+      </p:transition>
+    </mc:Choice>
+    <mc:Fallback>
+      <p:transition>
+        <p:fade/>
+      </p:transition>
+    </mc:Fallback>
+  </mc:AlternateContent>
 </p:sld>
 </file>
 
@@ -15265,12 +16404,20 @@
                   <a:solidFill>
                     <a:srgbClr val="C9962B"/>
                   </a:solidFill>
-                  <a:latin typeface="Times New Roman"/>
-                  <a:ea typeface="Times New Roman"/>
-                  <a:cs typeface="Times New Roman"/>
+                  <a:latin typeface="Times New Roman" panose="02020603050405020304"/>
+                  <a:ea typeface="Times New Roman" panose="02020603050405020304"/>
+                  <a:cs typeface="Times New Roman" panose="02020603050405020304"/>
                 </a:rPr>
                 <a:t>05 · RESULTS &amp; INNOVATIONS</a:t>
               </a:r>
+              <a:endParaRPr lang="en-US" sz="1350" b="1" spc="75" dirty="0">
+                <a:solidFill>
+                  <a:srgbClr val="C9962B"/>
+                </a:solidFill>
+                <a:latin typeface="Times New Roman" panose="02020603050405020304"/>
+                <a:ea typeface="Times New Roman" panose="02020603050405020304"/>
+                <a:cs typeface="Times New Roman" panose="02020603050405020304"/>
+              </a:endParaRPr>
             </a:p>
           </p:txBody>
         </p:sp>
@@ -15305,12 +16452,20 @@
                   <a:solidFill>
                     <a:srgbClr val="1A3A6B"/>
                   </a:solidFill>
-                  <a:latin typeface="Times New Roman"/>
-                  <a:ea typeface="Microsoft YaHei"/>
-                  <a:cs typeface="Times New Roman"/>
+                  <a:latin typeface="Times New Roman" panose="02020603050405020304"/>
+                  <a:ea typeface="微软雅黑" panose="020B0503020204020204" charset="-122"/>
+                  <a:cs typeface="Times New Roman" panose="02020603050405020304"/>
                 </a:rPr>
                 <a:t>最终性能与创新点</a:t>
               </a:r>
+              <a:endParaRPr lang="zh-CN" sz="3150" b="1" dirty="0">
+                <a:solidFill>
+                  <a:srgbClr val="1A3A6B"/>
+                </a:solidFill>
+                <a:latin typeface="Times New Roman" panose="02020603050405020304"/>
+                <a:ea typeface="微软雅黑" panose="020B0503020204020204" charset="-122"/>
+                <a:cs typeface="Times New Roman" panose="02020603050405020304"/>
+              </a:endParaRPr>
             </a:p>
           </p:txBody>
         </p:sp>
@@ -15396,12 +16551,20 @@
                   <a:solidFill>
                     <a:srgbClr val="5A6478"/>
                   </a:solidFill>
-                  <a:latin typeface="Times New Roman"/>
-                  <a:ea typeface="Times New Roman"/>
-                  <a:cs typeface="Times New Roman"/>
+                  <a:latin typeface="Times New Roman" panose="02020603050405020304"/>
+                  <a:ea typeface="Times New Roman" panose="02020603050405020304"/>
+                  <a:cs typeface="Times New Roman" panose="02020603050405020304"/>
                 </a:rPr>
                 <a:t>LEADERBOARD MAE</a:t>
               </a:r>
+              <a:endParaRPr lang="en-US" sz="1200" b="1" spc="75" dirty="0">
+                <a:solidFill>
+                  <a:srgbClr val="5A6478"/>
+                </a:solidFill>
+                <a:latin typeface="Times New Roman" panose="02020603050405020304"/>
+                <a:ea typeface="Times New Roman" panose="02020603050405020304"/>
+                <a:cs typeface="Times New Roman" panose="02020603050405020304"/>
+              </a:endParaRPr>
             </a:p>
           </p:txBody>
         </p:sp>
@@ -15436,12 +16599,20 @@
                   <a:solidFill>
                     <a:srgbClr val="1A3A6B"/>
                   </a:solidFill>
-                  <a:latin typeface="Arial"/>
-                  <a:ea typeface="Arial"/>
-                  <a:cs typeface="Arial"/>
+                  <a:latin typeface="Arial" panose="020B0604020202020204"/>
+                  <a:ea typeface="Arial" panose="020B0604020202020204"/>
+                  <a:cs typeface="Arial" panose="020B0604020202020204"/>
                 </a:rPr>
                 <a:t>3.67</a:t>
               </a:r>
+              <a:endParaRPr lang="en-US" sz="5400" b="1" dirty="0">
+                <a:solidFill>
+                  <a:srgbClr val="1A3A6B"/>
+                </a:solidFill>
+                <a:latin typeface="Arial" panose="020B0604020202020204"/>
+                <a:ea typeface="Arial" panose="020B0604020202020204"/>
+                <a:cs typeface="Arial" panose="020B0604020202020204"/>
+              </a:endParaRPr>
             </a:p>
           </p:txBody>
         </p:sp>
@@ -15512,12 +16683,20 @@
                   <a:solidFill>
                     <a:srgbClr val="5A6478"/>
                   </a:solidFill>
-                  <a:latin typeface="Times New Roman"/>
-                  <a:ea typeface="Times New Roman"/>
-                  <a:cs typeface="Times New Roman"/>
+                  <a:latin typeface="Times New Roman" panose="02020603050405020304"/>
+                  <a:ea typeface="Times New Roman" panose="02020603050405020304"/>
+                  <a:cs typeface="Times New Roman" panose="02020603050405020304"/>
                 </a:rPr>
                 <a:t>CV MAE</a:t>
               </a:r>
+              <a:endParaRPr lang="en-US" sz="1200" b="1" spc="75" dirty="0">
+                <a:solidFill>
+                  <a:srgbClr val="5A6478"/>
+                </a:solidFill>
+                <a:latin typeface="Times New Roman" panose="02020603050405020304"/>
+                <a:ea typeface="Times New Roman" panose="02020603050405020304"/>
+                <a:cs typeface="Times New Roman" panose="02020603050405020304"/>
+              </a:endParaRPr>
             </a:p>
           </p:txBody>
         </p:sp>
@@ -15552,12 +16731,20 @@
                   <a:solidFill>
                     <a:srgbClr val="4A7BB5"/>
                   </a:solidFill>
-                  <a:latin typeface="Arial"/>
-                  <a:ea typeface="Arial"/>
-                  <a:cs typeface="Arial"/>
+                  <a:latin typeface="Arial" panose="020B0604020202020204"/>
+                  <a:ea typeface="Arial" panose="020B0604020202020204"/>
+                  <a:cs typeface="Arial" panose="020B0604020202020204"/>
                 </a:rPr>
                 <a:t>3.71</a:t>
               </a:r>
+              <a:endParaRPr lang="en-US" sz="3900" b="1" dirty="0">
+                <a:solidFill>
+                  <a:srgbClr val="4A7BB5"/>
+                </a:solidFill>
+                <a:latin typeface="Arial" panose="020B0604020202020204"/>
+                <a:ea typeface="Arial" panose="020B0604020202020204"/>
+                <a:cs typeface="Arial" panose="020B0604020202020204"/>
+              </a:endParaRPr>
             </a:p>
           </p:txBody>
         </p:sp>
@@ -15628,12 +16815,20 @@
                   <a:solidFill>
                     <a:srgbClr val="C9962B"/>
                   </a:solidFill>
-                  <a:latin typeface="Times New Roman"/>
-                  <a:ea typeface="Times New Roman"/>
-                  <a:cs typeface="Times New Roman"/>
+                  <a:latin typeface="Times New Roman" panose="02020603050405020304"/>
+                  <a:ea typeface="Times New Roman" panose="02020603050405020304"/>
+                  <a:cs typeface="Times New Roman" panose="02020603050405020304"/>
                 </a:rPr>
                 <a:t>CALIBRATION PATH</a:t>
               </a:r>
+              <a:endParaRPr lang="en-US" sz="1200" b="1" spc="75" dirty="0">
+                <a:solidFill>
+                  <a:srgbClr val="C9962B"/>
+                </a:solidFill>
+                <a:latin typeface="Times New Roman" panose="02020603050405020304"/>
+                <a:ea typeface="Times New Roman" panose="02020603050405020304"/>
+                <a:cs typeface="Times New Roman" panose="02020603050405020304"/>
+              </a:endParaRPr>
             </a:p>
           </p:txBody>
         </p:sp>
@@ -15668,9 +16863,9 @@
                   <a:solidFill>
                     <a:srgbClr val="8A92A0"/>
                   </a:solidFill>
-                  <a:latin typeface="Arial"/>
-                  <a:ea typeface="Arial"/>
-                  <a:cs typeface="Arial"/>
+                  <a:latin typeface="Arial" panose="020B0604020202020204"/>
+                  <a:ea typeface="Arial" panose="020B0604020202020204"/>
+                  <a:cs typeface="Arial" panose="020B0604020202020204"/>
                 </a:rPr>
                 <a:t>4.06</a:t>
               </a:r>
@@ -15679,20 +16874,20 @@
                   <a:solidFill>
                     <a:srgbClr val="5A6478"/>
                   </a:solidFill>
-                  <a:latin typeface="Arial"/>
-                  <a:ea typeface="Arial"/>
-                  <a:cs typeface="Arial"/>
+                  <a:latin typeface="Arial" panose="020B0604020202020204"/>
+                  <a:ea typeface="Arial" panose="020B0604020202020204"/>
+                  <a:cs typeface="Arial" panose="020B0604020202020204"/>
                 </a:rPr>
-                <a:t xml:space="preserve"> → </a:t>
+                <a:t> → </a:t>
               </a:r>
               <a:r>
                 <a:rPr lang="en-US" sz="1800" dirty="0">
                   <a:solidFill>
                     <a:srgbClr val="4A7BB5"/>
                   </a:solidFill>
-                  <a:latin typeface="Arial"/>
-                  <a:ea typeface="Arial"/>
-                  <a:cs typeface="Arial"/>
+                  <a:latin typeface="Arial" panose="020B0604020202020204"/>
+                  <a:ea typeface="Arial" panose="020B0604020202020204"/>
+                  <a:cs typeface="Arial" panose="020B0604020202020204"/>
                 </a:rPr>
                 <a:t>3.89</a:t>
               </a:r>
@@ -15701,20 +16896,20 @@
                   <a:solidFill>
                     <a:srgbClr val="5A6478"/>
                   </a:solidFill>
-                  <a:latin typeface="Arial"/>
-                  <a:ea typeface="Arial"/>
-                  <a:cs typeface="Arial"/>
+                  <a:latin typeface="Arial" panose="020B0604020202020204"/>
+                  <a:ea typeface="Arial" panose="020B0604020202020204"/>
+                  <a:cs typeface="Arial" panose="020B0604020202020204"/>
                 </a:rPr>
-                <a:t xml:space="preserve"> → </a:t>
+                <a:t> → </a:t>
               </a:r>
               <a:r>
                 <a:rPr lang="en-US" sz="1800" dirty="0">
                   <a:solidFill>
                     <a:srgbClr val="1A3A6B"/>
                   </a:solidFill>
-                  <a:latin typeface="Arial"/>
-                  <a:ea typeface="Arial"/>
-                  <a:cs typeface="Arial"/>
+                  <a:latin typeface="Arial" panose="020B0604020202020204"/>
+                  <a:ea typeface="Arial" panose="020B0604020202020204"/>
+                  <a:cs typeface="Arial" panose="020B0604020202020204"/>
                 </a:rPr>
                 <a:t>3.81</a:t>
               </a:r>
@@ -15723,23 +16918,31 @@
                   <a:solidFill>
                     <a:srgbClr val="5A6478"/>
                   </a:solidFill>
-                  <a:latin typeface="Arial"/>
-                  <a:ea typeface="Arial"/>
-                  <a:cs typeface="Arial"/>
+                  <a:latin typeface="Arial" panose="020B0604020202020204"/>
+                  <a:ea typeface="Arial" panose="020B0604020202020204"/>
+                  <a:cs typeface="Arial" panose="020B0604020202020204"/>
                 </a:rPr>
-                <a:t xml:space="preserve"> → </a:t>
+                <a:t> → </a:t>
               </a:r>
               <a:r>
                 <a:rPr lang="en-US" sz="1800" b="1" dirty="0">
                   <a:solidFill>
                     <a:srgbClr val="C9962B"/>
                   </a:solidFill>
-                  <a:latin typeface="Arial"/>
-                  <a:ea typeface="Arial"/>
-                  <a:cs typeface="Arial"/>
+                  <a:latin typeface="Arial" panose="020B0604020202020204"/>
+                  <a:ea typeface="Arial" panose="020B0604020202020204"/>
+                  <a:cs typeface="Arial" panose="020B0604020202020204"/>
                 </a:rPr>
                 <a:t>3.67</a:t>
               </a:r>
+              <a:endParaRPr lang="en-US" sz="1800" b="1" dirty="0">
+                <a:solidFill>
+                  <a:srgbClr val="C9962B"/>
+                </a:solidFill>
+                <a:latin typeface="Arial" panose="020B0604020202020204"/>
+                <a:ea typeface="Arial" panose="020B0604020202020204"/>
+                <a:cs typeface="Arial" panose="020B0604020202020204"/>
+              </a:endParaRPr>
             </a:p>
           </p:txBody>
         </p:sp>
@@ -15774,12 +16977,20 @@
                   <a:solidFill>
                     <a:srgbClr val="000000"/>
                   </a:solidFill>
-                  <a:latin typeface="Arial"/>
-                  <a:ea typeface="Arial"/>
-                  <a:cs typeface="Arial"/>
+                  <a:latin typeface="Arial" panose="020B0604020202020204"/>
+                  <a:ea typeface="Arial" panose="020B0604020202020204"/>
+                  <a:cs typeface="Arial" panose="020B0604020202020204"/>
                 </a:rPr>
                 <a:t>baseline +recipe +operator +apc</a:t>
               </a:r>
+              <a:endParaRPr lang="en-US" sz="1120" dirty="0">
+                <a:solidFill>
+                  <a:srgbClr val="000000"/>
+                </a:solidFill>
+                <a:latin typeface="Arial" panose="020B0604020202020204"/>
+                <a:ea typeface="Arial" panose="020B0604020202020204"/>
+                <a:cs typeface="Arial" panose="020B0604020202020204"/>
+              </a:endParaRPr>
             </a:p>
           </p:txBody>
         </p:sp>
@@ -15927,12 +17138,20 @@
                   <a:solidFill>
                     <a:srgbClr val="8A92A0"/>
                   </a:solidFill>
-                  <a:latin typeface="Times New Roman"/>
-                  <a:ea typeface="Times New Roman"/>
-                  <a:cs typeface="Times New Roman"/>
+                  <a:latin typeface="Times New Roman" panose="02020603050405020304"/>
+                  <a:ea typeface="Times New Roman" panose="02020603050405020304"/>
+                  <a:cs typeface="Times New Roman" panose="02020603050405020304"/>
                 </a:rPr>
                 <a:t>3.55</a:t>
               </a:r>
+              <a:endParaRPr lang="en-US" sz="980" dirty="0">
+                <a:solidFill>
+                  <a:srgbClr val="8A92A0"/>
+                </a:solidFill>
+                <a:latin typeface="Times New Roman" panose="02020603050405020304"/>
+                <a:ea typeface="Times New Roman" panose="02020603050405020304"/>
+                <a:cs typeface="Times New Roman" panose="02020603050405020304"/>
+              </a:endParaRPr>
             </a:p>
           </p:txBody>
         </p:sp>
@@ -16006,12 +17225,20 @@
                   <a:solidFill>
                     <a:srgbClr val="8A92A0"/>
                   </a:solidFill>
-                  <a:latin typeface="Times New Roman"/>
-                  <a:ea typeface="Times New Roman"/>
-                  <a:cs typeface="Times New Roman"/>
+                  <a:latin typeface="Times New Roman" panose="02020603050405020304"/>
+                  <a:ea typeface="Times New Roman" panose="02020603050405020304"/>
+                  <a:cs typeface="Times New Roman" panose="02020603050405020304"/>
                 </a:rPr>
                 <a:t>3.65</a:t>
               </a:r>
+              <a:endParaRPr lang="en-US" sz="980" dirty="0">
+                <a:solidFill>
+                  <a:srgbClr val="8A92A0"/>
+                </a:solidFill>
+                <a:latin typeface="Times New Roman" panose="02020603050405020304"/>
+                <a:ea typeface="Times New Roman" panose="02020603050405020304"/>
+                <a:cs typeface="Times New Roman" panose="02020603050405020304"/>
+              </a:endParaRPr>
             </a:p>
           </p:txBody>
         </p:sp>
@@ -16085,12 +17312,20 @@
                   <a:solidFill>
                     <a:srgbClr val="8A92A0"/>
                   </a:solidFill>
-                  <a:latin typeface="Times New Roman"/>
-                  <a:ea typeface="Times New Roman"/>
-                  <a:cs typeface="Times New Roman"/>
+                  <a:latin typeface="Times New Roman" panose="02020603050405020304"/>
+                  <a:ea typeface="Times New Roman" panose="02020603050405020304"/>
+                  <a:cs typeface="Times New Roman" panose="02020603050405020304"/>
                 </a:rPr>
                 <a:t>3.75</a:t>
               </a:r>
+              <a:endParaRPr lang="en-US" sz="980" dirty="0">
+                <a:solidFill>
+                  <a:srgbClr val="8A92A0"/>
+                </a:solidFill>
+                <a:latin typeface="Times New Roman" panose="02020603050405020304"/>
+                <a:ea typeface="Times New Roman" panose="02020603050405020304"/>
+                <a:cs typeface="Times New Roman" panose="02020603050405020304"/>
+              </a:endParaRPr>
             </a:p>
           </p:txBody>
         </p:sp>
@@ -16164,12 +17399,20 @@
                   <a:solidFill>
                     <a:srgbClr val="8A92A0"/>
                   </a:solidFill>
-                  <a:latin typeface="Times New Roman"/>
-                  <a:ea typeface="Times New Roman"/>
-                  <a:cs typeface="Times New Roman"/>
+                  <a:latin typeface="Times New Roman" panose="02020603050405020304"/>
+                  <a:ea typeface="Times New Roman" panose="02020603050405020304"/>
+                  <a:cs typeface="Times New Roman" panose="02020603050405020304"/>
                 </a:rPr>
                 <a:t>3.85</a:t>
               </a:r>
+              <a:endParaRPr lang="en-US" sz="980" dirty="0">
+                <a:solidFill>
+                  <a:srgbClr val="8A92A0"/>
+                </a:solidFill>
+                <a:latin typeface="Times New Roman" panose="02020603050405020304"/>
+                <a:ea typeface="Times New Roman" panose="02020603050405020304"/>
+                <a:cs typeface="Times New Roman" panose="02020603050405020304"/>
+              </a:endParaRPr>
             </a:p>
           </p:txBody>
         </p:sp>
@@ -16243,12 +17486,20 @@
                   <a:solidFill>
                     <a:srgbClr val="8A92A0"/>
                   </a:solidFill>
-                  <a:latin typeface="Times New Roman"/>
-                  <a:ea typeface="Times New Roman"/>
-                  <a:cs typeface="Times New Roman"/>
+                  <a:latin typeface="Times New Roman" panose="02020603050405020304"/>
+                  <a:ea typeface="Times New Roman" panose="02020603050405020304"/>
+                  <a:cs typeface="Times New Roman" panose="02020603050405020304"/>
                 </a:rPr>
                 <a:t>3.95</a:t>
               </a:r>
+              <a:endParaRPr lang="en-US" sz="980" dirty="0">
+                <a:solidFill>
+                  <a:srgbClr val="8A92A0"/>
+                </a:solidFill>
+                <a:latin typeface="Times New Roman" panose="02020603050405020304"/>
+                <a:ea typeface="Times New Roman" panose="02020603050405020304"/>
+                <a:cs typeface="Times New Roman" panose="02020603050405020304"/>
+              </a:endParaRPr>
             </a:p>
           </p:txBody>
         </p:sp>
@@ -16322,12 +17573,20 @@
                   <a:solidFill>
                     <a:srgbClr val="8A92A0"/>
                   </a:solidFill>
-                  <a:latin typeface="Times New Roman"/>
-                  <a:ea typeface="Times New Roman"/>
-                  <a:cs typeface="Times New Roman"/>
+                  <a:latin typeface="Times New Roman" panose="02020603050405020304"/>
+                  <a:ea typeface="Times New Roman" panose="02020603050405020304"/>
+                  <a:cs typeface="Times New Roman" panose="02020603050405020304"/>
                 </a:rPr>
                 <a:t>4.05</a:t>
               </a:r>
+              <a:endParaRPr lang="en-US" sz="980" dirty="0">
+                <a:solidFill>
+                  <a:srgbClr val="8A92A0"/>
+                </a:solidFill>
+                <a:latin typeface="Times New Roman" panose="02020603050405020304"/>
+                <a:ea typeface="Times New Roman" panose="02020603050405020304"/>
+                <a:cs typeface="Times New Roman" panose="02020603050405020304"/>
+              </a:endParaRPr>
             </a:p>
           </p:txBody>
         </p:sp>
@@ -16401,12 +17660,20 @@
                   <a:solidFill>
                     <a:srgbClr val="8A92A0"/>
                   </a:solidFill>
-                  <a:latin typeface="Times New Roman"/>
-                  <a:ea typeface="Times New Roman"/>
-                  <a:cs typeface="Times New Roman"/>
+                  <a:latin typeface="Times New Roman" panose="02020603050405020304"/>
+                  <a:ea typeface="Times New Roman" panose="02020603050405020304"/>
+                  <a:cs typeface="Times New Roman" panose="02020603050405020304"/>
                 </a:rPr>
                 <a:t>4.15</a:t>
               </a:r>
+              <a:endParaRPr lang="en-US" sz="980" dirty="0">
+                <a:solidFill>
+                  <a:srgbClr val="8A92A0"/>
+                </a:solidFill>
+                <a:latin typeface="Times New Roman" panose="02020603050405020304"/>
+                <a:ea typeface="Times New Roman" panose="02020603050405020304"/>
+                <a:cs typeface="Times New Roman" panose="02020603050405020304"/>
+              </a:endParaRPr>
             </a:p>
           </p:txBody>
         </p:sp>
@@ -16441,12 +17708,20 @@
                   <a:solidFill>
                     <a:srgbClr val="5A6478"/>
                   </a:solidFill>
-                  <a:latin typeface="Arial"/>
-                  <a:ea typeface="Arial"/>
-                  <a:cs typeface="Arial"/>
+                  <a:latin typeface="Arial" panose="020B0604020202020204"/>
+                  <a:ea typeface="Arial" panose="020B0604020202020204"/>
+                  <a:cs typeface="Arial" panose="020B0604020202020204"/>
                 </a:rPr>
                 <a:t>baseline</a:t>
               </a:r>
+              <a:endParaRPr lang="en-US" sz="1120" dirty="0">
+                <a:solidFill>
+                  <a:srgbClr val="5A6478"/>
+                </a:solidFill>
+                <a:latin typeface="Arial" panose="020B0604020202020204"/>
+                <a:ea typeface="Arial" panose="020B0604020202020204"/>
+                <a:cs typeface="Arial" panose="020B0604020202020204"/>
+              </a:endParaRPr>
             </a:p>
           </p:txBody>
         </p:sp>
@@ -16481,12 +17756,20 @@
                   <a:solidFill>
                     <a:srgbClr val="5A6478"/>
                   </a:solidFill>
-                  <a:latin typeface="Arial"/>
-                  <a:ea typeface="Arial"/>
-                  <a:cs typeface="Arial"/>
+                  <a:latin typeface="Arial" panose="020B0604020202020204"/>
+                  <a:ea typeface="Arial" panose="020B0604020202020204"/>
+                  <a:cs typeface="Arial" panose="020B0604020202020204"/>
                 </a:rPr>
                 <a:t>+recipe</a:t>
               </a:r>
+              <a:endParaRPr lang="en-US" sz="1120" dirty="0">
+                <a:solidFill>
+                  <a:srgbClr val="5A6478"/>
+                </a:solidFill>
+                <a:latin typeface="Arial" panose="020B0604020202020204"/>
+                <a:ea typeface="Arial" panose="020B0604020202020204"/>
+                <a:cs typeface="Arial" panose="020B0604020202020204"/>
+              </a:endParaRPr>
             </a:p>
           </p:txBody>
         </p:sp>
@@ -16521,12 +17804,20 @@
                   <a:solidFill>
                     <a:srgbClr val="5A6478"/>
                   </a:solidFill>
-                  <a:latin typeface="Arial"/>
-                  <a:ea typeface="Arial"/>
-                  <a:cs typeface="Arial"/>
+                  <a:latin typeface="Arial" panose="020B0604020202020204"/>
+                  <a:ea typeface="Arial" panose="020B0604020202020204"/>
+                  <a:cs typeface="Arial" panose="020B0604020202020204"/>
                 </a:rPr>
                 <a:t>+operator</a:t>
               </a:r>
+              <a:endParaRPr lang="en-US" sz="1120" dirty="0">
+                <a:solidFill>
+                  <a:srgbClr val="5A6478"/>
+                </a:solidFill>
+                <a:latin typeface="Arial" panose="020B0604020202020204"/>
+                <a:ea typeface="Arial" panose="020B0604020202020204"/>
+                <a:cs typeface="Arial" panose="020B0604020202020204"/>
+              </a:endParaRPr>
             </a:p>
           </p:txBody>
         </p:sp>
@@ -16561,12 +17852,20 @@
                   <a:solidFill>
                     <a:srgbClr val="5A6478"/>
                   </a:solidFill>
-                  <a:latin typeface="Arial"/>
-                  <a:ea typeface="Arial"/>
-                  <a:cs typeface="Arial"/>
+                  <a:latin typeface="Arial" panose="020B0604020202020204"/>
+                  <a:ea typeface="Arial" panose="020B0604020202020204"/>
+                  <a:cs typeface="Arial" panose="020B0604020202020204"/>
                 </a:rPr>
                 <a:t>+apc</a:t>
               </a:r>
+              <a:endParaRPr lang="en-US" sz="1120" dirty="0">
+                <a:solidFill>
+                  <a:srgbClr val="5A6478"/>
+                </a:solidFill>
+                <a:latin typeface="Arial" panose="020B0604020202020204"/>
+                <a:ea typeface="Arial" panose="020B0604020202020204"/>
+                <a:cs typeface="Arial" panose="020B0604020202020204"/>
+              </a:endParaRPr>
             </a:p>
           </p:txBody>
         </p:sp>
@@ -16668,12 +17967,20 @@
                   <a:solidFill>
                     <a:srgbClr val="1A3A6B"/>
                   </a:solidFill>
-                  <a:latin typeface="Times New Roman"/>
-                  <a:ea typeface="Times New Roman"/>
-                  <a:cs typeface="Times New Roman"/>
+                  <a:latin typeface="Times New Roman" panose="02020603050405020304"/>
+                  <a:ea typeface="Times New Roman" panose="02020603050405020304"/>
+                  <a:cs typeface="Times New Roman" panose="02020603050405020304"/>
                 </a:rPr>
                 <a:t>4.06</a:t>
               </a:r>
+              <a:endParaRPr lang="en-US" sz="1120" dirty="0">
+                <a:solidFill>
+                  <a:srgbClr val="1A3A6B"/>
+                </a:solidFill>
+                <a:latin typeface="Times New Roman" panose="02020603050405020304"/>
+                <a:ea typeface="Times New Roman" panose="02020603050405020304"/>
+                <a:cs typeface="Times New Roman" panose="02020603050405020304"/>
+              </a:endParaRPr>
             </a:p>
           </p:txBody>
         </p:sp>
@@ -16732,12 +18039,20 @@
                   <a:solidFill>
                     <a:srgbClr val="1A3A6B"/>
                   </a:solidFill>
-                  <a:latin typeface="Times New Roman"/>
-                  <a:ea typeface="Times New Roman"/>
-                  <a:cs typeface="Times New Roman"/>
+                  <a:latin typeface="Times New Roman" panose="02020603050405020304"/>
+                  <a:ea typeface="Times New Roman" panose="02020603050405020304"/>
+                  <a:cs typeface="Times New Roman" panose="02020603050405020304"/>
                 </a:rPr>
                 <a:t>3.89</a:t>
               </a:r>
+              <a:endParaRPr lang="en-US" sz="1120" dirty="0">
+                <a:solidFill>
+                  <a:srgbClr val="1A3A6B"/>
+                </a:solidFill>
+                <a:latin typeface="Times New Roman" panose="02020603050405020304"/>
+                <a:ea typeface="Times New Roman" panose="02020603050405020304"/>
+                <a:cs typeface="Times New Roman" panose="02020603050405020304"/>
+              </a:endParaRPr>
             </a:p>
           </p:txBody>
         </p:sp>
@@ -16796,12 +18111,20 @@
                   <a:solidFill>
                     <a:srgbClr val="1A3A6B"/>
                   </a:solidFill>
-                  <a:latin typeface="Times New Roman"/>
-                  <a:ea typeface="Times New Roman"/>
-                  <a:cs typeface="Times New Roman"/>
+                  <a:latin typeface="Times New Roman" panose="02020603050405020304"/>
+                  <a:ea typeface="Times New Roman" panose="02020603050405020304"/>
+                  <a:cs typeface="Times New Roman" panose="02020603050405020304"/>
                 </a:rPr>
                 <a:t>3.81</a:t>
               </a:r>
+              <a:endParaRPr lang="en-US" sz="1120" dirty="0">
+                <a:solidFill>
+                  <a:srgbClr val="1A3A6B"/>
+                </a:solidFill>
+                <a:latin typeface="Times New Roman" panose="02020603050405020304"/>
+                <a:ea typeface="Times New Roman" panose="02020603050405020304"/>
+                <a:cs typeface="Times New Roman" panose="02020603050405020304"/>
+              </a:endParaRPr>
             </a:p>
           </p:txBody>
         </p:sp>
@@ -16860,12 +18183,20 @@
                   <a:solidFill>
                     <a:srgbClr val="C9962B"/>
                   </a:solidFill>
-                  <a:latin typeface="Times New Roman"/>
-                  <a:ea typeface="Times New Roman"/>
-                  <a:cs typeface="Times New Roman"/>
+                  <a:latin typeface="Times New Roman" panose="02020603050405020304"/>
+                  <a:ea typeface="Times New Roman" panose="02020603050405020304"/>
+                  <a:cs typeface="Times New Roman" panose="02020603050405020304"/>
                 </a:rPr>
                 <a:t>3.67</a:t>
               </a:r>
+              <a:endParaRPr lang="en-US" sz="1120" b="1" dirty="0">
+                <a:solidFill>
+                  <a:srgbClr val="C9962B"/>
+                </a:solidFill>
+                <a:latin typeface="Times New Roman" panose="02020603050405020304"/>
+                <a:ea typeface="Times New Roman" panose="02020603050405020304"/>
+                <a:cs typeface="Times New Roman" panose="02020603050405020304"/>
+              </a:endParaRPr>
             </a:p>
           </p:txBody>
         </p:sp>
@@ -16955,12 +18286,20 @@
                 <a:solidFill>
                   <a:srgbClr val="1A3A6B"/>
                 </a:solidFill>
-                <a:latin typeface="Arial"/>
-                <a:ea typeface="Microsoft YaHei"/>
-                <a:cs typeface="Arial"/>
+                <a:latin typeface="Arial" panose="020B0604020202020204"/>
+                <a:ea typeface="微软雅黑" panose="020B0503020204020204" charset="-122"/>
+                <a:cs typeface="Arial" panose="020B0604020202020204"/>
               </a:rPr>
               <a:t>校准改善路径</a:t>
             </a:r>
+            <a:endParaRPr lang="zh-CN" sz="1350" b="1" dirty="0">
+              <a:solidFill>
+                <a:srgbClr val="1A3A6B"/>
+              </a:solidFill>
+              <a:latin typeface="Arial" panose="020B0604020202020204"/>
+              <a:ea typeface="微软雅黑" panose="020B0503020204020204" charset="-122"/>
+              <a:cs typeface="Arial" panose="020B0604020202020204"/>
+            </a:endParaRPr>
           </a:p>
         </p:txBody>
       </p:sp>
@@ -16995,12 +18334,20 @@
                 <a:solidFill>
                   <a:srgbClr val="000000"/>
                 </a:solidFill>
-                <a:latin typeface="Times New Roman"/>
-                <a:ea typeface="SimSun"/>
-                <a:cs typeface="Times New Roman"/>
+                <a:latin typeface="Times New Roman" panose="02020603050405020304"/>
+                <a:ea typeface="宋体" panose="02010600030101010101" pitchFamily="2" charset="-122"/>
+                <a:cs typeface="Times New Roman" panose="02020603050405020304"/>
               </a:rPr>
               <a:t>MAE 逐步下降</a:t>
             </a:r>
+            <a:endParaRPr lang="zh-CN" sz="1050" dirty="0">
+              <a:solidFill>
+                <a:srgbClr val="000000"/>
+              </a:solidFill>
+              <a:latin typeface="Times New Roman" panose="02020603050405020304"/>
+              <a:ea typeface="宋体" panose="02010600030101010101" pitchFamily="2" charset="-122"/>
+              <a:cs typeface="Times New Roman" panose="02020603050405020304"/>
+            </a:endParaRPr>
           </a:p>
         </p:txBody>
       </p:sp>
@@ -17075,12 +18422,20 @@
                   <a:solidFill>
                     <a:srgbClr val="1A3A6B"/>
                   </a:solidFill>
-                  <a:latin typeface="Arial"/>
-                  <a:ea typeface="Microsoft YaHei"/>
-                  <a:cs typeface="Arial"/>
+                  <a:latin typeface="Arial" panose="020B0604020202020204"/>
+                  <a:ea typeface="微软雅黑" panose="020B0503020204020204" charset="-122"/>
+                  <a:cs typeface="Arial" panose="020B0604020202020204"/>
                 </a:rPr>
                 <a:t>CT 预测均值对比</a:t>
               </a:r>
+              <a:endParaRPr lang="zh-CN" sz="1350" b="1" dirty="0">
+                <a:solidFill>
+                  <a:srgbClr val="1A3A6B"/>
+                </a:solidFill>
+                <a:latin typeface="Arial" panose="020B0604020202020204"/>
+                <a:ea typeface="微软雅黑" panose="020B0503020204020204" charset="-122"/>
+                <a:cs typeface="Arial" panose="020B0604020202020204"/>
+              </a:endParaRPr>
             </a:p>
           </p:txBody>
         </p:sp>
@@ -17115,12 +18470,20 @@
                   <a:solidFill>
                     <a:srgbClr val="000000"/>
                   </a:solidFill>
-                  <a:latin typeface="Times New Roman"/>
-                  <a:ea typeface="SimSun"/>
-                  <a:cs typeface="Times New Roman"/>
+                  <a:latin typeface="Times New Roman" panose="02020603050405020304"/>
+                  <a:ea typeface="宋体" panose="02010600030101010101" pitchFamily="2" charset="-122"/>
+                  <a:cs typeface="Times New Roman" panose="02020603050405020304"/>
                 </a:rPr>
                 <a:t>模型→校准→真实 三线收敛</a:t>
               </a:r>
+              <a:endParaRPr lang="zh-CN" sz="1050" dirty="0">
+                <a:solidFill>
+                  <a:srgbClr val="000000"/>
+                </a:solidFill>
+                <a:latin typeface="Times New Roman" panose="02020603050405020304"/>
+                <a:ea typeface="宋体" panose="02010600030101010101" pitchFamily="2" charset="-122"/>
+                <a:cs typeface="Times New Roman" panose="02020603050405020304"/>
+              </a:endParaRPr>
             </a:p>
           </p:txBody>
         </p:sp>
@@ -17191,12 +18554,20 @@
                   <a:solidFill>
                     <a:srgbClr val="8A92A0"/>
                   </a:solidFill>
-                  <a:latin typeface="Times New Roman"/>
-                  <a:ea typeface="Times New Roman"/>
-                  <a:cs typeface="Times New Roman"/>
+                  <a:latin typeface="Times New Roman" panose="02020603050405020304"/>
+                  <a:ea typeface="Times New Roman" panose="02020603050405020304"/>
+                  <a:cs typeface="Times New Roman" panose="02020603050405020304"/>
                 </a:rPr>
                 <a:t>23</a:t>
               </a:r>
+              <a:endParaRPr lang="en-US" sz="980" dirty="0">
+                <a:solidFill>
+                  <a:srgbClr val="8A92A0"/>
+                </a:solidFill>
+                <a:latin typeface="Times New Roman" panose="02020603050405020304"/>
+                <a:ea typeface="Times New Roman" panose="02020603050405020304"/>
+                <a:cs typeface="Times New Roman" panose="02020603050405020304"/>
+              </a:endParaRPr>
             </a:p>
           </p:txBody>
         </p:sp>
@@ -17270,12 +18641,20 @@
                   <a:solidFill>
                     <a:srgbClr val="8A92A0"/>
                   </a:solidFill>
-                  <a:latin typeface="Times New Roman"/>
-                  <a:ea typeface="Times New Roman"/>
-                  <a:cs typeface="Times New Roman"/>
+                  <a:latin typeface="Times New Roman" panose="02020603050405020304"/>
+                  <a:ea typeface="Times New Roman" panose="02020603050405020304"/>
+                  <a:cs typeface="Times New Roman" panose="02020603050405020304"/>
                 </a:rPr>
                 <a:t>24</a:t>
               </a:r>
+              <a:endParaRPr lang="en-US" sz="980" dirty="0">
+                <a:solidFill>
+                  <a:srgbClr val="8A92A0"/>
+                </a:solidFill>
+                <a:latin typeface="Times New Roman" panose="02020603050405020304"/>
+                <a:ea typeface="Times New Roman" panose="02020603050405020304"/>
+                <a:cs typeface="Times New Roman" panose="02020603050405020304"/>
+              </a:endParaRPr>
             </a:p>
           </p:txBody>
         </p:sp>
@@ -17349,12 +18728,20 @@
                   <a:solidFill>
                     <a:srgbClr val="8A92A0"/>
                   </a:solidFill>
-                  <a:latin typeface="Times New Roman"/>
-                  <a:ea typeface="Times New Roman"/>
-                  <a:cs typeface="Times New Roman"/>
+                  <a:latin typeface="Times New Roman" panose="02020603050405020304"/>
+                  <a:ea typeface="Times New Roman" panose="02020603050405020304"/>
+                  <a:cs typeface="Times New Roman" panose="02020603050405020304"/>
                 </a:rPr>
                 <a:t>25</a:t>
               </a:r>
+              <a:endParaRPr lang="en-US" sz="980" dirty="0">
+                <a:solidFill>
+                  <a:srgbClr val="8A92A0"/>
+                </a:solidFill>
+                <a:latin typeface="Times New Roman" panose="02020603050405020304"/>
+                <a:ea typeface="Times New Roman" panose="02020603050405020304"/>
+                <a:cs typeface="Times New Roman" panose="02020603050405020304"/>
+              </a:endParaRPr>
             </a:p>
           </p:txBody>
         </p:sp>
@@ -17428,12 +18815,20 @@
                   <a:solidFill>
                     <a:srgbClr val="8A92A0"/>
                   </a:solidFill>
-                  <a:latin typeface="Times New Roman"/>
-                  <a:ea typeface="Times New Roman"/>
-                  <a:cs typeface="Times New Roman"/>
+                  <a:latin typeface="Times New Roman" panose="02020603050405020304"/>
+                  <a:ea typeface="Times New Roman" panose="02020603050405020304"/>
+                  <a:cs typeface="Times New Roman" panose="02020603050405020304"/>
                 </a:rPr>
                 <a:t>26</a:t>
               </a:r>
+              <a:endParaRPr lang="en-US" sz="980" dirty="0">
+                <a:solidFill>
+                  <a:srgbClr val="8A92A0"/>
+                </a:solidFill>
+                <a:latin typeface="Times New Roman" panose="02020603050405020304"/>
+                <a:ea typeface="Times New Roman" panose="02020603050405020304"/>
+                <a:cs typeface="Times New Roman" panose="02020603050405020304"/>
+              </a:endParaRPr>
             </a:p>
           </p:txBody>
         </p:sp>
@@ -17507,12 +18902,20 @@
                   <a:solidFill>
                     <a:srgbClr val="8A92A0"/>
                   </a:solidFill>
-                  <a:latin typeface="Times New Roman"/>
-                  <a:ea typeface="Times New Roman"/>
-                  <a:cs typeface="Times New Roman"/>
+                  <a:latin typeface="Times New Roman" panose="02020603050405020304"/>
+                  <a:ea typeface="Times New Roman" panose="02020603050405020304"/>
+                  <a:cs typeface="Times New Roman" panose="02020603050405020304"/>
                 </a:rPr>
                 <a:t>27</a:t>
               </a:r>
+              <a:endParaRPr lang="en-US" sz="980" dirty="0">
+                <a:solidFill>
+                  <a:srgbClr val="8A92A0"/>
+                </a:solidFill>
+                <a:latin typeface="Times New Roman" panose="02020603050405020304"/>
+                <a:ea typeface="Times New Roman" panose="02020603050405020304"/>
+                <a:cs typeface="Times New Roman" panose="02020603050405020304"/>
+              </a:endParaRPr>
             </a:p>
           </p:txBody>
         </p:sp>
@@ -17586,12 +18989,20 @@
                   <a:solidFill>
                     <a:srgbClr val="8A92A0"/>
                   </a:solidFill>
-                  <a:latin typeface="Times New Roman"/>
-                  <a:ea typeface="Times New Roman"/>
-                  <a:cs typeface="Times New Roman"/>
+                  <a:latin typeface="Times New Roman" panose="02020603050405020304"/>
+                  <a:ea typeface="Times New Roman" panose="02020603050405020304"/>
+                  <a:cs typeface="Times New Roman" panose="02020603050405020304"/>
                 </a:rPr>
                 <a:t>28</a:t>
               </a:r>
+              <a:endParaRPr lang="en-US" sz="980" dirty="0">
+                <a:solidFill>
+                  <a:srgbClr val="8A92A0"/>
+                </a:solidFill>
+                <a:latin typeface="Times New Roman" panose="02020603050405020304"/>
+                <a:ea typeface="Times New Roman" panose="02020603050405020304"/>
+                <a:cs typeface="Times New Roman" panose="02020603050405020304"/>
+              </a:endParaRPr>
             </a:p>
           </p:txBody>
         </p:sp>
@@ -17665,12 +19076,20 @@
                   <a:solidFill>
                     <a:srgbClr val="8A92A0"/>
                   </a:solidFill>
-                  <a:latin typeface="Times New Roman"/>
-                  <a:ea typeface="Times New Roman"/>
-                  <a:cs typeface="Times New Roman"/>
+                  <a:latin typeface="Times New Roman" panose="02020603050405020304"/>
+                  <a:ea typeface="Times New Roman" panose="02020603050405020304"/>
+                  <a:cs typeface="Times New Roman" panose="02020603050405020304"/>
                 </a:rPr>
                 <a:t>29</a:t>
               </a:r>
+              <a:endParaRPr lang="en-US" sz="980" dirty="0">
+                <a:solidFill>
+                  <a:srgbClr val="8A92A0"/>
+                </a:solidFill>
+                <a:latin typeface="Times New Roman" panose="02020603050405020304"/>
+                <a:ea typeface="Times New Roman" panose="02020603050405020304"/>
+                <a:cs typeface="Times New Roman" panose="02020603050405020304"/>
+              </a:endParaRPr>
             </a:p>
           </p:txBody>
         </p:sp>
@@ -17705,12 +19124,20 @@
                   <a:solidFill>
                     <a:srgbClr val="5A6478"/>
                   </a:solidFill>
-                  <a:latin typeface="Arial"/>
-                  <a:ea typeface="Arial"/>
-                  <a:cs typeface="Arial"/>
+                  <a:latin typeface="Arial" panose="020B0604020202020204"/>
+                  <a:ea typeface="Arial" panose="020B0604020202020204"/>
+                  <a:cs typeface="Arial" panose="020B0604020202020204"/>
                 </a:rPr>
                 <a:t>recipe</a:t>
               </a:r>
+              <a:endParaRPr lang="en-US" sz="1120" dirty="0">
+                <a:solidFill>
+                  <a:srgbClr val="5A6478"/>
+                </a:solidFill>
+                <a:latin typeface="Arial" panose="020B0604020202020204"/>
+                <a:ea typeface="Arial" panose="020B0604020202020204"/>
+                <a:cs typeface="Arial" panose="020B0604020202020204"/>
+              </a:endParaRPr>
             </a:p>
           </p:txBody>
         </p:sp>
@@ -17745,12 +19172,20 @@
                   <a:solidFill>
                     <a:srgbClr val="5A6478"/>
                   </a:solidFill>
-                  <a:latin typeface="Arial"/>
-                  <a:ea typeface="Arial"/>
-                  <a:cs typeface="Arial"/>
+                  <a:latin typeface="Arial" panose="020B0604020202020204"/>
+                  <a:ea typeface="Arial" panose="020B0604020202020204"/>
+                  <a:cs typeface="Arial" panose="020B0604020202020204"/>
                 </a:rPr>
                 <a:t>operator</a:t>
               </a:r>
+              <a:endParaRPr lang="en-US" sz="1120" dirty="0">
+                <a:solidFill>
+                  <a:srgbClr val="5A6478"/>
+                </a:solidFill>
+                <a:latin typeface="Arial" panose="020B0604020202020204"/>
+                <a:ea typeface="Arial" panose="020B0604020202020204"/>
+                <a:cs typeface="Arial" panose="020B0604020202020204"/>
+              </a:endParaRPr>
             </a:p>
           </p:txBody>
         </p:sp>
@@ -17785,12 +19220,20 @@
                   <a:solidFill>
                     <a:srgbClr val="5A6478"/>
                   </a:solidFill>
-                  <a:latin typeface="Arial"/>
-                  <a:ea typeface="Arial"/>
-                  <a:cs typeface="Arial"/>
+                  <a:latin typeface="Arial" panose="020B0604020202020204"/>
+                  <a:ea typeface="Arial" panose="020B0604020202020204"/>
+                  <a:cs typeface="Arial" panose="020B0604020202020204"/>
                 </a:rPr>
                 <a:t>apc</a:t>
               </a:r>
+              <a:endParaRPr lang="en-US" sz="1120" dirty="0">
+                <a:solidFill>
+                  <a:srgbClr val="5A6478"/>
+                </a:solidFill>
+                <a:latin typeface="Arial" panose="020B0604020202020204"/>
+                <a:ea typeface="Arial" panose="020B0604020202020204"/>
+                <a:cs typeface="Arial" panose="020B0604020202020204"/>
+              </a:endParaRPr>
             </a:p>
           </p:txBody>
         </p:sp>
@@ -17825,12 +19268,20 @@
                   <a:solidFill>
                     <a:srgbClr val="5A6478"/>
                   </a:solidFill>
-                  <a:latin typeface="Arial"/>
-                  <a:ea typeface="Arial"/>
-                  <a:cs typeface="Arial"/>
+                  <a:latin typeface="Arial" panose="020B0604020202020204"/>
+                  <a:ea typeface="Arial" panose="020B0604020202020204"/>
+                  <a:cs typeface="Arial" panose="020B0604020202020204"/>
                 </a:rPr>
                 <a:t>total</a:t>
               </a:r>
+              <a:endParaRPr lang="en-US" sz="1120" dirty="0">
+                <a:solidFill>
+                  <a:srgbClr val="5A6478"/>
+                </a:solidFill>
+                <a:latin typeface="Arial" panose="020B0604020202020204"/>
+                <a:ea typeface="Arial" panose="020B0604020202020204"/>
+                <a:cs typeface="Arial" panose="020B0604020202020204"/>
+              </a:endParaRPr>
             </a:p>
           </p:txBody>
         </p:sp>
@@ -18344,12 +19795,20 @@
                   <a:solidFill>
                     <a:srgbClr val="5A6478"/>
                   </a:solidFill>
-                  <a:latin typeface="Arial"/>
-                  <a:ea typeface="Microsoft YaHei"/>
-                  <a:cs typeface="Arial"/>
+                  <a:latin typeface="Arial" panose="020B0604020202020204"/>
+                  <a:ea typeface="微软雅黑" panose="020B0503020204020204" charset="-122"/>
+                  <a:cs typeface="Arial" panose="020B0604020202020204"/>
                 </a:rPr>
                 <a:t>模型预测</a:t>
               </a:r>
+              <a:endParaRPr lang="zh-CN" sz="1050" dirty="0">
+                <a:solidFill>
+                  <a:srgbClr val="5A6478"/>
+                </a:solidFill>
+                <a:latin typeface="Arial" panose="020B0604020202020204"/>
+                <a:ea typeface="微软雅黑" panose="020B0503020204020204" charset="-122"/>
+                <a:cs typeface="Arial" panose="020B0604020202020204"/>
+              </a:endParaRPr>
             </a:p>
           </p:txBody>
         </p:sp>
@@ -18442,12 +19901,20 @@
                   <a:solidFill>
                     <a:srgbClr val="5A6478"/>
                   </a:solidFill>
-                  <a:latin typeface="Arial"/>
-                  <a:ea typeface="Microsoft YaHei"/>
-                  <a:cs typeface="Arial"/>
+                  <a:latin typeface="Arial" panose="020B0604020202020204"/>
+                  <a:ea typeface="微软雅黑" panose="020B0503020204020204" charset="-122"/>
+                  <a:cs typeface="Arial" panose="020B0604020202020204"/>
                 </a:rPr>
                 <a:t>校准后</a:t>
               </a:r>
+              <a:endParaRPr lang="zh-CN" sz="1050" dirty="0">
+                <a:solidFill>
+                  <a:srgbClr val="5A6478"/>
+                </a:solidFill>
+                <a:latin typeface="Arial" panose="020B0604020202020204"/>
+                <a:ea typeface="微软雅黑" panose="020B0503020204020204" charset="-122"/>
+                <a:cs typeface="Arial" panose="020B0604020202020204"/>
+              </a:endParaRPr>
             </a:p>
           </p:txBody>
         </p:sp>
@@ -18540,12 +20007,20 @@
                   <a:solidFill>
                     <a:srgbClr val="5A6478"/>
                   </a:solidFill>
-                  <a:latin typeface="Arial"/>
-                  <a:ea typeface="Microsoft YaHei"/>
-                  <a:cs typeface="Arial"/>
+                  <a:latin typeface="Arial" panose="020B0604020202020204"/>
+                  <a:ea typeface="微软雅黑" panose="020B0503020204020204" charset="-122"/>
+                  <a:cs typeface="Arial" panose="020B0604020202020204"/>
                 </a:rPr>
                 <a:t>真实均值</a:t>
               </a:r>
+              <a:endParaRPr lang="zh-CN" sz="1050" dirty="0">
+                <a:solidFill>
+                  <a:srgbClr val="5A6478"/>
+                </a:solidFill>
+                <a:latin typeface="Arial" panose="020B0604020202020204"/>
+                <a:ea typeface="微软雅黑" panose="020B0503020204020204" charset="-122"/>
+                <a:cs typeface="Arial" panose="020B0604020202020204"/>
+              </a:endParaRPr>
             </a:p>
           </p:txBody>
         </p:sp>
@@ -18617,12 +20092,20 @@
                 <a:solidFill>
                   <a:srgbClr val="C9962B"/>
                 </a:solidFill>
-                <a:latin typeface="Times New Roman"/>
-                <a:ea typeface="Microsoft YaHei"/>
-                <a:cs typeface="Times New Roman"/>
+                <a:latin typeface="Times New Roman" panose="02020603050405020304"/>
+                <a:ea typeface="微软雅黑" panose="020B0503020204020204" charset="-122"/>
+                <a:cs typeface="Times New Roman" panose="02020603050405020304"/>
               </a:rPr>
               <a:t>FOUR INNOVATIONS · 四大创新点</a:t>
             </a:r>
+            <a:endParaRPr lang="zh-CN" sz="1350" b="1" spc="75" dirty="0">
+              <a:solidFill>
+                <a:srgbClr val="C9962B"/>
+              </a:solidFill>
+              <a:latin typeface="Times New Roman" panose="02020603050405020304"/>
+              <a:ea typeface="微软雅黑" panose="020B0503020204020204" charset="-122"/>
+              <a:cs typeface="Times New Roman" panose="02020603050405020304"/>
+            </a:endParaRPr>
           </a:p>
         </p:txBody>
       </p:sp>
@@ -18931,12 +20414,20 @@
                     <a:solidFill>
                       <a:srgbClr val="C9962B"/>
                     </a:solidFill>
-                    <a:latin typeface="Times New Roman"/>
-                    <a:ea typeface="Times New Roman"/>
-                    <a:cs typeface="Times New Roman"/>
+                    <a:latin typeface="Times New Roman" panose="02020603050405020304"/>
+                    <a:ea typeface="Times New Roman" panose="02020603050405020304"/>
+                    <a:cs typeface="Times New Roman" panose="02020603050405020304"/>
                   </a:rPr>
                   <a:t>①</a:t>
                 </a:r>
+                <a:endParaRPr lang="en-US" sz="1800" b="1" dirty="0">
+                  <a:solidFill>
+                    <a:srgbClr val="C9962B"/>
+                  </a:solidFill>
+                  <a:latin typeface="Times New Roman" panose="02020603050405020304"/>
+                  <a:ea typeface="Times New Roman" panose="02020603050405020304"/>
+                  <a:cs typeface="Times New Roman" panose="02020603050405020304"/>
+                </a:endParaRPr>
               </a:p>
             </p:txBody>
           </p:sp>
@@ -18971,12 +20462,20 @@
                     <a:solidFill>
                       <a:srgbClr val="1A3A6B"/>
                     </a:solidFill>
-                    <a:latin typeface="Arial"/>
-                    <a:ea typeface="Microsoft YaHei"/>
-                    <a:cs typeface="Arial"/>
+                    <a:latin typeface="Arial" panose="020B0604020202020204"/>
+                    <a:ea typeface="微软雅黑" panose="020B0503020204020204" charset="-122"/>
+                    <a:cs typeface="Arial" panose="020B0604020202020204"/>
                   </a:rPr>
                   <a:t>CT 特异性建模</a:t>
                 </a:r>
+                <a:endParaRPr lang="zh-CN" sz="1650" b="1" dirty="0">
+                  <a:solidFill>
+                    <a:srgbClr val="1A3A6B"/>
+                  </a:solidFill>
+                  <a:latin typeface="Arial" panose="020B0604020202020204"/>
+                  <a:ea typeface="微软雅黑" panose="020B0503020204020204" charset="-122"/>
+                  <a:cs typeface="Arial" panose="020B0604020202020204"/>
+                </a:endParaRPr>
               </a:p>
             </p:txBody>
           </p:sp>
@@ -19011,12 +20510,20 @@
                     <a:solidFill>
                       <a:srgbClr val="5A6478"/>
                     </a:solidFill>
-                    <a:latin typeface="Arial"/>
-                    <a:ea typeface="Microsoft YaHei"/>
-                    <a:cs typeface="Arial"/>
+                    <a:latin typeface="Arial" panose="020B0604020202020204"/>
+                    <a:ea typeface="微软雅黑" panose="020B0503020204020204" charset="-122"/>
+                    <a:cs typeface="Arial" panose="020B0604020202020204"/>
                   </a:rPr>
                   <a:t>按控制类型分别建模，捕捉 recipe / operator / apc 工艺差异</a:t>
                 </a:r>
+                <a:endParaRPr lang="zh-CN" sz="1280" dirty="0">
+                  <a:solidFill>
+                    <a:srgbClr val="5A6478"/>
+                  </a:solidFill>
+                  <a:latin typeface="Arial" panose="020B0604020202020204"/>
+                  <a:ea typeface="微软雅黑" panose="020B0503020204020204" charset="-122"/>
+                  <a:cs typeface="Arial" panose="020B0604020202020204"/>
+                </a:endParaRPr>
               </a:p>
             </p:txBody>
           </p:sp>
@@ -19051,12 +20558,20 @@
                     <a:solidFill>
                       <a:srgbClr val="8A92A0"/>
                     </a:solidFill>
-                    <a:latin typeface="Arial"/>
-                    <a:ea typeface="Microsoft YaHei"/>
-                    <a:cs typeface="Arial"/>
+                    <a:latin typeface="Arial" panose="020B0604020202020204"/>
+                    <a:ea typeface="微软雅黑" panose="020B0503020204020204" charset="-122"/>
+                    <a:cs typeface="Arial" panose="020B0604020202020204"/>
                   </a:rPr>
                   <a:t>核心决策点，驱动整个方案架构</a:t>
                 </a:r>
+                <a:endParaRPr lang="zh-CN" sz="1120" dirty="0">
+                  <a:solidFill>
+                    <a:srgbClr val="8A92A0"/>
+                  </a:solidFill>
+                  <a:latin typeface="Arial" panose="020B0604020202020204"/>
+                  <a:ea typeface="微软雅黑" panose="020B0503020204020204" charset="-122"/>
+                  <a:cs typeface="Arial" panose="020B0604020202020204"/>
+                </a:endParaRPr>
               </a:p>
             </p:txBody>
           </p:sp>
@@ -19173,12 +20688,20 @@
                     <a:solidFill>
                       <a:srgbClr val="C9962B"/>
                     </a:solidFill>
-                    <a:latin typeface="Times New Roman"/>
-                    <a:ea typeface="Times New Roman"/>
-                    <a:cs typeface="Times New Roman"/>
+                    <a:latin typeface="Times New Roman" panose="02020603050405020304"/>
+                    <a:ea typeface="Times New Roman" panose="02020603050405020304"/>
+                    <a:cs typeface="Times New Roman" panose="02020603050405020304"/>
                   </a:rPr>
                   <a:t>②</a:t>
                 </a:r>
+                <a:endParaRPr lang="en-US" sz="1800" b="1" dirty="0">
+                  <a:solidFill>
+                    <a:srgbClr val="C9962B"/>
+                  </a:solidFill>
+                  <a:latin typeface="Times New Roman" panose="02020603050405020304"/>
+                  <a:ea typeface="Times New Roman" panose="02020603050405020304"/>
+                  <a:cs typeface="Times New Roman" panose="02020603050405020304"/>
+                </a:endParaRPr>
               </a:p>
             </p:txBody>
           </p:sp>
@@ -19213,12 +20736,20 @@
                     <a:solidFill>
                       <a:srgbClr val="1A3A6B"/>
                     </a:solidFill>
-                    <a:latin typeface="Arial"/>
-                    <a:ea typeface="Microsoft YaHei"/>
-                    <a:cs typeface="Arial"/>
+                    <a:latin typeface="Arial" panose="020B0604020202020204"/>
+                    <a:ea typeface="微软雅黑" panose="020B0503020204020204" charset="-122"/>
+                    <a:cs typeface="Arial" panose="020B0604020202020204"/>
                   </a:rPr>
                   <a:t>自适应特征选择</a:t>
                 </a:r>
+                <a:endParaRPr lang="zh-CN" sz="1650" b="1" dirty="0">
+                  <a:solidFill>
+                    <a:srgbClr val="1A3A6B"/>
+                  </a:solidFill>
+                  <a:latin typeface="Arial" panose="020B0604020202020204"/>
+                  <a:ea typeface="微软雅黑" panose="020B0503020204020204" charset="-122"/>
+                  <a:cs typeface="Arial" panose="020B0604020202020204"/>
+                </a:endParaRPr>
               </a:p>
             </p:txBody>
           </p:sp>
@@ -19253,12 +20784,20 @@
                     <a:solidFill>
                       <a:srgbClr val="5A6478"/>
                     </a:solidFill>
-                    <a:latin typeface="Arial"/>
-                    <a:ea typeface="Microsoft YaHei"/>
-                    <a:cs typeface="Arial"/>
+                    <a:latin typeface="Arial" panose="020B0604020202020204"/>
+                    <a:ea typeface="微软雅黑" panose="020B0503020204020204" charset="-122"/>
+                    <a:cs typeface="Arial" panose="020B0604020202020204"/>
                   </a:rPr>
                   <a:t>APC 全局排名，其他 CT 内排名；K 值按样本数自适应</a:t>
                 </a:r>
+                <a:endParaRPr lang="zh-CN" sz="1280" dirty="0">
+                  <a:solidFill>
+                    <a:srgbClr val="5A6478"/>
+                  </a:solidFill>
+                  <a:latin typeface="Arial" panose="020B0604020202020204"/>
+                  <a:ea typeface="微软雅黑" panose="020B0503020204020204" charset="-122"/>
+                  <a:cs typeface="Arial" panose="020B0604020202020204"/>
+                </a:endParaRPr>
               </a:p>
             </p:txBody>
           </p:sp>
@@ -19293,12 +20832,20 @@
                     <a:solidFill>
                       <a:srgbClr val="8A92A0"/>
                     </a:solidFill>
-                    <a:latin typeface="Arial"/>
-                    <a:ea typeface="Microsoft YaHei"/>
-                    <a:cs typeface="Arial"/>
+                    <a:latin typeface="Arial" panose="020B0604020202020204"/>
+                    <a:ea typeface="微软雅黑" panose="020B0503020204020204" charset="-122"/>
+                    <a:cs typeface="Arial" panose="020B0604020202020204"/>
                   </a:rPr>
                   <a:t>小样本 CT 更激进降维，防过拟合</a:t>
                 </a:r>
+                <a:endParaRPr lang="zh-CN" sz="1120" dirty="0">
+                  <a:solidFill>
+                    <a:srgbClr val="8A92A0"/>
+                  </a:solidFill>
+                  <a:latin typeface="Arial" panose="020B0604020202020204"/>
+                  <a:ea typeface="微软雅黑" panose="020B0503020204020204" charset="-122"/>
+                  <a:cs typeface="Arial" panose="020B0604020202020204"/>
+                </a:endParaRPr>
               </a:p>
             </p:txBody>
           </p:sp>
@@ -19572,12 +21119,20 @@
                     <a:solidFill>
                       <a:srgbClr val="C9962B"/>
                     </a:solidFill>
-                    <a:latin typeface="Times New Roman"/>
-                    <a:ea typeface="Times New Roman"/>
-                    <a:cs typeface="Times New Roman"/>
+                    <a:latin typeface="Times New Roman" panose="02020603050405020304"/>
+                    <a:ea typeface="Times New Roman" panose="02020603050405020304"/>
+                    <a:cs typeface="Times New Roman" panose="02020603050405020304"/>
                   </a:rPr>
                   <a:t>③</a:t>
                 </a:r>
+                <a:endParaRPr lang="en-US" sz="1800" b="1" dirty="0">
+                  <a:solidFill>
+                    <a:srgbClr val="C9962B"/>
+                  </a:solidFill>
+                  <a:latin typeface="Times New Roman" panose="02020603050405020304"/>
+                  <a:ea typeface="Times New Roman" panose="02020603050405020304"/>
+                  <a:cs typeface="Times New Roman" panose="02020603050405020304"/>
+                </a:endParaRPr>
               </a:p>
             </p:txBody>
           </p:sp>
@@ -19612,12 +21167,20 @@
                     <a:solidFill>
                       <a:srgbClr val="1A3A6B"/>
                     </a:solidFill>
-                    <a:latin typeface="Arial"/>
-                    <a:ea typeface="Microsoft YaHei"/>
-                    <a:cs typeface="Arial"/>
+                    <a:latin typeface="Arial" panose="020B0604020202020204"/>
+                    <a:ea typeface="微软雅黑" panose="020B0503020204020204" charset="-122"/>
+                    <a:cs typeface="Arial" panose="020B0604020202020204"/>
                   </a:rPr>
                   <a:t>分层校准</a:t>
                 </a:r>
+                <a:endParaRPr lang="zh-CN" sz="1650" b="1" dirty="0">
+                  <a:solidFill>
+                    <a:srgbClr val="1A3A6B"/>
+                  </a:solidFill>
+                  <a:latin typeface="Arial" panose="020B0604020202020204"/>
+                  <a:ea typeface="微软雅黑" panose="020B0503020204020204" charset="-122"/>
+                  <a:cs typeface="Arial" panose="020B0604020202020204"/>
+                </a:endParaRPr>
               </a:p>
             </p:txBody>
           </p:sp>
@@ -19652,12 +21215,20 @@
                     <a:solidFill>
                       <a:srgbClr val="5A6478"/>
                     </a:solidFill>
-                    <a:latin typeface="Arial"/>
-                    <a:ea typeface="Microsoft YaHei"/>
-                    <a:cs typeface="Arial"/>
+                    <a:latin typeface="Arial" panose="020B0604020202020204"/>
+                    <a:ea typeface="微软雅黑" panose="020B0503020204020204" charset="-122"/>
+                    <a:cs typeface="Arial" panose="020B0604020202020204"/>
                   </a:rPr>
                   <a:t>OOF R² 差异化收缩：apc 70% vs recipe 35%</a:t>
                 </a:r>
+                <a:endParaRPr lang="zh-CN" sz="1280" dirty="0">
+                  <a:solidFill>
+                    <a:srgbClr val="5A6478"/>
+                  </a:solidFill>
+                  <a:latin typeface="Arial" panose="020B0604020202020204"/>
+                  <a:ea typeface="微软雅黑" panose="020B0503020204020204" charset="-122"/>
+                  <a:cs typeface="Arial" panose="020B0604020202020204"/>
+                </a:endParaRPr>
               </a:p>
             </p:txBody>
           </p:sp>
@@ -19692,12 +21263,20 @@
                     <a:solidFill>
                       <a:srgbClr val="8A92A0"/>
                     </a:solidFill>
-                    <a:latin typeface="Arial"/>
-                    <a:ea typeface="Microsoft YaHei"/>
-                    <a:cs typeface="Arial"/>
+                    <a:latin typeface="Arial" panose="020B0604020202020204"/>
+                    <a:ea typeface="微软雅黑" panose="020B0503020204020204" charset="-122"/>
+                    <a:cs typeface="Arial" panose="020B0604020202020204"/>
                   </a:rPr>
                   <a:t>低置信度预测向参考点回归，稳健输出</a:t>
                 </a:r>
+                <a:endParaRPr lang="zh-CN" sz="1120" dirty="0">
+                  <a:solidFill>
+                    <a:srgbClr val="8A92A0"/>
+                  </a:solidFill>
+                  <a:latin typeface="Arial" panose="020B0604020202020204"/>
+                  <a:ea typeface="微软雅黑" panose="020B0503020204020204" charset="-122"/>
+                  <a:cs typeface="Arial" panose="020B0604020202020204"/>
+                </a:endParaRPr>
               </a:p>
             </p:txBody>
           </p:sp>
@@ -19798,12 +21377,20 @@
                     <a:solidFill>
                       <a:srgbClr val="C9962B"/>
                     </a:solidFill>
-                    <a:latin typeface="Times New Roman"/>
-                    <a:ea typeface="Times New Roman"/>
-                    <a:cs typeface="Times New Roman"/>
+                    <a:latin typeface="Times New Roman" panose="02020603050405020304"/>
+                    <a:ea typeface="Times New Roman" panose="02020603050405020304"/>
+                    <a:cs typeface="Times New Roman" panose="02020603050405020304"/>
                   </a:rPr>
                   <a:t>④</a:t>
                 </a:r>
+                <a:endParaRPr lang="en-US" sz="1800" b="1" dirty="0">
+                  <a:solidFill>
+                    <a:srgbClr val="C9962B"/>
+                  </a:solidFill>
+                  <a:latin typeface="Times New Roman" panose="02020603050405020304"/>
+                  <a:ea typeface="Times New Roman" panose="02020603050405020304"/>
+                  <a:cs typeface="Times New Roman" panose="02020603050405020304"/>
+                </a:endParaRPr>
               </a:p>
             </p:txBody>
           </p:sp>
@@ -19838,12 +21425,20 @@
                     <a:solidFill>
                       <a:srgbClr val="1A3A6B"/>
                     </a:solidFill>
-                    <a:latin typeface="Arial"/>
-                    <a:ea typeface="Microsoft YaHei"/>
-                    <a:cs typeface="Arial"/>
+                    <a:latin typeface="Arial" panose="020B0604020202020204"/>
+                    <a:ea typeface="微软雅黑" panose="020B0503020204020204" charset="-122"/>
+                    <a:cs typeface="Arial" panose="020B0604020202020204"/>
                   </a:rPr>
                   <a:t>样本加权</a:t>
                 </a:r>
+                <a:endParaRPr lang="zh-CN" sz="1650" b="1" dirty="0">
+                  <a:solidFill>
+                    <a:srgbClr val="1A3A6B"/>
+                  </a:solidFill>
+                  <a:latin typeface="Arial" panose="020B0604020202020204"/>
+                  <a:ea typeface="微软雅黑" panose="020B0503020204020204" charset="-122"/>
+                  <a:cs typeface="Arial" panose="020B0604020202020204"/>
+                </a:endParaRPr>
               </a:p>
             </p:txBody>
           </p:sp>
@@ -19878,12 +21473,20 @@
                     <a:solidFill>
                       <a:srgbClr val="5A6478"/>
                     </a:solidFill>
-                    <a:latin typeface="Arial"/>
-                    <a:ea typeface="Microsoft YaHei"/>
-                    <a:cs typeface="Arial"/>
+                    <a:latin typeface="Arial" panose="020B0604020202020204"/>
+                    <a:ea typeface="微软雅黑" panose="020B0503020204020204" charset="-122"/>
+                    <a:cs typeface="Arial" panose="020B0604020202020204"/>
                   </a:rPr>
                   <a:t>本 CT 样本 weight=2 + 30 seed Ensemble</a:t>
                 </a:r>
+                <a:endParaRPr lang="zh-CN" sz="1280" dirty="0">
+                  <a:solidFill>
+                    <a:srgbClr val="5A6478"/>
+                  </a:solidFill>
+                  <a:latin typeface="Arial" panose="020B0604020202020204"/>
+                  <a:ea typeface="微软雅黑" panose="020B0503020204020204" charset="-122"/>
+                  <a:cs typeface="Arial" panose="020B0604020202020204"/>
+                </a:endParaRPr>
               </a:p>
             </p:txBody>
           </p:sp>
@@ -19918,12 +21521,20 @@
                     <a:solidFill>
                       <a:srgbClr val="8A92A0"/>
                     </a:solidFill>
-                    <a:latin typeface="Arial"/>
-                    <a:ea typeface="Microsoft YaHei"/>
-                    <a:cs typeface="Arial"/>
+                    <a:latin typeface="Arial" panose="020B0604020202020204"/>
+                    <a:ea typeface="微软雅黑" panose="020B0503020204020204" charset="-122"/>
+                    <a:cs typeface="Arial" panose="020B0604020202020204"/>
                   </a:rPr>
                   <a:t>聚焦目标 CT 分布，稳定预测</a:t>
                 </a:r>
+                <a:endParaRPr lang="zh-CN" sz="1120" dirty="0">
+                  <a:solidFill>
+                    <a:srgbClr val="8A92A0"/>
+                  </a:solidFill>
+                  <a:latin typeface="Arial" panose="020B0604020202020204"/>
+                  <a:ea typeface="微软雅黑" panose="020B0503020204020204" charset="-122"/>
+                  <a:cs typeface="Arial" panose="020B0604020202020204"/>
+                </a:endParaRPr>
               </a:p>
             </p:txBody>
           </p:sp>
@@ -20010,12 +21621,20 @@
                   <a:solidFill>
                     <a:srgbClr val="8A92A0"/>
                   </a:solidFill>
-                  <a:latin typeface="Arial"/>
-                  <a:ea typeface="Microsoft YaHei"/>
-                  <a:cs typeface="Arial"/>
+                  <a:latin typeface="Arial" panose="020B0604020202020204"/>
+                  <a:ea typeface="微软雅黑" panose="020B0503020204020204" charset="-122"/>
+                  <a:cs typeface="Arial" panose="020B0604020202020204"/>
                 </a:rPr>
                 <a:t>MAE 3.67 = CT 特异性建模 + 分层校准 + 样本加权 + 自适应特征选择</a:t>
               </a:r>
+              <a:endParaRPr lang="zh-CN" sz="1200" dirty="0">
+                <a:solidFill>
+                  <a:srgbClr val="8A92A0"/>
+                </a:solidFill>
+                <a:latin typeface="Arial" panose="020B0604020202020204"/>
+                <a:ea typeface="微软雅黑" panose="020B0503020204020204" charset="-122"/>
+                <a:cs typeface="Arial" panose="020B0604020202020204"/>
+              </a:endParaRPr>
             </a:p>
           </p:txBody>
         </p:sp>
@@ -20050,12 +21669,20 @@
                   <a:solidFill>
                     <a:srgbClr val="8A92A0"/>
                   </a:solidFill>
-                  <a:latin typeface="Times New Roman"/>
-                  <a:ea typeface="Times New Roman"/>
-                  <a:cs typeface="Times New Roman"/>
+                  <a:latin typeface="Times New Roman" panose="02020603050405020304"/>
+                  <a:ea typeface="Times New Roman" panose="02020603050405020304"/>
+                  <a:cs typeface="Times New Roman" panose="02020603050405020304"/>
                 </a:rPr>
                 <a:t>05 / 05</a:t>
               </a:r>
+              <a:endParaRPr lang="en-US" sz="1200" dirty="0">
+                <a:solidFill>
+                  <a:srgbClr val="8A92A0"/>
+                </a:solidFill>
+                <a:latin typeface="Times New Roman" panose="02020603050405020304"/>
+                <a:ea typeface="Times New Roman" panose="02020603050405020304"/>
+                <a:cs typeface="Times New Roman" panose="02020603050405020304"/>
+              </a:endParaRPr>
             </a:p>
           </p:txBody>
         </p:sp>
@@ -20065,9 +21692,18 @@
   <p:clrMapOvr>
     <a:masterClrMapping/>
   </p:clrMapOvr>
-  <p:transition xmlns:p14="http://schemas.microsoft.com/office/powerpoint/2010/main" p14:dur="400">
-    <p:fade/>
-  </p:transition>
+  <mc:AlternateContent xmlns:mc="http://schemas.openxmlformats.org/markup-compatibility/2006">
+    <mc:Choice xmlns:p14="http://schemas.microsoft.com/office/powerpoint/2010/main" Requires="p14">
+      <p:transition p14:dur="400">
+        <p:fade/>
+      </p:transition>
+    </mc:Choice>
+    <mc:Fallback>
+      <p:transition>
+        <p:fade/>
+      </p:transition>
+    </mc:Fallback>
+  </mc:AlternateContent>
 </p:sld>
 </file>
 
@@ -20387,7 +22023,11 @@
       </a:style>
     </a:lnDef>
   </a:objectDefaults>
-  <a:extraClrSchemeLst/>
+  <a:extLst>
+    <a:ext uri="{05A4C25C-085E-4340-85A3-A5531E510DB2}">
+      <thm15:themeFamily xmlns:thm15="http://schemas.microsoft.com/office/thememl/2012/main" name="Office Theme" id="{62F939B6-93AF-4DB8-9C6B-D6C7DFDC589F}" vid="{4A3C46E8-61CC-4603-A589-7422A47A8E4A}"/>
+    </a:ext>
+  </a:extLst>
 </a:theme>
 </file>
 
@@ -20707,6 +22347,10 @@
       </a:style>
     </a:lnDef>
   </a:objectDefaults>
-  <a:extraClrSchemeLst/>
+  <a:extLst>
+    <a:ext uri="{05A4C25C-085E-4340-85A3-A5531E510DB2}">
+      <thm15:themeFamily xmlns:thm15="http://schemas.microsoft.com/office/thememl/2012/main" name="Office Theme" id="{62F939B6-93AF-4DB8-9C6B-D6C7DFDC589F}" vid="{4A3C46E8-61CC-4603-A589-7422A47A8E4A}"/>
+    </a:ext>
+  </a:extLst>
 </a:theme>
 </file>
--- a/Project Overview.pptx
+++ b/Project Overview.pptx
@@ -5,16 +5,16 @@
     <p:sldMasterId id="2147483648" r:id="rId1"/>
   </p:sldMasterIdLst>
   <p:notesMasterIdLst>
-    <p:notesMasterId r:id="rId4"/>
+    <p:notesMasterId r:id="rId7"/>
   </p:notesMasterIdLst>
   <p:sldIdLst>
-    <p:sldId id="256" r:id="rId3"/>
-    <p:sldId id="257" r:id="rId5"/>
-    <p:sldId id="258" r:id="rId6"/>
-    <p:sldId id="259" r:id="rId7"/>
-    <p:sldId id="260" r:id="rId8"/>
+    <p:sldId id="256" r:id="rId2"/>
+    <p:sldId id="257" r:id="rId3"/>
+    <p:sldId id="258" r:id="rId4"/>
+    <p:sldId id="259" r:id="rId5"/>
+    <p:sldId id="260" r:id="rId6"/>
   </p:sldIdLst>
-  <p:sldSz cx="12192000" cy="7620000" type="screen4x3"/>
+  <p:sldSz cx="12192000" cy="7620000"/>
   <p:notesSz cx="6858000" cy="9144000"/>
   <p:defaultTextStyle>
     <a:defPPr>
@@ -319,7 +319,6 @@
               <a:rPr lang="zh-CN" dirty="0"/>
               <a:t>各位评委好，今天介绍我们的梅特勒托利多 AI 竞赛项目方案——青霉素发酵稳定期目标变量预测。我们最终在排行榜上取得了平均绝对误差三点六七的成绩，这个结果源于我们对控制类型异质性的深入分析和针对性的建模策略。接下来从问题背景、数据探索、方案流程和最终性能四个方面展开介绍。</a:t>
             </a:r>
-            <a:endParaRPr lang="zh-CN" dirty="0"/>
           </a:p>
         </p:txBody>
       </p:sp>
@@ -379,7 +378,6 @@
               <a:rPr lang="zh-CN" dirty="0"/>
               <a:t>在明确了项目目标之后，来看我们面临的问题。任务是要预测青霉素发酵批次在稳定期的目标变量均值，这是一个回归任务，用平均绝对误差来评价。训练集只有一百零五个样本，测试集二十个样本，特征维度却高达九十七维，而且每个批次的时间序列长度不等，有五种、十种、二十种和三十五种时间点这四种情况。更关键的是，数据包含三种不同的控制类型——固定配方、操作员人工干预和自动过程控制，它们的工艺逻辑完全不同。这就构成了三大核心挑战：小样本高维容易过拟合，不等长时间序列需要压缩成固定长度，以及控制类型的异质性要求差异化处理。</a:t>
             </a:r>
-            <a:endParaRPr lang="zh-CN" dirty="0"/>
           </a:p>
         </p:txBody>
       </p:sp>
@@ -439,7 +437,6 @@
               <a:rPr lang="zh-CN" dirty="0"/>
               <a:t>带着这三大挑战，我们对数据进行了深入探索，最重要的发现是三类控制类型的目标分布显著不同。从对比表可以看到，固定配方控制有大约五十二个样本，目标均值二十四点八四；操作员控制约四十七个样本，均值二十五点零五；而自动过程控制只有六个样本，均值却高达二十八点一六。这个分布差异是整个方案的核心决策点——它直接决定了我们不能用同一个模型来处理所有样本，而必须按控制类型分别建模。此外我们还发现，六十四个拉曼光谱通道中只有八到十二个与目标强相关，需要特征选择；而温度、酸碱度等过程变量在交叉验证中并没有带来性能提升，所以最终方案只使用了光谱特征。</a:t>
             </a:r>
-            <a:endParaRPr lang="zh-CN" dirty="0"/>
           </a:p>
         </p:txBody>
       </p:sp>
@@ -499,7 +496,6 @@
               <a:rPr lang="zh-CN" dirty="0"/>
               <a:t>基于这些发现，我们设计了五阶段流水线方案。第一阶段是数据预处理，用前向和后向填充处理缺失值。第二阶段是特征工程，对六十四个通道分别计算均值、标准差、偏度、中位数和变异系数五个统计量，生成三百二十个候选特征。第三阶段是控制类型特异性的特征选择，按各自的相关性排名分别选取，固定配方选十四个，操作员选二十二个，自动控制因为样本太少只选三个而且用全局排名。第四阶段是 Ridge 回归建模，用 alpha 等于零点一的 L2 正则化，配合标准化、样本加权和三十次随机种子集成。第五阶段是分层校准，根据每种控制类型的交叉验证 R 平方来差异化设置收缩比例，R 平方越低收缩越多，最终输出提交文件。整个流程在 GroupKFold 五折交叉验证下取得了三点七一的成绩。</a:t>
             </a:r>
-            <a:endParaRPr lang="zh-CN" dirty="0"/>
           </a:p>
         </p:txBody>
       </p:sp>
@@ -559,7 +555,6 @@
               <a:rPr lang="zh-CN" dirty="0"/>
               <a:t>最后来看最终性能。我们在排行榜上取得了平均绝对误差三点六七的成绩，交叉验证成绩三点七一。校准的改善路径非常清晰：从基线的四点零六，加上固定配方校准降到三点八九，再加操作员校准降到三点八一，最后加自动控制校准降到三点六七，累计改善了零点三九。这个成绩源于四大创新：第一，控制类型特异性建模，充分捕捉工艺差异；第二，自适应特征选择，小样本类型更激进地降维防止过拟合；第三，分层校准，根据置信度差异化收缩；第四，样本加权，让模型聚焦目标分布。以上就是我们的项目方案，谢谢各位评委。</a:t>
             </a:r>
-            <a:endParaRPr lang="zh-CN" dirty="0"/>
           </a:p>
         </p:txBody>
       </p:sp>
@@ -609,10 +604,9 @@
           <a:lstStyle/>
           <a:p>
             <a:r>
-              <a:rPr lang="en-US" smtClean="0"/>
+              <a:rPr lang="en-US"/>
               <a:t>Click to edit Master title style</a:t>
             </a:r>
-            <a:endParaRPr lang="en-US"/>
           </a:p>
         </p:txBody>
       </p:sp>
@@ -728,10 +722,9 @@
           </a:lstStyle>
           <a:p>
             <a:r>
-              <a:rPr lang="en-US" smtClean="0"/>
+              <a:rPr lang="en-US"/>
               <a:t>Click to edit Master subtitle style</a:t>
             </a:r>
-            <a:endParaRPr lang="en-US"/>
           </a:p>
         </p:txBody>
       </p:sp>
@@ -752,6 +745,7 @@
           <a:p>
             <a:fld id="{5BCAD085-E8A6-8845-BD4E-CB4CCA059FC4}" type="datetimeFigureOut">
               <a:rPr lang="en-US" smtClean="0"/>
+              <a:t>7/7/2026</a:t>
             </a:fld>
             <a:endParaRPr lang="en-US"/>
           </a:p>
@@ -793,6 +787,7 @@
           <a:p>
             <a:fld id="{C1FF6DA9-008F-8B48-92A6-B652298478BF}" type="slidenum">
               <a:rPr lang="en-US" smtClean="0"/>
+              <a:t>‹#›</a:t>
             </a:fld>
             <a:endParaRPr lang="en-US"/>
           </a:p>
@@ -839,10 +834,9 @@
           <a:lstStyle/>
           <a:p>
             <a:r>
-              <a:rPr lang="en-US" smtClean="0"/>
+              <a:rPr lang="en-US"/>
               <a:t>Click to edit Master title style</a:t>
             </a:r>
-            <a:endParaRPr lang="en-US"/>
           </a:p>
         </p:txBody>
       </p:sp>
@@ -863,42 +857,37 @@
           <a:p>
             <a:pPr lvl="0"/>
             <a:r>
-              <a:rPr lang="en-US" smtClean="0"/>
+              <a:rPr lang="en-US"/>
               <a:t>Click to edit Master text styles</a:t>
             </a:r>
-            <a:endParaRPr lang="en-US" smtClean="0"/>
           </a:p>
           <a:p>
             <a:pPr lvl="1"/>
             <a:r>
-              <a:rPr lang="en-US" smtClean="0"/>
+              <a:rPr lang="en-US"/>
               <a:t>Second level</a:t>
             </a:r>
-            <a:endParaRPr lang="en-US" smtClean="0"/>
           </a:p>
           <a:p>
             <a:pPr lvl="2"/>
             <a:r>
-              <a:rPr lang="en-US" smtClean="0"/>
+              <a:rPr lang="en-US"/>
               <a:t>Third level</a:t>
             </a:r>
-            <a:endParaRPr lang="en-US" smtClean="0"/>
           </a:p>
           <a:p>
             <a:pPr lvl="3"/>
             <a:r>
-              <a:rPr lang="en-US" smtClean="0"/>
+              <a:rPr lang="en-US"/>
               <a:t>Fourth level</a:t>
             </a:r>
-            <a:endParaRPr lang="en-US" smtClean="0"/>
           </a:p>
           <a:p>
             <a:pPr lvl="4"/>
             <a:r>
-              <a:rPr lang="en-US" smtClean="0"/>
+              <a:rPr lang="en-US"/>
               <a:t>Fifth level</a:t>
             </a:r>
-            <a:endParaRPr lang="en-US"/>
           </a:p>
         </p:txBody>
       </p:sp>
@@ -919,6 +908,7 @@
           <a:p>
             <a:fld id="{5BCAD085-E8A6-8845-BD4E-CB4CCA059FC4}" type="datetimeFigureOut">
               <a:rPr lang="en-US" smtClean="0"/>
+              <a:t>7/7/2026</a:t>
             </a:fld>
             <a:endParaRPr lang="en-US"/>
           </a:p>
@@ -960,6 +950,7 @@
           <a:p>
             <a:fld id="{C1FF6DA9-008F-8B48-92A6-B652298478BF}" type="slidenum">
               <a:rPr lang="en-US" smtClean="0"/>
+              <a:t>‹#›</a:t>
             </a:fld>
             <a:endParaRPr lang="en-US"/>
           </a:p>
@@ -1011,10 +1002,9 @@
           <a:lstStyle/>
           <a:p>
             <a:r>
-              <a:rPr lang="en-US" smtClean="0"/>
+              <a:rPr lang="en-US"/>
               <a:t>Click to edit Master title style</a:t>
             </a:r>
-            <a:endParaRPr lang="en-US"/>
           </a:p>
         </p:txBody>
       </p:sp>
@@ -1040,42 +1030,37 @@
           <a:p>
             <a:pPr lvl="0"/>
             <a:r>
-              <a:rPr lang="en-US" smtClean="0"/>
+              <a:rPr lang="en-US"/>
               <a:t>Click to edit Master text styles</a:t>
             </a:r>
-            <a:endParaRPr lang="en-US" smtClean="0"/>
           </a:p>
           <a:p>
             <a:pPr lvl="1"/>
             <a:r>
-              <a:rPr lang="en-US" smtClean="0"/>
+              <a:rPr lang="en-US"/>
               <a:t>Second level</a:t>
             </a:r>
-            <a:endParaRPr lang="en-US" smtClean="0"/>
           </a:p>
           <a:p>
             <a:pPr lvl="2"/>
             <a:r>
-              <a:rPr lang="en-US" smtClean="0"/>
+              <a:rPr lang="en-US"/>
               <a:t>Third level</a:t>
             </a:r>
-            <a:endParaRPr lang="en-US" smtClean="0"/>
           </a:p>
           <a:p>
             <a:pPr lvl="3"/>
             <a:r>
-              <a:rPr lang="en-US" smtClean="0"/>
+              <a:rPr lang="en-US"/>
               <a:t>Fourth level</a:t>
             </a:r>
-            <a:endParaRPr lang="en-US" smtClean="0"/>
           </a:p>
           <a:p>
             <a:pPr lvl="4"/>
             <a:r>
-              <a:rPr lang="en-US" smtClean="0"/>
+              <a:rPr lang="en-US"/>
               <a:t>Fifth level</a:t>
             </a:r>
-            <a:endParaRPr lang="en-US"/>
           </a:p>
         </p:txBody>
       </p:sp>
@@ -1096,6 +1081,7 @@
           <a:p>
             <a:fld id="{5BCAD085-E8A6-8845-BD4E-CB4CCA059FC4}" type="datetimeFigureOut">
               <a:rPr lang="en-US" smtClean="0"/>
+              <a:t>7/7/2026</a:t>
             </a:fld>
             <a:endParaRPr lang="en-US"/>
           </a:p>
@@ -1137,6 +1123,7 @@
           <a:p>
             <a:fld id="{C1FF6DA9-008F-8B48-92A6-B652298478BF}" type="slidenum">
               <a:rPr lang="en-US" smtClean="0"/>
+              <a:t>‹#›</a:t>
             </a:fld>
             <a:endParaRPr lang="en-US"/>
           </a:p>
@@ -1183,10 +1170,9 @@
           <a:lstStyle/>
           <a:p>
             <a:r>
-              <a:rPr lang="en-US" smtClean="0"/>
+              <a:rPr lang="en-US"/>
               <a:t>Click to edit Master title style</a:t>
             </a:r>
-            <a:endParaRPr lang="en-US"/>
           </a:p>
         </p:txBody>
       </p:sp>
@@ -1207,42 +1193,37 @@
           <a:p>
             <a:pPr lvl="0"/>
             <a:r>
-              <a:rPr lang="en-US" smtClean="0"/>
+              <a:rPr lang="en-US"/>
               <a:t>Click to edit Master text styles</a:t>
             </a:r>
-            <a:endParaRPr lang="en-US" smtClean="0"/>
           </a:p>
           <a:p>
             <a:pPr lvl="1"/>
             <a:r>
-              <a:rPr lang="en-US" smtClean="0"/>
+              <a:rPr lang="en-US"/>
               <a:t>Second level</a:t>
             </a:r>
-            <a:endParaRPr lang="en-US" smtClean="0"/>
           </a:p>
           <a:p>
             <a:pPr lvl="2"/>
             <a:r>
-              <a:rPr lang="en-US" smtClean="0"/>
+              <a:rPr lang="en-US"/>
               <a:t>Third level</a:t>
             </a:r>
-            <a:endParaRPr lang="en-US" smtClean="0"/>
           </a:p>
           <a:p>
             <a:pPr lvl="3"/>
             <a:r>
-              <a:rPr lang="en-US" smtClean="0"/>
+              <a:rPr lang="en-US"/>
               <a:t>Fourth level</a:t>
             </a:r>
-            <a:endParaRPr lang="en-US" smtClean="0"/>
           </a:p>
           <a:p>
             <a:pPr lvl="4"/>
             <a:r>
-              <a:rPr lang="en-US" smtClean="0"/>
+              <a:rPr lang="en-US"/>
               <a:t>Fifth level</a:t>
             </a:r>
-            <a:endParaRPr lang="en-US"/>
           </a:p>
         </p:txBody>
       </p:sp>
@@ -1263,6 +1244,7 @@
           <a:p>
             <a:fld id="{5BCAD085-E8A6-8845-BD4E-CB4CCA059FC4}" type="datetimeFigureOut">
               <a:rPr lang="en-US" smtClean="0"/>
+              <a:t>7/7/2026</a:t>
             </a:fld>
             <a:endParaRPr lang="en-US"/>
           </a:p>
@@ -1304,6 +1286,7 @@
           <a:p>
             <a:fld id="{C1FF6DA9-008F-8B48-92A6-B652298478BF}" type="slidenum">
               <a:rPr lang="en-US" smtClean="0"/>
+              <a:t>‹#›</a:t>
             </a:fld>
             <a:endParaRPr lang="en-US"/>
           </a:p>
@@ -1359,10 +1342,9 @@
           </a:lstStyle>
           <a:p>
             <a:r>
-              <a:rPr lang="en-US" smtClean="0"/>
+              <a:rPr lang="en-US"/>
               <a:t>Click to edit Master title style</a:t>
             </a:r>
-            <a:endParaRPr lang="en-US"/>
           </a:p>
         </p:txBody>
       </p:sp>
@@ -1479,10 +1461,9 @@
           <a:p>
             <a:pPr lvl="0"/>
             <a:r>
-              <a:rPr lang="en-US" smtClean="0"/>
+              <a:rPr lang="en-US"/>
               <a:t>Click to edit Master text styles</a:t>
             </a:r>
-            <a:endParaRPr lang="en-US" smtClean="0"/>
           </a:p>
         </p:txBody>
       </p:sp>
@@ -1503,6 +1484,7 @@
           <a:p>
             <a:fld id="{5BCAD085-E8A6-8845-BD4E-CB4CCA059FC4}" type="datetimeFigureOut">
               <a:rPr lang="en-US" smtClean="0"/>
+              <a:t>7/7/2026</a:t>
             </a:fld>
             <a:endParaRPr lang="en-US"/>
           </a:p>
@@ -1544,6 +1526,7 @@
           <a:p>
             <a:fld id="{C1FF6DA9-008F-8B48-92A6-B652298478BF}" type="slidenum">
               <a:rPr lang="en-US" smtClean="0"/>
+              <a:t>‹#›</a:t>
             </a:fld>
             <a:endParaRPr lang="en-US"/>
           </a:p>
@@ -1590,10 +1573,9 @@
           <a:lstStyle/>
           <a:p>
             <a:r>
-              <a:rPr lang="en-US" smtClean="0"/>
+              <a:rPr lang="en-US"/>
               <a:t>Click to edit Master title style</a:t>
             </a:r>
-            <a:endParaRPr lang="en-US"/>
           </a:p>
         </p:txBody>
       </p:sp>
@@ -1647,42 +1629,37 @@
           <a:p>
             <a:pPr lvl="0"/>
             <a:r>
-              <a:rPr lang="en-US" smtClean="0"/>
+              <a:rPr lang="en-US"/>
               <a:t>Click to edit Master text styles</a:t>
             </a:r>
-            <a:endParaRPr lang="en-US" smtClean="0"/>
           </a:p>
           <a:p>
             <a:pPr lvl="1"/>
             <a:r>
-              <a:rPr lang="en-US" smtClean="0"/>
+              <a:rPr lang="en-US"/>
               <a:t>Second level</a:t>
             </a:r>
-            <a:endParaRPr lang="en-US" smtClean="0"/>
           </a:p>
           <a:p>
             <a:pPr lvl="2"/>
             <a:r>
-              <a:rPr lang="en-US" smtClean="0"/>
+              <a:rPr lang="en-US"/>
               <a:t>Third level</a:t>
             </a:r>
-            <a:endParaRPr lang="en-US" smtClean="0"/>
           </a:p>
           <a:p>
             <a:pPr lvl="3"/>
             <a:r>
-              <a:rPr lang="en-US" smtClean="0"/>
+              <a:rPr lang="en-US"/>
               <a:t>Fourth level</a:t>
             </a:r>
-            <a:endParaRPr lang="en-US" smtClean="0"/>
           </a:p>
           <a:p>
             <a:pPr lvl="4"/>
             <a:r>
-              <a:rPr lang="en-US" smtClean="0"/>
+              <a:rPr lang="en-US"/>
               <a:t>Fifth level</a:t>
             </a:r>
-            <a:endParaRPr lang="en-US"/>
           </a:p>
         </p:txBody>
       </p:sp>
@@ -1736,42 +1713,37 @@
           <a:p>
             <a:pPr lvl="0"/>
             <a:r>
-              <a:rPr lang="en-US" smtClean="0"/>
+              <a:rPr lang="en-US"/>
               <a:t>Click to edit Master text styles</a:t>
             </a:r>
-            <a:endParaRPr lang="en-US" smtClean="0"/>
           </a:p>
           <a:p>
             <a:pPr lvl="1"/>
             <a:r>
-              <a:rPr lang="en-US" smtClean="0"/>
+              <a:rPr lang="en-US"/>
               <a:t>Second level</a:t>
             </a:r>
-            <a:endParaRPr lang="en-US" smtClean="0"/>
           </a:p>
           <a:p>
             <a:pPr lvl="2"/>
             <a:r>
-              <a:rPr lang="en-US" smtClean="0"/>
+              <a:rPr lang="en-US"/>
               <a:t>Third level</a:t>
             </a:r>
-            <a:endParaRPr lang="en-US" smtClean="0"/>
           </a:p>
           <a:p>
             <a:pPr lvl="3"/>
             <a:r>
-              <a:rPr lang="en-US" smtClean="0"/>
+              <a:rPr lang="en-US"/>
               <a:t>Fourth level</a:t>
             </a:r>
-            <a:endParaRPr lang="en-US" smtClean="0"/>
           </a:p>
           <a:p>
             <a:pPr lvl="4"/>
             <a:r>
-              <a:rPr lang="en-US" smtClean="0"/>
+              <a:rPr lang="en-US"/>
               <a:t>Fifth level</a:t>
             </a:r>
-            <a:endParaRPr lang="en-US"/>
           </a:p>
         </p:txBody>
       </p:sp>
@@ -1792,6 +1764,7 @@
           <a:p>
             <a:fld id="{5BCAD085-E8A6-8845-BD4E-CB4CCA059FC4}" type="datetimeFigureOut">
               <a:rPr lang="en-US" smtClean="0"/>
+              <a:t>7/7/2026</a:t>
             </a:fld>
             <a:endParaRPr lang="en-US"/>
           </a:p>
@@ -1833,6 +1806,7 @@
           <a:p>
             <a:fld id="{C1FF6DA9-008F-8B48-92A6-B652298478BF}" type="slidenum">
               <a:rPr lang="en-US" smtClean="0"/>
+              <a:t>‹#›</a:t>
             </a:fld>
             <a:endParaRPr lang="en-US"/>
           </a:p>
@@ -1883,10 +1857,9 @@
           </a:lstStyle>
           <a:p>
             <a:r>
-              <a:rPr lang="en-US" smtClean="0"/>
+              <a:rPr lang="en-US"/>
               <a:t>Click to edit Master title style</a:t>
             </a:r>
-            <a:endParaRPr lang="en-US"/>
           </a:p>
         </p:txBody>
       </p:sp>
@@ -1949,10 +1922,9 @@
           <a:p>
             <a:pPr lvl="0"/>
             <a:r>
-              <a:rPr lang="en-US" smtClean="0"/>
+              <a:rPr lang="en-US"/>
               <a:t>Click to edit Master text styles</a:t>
             </a:r>
-            <a:endParaRPr lang="en-US" smtClean="0"/>
           </a:p>
         </p:txBody>
       </p:sp>
@@ -2006,42 +1978,37 @@
           <a:p>
             <a:pPr lvl="0"/>
             <a:r>
-              <a:rPr lang="en-US" smtClean="0"/>
+              <a:rPr lang="en-US"/>
               <a:t>Click to edit Master text styles</a:t>
             </a:r>
-            <a:endParaRPr lang="en-US" smtClean="0"/>
           </a:p>
           <a:p>
             <a:pPr lvl="1"/>
             <a:r>
-              <a:rPr lang="en-US" smtClean="0"/>
+              <a:rPr lang="en-US"/>
               <a:t>Second level</a:t>
             </a:r>
-            <a:endParaRPr lang="en-US" smtClean="0"/>
           </a:p>
           <a:p>
             <a:pPr lvl="2"/>
             <a:r>
-              <a:rPr lang="en-US" smtClean="0"/>
+              <a:rPr lang="en-US"/>
               <a:t>Third level</a:t>
             </a:r>
-            <a:endParaRPr lang="en-US" smtClean="0"/>
           </a:p>
           <a:p>
             <a:pPr lvl="3"/>
             <a:r>
-              <a:rPr lang="en-US" smtClean="0"/>
+              <a:rPr lang="en-US"/>
               <a:t>Fourth level</a:t>
             </a:r>
-            <a:endParaRPr lang="en-US" smtClean="0"/>
           </a:p>
           <a:p>
             <a:pPr lvl="4"/>
             <a:r>
-              <a:rPr lang="en-US" smtClean="0"/>
+              <a:rPr lang="en-US"/>
               <a:t>Fifth level</a:t>
             </a:r>
-            <a:endParaRPr lang="en-US"/>
           </a:p>
         </p:txBody>
       </p:sp>
@@ -2104,10 +2071,9 @@
           <a:p>
             <a:pPr lvl="0"/>
             <a:r>
-              <a:rPr lang="en-US" smtClean="0"/>
+              <a:rPr lang="en-US"/>
               <a:t>Click to edit Master text styles</a:t>
             </a:r>
-            <a:endParaRPr lang="en-US" smtClean="0"/>
           </a:p>
         </p:txBody>
       </p:sp>
@@ -2161,42 +2127,37 @@
           <a:p>
             <a:pPr lvl="0"/>
             <a:r>
-              <a:rPr lang="en-US" smtClean="0"/>
+              <a:rPr lang="en-US"/>
               <a:t>Click to edit Master text styles</a:t>
             </a:r>
-            <a:endParaRPr lang="en-US" smtClean="0"/>
           </a:p>
           <a:p>
             <a:pPr lvl="1"/>
             <a:r>
-              <a:rPr lang="en-US" smtClean="0"/>
+              <a:rPr lang="en-US"/>
               <a:t>Second level</a:t>
             </a:r>
-            <a:endParaRPr lang="en-US" smtClean="0"/>
           </a:p>
           <a:p>
             <a:pPr lvl="2"/>
             <a:r>
-              <a:rPr lang="en-US" smtClean="0"/>
+              <a:rPr lang="en-US"/>
               <a:t>Third level</a:t>
             </a:r>
-            <a:endParaRPr lang="en-US" smtClean="0"/>
           </a:p>
           <a:p>
             <a:pPr lvl="3"/>
             <a:r>
-              <a:rPr lang="en-US" smtClean="0"/>
+              <a:rPr lang="en-US"/>
               <a:t>Fourth level</a:t>
             </a:r>
-            <a:endParaRPr lang="en-US" smtClean="0"/>
           </a:p>
           <a:p>
             <a:pPr lvl="4"/>
             <a:r>
-              <a:rPr lang="en-US" smtClean="0"/>
+              <a:rPr lang="en-US"/>
               <a:t>Fifth level</a:t>
             </a:r>
-            <a:endParaRPr lang="en-US"/>
           </a:p>
         </p:txBody>
       </p:sp>
@@ -2217,6 +2178,7 @@
           <a:p>
             <a:fld id="{5BCAD085-E8A6-8845-BD4E-CB4CCA059FC4}" type="datetimeFigureOut">
               <a:rPr lang="en-US" smtClean="0"/>
+              <a:t>7/7/2026</a:t>
             </a:fld>
             <a:endParaRPr lang="en-US"/>
           </a:p>
@@ -2258,6 +2220,7 @@
           <a:p>
             <a:fld id="{C1FF6DA9-008F-8B48-92A6-B652298478BF}" type="slidenum">
               <a:rPr lang="en-US" smtClean="0"/>
+              <a:t>‹#›</a:t>
             </a:fld>
             <a:endParaRPr lang="en-US"/>
           </a:p>
@@ -2304,10 +2267,9 @@
           <a:lstStyle/>
           <a:p>
             <a:r>
-              <a:rPr lang="en-US" smtClean="0"/>
+              <a:rPr lang="en-US"/>
               <a:t>Click to edit Master title style</a:t>
             </a:r>
-            <a:endParaRPr lang="en-US"/>
           </a:p>
         </p:txBody>
       </p:sp>
@@ -2328,6 +2290,7 @@
           <a:p>
             <a:fld id="{5BCAD085-E8A6-8845-BD4E-CB4CCA059FC4}" type="datetimeFigureOut">
               <a:rPr lang="en-US" smtClean="0"/>
+              <a:t>7/7/2026</a:t>
             </a:fld>
             <a:endParaRPr lang="en-US"/>
           </a:p>
@@ -2369,6 +2332,7 @@
           <a:p>
             <a:fld id="{C1FF6DA9-008F-8B48-92A6-B652298478BF}" type="slidenum">
               <a:rPr lang="en-US" smtClean="0"/>
+              <a:t>‹#›</a:t>
             </a:fld>
             <a:endParaRPr lang="en-US"/>
           </a:p>
@@ -2416,6 +2380,7 @@
           <a:p>
             <a:fld id="{5BCAD085-E8A6-8845-BD4E-CB4CCA059FC4}" type="datetimeFigureOut">
               <a:rPr lang="en-US" smtClean="0"/>
+              <a:t>7/7/2026</a:t>
             </a:fld>
             <a:endParaRPr lang="en-US"/>
           </a:p>
@@ -2457,6 +2422,7 @@
           <a:p>
             <a:fld id="{C1FF6DA9-008F-8B48-92A6-B652298478BF}" type="slidenum">
               <a:rPr lang="en-US" smtClean="0"/>
+              <a:t>‹#›</a:t>
             </a:fld>
             <a:endParaRPr lang="en-US"/>
           </a:p>
@@ -2512,10 +2478,9 @@
           </a:lstStyle>
           <a:p>
             <a:r>
-              <a:rPr lang="en-US" smtClean="0"/>
+              <a:rPr lang="en-US"/>
               <a:t>Click to edit Master title style</a:t>
             </a:r>
-            <a:endParaRPr lang="en-US"/>
           </a:p>
         </p:txBody>
       </p:sp>
@@ -2569,42 +2534,37 @@
           <a:p>
             <a:pPr lvl="0"/>
             <a:r>
-              <a:rPr lang="en-US" smtClean="0"/>
+              <a:rPr lang="en-US"/>
               <a:t>Click to edit Master text styles</a:t>
             </a:r>
-            <a:endParaRPr lang="en-US" smtClean="0"/>
           </a:p>
           <a:p>
             <a:pPr lvl="1"/>
             <a:r>
-              <a:rPr lang="en-US" smtClean="0"/>
+              <a:rPr lang="en-US"/>
               <a:t>Second level</a:t>
             </a:r>
-            <a:endParaRPr lang="en-US" smtClean="0"/>
           </a:p>
           <a:p>
             <a:pPr lvl="2"/>
             <a:r>
-              <a:rPr lang="en-US" smtClean="0"/>
+              <a:rPr lang="en-US"/>
               <a:t>Third level</a:t>
             </a:r>
-            <a:endParaRPr lang="en-US" smtClean="0"/>
           </a:p>
           <a:p>
             <a:pPr lvl="3"/>
             <a:r>
-              <a:rPr lang="en-US" smtClean="0"/>
+              <a:rPr lang="en-US"/>
               <a:t>Fourth level</a:t>
             </a:r>
-            <a:endParaRPr lang="en-US" smtClean="0"/>
           </a:p>
           <a:p>
             <a:pPr lvl="4"/>
             <a:r>
-              <a:rPr lang="en-US" smtClean="0"/>
+              <a:rPr lang="en-US"/>
               <a:t>Fifth level</a:t>
             </a:r>
-            <a:endParaRPr lang="en-US"/>
           </a:p>
         </p:txBody>
       </p:sp>
@@ -2667,10 +2627,9 @@
           <a:p>
             <a:pPr lvl="0"/>
             <a:r>
-              <a:rPr lang="en-US" smtClean="0"/>
+              <a:rPr lang="en-US"/>
               <a:t>Click to edit Master text styles</a:t>
             </a:r>
-            <a:endParaRPr lang="en-US" smtClean="0"/>
           </a:p>
         </p:txBody>
       </p:sp>
@@ -2691,6 +2650,7 @@
           <a:p>
             <a:fld id="{5BCAD085-E8A6-8845-BD4E-CB4CCA059FC4}" type="datetimeFigureOut">
               <a:rPr lang="en-US" smtClean="0"/>
+              <a:t>7/7/2026</a:t>
             </a:fld>
             <a:endParaRPr lang="en-US"/>
           </a:p>
@@ -2732,6 +2692,7 @@
           <a:p>
             <a:fld id="{C1FF6DA9-008F-8B48-92A6-B652298478BF}" type="slidenum">
               <a:rPr lang="en-US" smtClean="0"/>
+              <a:t>‹#›</a:t>
             </a:fld>
             <a:endParaRPr lang="en-US"/>
           </a:p>
@@ -2787,10 +2748,9 @@
           </a:lstStyle>
           <a:p>
             <a:r>
-              <a:rPr lang="en-US" smtClean="0"/>
+              <a:rPr lang="en-US"/>
               <a:t>Click to edit Master title style</a:t>
             </a:r>
-            <a:endParaRPr lang="en-US"/>
           </a:p>
         </p:txBody>
       </p:sp>
@@ -2914,10 +2874,9 @@
           <a:p>
             <a:pPr lvl="0"/>
             <a:r>
-              <a:rPr lang="en-US" smtClean="0"/>
+              <a:rPr lang="en-US"/>
               <a:t>Click to edit Master text styles</a:t>
             </a:r>
-            <a:endParaRPr lang="en-US" smtClean="0"/>
           </a:p>
         </p:txBody>
       </p:sp>
@@ -2938,6 +2897,7 @@
           <a:p>
             <a:fld id="{5BCAD085-E8A6-8845-BD4E-CB4CCA059FC4}" type="datetimeFigureOut">
               <a:rPr lang="en-US" smtClean="0"/>
+              <a:t>7/7/2026</a:t>
             </a:fld>
             <a:endParaRPr lang="en-US"/>
           </a:p>
@@ -2979,6 +2939,7 @@
           <a:p>
             <a:fld id="{C1FF6DA9-008F-8B48-92A6-B652298478BF}" type="slidenum">
               <a:rPr lang="en-US" smtClean="0"/>
+              <a:t>‹#›</a:t>
             </a:fld>
             <a:endParaRPr lang="en-US"/>
           </a:p>
@@ -3040,10 +3001,9 @@
           <a:lstStyle/>
           <a:p>
             <a:r>
-              <a:rPr lang="en-US" smtClean="0"/>
+              <a:rPr lang="en-US"/>
               <a:t>Click to edit Master title style</a:t>
             </a:r>
-            <a:endParaRPr lang="en-US"/>
           </a:p>
         </p:txBody>
       </p:sp>
@@ -3074,42 +3034,37 @@
           <a:p>
             <a:pPr lvl="0"/>
             <a:r>
-              <a:rPr lang="en-US" smtClean="0"/>
+              <a:rPr lang="en-US"/>
               <a:t>Click to edit Master text styles</a:t>
             </a:r>
-            <a:endParaRPr lang="en-US" smtClean="0"/>
           </a:p>
           <a:p>
             <a:pPr lvl="1"/>
             <a:r>
-              <a:rPr lang="en-US" smtClean="0"/>
+              <a:rPr lang="en-US"/>
               <a:t>Second level</a:t>
             </a:r>
-            <a:endParaRPr lang="en-US" smtClean="0"/>
           </a:p>
           <a:p>
             <a:pPr lvl="2"/>
             <a:r>
-              <a:rPr lang="en-US" smtClean="0"/>
+              <a:rPr lang="en-US"/>
               <a:t>Third level</a:t>
             </a:r>
-            <a:endParaRPr lang="en-US" smtClean="0"/>
           </a:p>
           <a:p>
             <a:pPr lvl="3"/>
             <a:r>
-              <a:rPr lang="en-US" smtClean="0"/>
+              <a:rPr lang="en-US"/>
               <a:t>Fourth level</a:t>
             </a:r>
-            <a:endParaRPr lang="en-US" smtClean="0"/>
           </a:p>
           <a:p>
             <a:pPr lvl="4"/>
             <a:r>
-              <a:rPr lang="en-US" smtClean="0"/>
+              <a:rPr lang="en-US"/>
               <a:t>Fifth level</a:t>
             </a:r>
-            <a:endParaRPr lang="en-US"/>
           </a:p>
         </p:txBody>
       </p:sp>
@@ -3148,6 +3103,7 @@
           <a:p>
             <a:fld id="{5BCAD085-E8A6-8845-BD4E-CB4CCA059FC4}" type="datetimeFigureOut">
               <a:rPr lang="en-US" smtClean="0"/>
+              <a:t>7/7/2026</a:t>
             </a:fld>
             <a:endParaRPr lang="en-US"/>
           </a:p>
@@ -3225,6 +3181,7 @@
           <a:p>
             <a:fld id="{C1FF6DA9-008F-8B48-92A6-B652298478BF}" type="slidenum">
               <a:rPr lang="en-US" smtClean="0"/>
+              <a:t>‹#›</a:t>
             </a:fld>
             <a:endParaRPr lang="en-US"/>
           </a:p>
@@ -3662,14 +3619,6 @@
                 </a:rPr>
                 <a:t>MTL AI CHALLENGE · 项目方案</a:t>
               </a:r>
-              <a:endParaRPr lang="zh-CN" sz="1350" b="1" spc="75" dirty="0">
-                <a:solidFill>
-                  <a:srgbClr val="C9962B"/>
-                </a:solidFill>
-                <a:latin typeface="Times New Roman" panose="02020603050405020304"/>
-                <a:ea typeface="微软雅黑" panose="020B0503020204020204" charset="-122"/>
-                <a:cs typeface="Times New Roman" panose="02020603050405020304"/>
-              </a:endParaRPr>
             </a:p>
           </p:txBody>
         </p:sp>
@@ -4090,14 +4039,6 @@
                 </a:rPr>
                 <a:t>LEADERBOARD MAE</a:t>
               </a:r>
-              <a:endParaRPr lang="en-US" sz="1350" b="1" spc="75" dirty="0">
-                <a:solidFill>
-                  <a:srgbClr val="5A6478"/>
-                </a:solidFill>
-                <a:latin typeface="Times New Roman" panose="02020603050405020304"/>
-                <a:ea typeface="Times New Roman" panose="02020603050405020304"/>
-                <a:cs typeface="Times New Roman" panose="02020603050405020304"/>
-              </a:endParaRPr>
             </a:p>
           </p:txBody>
         </p:sp>
@@ -4138,14 +4079,6 @@
                 </a:rPr>
                 <a:t>3.67</a:t>
               </a:r>
-              <a:endParaRPr lang="en-US" sz="11250" b="1" dirty="0">
-                <a:solidFill>
-                  <a:srgbClr val="1A3A6B"/>
-                </a:solidFill>
-                <a:latin typeface="Times New Roman" panose="02020603050405020304"/>
-                <a:ea typeface="Times New Roman" panose="02020603050405020304"/>
-                <a:cs typeface="Times New Roman" panose="02020603050405020304"/>
-              </a:endParaRPr>
             </a:p>
           </p:txBody>
         </p:sp>
@@ -4208,14 +4141,6 @@
                 </a:rPr>
                 <a:t>成绩</a:t>
               </a:r>
-              <a:endParaRPr lang="zh-CN" sz="1800" dirty="0">
-                <a:solidFill>
-                  <a:srgbClr val="1D2430"/>
-                </a:solidFill>
-                <a:latin typeface="Arial" panose="020B0604020202020204"/>
-                <a:ea typeface="微软雅黑" panose="020B0503020204020204" charset="-122"/>
-                <a:cs typeface="Arial" panose="020B0604020202020204"/>
-              </a:endParaRPr>
             </a:p>
           </p:txBody>
         </p:sp>
@@ -4278,14 +4203,6 @@
                 </a:rPr>
                 <a:t> 样本训练 / 20 样本测试</a:t>
               </a:r>
-              <a:endParaRPr lang="zh-CN" sz="1350" dirty="0">
-                <a:solidFill>
-                  <a:srgbClr val="5A6478"/>
-                </a:solidFill>
-                <a:latin typeface="Arial" panose="020B0604020202020204"/>
-                <a:ea typeface="微软雅黑" panose="020B0503020204020204" charset="-122"/>
-                <a:cs typeface="Arial" panose="020B0604020202020204"/>
-              </a:endParaRPr>
             </a:p>
           </p:txBody>
         </p:sp>
@@ -4377,14 +4294,6 @@
                 </a:rPr>
                 <a:t>PROJECT BRIEF</a:t>
               </a:r>
-              <a:endParaRPr lang="en-US" sz="1350" b="1" spc="75" dirty="0">
-                <a:solidFill>
-                  <a:srgbClr val="C9962B"/>
-                </a:solidFill>
-                <a:latin typeface="Times New Roman" panose="02020603050405020304"/>
-                <a:ea typeface="Times New Roman" panose="02020603050405020304"/>
-                <a:cs typeface="Times New Roman" panose="02020603050405020304"/>
-              </a:endParaRPr>
             </a:p>
           </p:txBody>
         </p:sp>
@@ -4425,14 +4334,6 @@
                 </a:rPr>
                 <a:t>青霉素发酵</a:t>
               </a:r>
-              <a:endParaRPr lang="zh-CN" sz="4500" b="1" dirty="0">
-                <a:solidFill>
-                  <a:srgbClr val="1A3A6B"/>
-                </a:solidFill>
-                <a:latin typeface="Times New Roman" panose="02020603050405020304"/>
-                <a:ea typeface="微软雅黑" panose="020B0503020204020204" charset="-122"/>
-                <a:cs typeface="Times New Roman" panose="02020603050405020304"/>
-              </a:endParaRPr>
             </a:p>
           </p:txBody>
         </p:sp>
@@ -4473,14 +4374,6 @@
                 </a:rPr>
                 <a:t>稳定期目标变量预测</a:t>
               </a:r>
-              <a:endParaRPr lang="zh-CN" sz="4500" b="1" dirty="0">
-                <a:solidFill>
-                  <a:srgbClr val="1A3A6B"/>
-                </a:solidFill>
-                <a:latin typeface="Times New Roman" panose="02020603050405020304"/>
-                <a:ea typeface="微软雅黑" panose="020B0503020204020204" charset="-122"/>
-                <a:cs typeface="Times New Roman" panose="02020603050405020304"/>
-              </a:endParaRPr>
             </a:p>
           </p:txBody>
         </p:sp>
@@ -4601,14 +4494,6 @@
                 </a:rPr>
                 <a:t>的小样本回归方案</a:t>
               </a:r>
-              <a:endParaRPr lang="zh-CN" sz="1800" dirty="0">
-                <a:solidFill>
-                  <a:srgbClr val="5A6478"/>
-                </a:solidFill>
-                <a:latin typeface="Arial" panose="020B0604020202020204"/>
-                <a:ea typeface="微软雅黑" panose="020B0503020204020204" charset="-122"/>
-                <a:cs typeface="Arial" panose="020B0604020202020204"/>
-              </a:endParaRPr>
             </a:p>
           </p:txBody>
         </p:sp>
@@ -4700,14 +4585,6 @@
                 </a:rPr>
                 <a:t>梅特勒托利多 AI 竞赛 · 项目方案介绍 · 2026.07</a:t>
               </a:r>
-              <a:endParaRPr lang="zh-CN" sz="1200" dirty="0">
-                <a:solidFill>
-                  <a:srgbClr val="000000"/>
-                </a:solidFill>
-                <a:latin typeface="Arial" panose="020B0604020202020204"/>
-                <a:ea typeface="微软雅黑" panose="020B0503020204020204" charset="-122"/>
-                <a:cs typeface="Arial" panose="020B0604020202020204"/>
-              </a:endParaRPr>
             </a:p>
           </p:txBody>
         </p:sp>
@@ -4748,14 +4625,6 @@
                 </a:rPr>
                 <a:t>01 / 05</a:t>
               </a:r>
-              <a:endParaRPr lang="en-US" sz="1200" dirty="0">
-                <a:solidFill>
-                  <a:srgbClr val="8A92A0"/>
-                </a:solidFill>
-                <a:latin typeface="Times New Roman" panose="02020603050405020304"/>
-                <a:ea typeface="Times New Roman" panose="02020603050405020304"/>
-                <a:cs typeface="Times New Roman" panose="02020603050405020304"/>
-              </a:endParaRPr>
             </a:p>
           </p:txBody>
         </p:sp>
@@ -4765,13 +4634,13 @@
   <p:clrMapOvr>
     <a:masterClrMapping/>
   </p:clrMapOvr>
-  <mc:AlternateContent xmlns:mc="http://schemas.openxmlformats.org/markup-compatibility/2006">
-    <mc:Choice xmlns:p14="http://schemas.microsoft.com/office/powerpoint/2010/main" Requires="p14">
+  <mc:AlternateContent xmlns:mc="http://schemas.openxmlformats.org/markup-compatibility/2006" xmlns:p14="http://schemas.microsoft.com/office/powerpoint/2010/main">
+    <mc:Choice Requires="p14">
       <p:transition p14:dur="400">
         <p:fade/>
       </p:transition>
     </mc:Choice>
-    <mc:Fallback>
+    <mc:Fallback xmlns="">
       <p:transition>
         <p:fade/>
       </p:transition>
@@ -4892,14 +4761,6 @@
                 </a:rPr>
                 <a:t>02 · BACKGROUND</a:t>
               </a:r>
-              <a:endParaRPr lang="en-US" sz="1350" b="1" spc="75" dirty="0">
-                <a:solidFill>
-                  <a:srgbClr val="C9962B"/>
-                </a:solidFill>
-                <a:latin typeface="Times New Roman" panose="02020603050405020304"/>
-                <a:ea typeface="Times New Roman" panose="02020603050405020304"/>
-                <a:cs typeface="Times New Roman" panose="02020603050405020304"/>
-              </a:endParaRPr>
             </a:p>
           </p:txBody>
         </p:sp>
@@ -4940,14 +4801,6 @@
                 </a:rPr>
                 <a:t>问题背景与挑战</a:t>
               </a:r>
-              <a:endParaRPr lang="zh-CN" sz="3150" b="1" dirty="0">
-                <a:solidFill>
-                  <a:srgbClr val="1A3A6B"/>
-                </a:solidFill>
-                <a:latin typeface="Times New Roman" panose="02020603050405020304"/>
-                <a:ea typeface="微软雅黑" panose="020B0503020204020204" charset="-122"/>
-                <a:cs typeface="Times New Roman" panose="02020603050405020304"/>
-              </a:endParaRPr>
             </a:p>
           </p:txBody>
         </p:sp>
@@ -4997,9 +4850,9 @@
         <p:grpSpPr>
           <a:xfrm>
             <a:off x="562356" y="1504950"/>
-            <a:ext cx="11450955" cy="1013651"/>
+            <a:ext cx="10884708" cy="1013651"/>
             <a:chOff x="562356" y="1504950"/>
-            <a:chExt cx="11450955" cy="1013651"/>
+            <a:chExt cx="10884708" cy="1013651"/>
           </a:xfrm>
         </p:grpSpPr>
         <p:grpSp>
@@ -5219,14 +5072,6 @@
                   </a:rPr>
                   <a:t>任务定义</a:t>
                 </a:r>
-                <a:endParaRPr lang="zh-CN" sz="1350" b="1" spc="75" dirty="0">
-                  <a:solidFill>
-                    <a:srgbClr val="5A6478"/>
-                  </a:solidFill>
-                  <a:latin typeface="Arial" panose="020B0604020202020204"/>
-                  <a:ea typeface="微软雅黑" panose="020B0503020204020204" charset="-122"/>
-                  <a:cs typeface="Arial" panose="020B0604020202020204"/>
-                </a:endParaRPr>
               </a:p>
             </p:txBody>
           </p:sp>
@@ -5278,14 +5123,6 @@
                   </a:rPr>
                   <a:t>稳定期目标变量均值</a:t>
                 </a:r>
-                <a:endParaRPr lang="zh-CN" sz="1800" b="1" dirty="0">
-                  <a:solidFill>
-                    <a:srgbClr val="1A3A6B"/>
-                  </a:solidFill>
-                  <a:latin typeface="Arial" panose="020B0604020202020204"/>
-                  <a:ea typeface="微软雅黑" panose="020B0503020204020204" charset="-122"/>
-                  <a:cs typeface="Arial" panose="020B0604020202020204"/>
-                </a:endParaRPr>
               </a:p>
             </p:txBody>
           </p:sp>
@@ -5326,14 +5163,6 @@
                   </a:rPr>
                   <a:t>回归任务 · MAE 评价 · 输入：SPC 拉曼光谱（64 通道）+ 过程变量（33 列）</a:t>
                 </a:r>
-                <a:endParaRPr lang="zh-CN" sz="1350" dirty="0">
-                  <a:solidFill>
-                    <a:srgbClr val="5A6478"/>
-                  </a:solidFill>
-                  <a:latin typeface="Arial" panose="020B0604020202020204"/>
-                  <a:ea typeface="微软雅黑" panose="020B0503020204020204" charset="-122"/>
-                  <a:cs typeface="Arial" panose="020B0604020202020204"/>
-                </a:endParaRPr>
               </a:p>
             </p:txBody>
           </p:sp>
@@ -5383,9 +5212,9 @@
           <p:grpSpPr>
             <a:xfrm>
               <a:off x="7132320" y="1568768"/>
-              <a:ext cx="4880991" cy="841438"/>
+              <a:ext cx="4314744" cy="791408"/>
               <a:chOff x="7132320" y="1568768"/>
-              <a:chExt cx="4880991" cy="841438"/>
+              <a:chExt cx="4314744" cy="791408"/>
             </a:xfrm>
           </p:grpSpPr>
           <p:sp>
@@ -5425,14 +5254,6 @@
                   </a:rPr>
                   <a:t>数据规模</a:t>
                 </a:r>
-                <a:endParaRPr lang="zh-CN" sz="1350" b="1" spc="75" dirty="0">
-                  <a:solidFill>
-                    <a:srgbClr val="5A6478"/>
-                  </a:solidFill>
-                  <a:latin typeface="Arial" panose="020B0604020202020204"/>
-                  <a:ea typeface="微软雅黑" panose="020B0503020204020204" charset="-122"/>
-                  <a:cs typeface="Arial" panose="020B0604020202020204"/>
-                </a:endParaRPr>
               </a:p>
             </p:txBody>
           </p:sp>
@@ -5484,14 +5305,6 @@
                   </a:rPr>
                   <a:t> 训练</a:t>
                 </a:r>
-                <a:endParaRPr lang="zh-CN" sz="1350" dirty="0">
-                  <a:solidFill>
-                    <a:srgbClr val="8A92A0"/>
-                  </a:solidFill>
-                  <a:latin typeface="Times New Roman" panose="02020603050405020304"/>
-                  <a:ea typeface="微软雅黑" panose="020B0503020204020204" charset="-122"/>
-                  <a:cs typeface="Times New Roman" panose="02020603050405020304"/>
-                </a:endParaRPr>
               </a:p>
             </p:txBody>
           </p:sp>
@@ -5543,14 +5356,6 @@
                   </a:rPr>
                   <a:t> 测试</a:t>
                 </a:r>
-                <a:endParaRPr lang="zh-CN" sz="1350" dirty="0">
-                  <a:solidFill>
-                    <a:srgbClr val="8A92A0"/>
-                  </a:solidFill>
-                  <a:latin typeface="Times New Roman" panose="02020603050405020304"/>
-                  <a:ea typeface="微软雅黑" panose="020B0503020204020204" charset="-122"/>
-                  <a:cs typeface="Times New Roman" panose="02020603050405020304"/>
-                </a:endParaRPr>
               </a:p>
             </p:txBody>
           </p:sp>
@@ -5563,7 +5368,7 @@
             <p:spPr>
               <a:xfrm>
                 <a:off x="9123045" y="1871662"/>
-                <a:ext cx="1026185" cy="440055"/>
+                <a:ext cx="995465" cy="346249"/>
               </a:xfrm>
               <a:prstGeom prst="rect">
                 <a:avLst/>
@@ -5581,15 +5386,15 @@
               <a:p>
                 <a:pPr algn="l"/>
                 <a:r>
-                  <a:rPr lang="en-US" sz="2250" b="1" dirty="0">
+                  <a:rPr lang="en-US" altLang="zh-CN" sz="2250" b="1" dirty="0">
                     <a:solidFill>
                       <a:srgbClr val="C9962B"/>
                     </a:solidFill>
                     <a:latin typeface="Times New Roman" panose="02020603050405020304"/>
-                    <a:ea typeface="Times New Roman" panose="02020603050405020304"/>
+                    <a:ea typeface="微软雅黑" panose="020B0503020204020204" charset="-122"/>
                     <a:cs typeface="Times New Roman" panose="02020603050405020304"/>
                   </a:rPr>
-                  <a:t>97</a:t>
+                  <a:t>103</a:t>
                 </a:r>
                 <a:r>
                   <a:rPr lang="zh-CN" sz="1350" dirty="0">
@@ -5602,14 +5407,6 @@
                   </a:rPr>
                   <a:t> 维特征</a:t>
                 </a:r>
-                <a:endParaRPr lang="zh-CN" sz="1350" dirty="0">
-                  <a:solidFill>
-                    <a:srgbClr val="8A92A0"/>
-                  </a:solidFill>
-                  <a:latin typeface="Times New Roman" panose="02020603050405020304"/>
-                  <a:ea typeface="微软雅黑" panose="020B0503020204020204" charset="-122"/>
-                  <a:cs typeface="Times New Roman" panose="02020603050405020304"/>
-                </a:endParaRPr>
               </a:p>
             </p:txBody>
           </p:sp>
@@ -5622,7 +5419,7 @@
             <p:spPr>
               <a:xfrm>
                 <a:off x="10890504" y="2175510"/>
-                <a:ext cx="496824" cy="234696"/>
+                <a:ext cx="65" cy="184666"/>
               </a:xfrm>
               <a:prstGeom prst="rect">
                 <a:avLst/>
@@ -5639,17 +5436,6 @@
               <a:lstStyle/>
               <a:p>
                 <a:pPr algn="l"/>
-                <a:r>
-                  <a:rPr lang="zh-CN" sz="1200" dirty="0">
-                    <a:solidFill>
-                      <a:srgbClr val="8A92A0"/>
-                    </a:solidFill>
-                    <a:latin typeface="Arial" panose="020B0604020202020204"/>
-                    <a:ea typeface="微软雅黑" panose="020B0503020204020204" charset="-122"/>
-                    <a:cs typeface="Arial" panose="020B0604020202020204"/>
-                  </a:rPr>
-                  <a:t>时间点</a:t>
-                </a:r>
                 <a:endParaRPr lang="zh-CN" sz="1200" dirty="0">
                   <a:solidFill>
                     <a:srgbClr val="8A92A0"/>
@@ -5670,7 +5456,7 @@
             <p:spPr>
               <a:xfrm>
                 <a:off x="10142220" y="1862138"/>
-                <a:ext cx="1871091" cy="440055"/>
+                <a:ext cx="1304844" cy="346249"/>
               </a:xfrm>
               <a:prstGeom prst="rect">
                 <a:avLst/>
@@ -5688,7 +5474,7 @@
               <a:p>
                 <a:pPr algn="l"/>
                 <a:r>
-                  <a:rPr lang="en-US" sz="2250" b="1" dirty="0">
+                  <a:rPr lang="zh-CN" altLang="en-US" sz="2250" b="1" dirty="0">
                     <a:solidFill>
                       <a:srgbClr val="C9962B"/>
                     </a:solidFill>
@@ -5696,7 +5482,7 @@
                     <a:ea typeface="Times New Roman" panose="02020603050405020304"/>
                     <a:cs typeface="Times New Roman" panose="02020603050405020304"/>
                   </a:rPr>
-                  <a:t>5/10/20/35</a:t>
+                  <a:t>  多时间点</a:t>
                 </a:r>
                 <a:endParaRPr lang="en-US" sz="2250" b="1" dirty="0">
                   <a:solidFill>
@@ -5784,14 +5570,6 @@
               </a:rPr>
               <a:t>CORE CHALLENGES · 三大核心挑战</a:t>
             </a:r>
-            <a:endParaRPr lang="zh-CN" sz="1350" b="1" spc="75" dirty="0">
-              <a:solidFill>
-                <a:srgbClr val="C9962B"/>
-              </a:solidFill>
-              <a:latin typeface="Times New Roman" panose="02020603050405020304"/>
-              <a:ea typeface="微软雅黑" panose="020B0503020204020204" charset="-122"/>
-              <a:cs typeface="Times New Roman" panose="02020603050405020304"/>
-            </a:endParaRPr>
           </a:p>
         </p:txBody>
       </p:sp>
@@ -5918,14 +5696,6 @@
                   </a:rPr>
                   <a:t>01</a:t>
                 </a:r>
-                <a:endParaRPr lang="en-US" sz="1350" b="1" dirty="0">
-                  <a:solidFill>
-                    <a:srgbClr val="FFFFFF"/>
-                  </a:solidFill>
-                  <a:latin typeface="Arial" panose="020B0604020202020204"/>
-                  <a:ea typeface="Arial" panose="020B0604020202020204"/>
-                  <a:cs typeface="Arial" panose="020B0604020202020204"/>
-                </a:endParaRPr>
               </a:p>
             </p:txBody>
           </p:sp>
@@ -6212,14 +5982,6 @@
                   </a:rPr>
                   <a:t>小样本高维</a:t>
                 </a:r>
-                <a:endParaRPr lang="zh-CN" sz="1800" b="1" dirty="0">
-                  <a:solidFill>
-                    <a:srgbClr val="1A3A6B"/>
-                  </a:solidFill>
-                  <a:latin typeface="Arial" panose="020B0604020202020204"/>
-                  <a:ea typeface="微软雅黑" panose="020B0503020204020204" charset="-122"/>
-                  <a:cs typeface="Arial" panose="020B0604020202020204"/>
-                </a:endParaRPr>
               </a:p>
             </p:txBody>
           </p:sp>
@@ -6326,14 +6088,6 @@
                   </a:rPr>
                   <a:t>，极易过拟合</a:t>
                 </a:r>
-                <a:endParaRPr lang="zh-CN" sz="1350" dirty="0">
-                  <a:solidFill>
-                    <a:srgbClr val="5A6478"/>
-                  </a:solidFill>
-                  <a:latin typeface="Arial" panose="020B0604020202020204"/>
-                  <a:ea typeface="微软雅黑" panose="020B0503020204020204" charset="-122"/>
-                  <a:cs typeface="Arial" panose="020B0604020202020204"/>
-                </a:endParaRPr>
               </a:p>
             </p:txBody>
           </p:sp>
@@ -6347,9 +6101,9 @@
           <p:grpSpPr>
             <a:xfrm>
               <a:off x="723900" y="4124325"/>
-              <a:ext cx="10896600" cy="632650"/>
+              <a:ext cx="10896600" cy="609600"/>
               <a:chOff x="723900" y="4124325"/>
-              <a:chExt cx="10896600" cy="632650"/>
+              <a:chExt cx="10896600" cy="609600"/>
             </a:xfrm>
           </p:grpSpPr>
           <p:sp>
@@ -6411,14 +6165,6 @@
                   </a:rPr>
                   <a:t>02</a:t>
                 </a:r>
-                <a:endParaRPr lang="en-US" sz="1350" b="1" dirty="0">
-                  <a:solidFill>
-                    <a:srgbClr val="FFFFFF"/>
-                  </a:solidFill>
-                  <a:latin typeface="Times New Roman" panose="02020603050405020304"/>
-                  <a:ea typeface="Times New Roman" panose="02020603050405020304"/>
-                  <a:cs typeface="Times New Roman" panose="02020603050405020304"/>
-                </a:endParaRPr>
               </a:p>
             </p:txBody>
           </p:sp>
@@ -6642,14 +6388,6 @@
                   </a:rPr>
                   <a:t>不等长时间序列</a:t>
                 </a:r>
-                <a:endParaRPr lang="zh-CN" sz="1800" b="1" dirty="0">
-                  <a:solidFill>
-                    <a:srgbClr val="1A3A6B"/>
-                  </a:solidFill>
-                  <a:latin typeface="Arial" panose="020B0604020202020204"/>
-                  <a:ea typeface="微软雅黑" panose="020B0503020204020204" charset="-122"/>
-                  <a:cs typeface="Arial" panose="020B0604020202020204"/>
-                </a:endParaRPr>
               </a:p>
             </p:txBody>
           </p:sp>
@@ -6662,7 +6400,7 @@
             <p:spPr>
               <a:xfrm>
                 <a:off x="2145792" y="4492942"/>
-                <a:ext cx="5792953" cy="264033"/>
+                <a:ext cx="5713102" cy="207749"/>
               </a:xfrm>
               <a:prstGeom prst="rect">
                 <a:avLst/>
@@ -6688,16 +6426,30 @@
                     <a:ea typeface="微软雅黑" panose="020B0503020204020204" charset="-122"/>
                     <a:cs typeface="Arial" panose="020B0604020202020204"/>
                   </a:rPr>
-                  <a:t>批次时长不一致（5/10/20/35 个时间点），需压缩为固定长度特征向量</a:t>
+                  <a:t>批次时长不一致（5/10/20/35 </a:t>
                 </a:r>
-                <a:endParaRPr lang="zh-CN" sz="1350" dirty="0">
-                  <a:solidFill>
-                    <a:srgbClr val="5A6478"/>
-                  </a:solidFill>
-                  <a:latin typeface="Arial" panose="020B0604020202020204"/>
-                  <a:ea typeface="微软雅黑" panose="020B0503020204020204" charset="-122"/>
-                  <a:cs typeface="Arial" panose="020B0604020202020204"/>
-                </a:endParaRPr>
+                <a:r>
+                  <a:rPr lang="zh-CN" altLang="en-US" sz="1350" dirty="0">
+                    <a:solidFill>
+                      <a:srgbClr val="5A6478"/>
+                    </a:solidFill>
+                    <a:latin typeface="Arial" panose="020B0604020202020204"/>
+                    <a:ea typeface="微软雅黑" panose="020B0503020204020204" charset="-122"/>
+                    <a:cs typeface="Arial" panose="020B0604020202020204"/>
+                  </a:rPr>
+                  <a:t>等多</a:t>
+                </a:r>
+                <a:r>
+                  <a:rPr lang="zh-CN" sz="1350" dirty="0">
+                    <a:solidFill>
+                      <a:srgbClr val="5A6478"/>
+                    </a:solidFill>
+                    <a:latin typeface="Arial" panose="020B0604020202020204"/>
+                    <a:ea typeface="微软雅黑" panose="020B0503020204020204" charset="-122"/>
+                    <a:cs typeface="Arial" panose="020B0604020202020204"/>
+                  </a:rPr>
+                  <a:t>个时间点），需压缩为固定长度特征向量</a:t>
+                </a:r>
               </a:p>
             </p:txBody>
           </p:sp>
@@ -6775,14 +6527,6 @@
                   </a:rPr>
                   <a:t>03</a:t>
                 </a:r>
-                <a:endParaRPr lang="en-US" sz="1350" b="1" dirty="0">
-                  <a:solidFill>
-                    <a:srgbClr val="FFFFFF"/>
-                  </a:solidFill>
-                  <a:latin typeface="Times New Roman" panose="02020603050405020304"/>
-                  <a:ea typeface="Times New Roman" panose="02020603050405020304"/>
-                  <a:cs typeface="Times New Roman" panose="02020603050405020304"/>
-                </a:endParaRPr>
               </a:p>
             </p:txBody>
           </p:sp>
@@ -7195,14 +6939,6 @@
                   </a:rPr>
                   <a:t>CT 异质性</a:t>
                 </a:r>
-                <a:endParaRPr lang="zh-CN" sz="1800" b="1" dirty="0">
-                  <a:solidFill>
-                    <a:srgbClr val="1A3A6B"/>
-                  </a:solidFill>
-                  <a:latin typeface="Arial" panose="020B0604020202020204"/>
-                  <a:ea typeface="微软雅黑" panose="020B0503020204020204" charset="-122"/>
-                  <a:cs typeface="Arial" panose="020B0604020202020204"/>
-                </a:endParaRPr>
               </a:p>
             </p:txBody>
           </p:sp>
@@ -7243,14 +6979,6 @@
                   </a:rPr>
                   <a:t>三种控制类型（recipe / operator / apc）工艺逻辑不同，目标分布差异大</a:t>
                 </a:r>
-                <a:endParaRPr lang="zh-CN" sz="1350" dirty="0">
-                  <a:solidFill>
-                    <a:srgbClr val="5A6478"/>
-                  </a:solidFill>
-                  <a:latin typeface="Arial" panose="020B0604020202020204"/>
-                  <a:ea typeface="微软雅黑" panose="020B0503020204020204" charset="-122"/>
-                  <a:cs typeface="Arial" panose="020B0604020202020204"/>
-                </a:endParaRPr>
               </a:p>
             </p:txBody>
           </p:sp>
@@ -7343,14 +7071,6 @@
                 </a:rPr>
                 <a:t>青霉素发酵稳定期目标变量预测 · 项目方案</a:t>
               </a:r>
-              <a:endParaRPr lang="zh-CN" sz="1200" dirty="0">
-                <a:solidFill>
-                  <a:srgbClr val="000000"/>
-                </a:solidFill>
-                <a:latin typeface="Arial" panose="020B0604020202020204"/>
-                <a:ea typeface="微软雅黑" panose="020B0503020204020204" charset="-122"/>
-                <a:cs typeface="Arial" panose="020B0604020202020204"/>
-              </a:endParaRPr>
             </a:p>
           </p:txBody>
         </p:sp>
@@ -7391,14 +7111,6 @@
                 </a:rPr>
                 <a:t>02 / 05</a:t>
               </a:r>
-              <a:endParaRPr lang="en-US" sz="1200" dirty="0">
-                <a:solidFill>
-                  <a:srgbClr val="8A92A0"/>
-                </a:solidFill>
-                <a:latin typeface="Times New Roman" panose="02020603050405020304"/>
-                <a:ea typeface="Times New Roman" panose="02020603050405020304"/>
-                <a:cs typeface="Times New Roman" panose="02020603050405020304"/>
-              </a:endParaRPr>
             </a:p>
           </p:txBody>
         </p:sp>
@@ -7408,13 +7120,13 @@
   <p:clrMapOvr>
     <a:masterClrMapping/>
   </p:clrMapOvr>
-  <mc:AlternateContent xmlns:mc="http://schemas.openxmlformats.org/markup-compatibility/2006">
-    <mc:Choice xmlns:p14="http://schemas.microsoft.com/office/powerpoint/2010/main" Requires="p14">
+  <mc:AlternateContent xmlns:mc="http://schemas.openxmlformats.org/markup-compatibility/2006" xmlns:p14="http://schemas.microsoft.com/office/powerpoint/2010/main">
+    <mc:Choice Requires="p14">
       <p:transition p14:dur="400">
         <p:fade/>
       </p:transition>
     </mc:Choice>
-    <mc:Fallback>
+    <mc:Fallback xmlns="">
       <p:transition>
         <p:fade/>
       </p:transition>
@@ -7535,14 +7247,6 @@
                 </a:rPr>
                 <a:t>03 · DATA EXPLORATION</a:t>
               </a:r>
-              <a:endParaRPr lang="en-US" sz="1350" b="1" spc="75" dirty="0">
-                <a:solidFill>
-                  <a:srgbClr val="C9962B"/>
-                </a:solidFill>
-                <a:latin typeface="Times New Roman" panose="02020603050405020304"/>
-                <a:ea typeface="Times New Roman" panose="02020603050405020304"/>
-                <a:cs typeface="Times New Roman" panose="02020603050405020304"/>
-              </a:endParaRPr>
             </a:p>
           </p:txBody>
         </p:sp>
@@ -7583,14 +7287,6 @@
                 </a:rPr>
                 <a:t>数据探索与核心发现</a:t>
               </a:r>
-              <a:endParaRPr lang="zh-CN" sz="3150" b="1" dirty="0">
-                <a:solidFill>
-                  <a:srgbClr val="1A3A6B"/>
-                </a:solidFill>
-                <a:latin typeface="Times New Roman" panose="02020603050405020304"/>
-                <a:ea typeface="微软雅黑" panose="020B0503020204020204" charset="-122"/>
-                <a:cs typeface="Times New Roman" panose="02020603050405020304"/>
-              </a:endParaRPr>
             </a:p>
           </p:txBody>
         </p:sp>
@@ -7675,14 +7371,6 @@
                 </a:rPr>
                 <a:t>，决定按 CT 分别建模</a:t>
               </a:r>
-              <a:endParaRPr lang="zh-CN" sz="1800" dirty="0">
-                <a:solidFill>
-                  <a:srgbClr val="1D2430"/>
-                </a:solidFill>
-                <a:latin typeface="Arial" panose="020B0604020202020204"/>
-                <a:ea typeface="微软雅黑" panose="020B0503020204020204" charset="-122"/>
-                <a:cs typeface="Arial" panose="020B0604020202020204"/>
-              </a:endParaRPr>
             </a:p>
           </p:txBody>
         </p:sp>
@@ -7832,14 +7520,6 @@
                   </a:rPr>
                   <a:t>CT 类型</a:t>
                 </a:r>
-                <a:endParaRPr lang="zh-CN" sz="1200" b="1" spc="75" dirty="0">
-                  <a:solidFill>
-                    <a:srgbClr val="FFFFFF"/>
-                  </a:solidFill>
-                  <a:latin typeface="Arial" panose="020B0604020202020204"/>
-                  <a:ea typeface="微软雅黑" panose="020B0503020204020204" charset="-122"/>
-                  <a:cs typeface="Arial" panose="020B0604020202020204"/>
-                </a:endParaRPr>
               </a:p>
             </p:txBody>
           </p:sp>
@@ -7880,14 +7560,6 @@
                   </a:rPr>
                   <a:t>样本数</a:t>
                 </a:r>
-                <a:endParaRPr lang="zh-CN" sz="1200" b="1" spc="75" dirty="0">
-                  <a:solidFill>
-                    <a:srgbClr val="FFFFFF"/>
-                  </a:solidFill>
-                  <a:latin typeface="Arial" panose="020B0604020202020204"/>
-                  <a:ea typeface="微软雅黑" panose="020B0503020204020204" charset="-122"/>
-                  <a:cs typeface="Arial" panose="020B0604020202020204"/>
-                </a:endParaRPr>
               </a:p>
             </p:txBody>
           </p:sp>
@@ -7928,14 +7600,6 @@
                   </a:rPr>
                   <a:t>工艺含义</a:t>
                 </a:r>
-                <a:endParaRPr lang="zh-CN" sz="1200" b="1" spc="75" dirty="0">
-                  <a:solidFill>
-                    <a:srgbClr val="FFFFFF"/>
-                  </a:solidFill>
-                  <a:latin typeface="Arial" panose="020B0604020202020204"/>
-                  <a:ea typeface="微软雅黑" panose="020B0503020204020204" charset="-122"/>
-                  <a:cs typeface="Arial" panose="020B0604020202020204"/>
-                </a:endParaRPr>
               </a:p>
             </p:txBody>
           </p:sp>
@@ -7976,14 +7640,6 @@
                   </a:rPr>
                   <a:t>目标均值</a:t>
                 </a:r>
-                <a:endParaRPr lang="zh-CN" sz="1200" b="1" spc="75" dirty="0">
-                  <a:solidFill>
-                    <a:srgbClr val="FFFFFF"/>
-                  </a:solidFill>
-                  <a:latin typeface="Arial" panose="020B0604020202020204"/>
-                  <a:ea typeface="微软雅黑" panose="020B0503020204020204" charset="-122"/>
-                  <a:cs typeface="Arial" panose="020B0604020202020204"/>
-                </a:endParaRPr>
               </a:p>
             </p:txBody>
           </p:sp>
@@ -8024,14 +7680,6 @@
                   </a:rPr>
                   <a:t>标准差</a:t>
                 </a:r>
-                <a:endParaRPr lang="zh-CN" sz="1200" b="1" spc="75" dirty="0">
-                  <a:solidFill>
-                    <a:srgbClr val="FFFFFF"/>
-                  </a:solidFill>
-                  <a:latin typeface="Arial" panose="020B0604020202020204"/>
-                  <a:ea typeface="微软雅黑" panose="020B0503020204020204" charset="-122"/>
-                  <a:cs typeface="Arial" panose="020B0604020202020204"/>
-                </a:endParaRPr>
               </a:p>
             </p:txBody>
           </p:sp>
@@ -8216,14 +7864,6 @@
                   </a:rPr>
                   <a:t>recipe</a:t>
                 </a:r>
-                <a:endParaRPr lang="en-US" sz="1500" b="1" dirty="0">
-                  <a:solidFill>
-                    <a:srgbClr val="1A3A6B"/>
-                  </a:solidFill>
-                  <a:latin typeface="Arial" panose="020B0604020202020204"/>
-                  <a:ea typeface="Arial" panose="020B0604020202020204"/>
-                  <a:cs typeface="Arial" panose="020B0604020202020204"/>
-                </a:endParaRPr>
               </a:p>
             </p:txBody>
           </p:sp>
@@ -8264,14 +7904,6 @@
                   </a:rPr>
                   <a:t>60</a:t>
                 </a:r>
-                <a:endParaRPr lang="en-US" sz="1500" b="1" dirty="0">
-                  <a:solidFill>
-                    <a:srgbClr val="000000"/>
-                  </a:solidFill>
-                  <a:latin typeface="Times New Roman" panose="02020603050405020304"/>
-                  <a:ea typeface="Times New Roman" panose="02020603050405020304"/>
-                  <a:cs typeface="Times New Roman" panose="02020603050405020304"/>
-                </a:endParaRPr>
               </a:p>
             </p:txBody>
           </p:sp>
@@ -8312,14 +7944,6 @@
                   </a:rPr>
                   <a:t>固定配方控制</a:t>
                 </a:r>
-                <a:endParaRPr lang="zh-CN" sz="1350" spc="150" dirty="0">
-                  <a:solidFill>
-                    <a:srgbClr val="1D2430"/>
-                  </a:solidFill>
-                  <a:latin typeface="Arial" panose="020B0604020202020204"/>
-                  <a:ea typeface="微软雅黑" panose="020B0503020204020204" charset="-122"/>
-                  <a:cs typeface="Arial" panose="020B0604020202020204"/>
-                </a:endParaRPr>
               </a:p>
             </p:txBody>
           </p:sp>
@@ -8360,14 +7984,6 @@
                   </a:rPr>
                   <a:t>24.84</a:t>
                 </a:r>
-                <a:endParaRPr lang="en-US" sz="1650" b="1" spc="75" dirty="0">
-                  <a:solidFill>
-                    <a:srgbClr val="1A3A6B"/>
-                  </a:solidFill>
-                  <a:latin typeface="Times New Roman" panose="02020603050405020304"/>
-                  <a:ea typeface="Times New Roman" panose="02020603050405020304"/>
-                  <a:cs typeface="Times New Roman" panose="02020603050405020304"/>
-                </a:endParaRPr>
               </a:p>
             </p:txBody>
           </p:sp>
@@ -8408,14 +8024,6 @@
                   </a:rPr>
                   <a:t>±4.56</a:t>
                 </a:r>
-                <a:endParaRPr lang="en-US" sz="1050" dirty="0">
-                  <a:solidFill>
-                    <a:srgbClr val="8A92A0"/>
-                  </a:solidFill>
-                  <a:latin typeface="Arial" panose="020B0604020202020204"/>
-                  <a:ea typeface="Arial" panose="020B0604020202020204"/>
-                  <a:cs typeface="Arial" panose="020B0604020202020204"/>
-                </a:endParaRPr>
               </a:p>
             </p:txBody>
           </p:sp>
@@ -8492,14 +8100,6 @@
                   </a:rPr>
                   <a:t>operator</a:t>
                 </a:r>
-                <a:endParaRPr lang="en-US" sz="1500" b="1" dirty="0">
-                  <a:solidFill>
-                    <a:srgbClr val="4A7BB5"/>
-                  </a:solidFill>
-                  <a:latin typeface="Arial" panose="020B0604020202020204"/>
-                  <a:ea typeface="Arial" panose="020B0604020202020204"/>
-                  <a:cs typeface="Arial" panose="020B0604020202020204"/>
-                </a:endParaRPr>
               </a:p>
             </p:txBody>
           </p:sp>
@@ -8540,14 +8140,6 @@
                   </a:rPr>
                   <a:t>60</a:t>
                 </a:r>
-                <a:endParaRPr lang="en-US" sz="1500" b="1" dirty="0">
-                  <a:solidFill>
-                    <a:srgbClr val="000000"/>
-                  </a:solidFill>
-                  <a:latin typeface="Times New Roman" panose="02020603050405020304"/>
-                  <a:ea typeface="Times New Roman" panose="02020603050405020304"/>
-                  <a:cs typeface="Times New Roman" panose="02020603050405020304"/>
-                </a:endParaRPr>
               </a:p>
             </p:txBody>
           </p:sp>
@@ -8588,14 +8180,6 @@
                   </a:rPr>
                   <a:t>操作员人工干预</a:t>
                 </a:r>
-                <a:endParaRPr lang="zh-CN" sz="1350" dirty="0">
-                  <a:solidFill>
-                    <a:srgbClr val="1D2430"/>
-                  </a:solidFill>
-                  <a:latin typeface="Arial" panose="020B0604020202020204"/>
-                  <a:ea typeface="微软雅黑" panose="020B0503020204020204" charset="-122"/>
-                  <a:cs typeface="Arial" panose="020B0604020202020204"/>
-                </a:endParaRPr>
               </a:p>
             </p:txBody>
           </p:sp>
@@ -8636,14 +8220,6 @@
                   </a:rPr>
                   <a:t>25.05</a:t>
                 </a:r>
-                <a:endParaRPr lang="en-US" sz="1650" b="1" dirty="0">
-                  <a:solidFill>
-                    <a:srgbClr val="4A7BB5"/>
-                  </a:solidFill>
-                  <a:latin typeface="Times New Roman" panose="02020603050405020304"/>
-                  <a:ea typeface="Times New Roman" panose="02020603050405020304"/>
-                  <a:cs typeface="Times New Roman" panose="02020603050405020304"/>
-                </a:endParaRPr>
               </a:p>
             </p:txBody>
           </p:sp>
@@ -8684,14 +8260,6 @@
                   </a:rPr>
                   <a:t>±4.89</a:t>
                 </a:r>
-                <a:endParaRPr lang="en-US" sz="1050" dirty="0">
-                  <a:solidFill>
-                    <a:srgbClr val="8A92A0"/>
-                  </a:solidFill>
-                  <a:latin typeface="Arial" panose="020B0604020202020204"/>
-                  <a:ea typeface="Arial" panose="020B0604020202020204"/>
-                  <a:cs typeface="Arial" panose="020B0604020202020204"/>
-                </a:endParaRPr>
               </a:p>
             </p:txBody>
           </p:sp>
@@ -8792,14 +8360,6 @@
                   </a:rPr>
                   <a:t>apc</a:t>
                 </a:r>
-                <a:endParaRPr lang="en-US" sz="1500" b="1" dirty="0">
-                  <a:solidFill>
-                    <a:srgbClr val="C9962B"/>
-                  </a:solidFill>
-                  <a:latin typeface="Arial" panose="020B0604020202020204"/>
-                  <a:ea typeface="Arial" panose="020B0604020202020204"/>
-                  <a:cs typeface="Arial" panose="020B0604020202020204"/>
-                </a:endParaRPr>
               </a:p>
             </p:txBody>
           </p:sp>
@@ -8840,14 +8400,6 @@
                   </a:rPr>
                   <a:t>60</a:t>
                 </a:r>
-                <a:endParaRPr lang="en-US" sz="1500" b="1" dirty="0">
-                  <a:solidFill>
-                    <a:srgbClr val="000000"/>
-                  </a:solidFill>
-                  <a:latin typeface="Times New Roman" panose="02020603050405020304"/>
-                  <a:ea typeface="Times New Roman" panose="02020603050405020304"/>
-                  <a:cs typeface="Times New Roman" panose="02020603050405020304"/>
-                </a:endParaRPr>
               </a:p>
             </p:txBody>
           </p:sp>
@@ -8888,14 +8440,6 @@
                   </a:rPr>
                   <a:t>自动过程控制</a:t>
                 </a:r>
-                <a:endParaRPr lang="zh-CN" sz="1350" dirty="0">
-                  <a:solidFill>
-                    <a:srgbClr val="1D2430"/>
-                  </a:solidFill>
-                  <a:latin typeface="Arial" panose="020B0604020202020204"/>
-                  <a:ea typeface="微软雅黑" panose="020B0503020204020204" charset="-122"/>
-                  <a:cs typeface="Arial" panose="020B0604020202020204"/>
-                </a:endParaRPr>
               </a:p>
             </p:txBody>
           </p:sp>
@@ -8936,14 +8480,6 @@
                   </a:rPr>
                   <a:t>28.16</a:t>
                 </a:r>
-                <a:endParaRPr lang="en-US" sz="1650" b="1" dirty="0">
-                  <a:solidFill>
-                    <a:srgbClr val="C9962B"/>
-                  </a:solidFill>
-                  <a:latin typeface="Times New Roman" panose="02020603050405020304"/>
-                  <a:ea typeface="Times New Roman" panose="02020603050405020304"/>
-                  <a:cs typeface="Times New Roman" panose="02020603050405020304"/>
-                </a:endParaRPr>
               </a:p>
             </p:txBody>
           </p:sp>
@@ -8984,14 +8520,6 @@
                   </a:rPr>
                   <a:t>±3.14</a:t>
                 </a:r>
-                <a:endParaRPr lang="en-US" sz="1050" dirty="0">
-                  <a:solidFill>
-                    <a:srgbClr val="8A92A0"/>
-                  </a:solidFill>
-                  <a:latin typeface="Arial" panose="020B0604020202020204"/>
-                  <a:ea typeface="Arial" panose="020B0604020202020204"/>
-                  <a:cs typeface="Arial" panose="020B0604020202020204"/>
-                </a:endParaRPr>
               </a:p>
             </p:txBody>
           </p:sp>
@@ -9033,14 +8561,6 @@
                 </a:rPr>
                 <a:t>注：apc 仅 6 个样本但均值最高（28.16），分布差异驱动 CT 特异性建模策略</a:t>
               </a:r>
-              <a:endParaRPr lang="zh-CN" sz="1200" b="1" dirty="0">
-                <a:solidFill>
-                  <a:srgbClr val="8A92A0"/>
-                </a:solidFill>
-                <a:latin typeface="Arial" panose="020B0604020202020204"/>
-                <a:ea typeface="微软雅黑" panose="020B0503020204020204" charset="-122"/>
-                <a:cs typeface="Arial" panose="020B0604020202020204"/>
-              </a:endParaRPr>
             </a:p>
           </p:txBody>
         </p:sp>
@@ -9096,14 +8616,6 @@
                 </a:rPr>
                 <a:t>KEY FINDINGS · 关键发现</a:t>
               </a:r>
-              <a:endParaRPr lang="zh-CN" sz="1350" b="1" spc="75" dirty="0">
-                <a:solidFill>
-                  <a:srgbClr val="C9962B"/>
-                </a:solidFill>
-                <a:latin typeface="Times New Roman" panose="02020603050405020304"/>
-                <a:ea typeface="微软雅黑" panose="020B0503020204020204" charset="-122"/>
-                <a:cs typeface="Times New Roman" panose="02020603050405020304"/>
-              </a:endParaRPr>
             </a:p>
           </p:txBody>
         </p:sp>
@@ -9313,14 +8825,6 @@
                   </a:rPr>
                   <a:t>CT 分布差异 → 分别建模</a:t>
                 </a:r>
-                <a:endParaRPr lang="zh-CN" sz="1800" b="1" dirty="0">
-                  <a:solidFill>
-                    <a:srgbClr val="1A3A6B"/>
-                  </a:solidFill>
-                  <a:latin typeface="Arial" panose="020B0604020202020204"/>
-                  <a:ea typeface="微软雅黑" panose="020B0503020204020204" charset="-122"/>
-                  <a:cs typeface="Arial" panose="020B0604020202020204"/>
-                </a:endParaRPr>
               </a:p>
             </p:txBody>
           </p:sp>
@@ -9361,14 +8865,6 @@
                   </a:rPr>
                   <a:t>三类 CT 目标均值跨度 3.32（24.84→28.16），</a:t>
                 </a:r>
-                <a:endParaRPr lang="zh-CN" sz="1350" dirty="0">
-                  <a:solidFill>
-                    <a:srgbClr val="5A6478"/>
-                  </a:solidFill>
-                  <a:latin typeface="Arial" panose="020B0604020202020204"/>
-                  <a:ea typeface="微软雅黑" panose="020B0503020204020204" charset="-122"/>
-                  <a:cs typeface="Arial" panose="020B0604020202020204"/>
-                </a:endParaRPr>
               </a:p>
             </p:txBody>
           </p:sp>
@@ -9420,14 +8916,6 @@
                   </a:rPr>
                   <a:t>核心决策点</a:t>
                 </a:r>
-                <a:endParaRPr lang="zh-CN" sz="1350" b="1" dirty="0">
-                  <a:solidFill>
-                    <a:srgbClr val="C9962B"/>
-                  </a:solidFill>
-                  <a:latin typeface="Arial" panose="020B0604020202020204"/>
-                  <a:ea typeface="微软雅黑" panose="020B0503020204020204" charset="-122"/>
-                  <a:cs typeface="Arial" panose="020B0604020202020204"/>
-                </a:endParaRPr>
               </a:p>
             </p:txBody>
           </p:sp>
@@ -9598,14 +9086,6 @@
                   </a:rPr>
                   <a:t>SPC 通道需特征选择</a:t>
                 </a:r>
-                <a:endParaRPr lang="zh-CN" sz="1800" b="1" dirty="0">
-                  <a:solidFill>
-                    <a:srgbClr val="1A3A6B"/>
-                  </a:solidFill>
-                  <a:latin typeface="Arial" panose="020B0604020202020204"/>
-                  <a:ea typeface="微软雅黑" panose="020B0503020204020204" charset="-122"/>
-                  <a:cs typeface="Arial" panose="020B0604020202020204"/>
-                </a:endParaRPr>
               </a:p>
             </p:txBody>
           </p:sp>
@@ -9668,14 +9148,6 @@
                   </a:rPr>
                   <a:t>（|r| &gt; 0.3），</a:t>
                 </a:r>
-                <a:endParaRPr lang="zh-CN" sz="1350" dirty="0">
-                  <a:solidFill>
-                    <a:srgbClr val="5A6478"/>
-                  </a:solidFill>
-                  <a:latin typeface="Arial" panose="020B0604020202020204"/>
-                  <a:ea typeface="微软雅黑" panose="020B0503020204020204" charset="-122"/>
-                  <a:cs typeface="Arial" panose="020B0604020202020204"/>
-                </a:endParaRPr>
               </a:p>
             </p:txBody>
           </p:sp>
@@ -9716,14 +9188,6 @@
                   </a:rPr>
                   <a:t>20-30 个弱相关 — 需按 CT 分别筛选</a:t>
                 </a:r>
-                <a:endParaRPr lang="zh-CN" sz="1350" dirty="0">
-                  <a:solidFill>
-                    <a:srgbClr val="5A6478"/>
-                  </a:solidFill>
-                  <a:latin typeface="Arial" panose="020B0604020202020204"/>
-                  <a:ea typeface="微软雅黑" panose="020B0503020204020204" charset="-122"/>
-                  <a:cs typeface="Arial" panose="020B0604020202020204"/>
-                </a:endParaRPr>
               </a:p>
             </p:txBody>
           </p:sp>
@@ -10073,14 +9537,6 @@
                   </a:rPr>
                   <a:t>过程变量未提升性能</a:t>
                 </a:r>
-                <a:endParaRPr lang="zh-CN" sz="1800" b="1" dirty="0">
-                  <a:solidFill>
-                    <a:srgbClr val="1A3A6B"/>
-                  </a:solidFill>
-                  <a:latin typeface="Arial" panose="020B0604020202020204"/>
-                  <a:ea typeface="微软雅黑" panose="020B0503020204020204" charset="-122"/>
-                  <a:cs typeface="Arial" panose="020B0604020202020204"/>
-                </a:endParaRPr>
               </a:p>
             </p:txBody>
           </p:sp>
@@ -10121,14 +9577,6 @@
                   </a:rPr>
                   <a:t>温度/pH/DO 等在 CV 实验中无增益，</a:t>
                 </a:r>
-                <a:endParaRPr lang="zh-CN" sz="1350" dirty="0">
-                  <a:solidFill>
-                    <a:srgbClr val="5A6478"/>
-                  </a:solidFill>
-                  <a:latin typeface="Arial" panose="020B0604020202020204"/>
-                  <a:ea typeface="微软雅黑" panose="020B0503020204020204" charset="-122"/>
-                  <a:cs typeface="Arial" panose="020B0604020202020204"/>
-                </a:endParaRPr>
               </a:p>
             </p:txBody>
           </p:sp>
@@ -10180,14 +9628,6 @@
                   </a:rPr>
                   <a:t>仅使用 SPC 特征</a:t>
                 </a:r>
-                <a:endParaRPr lang="zh-CN" sz="1350" b="1" dirty="0">
-                  <a:solidFill>
-                    <a:srgbClr val="4A7BB5"/>
-                  </a:solidFill>
-                  <a:latin typeface="Arial" panose="020B0604020202020204"/>
-                  <a:ea typeface="微软雅黑" panose="020B0503020204020204" charset="-122"/>
-                  <a:cs typeface="Arial" panose="020B0604020202020204"/>
-                </a:endParaRPr>
               </a:p>
             </p:txBody>
           </p:sp>
@@ -10280,14 +9720,6 @@
                 </a:rPr>
                 <a:t>数据来源：训练集 105 样本 EDA · target_stable_mean 统计</a:t>
               </a:r>
-              <a:endParaRPr lang="zh-CN" sz="1200" dirty="0">
-                <a:solidFill>
-                  <a:srgbClr val="000000"/>
-                </a:solidFill>
-                <a:latin typeface="Arial" panose="020B0604020202020204"/>
-                <a:ea typeface="微软雅黑" panose="020B0503020204020204" charset="-122"/>
-                <a:cs typeface="Arial" panose="020B0604020202020204"/>
-              </a:endParaRPr>
             </a:p>
           </p:txBody>
         </p:sp>
@@ -10328,14 +9760,6 @@
                 </a:rPr>
                 <a:t>03 / 05</a:t>
               </a:r>
-              <a:endParaRPr lang="en-US" sz="1200" dirty="0">
-                <a:solidFill>
-                  <a:srgbClr val="8A92A0"/>
-                </a:solidFill>
-                <a:latin typeface="Times New Roman" panose="02020603050405020304"/>
-                <a:ea typeface="Times New Roman" panose="02020603050405020304"/>
-                <a:cs typeface="Times New Roman" panose="02020603050405020304"/>
-              </a:endParaRPr>
             </a:p>
           </p:txBody>
         </p:sp>
@@ -10345,13 +9769,13 @@
   <p:clrMapOvr>
     <a:masterClrMapping/>
   </p:clrMapOvr>
-  <mc:AlternateContent xmlns:mc="http://schemas.openxmlformats.org/markup-compatibility/2006">
-    <mc:Choice xmlns:p14="http://schemas.microsoft.com/office/powerpoint/2010/main" Requires="p14">
+  <mc:AlternateContent xmlns:mc="http://schemas.openxmlformats.org/markup-compatibility/2006" xmlns:p14="http://schemas.microsoft.com/office/powerpoint/2010/main">
+    <mc:Choice Requires="p14">
       <p:transition p14:dur="400">
         <p:fade/>
       </p:transition>
     </mc:Choice>
-    <mc:Fallback>
+    <mc:Fallback xmlns="">
       <p:transition>
         <p:fade/>
       </p:transition>
@@ -10472,14 +9896,6 @@
                 </a:rPr>
                 <a:t>04 · SOLUTION PIPELINE</a:t>
               </a:r>
-              <a:endParaRPr lang="en-US" sz="1350" b="1" spc="75" dirty="0">
-                <a:solidFill>
-                  <a:srgbClr val="C9962B"/>
-                </a:solidFill>
-                <a:latin typeface="Times New Roman" panose="02020603050405020304"/>
-                <a:ea typeface="Times New Roman" panose="02020603050405020304"/>
-                <a:cs typeface="Times New Roman" panose="02020603050405020304"/>
-              </a:endParaRPr>
             </a:p>
           </p:txBody>
         </p:sp>
@@ -10520,14 +9936,6 @@
                 </a:rPr>
                 <a:t>整体方案流程</a:t>
               </a:r>
-              <a:endParaRPr lang="zh-CN" sz="3150" b="1" dirty="0">
-                <a:solidFill>
-                  <a:srgbClr val="1A3A6B"/>
-                </a:solidFill>
-                <a:latin typeface="Times New Roman" panose="02020603050405020304"/>
-                <a:ea typeface="微软雅黑" panose="020B0503020204020204" charset="-122"/>
-                <a:cs typeface="Times New Roman" panose="02020603050405020304"/>
-              </a:endParaRPr>
             </a:p>
           </p:txBody>
         </p:sp>
@@ -10634,14 +10042,6 @@
                 </a:rPr>
                 <a:t>，每阶段针对小样本精心设计</a:t>
               </a:r>
-              <a:endParaRPr lang="zh-CN" sz="1800" dirty="0">
-                <a:solidFill>
-                  <a:srgbClr val="1D2430"/>
-                </a:solidFill>
-                <a:latin typeface="Arial" panose="020B0604020202020204"/>
-                <a:ea typeface="微软雅黑" panose="020B0503020204020204" charset="-122"/>
-                <a:cs typeface="Arial" panose="020B0604020202020204"/>
-              </a:endParaRPr>
             </a:p>
           </p:txBody>
         </p:sp>
@@ -10819,14 +10219,6 @@
                   </a:rPr>
                   <a:t>01</a:t>
                 </a:r>
-                <a:endParaRPr lang="en-US" sz="1350" b="1" dirty="0">
-                  <a:solidFill>
-                    <a:srgbClr val="FFFFFF"/>
-                  </a:solidFill>
-                  <a:latin typeface="Times New Roman" panose="02020603050405020304"/>
-                  <a:ea typeface="Times New Roman" panose="02020603050405020304"/>
-                  <a:cs typeface="Times New Roman" panose="02020603050405020304"/>
-                </a:endParaRPr>
               </a:p>
             </p:txBody>
           </p:sp>
@@ -10867,14 +10259,6 @@
                   </a:rPr>
                   <a:t>预处理</a:t>
                 </a:r>
-                <a:endParaRPr lang="zh-CN" sz="1500" b="1" dirty="0">
-                  <a:solidFill>
-                    <a:srgbClr val="FFFFFF"/>
-                  </a:solidFill>
-                  <a:latin typeface="Arial" panose="020B0604020202020204"/>
-                  <a:ea typeface="微软雅黑" panose="020B0503020204020204" charset="-122"/>
-                  <a:cs typeface="Arial" panose="020B0604020202020204"/>
-                </a:endParaRPr>
               </a:p>
             </p:txBody>
           </p:sp>
@@ -11327,14 +10711,6 @@
                   </a:rPr>
                   <a:t>缺失值填充</a:t>
                 </a:r>
-                <a:endParaRPr lang="zh-CN" sz="1200" b="1" dirty="0">
-                  <a:solidFill>
-                    <a:srgbClr val="1A3A6B"/>
-                  </a:solidFill>
-                  <a:latin typeface="Arial" panose="020B0604020202020204"/>
-                  <a:ea typeface="微软雅黑" panose="020B0503020204020204" charset="-122"/>
-                  <a:cs typeface="Arial" panose="020B0604020202020204"/>
-                </a:endParaRPr>
               </a:p>
             </p:txBody>
           </p:sp>
@@ -11397,14 +10773,6 @@
                   </a:rPr>
                   <a:t>前向/后向填充</a:t>
                 </a:r>
-                <a:endParaRPr lang="zh-CN" sz="1350" dirty="0">
-                  <a:solidFill>
-                    <a:srgbClr val="1D2430"/>
-                  </a:solidFill>
-                  <a:latin typeface="Arial" panose="020B0604020202020204"/>
-                  <a:ea typeface="微软雅黑" panose="020B0503020204020204" charset="-122"/>
-                  <a:cs typeface="Arial" panose="020B0604020202020204"/>
-                </a:endParaRPr>
               </a:p>
             </p:txBody>
           </p:sp>
@@ -11467,14 +10835,6 @@
                   </a:rPr>
                   <a:t>剩余缺失填 0</a:t>
                 </a:r>
-                <a:endParaRPr lang="zh-CN" sz="1350" dirty="0">
-                  <a:solidFill>
-                    <a:srgbClr val="1D2430"/>
-                  </a:solidFill>
-                  <a:latin typeface="Arial" panose="020B0604020202020204"/>
-                  <a:ea typeface="微软雅黑" panose="020B0503020204020204" charset="-122"/>
-                  <a:cs typeface="Arial" panose="020B0604020202020204"/>
-                </a:endParaRPr>
               </a:p>
             </p:txBody>
           </p:sp>
@@ -11537,14 +10897,6 @@
                   </a:rPr>
                   <a:t>按 sample_id 分组</a:t>
                 </a:r>
-                <a:endParaRPr lang="zh-CN" sz="1350" dirty="0">
-                  <a:solidFill>
-                    <a:srgbClr val="1D2430"/>
-                  </a:solidFill>
-                  <a:latin typeface="Arial" panose="020B0604020202020204"/>
-                  <a:ea typeface="微软雅黑" panose="020B0503020204020204" charset="-122"/>
-                  <a:cs typeface="Arial" panose="020B0604020202020204"/>
-                </a:endParaRPr>
               </a:p>
             </p:txBody>
           </p:sp>
@@ -11650,14 +11002,6 @@
                   </a:rPr>
                   <a:t>STAGE OUTPUT</a:t>
                 </a:r>
-                <a:endParaRPr lang="en-US" sz="1050" b="1" spc="75" dirty="0">
-                  <a:solidFill>
-                    <a:srgbClr val="8A92A0"/>
-                  </a:solidFill>
-                  <a:latin typeface="Arial" panose="020B0604020202020204"/>
-                  <a:ea typeface="Arial" panose="020B0604020202020204"/>
-                  <a:cs typeface="Arial" panose="020B0604020202020204"/>
-                </a:endParaRPr>
               </a:p>
             </p:txBody>
           </p:sp>
@@ -11698,14 +11042,6 @@
                   </a:rPr>
                   <a:t>完整时序数据</a:t>
                 </a:r>
-                <a:endParaRPr lang="zh-CN" sz="1350" b="1" dirty="0">
-                  <a:solidFill>
-                    <a:srgbClr val="1A3A6B"/>
-                  </a:solidFill>
-                  <a:latin typeface="Arial" panose="020B0604020202020204"/>
-                  <a:ea typeface="微软雅黑" panose="020B0503020204020204" charset="-122"/>
-                  <a:cs typeface="Arial" panose="020B0604020202020204"/>
-                </a:endParaRPr>
               </a:p>
             </p:txBody>
           </p:sp>
@@ -11873,14 +11209,6 @@
                   </a:rPr>
                   <a:t>02</a:t>
                 </a:r>
-                <a:endParaRPr lang="en-US" sz="1350" b="1" dirty="0">
-                  <a:solidFill>
-                    <a:srgbClr val="FFFFFF"/>
-                  </a:solidFill>
-                  <a:latin typeface="Times New Roman" panose="02020603050405020304"/>
-                  <a:ea typeface="Times New Roman" panose="02020603050405020304"/>
-                  <a:cs typeface="Times New Roman" panose="02020603050405020304"/>
-                </a:endParaRPr>
               </a:p>
             </p:txBody>
           </p:sp>
@@ -11921,14 +11249,6 @@
                   </a:rPr>
                   <a:t>特征工程</a:t>
                 </a:r>
-                <a:endParaRPr lang="zh-CN" sz="1500" b="1" dirty="0">
-                  <a:solidFill>
-                    <a:srgbClr val="FFFFFF"/>
-                  </a:solidFill>
-                  <a:latin typeface="Arial" panose="020B0604020202020204"/>
-                  <a:ea typeface="微软雅黑" panose="020B0503020204020204" charset="-122"/>
-                  <a:cs typeface="Arial" panose="020B0604020202020204"/>
-                </a:endParaRPr>
               </a:p>
             </p:txBody>
           </p:sp>
@@ -12237,14 +11557,6 @@
                   </a:rPr>
                   <a:t>SPC 统计聚合</a:t>
                 </a:r>
-                <a:endParaRPr lang="zh-CN" sz="1200" b="1" dirty="0">
-                  <a:solidFill>
-                    <a:srgbClr val="1A3A6B"/>
-                  </a:solidFill>
-                  <a:latin typeface="Arial" panose="020B0604020202020204"/>
-                  <a:ea typeface="微软雅黑" panose="020B0503020204020204" charset="-122"/>
-                  <a:cs typeface="Arial" panose="020B0604020202020204"/>
-                </a:endParaRPr>
               </a:p>
             </p:txBody>
           </p:sp>
@@ -12307,14 +11619,6 @@
                   </a:rPr>
                   <a:t>64 通道 × 5 统计量</a:t>
                 </a:r>
-                <a:endParaRPr lang="zh-CN" sz="1350" dirty="0">
-                  <a:solidFill>
-                    <a:srgbClr val="1D2430"/>
-                  </a:solidFill>
-                  <a:latin typeface="Arial" panose="020B0604020202020204"/>
-                  <a:ea typeface="微软雅黑" panose="020B0503020204020204" charset="-122"/>
-                  <a:cs typeface="Arial" panose="020B0604020202020204"/>
-                </a:endParaRPr>
               </a:p>
             </p:txBody>
           </p:sp>
@@ -12377,14 +11681,6 @@
                   </a:rPr>
                   <a:t>mean/std/skew/</a:t>
                 </a:r>
-                <a:endParaRPr lang="en-US" sz="1350" dirty="0">
-                  <a:solidFill>
-                    <a:srgbClr val="1D2430"/>
-                  </a:solidFill>
-                  <a:latin typeface="Arial" panose="020B0604020202020204"/>
-                  <a:ea typeface="Arial" panose="020B0604020202020204"/>
-                  <a:cs typeface="Arial" panose="020B0604020202020204"/>
-                </a:endParaRPr>
               </a:p>
             </p:txBody>
           </p:sp>
@@ -12425,14 +11721,6 @@
                   </a:rPr>
                   <a:t>median/cv</a:t>
                 </a:r>
-                <a:endParaRPr lang="en-US" sz="1350" dirty="0">
-                  <a:solidFill>
-                    <a:srgbClr val="1D2430"/>
-                  </a:solidFill>
-                  <a:latin typeface="Arial" panose="020B0604020202020204"/>
-                  <a:ea typeface="Arial" panose="020B0604020202020204"/>
-                  <a:cs typeface="Arial" panose="020B0604020202020204"/>
-                </a:endParaRPr>
               </a:p>
             </p:txBody>
           </p:sp>
@@ -12495,14 +11783,6 @@
                   </a:rPr>
                   <a:t>320 候选特征</a:t>
                 </a:r>
-                <a:endParaRPr lang="zh-CN" sz="1350" b="1" dirty="0">
-                  <a:solidFill>
-                    <a:srgbClr val="C9962B"/>
-                  </a:solidFill>
-                  <a:latin typeface="Arial" panose="020B0604020202020204"/>
-                  <a:ea typeface="微软雅黑" panose="020B0503020204020204" charset="-122"/>
-                  <a:cs typeface="Arial" panose="020B0604020202020204"/>
-                </a:endParaRPr>
               </a:p>
             </p:txBody>
           </p:sp>
@@ -12608,14 +11888,6 @@
                   </a:rPr>
                   <a:t>STAGE OUTPUT</a:t>
                 </a:r>
-                <a:endParaRPr lang="en-US" sz="1050" b="1" spc="75" dirty="0">
-                  <a:solidFill>
-                    <a:srgbClr val="8A92A0"/>
-                  </a:solidFill>
-                  <a:latin typeface="Arial" panose="020B0604020202020204"/>
-                  <a:ea typeface="Arial" panose="020B0604020202020204"/>
-                  <a:cs typeface="Arial" panose="020B0604020202020204"/>
-                </a:endParaRPr>
               </a:p>
             </p:txBody>
           </p:sp>
@@ -12656,14 +11928,6 @@
                   </a:rPr>
                   <a:t>特征矩阵</a:t>
                 </a:r>
-                <a:endParaRPr lang="zh-CN" sz="1350" b="1" dirty="0">
-                  <a:solidFill>
-                    <a:srgbClr val="C9962B"/>
-                  </a:solidFill>
-                  <a:latin typeface="Arial" panose="020B0604020202020204"/>
-                  <a:ea typeface="微软雅黑" panose="020B0503020204020204" charset="-122"/>
-                  <a:cs typeface="Arial" panose="020B0604020202020204"/>
-                </a:endParaRPr>
               </a:p>
             </p:txBody>
           </p:sp>
@@ -12831,14 +12095,6 @@
                   </a:rPr>
                   <a:t>03</a:t>
                 </a:r>
-                <a:endParaRPr lang="en-US" sz="1350" b="1" dirty="0">
-                  <a:solidFill>
-                    <a:srgbClr val="FFFFFF"/>
-                  </a:solidFill>
-                  <a:latin typeface="Times New Roman" panose="02020603050405020304"/>
-                  <a:ea typeface="Times New Roman" panose="02020603050405020304"/>
-                  <a:cs typeface="Times New Roman" panose="02020603050405020304"/>
-                </a:endParaRPr>
               </a:p>
             </p:txBody>
           </p:sp>
@@ -12879,14 +12135,6 @@
                   </a:rPr>
                   <a:t>特征选择</a:t>
                 </a:r>
-                <a:endParaRPr lang="zh-CN" sz="1500" b="1" dirty="0">
-                  <a:solidFill>
-                    <a:srgbClr val="FFFFFF"/>
-                  </a:solidFill>
-                  <a:latin typeface="Arial" panose="020B0604020202020204"/>
-                  <a:ea typeface="微软雅黑" panose="020B0503020204020204" charset="-122"/>
-                  <a:cs typeface="Arial" panose="020B0604020202020204"/>
-                </a:endParaRPr>
               </a:p>
             </p:txBody>
           </p:sp>
@@ -13016,14 +12264,6 @@
                   </a:rPr>
                   <a:t>CT 特异性筛选</a:t>
                 </a:r>
-                <a:endParaRPr lang="zh-CN" sz="1200" b="1" dirty="0">
-                  <a:solidFill>
-                    <a:srgbClr val="1A3A6B"/>
-                  </a:solidFill>
-                  <a:latin typeface="Arial" panose="020B0604020202020204"/>
-                  <a:ea typeface="微软雅黑" panose="020B0503020204020204" charset="-122"/>
-                  <a:cs typeface="Arial" panose="020B0604020202020204"/>
-                </a:endParaRPr>
               </a:p>
             </p:txBody>
           </p:sp>
@@ -13086,14 +12326,6 @@
                   </a:rPr>
                   <a:t>Pearson 相关性</a:t>
                 </a:r>
-                <a:endParaRPr lang="zh-CN" sz="1350" dirty="0">
-                  <a:solidFill>
-                    <a:srgbClr val="1D2430"/>
-                  </a:solidFill>
-                  <a:latin typeface="Arial" panose="020B0604020202020204"/>
-                  <a:ea typeface="微软雅黑" panose="020B0503020204020204" charset="-122"/>
-                  <a:cs typeface="Arial" panose="020B0604020202020204"/>
-                </a:endParaRPr>
               </a:p>
             </p:txBody>
           </p:sp>
@@ -13156,14 +12388,6 @@
                   </a:rPr>
                   <a:t>按 CT 分别取 Top-K</a:t>
                 </a:r>
-                <a:endParaRPr lang="zh-CN" sz="1350" dirty="0">
-                  <a:solidFill>
-                    <a:srgbClr val="1D2430"/>
-                  </a:solidFill>
-                  <a:latin typeface="Arial" panose="020B0604020202020204"/>
-                  <a:ea typeface="微软雅黑" panose="020B0503020204020204" charset="-122"/>
-                  <a:cs typeface="Arial" panose="020B0604020202020204"/>
-                </a:endParaRPr>
               </a:p>
             </p:txBody>
           </p:sp>
@@ -13204,14 +12428,6 @@
                   </a:rPr>
                   <a:t>recipe: 14 · op: 22</a:t>
                 </a:r>
-                <a:endParaRPr lang="en-US" sz="1350" dirty="0">
-                  <a:solidFill>
-                    <a:srgbClr val="5A6478"/>
-                  </a:solidFill>
-                  <a:latin typeface="Arial" panose="020B0604020202020204"/>
-                  <a:ea typeface="Arial" panose="020B0604020202020204"/>
-                  <a:cs typeface="Arial" panose="020B0604020202020204"/>
-                </a:endParaRPr>
               </a:p>
             </p:txBody>
           </p:sp>
@@ -13252,14 +12468,6 @@
                   </a:rPr>
                   <a:t>apc: 3（全局排名）</a:t>
                 </a:r>
-                <a:endParaRPr lang="zh-CN" sz="1350" dirty="0">
-                  <a:solidFill>
-                    <a:srgbClr val="5A6478"/>
-                  </a:solidFill>
-                  <a:latin typeface="Arial" panose="020B0604020202020204"/>
-                  <a:ea typeface="微软雅黑" panose="020B0503020204020204" charset="-122"/>
-                  <a:cs typeface="Arial" panose="020B0604020202020204"/>
-                </a:endParaRPr>
               </a:p>
             </p:txBody>
           </p:sp>
@@ -13365,14 +12573,6 @@
                   </a:rPr>
                   <a:t>STAGE OUTPUT</a:t>
                 </a:r>
-                <a:endParaRPr lang="en-US" sz="1050" b="1" spc="75" dirty="0">
-                  <a:solidFill>
-                    <a:srgbClr val="8A92A0"/>
-                  </a:solidFill>
-                  <a:latin typeface="Arial" panose="020B0604020202020204"/>
-                  <a:ea typeface="Arial" panose="020B0604020202020204"/>
-                  <a:cs typeface="Arial" panose="020B0604020202020204"/>
-                </a:endParaRPr>
               </a:p>
             </p:txBody>
           </p:sp>
@@ -13413,14 +12613,6 @@
                   </a:rPr>
                   <a:t>精选特征</a:t>
                 </a:r>
-                <a:endParaRPr lang="zh-CN" sz="1350" b="1" dirty="0">
-                  <a:solidFill>
-                    <a:srgbClr val="1A3A6B"/>
-                  </a:solidFill>
-                  <a:latin typeface="Arial" panose="020B0604020202020204"/>
-                  <a:ea typeface="微软雅黑" panose="020B0503020204020204" charset="-122"/>
-                  <a:cs typeface="Arial" panose="020B0604020202020204"/>
-                </a:endParaRPr>
               </a:p>
             </p:txBody>
           </p:sp>
@@ -13588,14 +12780,6 @@
                   </a:rPr>
                   <a:t>04</a:t>
                 </a:r>
-                <a:endParaRPr lang="en-US" sz="1350" b="1" dirty="0">
-                  <a:solidFill>
-                    <a:srgbClr val="FFFFFF"/>
-                  </a:solidFill>
-                  <a:latin typeface="Times New Roman" panose="02020603050405020304"/>
-                  <a:ea typeface="Times New Roman" panose="02020603050405020304"/>
-                  <a:cs typeface="Times New Roman" panose="02020603050405020304"/>
-                </a:endParaRPr>
               </a:p>
             </p:txBody>
           </p:sp>
@@ -13636,14 +12820,6 @@
                   </a:rPr>
                   <a:t>建模</a:t>
                 </a:r>
-                <a:endParaRPr lang="zh-CN" sz="1500" b="1" dirty="0">
-                  <a:solidFill>
-                    <a:srgbClr val="FFFFFF"/>
-                  </a:solidFill>
-                  <a:latin typeface="Arial" panose="020B0604020202020204"/>
-                  <a:ea typeface="微软雅黑" panose="020B0503020204020204" charset="-122"/>
-                  <a:cs typeface="Arial" panose="020B0604020202020204"/>
-                </a:endParaRPr>
               </a:p>
             </p:txBody>
           </p:sp>
@@ -14016,14 +13192,6 @@
                   </a:rPr>
                   <a:t>Ridge 回归</a:t>
                 </a:r>
-                <a:endParaRPr lang="zh-CN" sz="1200" b="1" dirty="0">
-                  <a:solidFill>
-                    <a:srgbClr val="C9962B"/>
-                  </a:solidFill>
-                  <a:latin typeface="Arial" panose="020B0604020202020204"/>
-                  <a:ea typeface="微软雅黑" panose="020B0503020204020204" charset="-122"/>
-                  <a:cs typeface="Arial" panose="020B0604020202020204"/>
-                </a:endParaRPr>
               </a:p>
             </p:txBody>
           </p:sp>
@@ -14086,14 +13254,6 @@
                   </a:rPr>
                   <a:t>alpha=0.1, L2 正则</a:t>
                 </a:r>
-                <a:endParaRPr lang="zh-CN" sz="1350" dirty="0">
-                  <a:solidFill>
-                    <a:srgbClr val="1D2430"/>
-                  </a:solidFill>
-                  <a:latin typeface="Arial" panose="020B0604020202020204"/>
-                  <a:ea typeface="微软雅黑" panose="020B0503020204020204" charset="-122"/>
-                  <a:cs typeface="Arial" panose="020B0604020202020204"/>
-                </a:endParaRPr>
               </a:p>
             </p:txBody>
           </p:sp>
@@ -14156,14 +13316,6 @@
                   </a:rPr>
                   <a:t>StandardScaler</a:t>
                 </a:r>
-                <a:endParaRPr lang="en-US" sz="1350" dirty="0">
-                  <a:solidFill>
-                    <a:srgbClr val="1D2430"/>
-                  </a:solidFill>
-                  <a:latin typeface="Arial" panose="020B0604020202020204"/>
-                  <a:ea typeface="Arial" panose="020B0604020202020204"/>
-                  <a:cs typeface="Arial" panose="020B0604020202020204"/>
-                </a:endParaRPr>
               </a:p>
             </p:txBody>
           </p:sp>
@@ -14226,14 +13378,6 @@
                   </a:rPr>
                   <a:t>CT 样本加权=2</a:t>
                 </a:r>
-                <a:endParaRPr lang="zh-CN" sz="1350" dirty="0">
-                  <a:solidFill>
-                    <a:srgbClr val="1D2430"/>
-                  </a:solidFill>
-                  <a:latin typeface="Arial" panose="020B0604020202020204"/>
-                  <a:ea typeface="微软雅黑" panose="020B0503020204020204" charset="-122"/>
-                  <a:cs typeface="Arial" panose="020B0604020202020204"/>
-                </a:endParaRPr>
               </a:p>
             </p:txBody>
           </p:sp>
@@ -14296,14 +13440,6 @@
                   </a:rPr>
                   <a:t>30 seed Ensemble</a:t>
                 </a:r>
-                <a:endParaRPr lang="en-US" sz="1350" dirty="0">
-                  <a:solidFill>
-                    <a:srgbClr val="1D2430"/>
-                  </a:solidFill>
-                  <a:latin typeface="Arial" panose="020B0604020202020204"/>
-                  <a:ea typeface="Arial" panose="020B0604020202020204"/>
-                  <a:cs typeface="Arial" panose="020B0604020202020204"/>
-                </a:endParaRPr>
               </a:p>
             </p:txBody>
           </p:sp>
@@ -14409,14 +13545,6 @@
                   </a:rPr>
                   <a:t>STAGE OUTPUT</a:t>
                 </a:r>
-                <a:endParaRPr lang="en-US" sz="1050" b="1" spc="75" dirty="0">
-                  <a:solidFill>
-                    <a:srgbClr val="8A92A0"/>
-                  </a:solidFill>
-                  <a:latin typeface="Arial" panose="020B0604020202020204"/>
-                  <a:ea typeface="Arial" panose="020B0604020202020204"/>
-                  <a:cs typeface="Arial" panose="020B0604020202020204"/>
-                </a:endParaRPr>
               </a:p>
             </p:txBody>
           </p:sp>
@@ -14457,14 +13585,6 @@
                   </a:rPr>
                   <a:t>预测模型</a:t>
                 </a:r>
-                <a:endParaRPr lang="zh-CN" sz="1350" b="1" dirty="0">
-                  <a:solidFill>
-                    <a:srgbClr val="C9962B"/>
-                  </a:solidFill>
-                  <a:latin typeface="Arial" panose="020B0604020202020204"/>
-                  <a:ea typeface="微软雅黑" panose="020B0503020204020204" charset="-122"/>
-                  <a:cs typeface="Arial" panose="020B0604020202020204"/>
-                </a:endParaRPr>
               </a:p>
             </p:txBody>
           </p:sp>
@@ -14632,14 +13752,6 @@
                   </a:rPr>
                   <a:t>05</a:t>
                 </a:r>
-                <a:endParaRPr lang="en-US" sz="1350" b="1" dirty="0">
-                  <a:solidFill>
-                    <a:srgbClr val="FFFFFF"/>
-                  </a:solidFill>
-                  <a:latin typeface="Times New Roman" panose="02020603050405020304"/>
-                  <a:ea typeface="Times New Roman" panose="02020603050405020304"/>
-                  <a:cs typeface="Times New Roman" panose="02020603050405020304"/>
-                </a:endParaRPr>
               </a:p>
             </p:txBody>
           </p:sp>
@@ -14680,14 +13792,6 @@
                   </a:rPr>
                   <a:t>校准</a:t>
                 </a:r>
-                <a:endParaRPr lang="zh-CN" sz="1500" b="1" dirty="0">
-                  <a:solidFill>
-                    <a:srgbClr val="FFFFFF"/>
-                  </a:solidFill>
-                  <a:latin typeface="Arial" panose="020B0604020202020204"/>
-                  <a:ea typeface="微软雅黑" panose="020B0503020204020204" charset="-122"/>
-                  <a:cs typeface="Arial" panose="020B0604020202020204"/>
-                </a:endParaRPr>
               </a:p>
             </p:txBody>
           </p:sp>
@@ -14974,14 +14078,6 @@
                   </a:rPr>
                   <a:t>CT 分层校准</a:t>
                 </a:r>
-                <a:endParaRPr lang="zh-CN" sz="1200" b="1" dirty="0">
-                  <a:solidFill>
-                    <a:srgbClr val="1A3A6B"/>
-                  </a:solidFill>
-                  <a:latin typeface="Arial" panose="020B0604020202020204"/>
-                  <a:ea typeface="微软雅黑" panose="020B0503020204020204" charset="-122"/>
-                  <a:cs typeface="Arial" panose="020B0604020202020204"/>
-                </a:endParaRPr>
               </a:p>
             </p:txBody>
           </p:sp>
@@ -15044,14 +14140,6 @@
                   </a:rPr>
                   <a:t>收缩: recipe 35%</a:t>
                 </a:r>
-                <a:endParaRPr lang="zh-CN" sz="1350" dirty="0">
-                  <a:solidFill>
-                    <a:srgbClr val="1D2430"/>
-                  </a:solidFill>
-                  <a:latin typeface="Arial" panose="020B0604020202020204"/>
-                  <a:ea typeface="微软雅黑" panose="020B0503020204020204" charset="-122"/>
-                  <a:cs typeface="Arial" panose="020B0604020202020204"/>
-                </a:endParaRPr>
               </a:p>
             </p:txBody>
           </p:sp>
@@ -15114,14 +14202,6 @@
                   </a:rPr>
                   <a:t>operator 20%</a:t>
                 </a:r>
-                <a:endParaRPr lang="en-US" sz="1350" dirty="0">
-                  <a:solidFill>
-                    <a:srgbClr val="1D2430"/>
-                  </a:solidFill>
-                  <a:latin typeface="Arial" panose="020B0604020202020204"/>
-                  <a:ea typeface="Arial" panose="020B0604020202020204"/>
-                  <a:cs typeface="Arial" panose="020B0604020202020204"/>
-                </a:endParaRPr>
               </a:p>
             </p:txBody>
           </p:sp>
@@ -15184,14 +14264,6 @@
                   </a:rPr>
                   <a:t>apc 70%（R²低）</a:t>
                 </a:r>
-                <a:endParaRPr lang="zh-CN" sz="1350" dirty="0">
-                  <a:solidFill>
-                    <a:srgbClr val="1D2430"/>
-                  </a:solidFill>
-                  <a:latin typeface="Arial" panose="020B0604020202020204"/>
-                  <a:ea typeface="微软雅黑" panose="020B0503020204020204" charset="-122"/>
-                  <a:cs typeface="Arial" panose="020B0604020202020204"/>
-                </a:endParaRPr>
               </a:p>
             </p:txBody>
           </p:sp>
@@ -15232,14 +14304,6 @@
                   </a:rPr>
                   <a:t>参考点 + 预测偏移</a:t>
                 </a:r>
-                <a:endParaRPr lang="zh-CN" sz="1200" i="1" dirty="0">
-                  <a:solidFill>
-                    <a:srgbClr val="5A6478"/>
-                  </a:solidFill>
-                  <a:latin typeface="Times New Roman" panose="02020603050405020304"/>
-                  <a:ea typeface="宋体" panose="02010600030101010101" pitchFamily="2" charset="-122"/>
-                  <a:cs typeface="Times New Roman" panose="02020603050405020304"/>
-                </a:endParaRPr>
               </a:p>
             </p:txBody>
           </p:sp>
@@ -15345,14 +14409,6 @@
                   </a:rPr>
                   <a:t>STAGE OUTPUT</a:t>
                 </a:r>
-                <a:endParaRPr lang="en-US" sz="1050" b="1" spc="75" dirty="0">
-                  <a:solidFill>
-                    <a:srgbClr val="8A92A0"/>
-                  </a:solidFill>
-                  <a:latin typeface="Arial" panose="020B0604020202020204"/>
-                  <a:ea typeface="Arial" panose="020B0604020202020204"/>
-                  <a:cs typeface="Arial" panose="020B0604020202020204"/>
-                </a:endParaRPr>
               </a:p>
             </p:txBody>
           </p:sp>
@@ -15393,14 +14449,6 @@
                   </a:rPr>
                   <a:t>submission.csv</a:t>
                 </a:r>
-                <a:endParaRPr lang="en-US" sz="1350" b="1" dirty="0">
-                  <a:solidFill>
-                    <a:srgbClr val="1A3A6B"/>
-                  </a:solidFill>
-                  <a:latin typeface="Arial" panose="020B0604020202020204"/>
-                  <a:ea typeface="Arial" panose="020B0604020202020204"/>
-                  <a:cs typeface="Arial" panose="020B0604020202020204"/>
-                </a:endParaRPr>
               </a:p>
             </p:txBody>
           </p:sp>
@@ -15493,14 +14541,6 @@
                 </a:rPr>
                 <a:t>KEY PARAMETERS · 关键参数</a:t>
               </a:r>
-              <a:endParaRPr lang="zh-CN" sz="1350" b="1" spc="75" dirty="0">
-                <a:solidFill>
-                  <a:srgbClr val="C9962B"/>
-                </a:solidFill>
-                <a:latin typeface="Times New Roman" panose="02020603050405020304"/>
-                <a:ea typeface="微软雅黑" panose="020B0503020204020204" charset="-122"/>
-                <a:cs typeface="Times New Roman" panose="02020603050405020304"/>
-              </a:endParaRPr>
             </a:p>
           </p:txBody>
         </p:sp>
@@ -15603,14 +14643,6 @@
                 </a:rPr>
                 <a:t>CROSS-VALIDATION</a:t>
               </a:r>
-              <a:endParaRPr lang="en-US" sz="1200" b="1" spc="75" dirty="0">
-                <a:solidFill>
-                  <a:srgbClr val="5A6478"/>
-                </a:solidFill>
-                <a:latin typeface="Arial" panose="020B0604020202020204"/>
-                <a:ea typeface="Arial" panose="020B0604020202020204"/>
-                <a:cs typeface="Arial" panose="020B0604020202020204"/>
-              </a:endParaRPr>
             </a:p>
           </p:txBody>
         </p:sp>
@@ -15662,14 +14694,6 @@
                 </a:rPr>
                 <a:t> 按 batch_id 分组</a:t>
               </a:r>
-              <a:endParaRPr lang="zh-CN" sz="1200" dirty="0">
-                <a:solidFill>
-                  <a:srgbClr val="8A92A0"/>
-                </a:solidFill>
-                <a:latin typeface="Times New Roman" panose="02020603050405020304"/>
-                <a:ea typeface="宋体" panose="02010600030101010101" pitchFamily="2" charset="-122"/>
-                <a:cs typeface="Times New Roman" panose="02020603050405020304"/>
-              </a:endParaRPr>
             </a:p>
           </p:txBody>
         </p:sp>
@@ -15710,14 +14734,6 @@
                 </a:rPr>
                 <a:t>5-fold × 10 runs · 防批次泄漏</a:t>
               </a:r>
-              <a:endParaRPr lang="zh-CN" sz="1350" dirty="0">
-                <a:solidFill>
-                  <a:srgbClr val="5A6478"/>
-                </a:solidFill>
-                <a:latin typeface="Arial" panose="020B0604020202020204"/>
-                <a:ea typeface="微软雅黑" panose="020B0503020204020204" charset="-122"/>
-                <a:cs typeface="Arial" panose="020B0604020202020204"/>
-              </a:endParaRPr>
             </a:p>
           </p:txBody>
         </p:sp>
@@ -15794,14 +14810,6 @@
                 </a:rPr>
                 <a:t>MODEL</a:t>
               </a:r>
-              <a:endParaRPr lang="en-US" sz="1200" b="1" spc="75" dirty="0">
-                <a:solidFill>
-                  <a:srgbClr val="5A6478"/>
-                </a:solidFill>
-                <a:latin typeface="Arial" panose="020B0604020202020204"/>
-                <a:ea typeface="Arial" panose="020B0604020202020204"/>
-                <a:cs typeface="Arial" panose="020B0604020202020204"/>
-              </a:endParaRPr>
             </a:p>
           </p:txBody>
         </p:sp>
@@ -15842,14 +14850,6 @@
                 </a:rPr>
                 <a:t>Ridge alpha=0.1</a:t>
               </a:r>
-              <a:endParaRPr lang="en-US" sz="1800" b="1" dirty="0">
-                <a:solidFill>
-                  <a:srgbClr val="1A3A6B"/>
-                </a:solidFill>
-                <a:latin typeface="Times New Roman" panose="02020603050405020304"/>
-                <a:ea typeface="Times New Roman" panose="02020603050405020304"/>
-                <a:cs typeface="Times New Roman" panose="02020603050405020304"/>
-              </a:endParaRPr>
             </a:p>
           </p:txBody>
         </p:sp>
@@ -15890,14 +14890,6 @@
                 </a:rPr>
                 <a:t>L2 正则 · 适合小样本防过拟合</a:t>
               </a:r>
-              <a:endParaRPr lang="zh-CN" sz="1350" dirty="0">
-                <a:solidFill>
-                  <a:srgbClr val="5A6478"/>
-                </a:solidFill>
-                <a:latin typeface="Arial" panose="020B0604020202020204"/>
-                <a:ea typeface="微软雅黑" panose="020B0503020204020204" charset="-122"/>
-                <a:cs typeface="Arial" panose="020B0604020202020204"/>
-              </a:endParaRPr>
             </a:p>
           </p:txBody>
         </p:sp>
@@ -15938,14 +14930,6 @@
                 </a:rPr>
                 <a:t>OOF R² (OUT-OF-FOLD)</a:t>
               </a:r>
-              <a:endParaRPr lang="en-US" sz="1200" b="1" spc="75" dirty="0">
-                <a:solidFill>
-                  <a:srgbClr val="5A6478"/>
-                </a:solidFill>
-                <a:latin typeface="Arial" panose="020B0604020202020204"/>
-                <a:ea typeface="Arial" panose="020B0604020202020204"/>
-                <a:cs typeface="Arial" panose="020B0604020202020204"/>
-              </a:endParaRPr>
             </a:p>
           </p:txBody>
         </p:sp>
@@ -16107,14 +15091,6 @@
                 </a:rPr>
                 <a:t>CV 拟合优度</a:t>
               </a:r>
-              <a:endParaRPr lang="zh-CN" sz="1200" dirty="0">
-                <a:solidFill>
-                  <a:srgbClr val="8A92A0"/>
-                </a:solidFill>
-                <a:latin typeface="Arial" panose="020B0604020202020204"/>
-                <a:ea typeface="微软雅黑" panose="020B0503020204020204" charset="-122"/>
-                <a:cs typeface="Arial" panose="020B0604020202020204"/>
-              </a:endParaRPr>
             </a:p>
           </p:txBody>
         </p:sp>
@@ -16155,14 +15131,6 @@
                 </a:rPr>
                 <a:t>apc R²≈0 驱动 70% 收缩比例（R² 越低 → 收缩越多）</a:t>
               </a:r>
-              <a:endParaRPr lang="zh-CN" sz="1200" dirty="0">
-                <a:solidFill>
-                  <a:srgbClr val="8A92A0"/>
-                </a:solidFill>
-                <a:latin typeface="Arial" panose="020B0604020202020204"/>
-                <a:ea typeface="微软雅黑" panose="020B0503020204020204" charset="-122"/>
-                <a:cs typeface="Arial" panose="020B0604020202020204"/>
-              </a:endParaRPr>
             </a:p>
           </p:txBody>
         </p:sp>
@@ -16218,14 +15186,6 @@
                 </a:rPr>
                 <a:t>校准公式：校准后 = 参考点 + (模型预测 − 参考点) × (1 − 收缩比例)</a:t>
               </a:r>
-              <a:endParaRPr lang="zh-CN" sz="1200" dirty="0">
-                <a:solidFill>
-                  <a:srgbClr val="000000"/>
-                </a:solidFill>
-                <a:latin typeface="Arial" panose="020B0604020202020204"/>
-                <a:ea typeface="微软雅黑" panose="020B0503020204020204" charset="-122"/>
-                <a:cs typeface="Arial" panose="020B0604020202020204"/>
-              </a:endParaRPr>
             </a:p>
           </p:txBody>
         </p:sp>
@@ -16266,14 +15226,6 @@
                 </a:rPr>
                 <a:t>04 / 05</a:t>
               </a:r>
-              <a:endParaRPr lang="en-US" sz="1200" dirty="0">
-                <a:solidFill>
-                  <a:srgbClr val="8A92A0"/>
-                </a:solidFill>
-                <a:latin typeface="Times New Roman" panose="02020603050405020304"/>
-                <a:ea typeface="Times New Roman" panose="02020603050405020304"/>
-                <a:cs typeface="Times New Roman" panose="02020603050405020304"/>
-              </a:endParaRPr>
             </a:p>
           </p:txBody>
         </p:sp>
@@ -16283,13 +15235,13 @@
   <p:clrMapOvr>
     <a:masterClrMapping/>
   </p:clrMapOvr>
-  <mc:AlternateContent xmlns:mc="http://schemas.openxmlformats.org/markup-compatibility/2006">
-    <mc:Choice xmlns:p14="http://schemas.microsoft.com/office/powerpoint/2010/main" Requires="p14">
+  <mc:AlternateContent xmlns:mc="http://schemas.openxmlformats.org/markup-compatibility/2006" xmlns:p14="http://schemas.microsoft.com/office/powerpoint/2010/main">
+    <mc:Choice Requires="p14">
       <p:transition p14:dur="400">
         <p:fade/>
       </p:transition>
     </mc:Choice>
-    <mc:Fallback>
+    <mc:Fallback xmlns="">
       <p:transition>
         <p:fade/>
       </p:transition>
@@ -16410,14 +15362,6 @@
                 </a:rPr>
                 <a:t>05 · RESULTS &amp; INNOVATIONS</a:t>
               </a:r>
-              <a:endParaRPr lang="en-US" sz="1350" b="1" spc="75" dirty="0">
-                <a:solidFill>
-                  <a:srgbClr val="C9962B"/>
-                </a:solidFill>
-                <a:latin typeface="Times New Roman" panose="02020603050405020304"/>
-                <a:ea typeface="Times New Roman" panose="02020603050405020304"/>
-                <a:cs typeface="Times New Roman" panose="02020603050405020304"/>
-              </a:endParaRPr>
             </a:p>
           </p:txBody>
         </p:sp>
@@ -16458,14 +15402,6 @@
                 </a:rPr>
                 <a:t>最终性能与创新点</a:t>
               </a:r>
-              <a:endParaRPr lang="zh-CN" sz="3150" b="1" dirty="0">
-                <a:solidFill>
-                  <a:srgbClr val="1A3A6B"/>
-                </a:solidFill>
-                <a:latin typeface="Times New Roman" panose="02020603050405020304"/>
-                <a:ea typeface="微软雅黑" panose="020B0503020204020204" charset="-122"/>
-                <a:cs typeface="Times New Roman" panose="02020603050405020304"/>
-              </a:endParaRPr>
             </a:p>
           </p:txBody>
         </p:sp>
@@ -16557,14 +15493,6 @@
                 </a:rPr>
                 <a:t>LEADERBOARD MAE</a:t>
               </a:r>
-              <a:endParaRPr lang="en-US" sz="1200" b="1" spc="75" dirty="0">
-                <a:solidFill>
-                  <a:srgbClr val="5A6478"/>
-                </a:solidFill>
-                <a:latin typeface="Times New Roman" panose="02020603050405020304"/>
-                <a:ea typeface="Times New Roman" panose="02020603050405020304"/>
-                <a:cs typeface="Times New Roman" panose="02020603050405020304"/>
-              </a:endParaRPr>
             </a:p>
           </p:txBody>
         </p:sp>
@@ -16605,14 +15533,6 @@
                 </a:rPr>
                 <a:t>3.67</a:t>
               </a:r>
-              <a:endParaRPr lang="en-US" sz="5400" b="1" dirty="0">
-                <a:solidFill>
-                  <a:srgbClr val="1A3A6B"/>
-                </a:solidFill>
-                <a:latin typeface="Arial" panose="020B0604020202020204"/>
-                <a:ea typeface="Arial" panose="020B0604020202020204"/>
-                <a:cs typeface="Arial" panose="020B0604020202020204"/>
-              </a:endParaRPr>
             </a:p>
           </p:txBody>
         </p:sp>
@@ -16689,14 +15609,6 @@
                 </a:rPr>
                 <a:t>CV MAE</a:t>
               </a:r>
-              <a:endParaRPr lang="en-US" sz="1200" b="1" spc="75" dirty="0">
-                <a:solidFill>
-                  <a:srgbClr val="5A6478"/>
-                </a:solidFill>
-                <a:latin typeface="Times New Roman" panose="02020603050405020304"/>
-                <a:ea typeface="Times New Roman" panose="02020603050405020304"/>
-                <a:cs typeface="Times New Roman" panose="02020603050405020304"/>
-              </a:endParaRPr>
             </a:p>
           </p:txBody>
         </p:sp>
@@ -16737,14 +15649,6 @@
                 </a:rPr>
                 <a:t>3.71</a:t>
               </a:r>
-              <a:endParaRPr lang="en-US" sz="3900" b="1" dirty="0">
-                <a:solidFill>
-                  <a:srgbClr val="4A7BB5"/>
-                </a:solidFill>
-                <a:latin typeface="Arial" panose="020B0604020202020204"/>
-                <a:ea typeface="Arial" panose="020B0604020202020204"/>
-                <a:cs typeface="Arial" panose="020B0604020202020204"/>
-              </a:endParaRPr>
             </a:p>
           </p:txBody>
         </p:sp>
@@ -16821,14 +15725,6 @@
                 </a:rPr>
                 <a:t>CALIBRATION PATH</a:t>
               </a:r>
-              <a:endParaRPr lang="en-US" sz="1200" b="1" spc="75" dirty="0">
-                <a:solidFill>
-                  <a:srgbClr val="C9962B"/>
-                </a:solidFill>
-                <a:latin typeface="Times New Roman" panose="02020603050405020304"/>
-                <a:ea typeface="Times New Roman" panose="02020603050405020304"/>
-                <a:cs typeface="Times New Roman" panose="02020603050405020304"/>
-              </a:endParaRPr>
             </a:p>
           </p:txBody>
         </p:sp>
@@ -16935,14 +15831,6 @@
                 </a:rPr>
                 <a:t>3.67</a:t>
               </a:r>
-              <a:endParaRPr lang="en-US" sz="1800" b="1" dirty="0">
-                <a:solidFill>
-                  <a:srgbClr val="C9962B"/>
-                </a:solidFill>
-                <a:latin typeface="Arial" panose="020B0604020202020204"/>
-                <a:ea typeface="Arial" panose="020B0604020202020204"/>
-                <a:cs typeface="Arial" panose="020B0604020202020204"/>
-              </a:endParaRPr>
             </a:p>
           </p:txBody>
         </p:sp>
@@ -16983,14 +15871,6 @@
                 </a:rPr>
                 <a:t>baseline +recipe +operator +apc</a:t>
               </a:r>
-              <a:endParaRPr lang="en-US" sz="1120" dirty="0">
-                <a:solidFill>
-                  <a:srgbClr val="000000"/>
-                </a:solidFill>
-                <a:latin typeface="Arial" panose="020B0604020202020204"/>
-                <a:ea typeface="Arial" panose="020B0604020202020204"/>
-                <a:cs typeface="Arial" panose="020B0604020202020204"/>
-              </a:endParaRPr>
             </a:p>
           </p:txBody>
         </p:sp>
@@ -17144,14 +16024,6 @@
                 </a:rPr>
                 <a:t>3.55</a:t>
               </a:r>
-              <a:endParaRPr lang="en-US" sz="980" dirty="0">
-                <a:solidFill>
-                  <a:srgbClr val="8A92A0"/>
-                </a:solidFill>
-                <a:latin typeface="Times New Roman" panose="02020603050405020304"/>
-                <a:ea typeface="Times New Roman" panose="02020603050405020304"/>
-                <a:cs typeface="Times New Roman" panose="02020603050405020304"/>
-              </a:endParaRPr>
             </a:p>
           </p:txBody>
         </p:sp>
@@ -17231,14 +16103,6 @@
                 </a:rPr>
                 <a:t>3.65</a:t>
               </a:r>
-              <a:endParaRPr lang="en-US" sz="980" dirty="0">
-                <a:solidFill>
-                  <a:srgbClr val="8A92A0"/>
-                </a:solidFill>
-                <a:latin typeface="Times New Roman" panose="02020603050405020304"/>
-                <a:ea typeface="Times New Roman" panose="02020603050405020304"/>
-                <a:cs typeface="Times New Roman" panose="02020603050405020304"/>
-              </a:endParaRPr>
             </a:p>
           </p:txBody>
         </p:sp>
@@ -17318,14 +16182,6 @@
                 </a:rPr>
                 <a:t>3.75</a:t>
               </a:r>
-              <a:endParaRPr lang="en-US" sz="980" dirty="0">
-                <a:solidFill>
-                  <a:srgbClr val="8A92A0"/>
-                </a:solidFill>
-                <a:latin typeface="Times New Roman" panose="02020603050405020304"/>
-                <a:ea typeface="Times New Roman" panose="02020603050405020304"/>
-                <a:cs typeface="Times New Roman" panose="02020603050405020304"/>
-              </a:endParaRPr>
             </a:p>
           </p:txBody>
         </p:sp>
@@ -17405,14 +16261,6 @@
                 </a:rPr>
                 <a:t>3.85</a:t>
               </a:r>
-              <a:endParaRPr lang="en-US" sz="980" dirty="0">
-                <a:solidFill>
-                  <a:srgbClr val="8A92A0"/>
-                </a:solidFill>
-                <a:latin typeface="Times New Roman" panose="02020603050405020304"/>
-                <a:ea typeface="Times New Roman" panose="02020603050405020304"/>
-                <a:cs typeface="Times New Roman" panose="02020603050405020304"/>
-              </a:endParaRPr>
             </a:p>
           </p:txBody>
         </p:sp>
@@ -17492,14 +16340,6 @@
                 </a:rPr>
                 <a:t>3.95</a:t>
               </a:r>
-              <a:endParaRPr lang="en-US" sz="980" dirty="0">
-                <a:solidFill>
-                  <a:srgbClr val="8A92A0"/>
-                </a:solidFill>
-                <a:latin typeface="Times New Roman" panose="02020603050405020304"/>
-                <a:ea typeface="Times New Roman" panose="02020603050405020304"/>
-                <a:cs typeface="Times New Roman" panose="02020603050405020304"/>
-              </a:endParaRPr>
             </a:p>
           </p:txBody>
         </p:sp>
@@ -17579,14 +16419,6 @@
                 </a:rPr>
                 <a:t>4.05</a:t>
               </a:r>
-              <a:endParaRPr lang="en-US" sz="980" dirty="0">
-                <a:solidFill>
-                  <a:srgbClr val="8A92A0"/>
-                </a:solidFill>
-                <a:latin typeface="Times New Roman" panose="02020603050405020304"/>
-                <a:ea typeface="Times New Roman" panose="02020603050405020304"/>
-                <a:cs typeface="Times New Roman" panose="02020603050405020304"/>
-              </a:endParaRPr>
             </a:p>
           </p:txBody>
         </p:sp>
@@ -17666,14 +16498,6 @@
                 </a:rPr>
                 <a:t>4.15</a:t>
               </a:r>
-              <a:endParaRPr lang="en-US" sz="980" dirty="0">
-                <a:solidFill>
-                  <a:srgbClr val="8A92A0"/>
-                </a:solidFill>
-                <a:latin typeface="Times New Roman" panose="02020603050405020304"/>
-                <a:ea typeface="Times New Roman" panose="02020603050405020304"/>
-                <a:cs typeface="Times New Roman" panose="02020603050405020304"/>
-              </a:endParaRPr>
             </a:p>
           </p:txBody>
         </p:sp>
@@ -17714,14 +16538,6 @@
                 </a:rPr>
                 <a:t>baseline</a:t>
               </a:r>
-              <a:endParaRPr lang="en-US" sz="1120" dirty="0">
-                <a:solidFill>
-                  <a:srgbClr val="5A6478"/>
-                </a:solidFill>
-                <a:latin typeface="Arial" panose="020B0604020202020204"/>
-                <a:ea typeface="Arial" panose="020B0604020202020204"/>
-                <a:cs typeface="Arial" panose="020B0604020202020204"/>
-              </a:endParaRPr>
             </a:p>
           </p:txBody>
         </p:sp>
@@ -17762,14 +16578,6 @@
                 </a:rPr>
                 <a:t>+recipe</a:t>
               </a:r>
-              <a:endParaRPr lang="en-US" sz="1120" dirty="0">
-                <a:solidFill>
-                  <a:srgbClr val="5A6478"/>
-                </a:solidFill>
-                <a:latin typeface="Arial" panose="020B0604020202020204"/>
-                <a:ea typeface="Arial" panose="020B0604020202020204"/>
-                <a:cs typeface="Arial" panose="020B0604020202020204"/>
-              </a:endParaRPr>
             </a:p>
           </p:txBody>
         </p:sp>
@@ -17810,14 +16618,6 @@
                 </a:rPr>
                 <a:t>+operator</a:t>
               </a:r>
-              <a:endParaRPr lang="en-US" sz="1120" dirty="0">
-                <a:solidFill>
-                  <a:srgbClr val="5A6478"/>
-                </a:solidFill>
-                <a:latin typeface="Arial" panose="020B0604020202020204"/>
-                <a:ea typeface="Arial" panose="020B0604020202020204"/>
-                <a:cs typeface="Arial" panose="020B0604020202020204"/>
-              </a:endParaRPr>
             </a:p>
           </p:txBody>
         </p:sp>
@@ -17858,14 +16658,6 @@
                 </a:rPr>
                 <a:t>+apc</a:t>
               </a:r>
-              <a:endParaRPr lang="en-US" sz="1120" dirty="0">
-                <a:solidFill>
-                  <a:srgbClr val="5A6478"/>
-                </a:solidFill>
-                <a:latin typeface="Arial" panose="020B0604020202020204"/>
-                <a:ea typeface="Arial" panose="020B0604020202020204"/>
-                <a:cs typeface="Arial" panose="020B0604020202020204"/>
-              </a:endParaRPr>
             </a:p>
           </p:txBody>
         </p:sp>
@@ -17973,14 +16765,6 @@
                 </a:rPr>
                 <a:t>4.06</a:t>
               </a:r>
-              <a:endParaRPr lang="en-US" sz="1120" dirty="0">
-                <a:solidFill>
-                  <a:srgbClr val="1A3A6B"/>
-                </a:solidFill>
-                <a:latin typeface="Times New Roman" panose="02020603050405020304"/>
-                <a:ea typeface="Times New Roman" panose="02020603050405020304"/>
-                <a:cs typeface="Times New Roman" panose="02020603050405020304"/>
-              </a:endParaRPr>
             </a:p>
           </p:txBody>
         </p:sp>
@@ -18045,14 +16829,6 @@
                 </a:rPr>
                 <a:t>3.89</a:t>
               </a:r>
-              <a:endParaRPr lang="en-US" sz="1120" dirty="0">
-                <a:solidFill>
-                  <a:srgbClr val="1A3A6B"/>
-                </a:solidFill>
-                <a:latin typeface="Times New Roman" panose="02020603050405020304"/>
-                <a:ea typeface="Times New Roman" panose="02020603050405020304"/>
-                <a:cs typeface="Times New Roman" panose="02020603050405020304"/>
-              </a:endParaRPr>
             </a:p>
           </p:txBody>
         </p:sp>
@@ -18117,14 +16893,6 @@
                 </a:rPr>
                 <a:t>3.81</a:t>
               </a:r>
-              <a:endParaRPr lang="en-US" sz="1120" dirty="0">
-                <a:solidFill>
-                  <a:srgbClr val="1A3A6B"/>
-                </a:solidFill>
-                <a:latin typeface="Times New Roman" panose="02020603050405020304"/>
-                <a:ea typeface="Times New Roman" panose="02020603050405020304"/>
-                <a:cs typeface="Times New Roman" panose="02020603050405020304"/>
-              </a:endParaRPr>
             </a:p>
           </p:txBody>
         </p:sp>
@@ -18189,14 +16957,6 @@
                 </a:rPr>
                 <a:t>3.67</a:t>
               </a:r>
-              <a:endParaRPr lang="en-US" sz="1120" b="1" dirty="0">
-                <a:solidFill>
-                  <a:srgbClr val="C9962B"/>
-                </a:solidFill>
-                <a:latin typeface="Times New Roman" panose="02020603050405020304"/>
-                <a:ea typeface="Times New Roman" panose="02020603050405020304"/>
-                <a:cs typeface="Times New Roman" panose="02020603050405020304"/>
-              </a:endParaRPr>
             </a:p>
           </p:txBody>
         </p:sp>
@@ -18292,14 +17052,6 @@
               </a:rPr>
               <a:t>校准改善路径</a:t>
             </a:r>
-            <a:endParaRPr lang="zh-CN" sz="1350" b="1" dirty="0">
-              <a:solidFill>
-                <a:srgbClr val="1A3A6B"/>
-              </a:solidFill>
-              <a:latin typeface="Arial" panose="020B0604020202020204"/>
-              <a:ea typeface="微软雅黑" panose="020B0503020204020204" charset="-122"/>
-              <a:cs typeface="Arial" panose="020B0604020202020204"/>
-            </a:endParaRPr>
           </a:p>
         </p:txBody>
       </p:sp>
@@ -18340,14 +17092,6 @@
               </a:rPr>
               <a:t>MAE 逐步下降</a:t>
             </a:r>
-            <a:endParaRPr lang="zh-CN" sz="1050" dirty="0">
-              <a:solidFill>
-                <a:srgbClr val="000000"/>
-              </a:solidFill>
-              <a:latin typeface="Times New Roman" panose="02020603050405020304"/>
-              <a:ea typeface="宋体" panose="02010600030101010101" pitchFamily="2" charset="-122"/>
-              <a:cs typeface="Times New Roman" panose="02020603050405020304"/>
-            </a:endParaRPr>
           </a:p>
         </p:txBody>
       </p:sp>
@@ -18428,14 +17172,6 @@
                 </a:rPr>
                 <a:t>CT 预测均值对比</a:t>
               </a:r>
-              <a:endParaRPr lang="zh-CN" sz="1350" b="1" dirty="0">
-                <a:solidFill>
-                  <a:srgbClr val="1A3A6B"/>
-                </a:solidFill>
-                <a:latin typeface="Arial" panose="020B0604020202020204"/>
-                <a:ea typeface="微软雅黑" panose="020B0503020204020204" charset="-122"/>
-                <a:cs typeface="Arial" panose="020B0604020202020204"/>
-              </a:endParaRPr>
             </a:p>
           </p:txBody>
         </p:sp>
@@ -18476,14 +17212,6 @@
                 </a:rPr>
                 <a:t>模型→校准→真实 三线收敛</a:t>
               </a:r>
-              <a:endParaRPr lang="zh-CN" sz="1050" dirty="0">
-                <a:solidFill>
-                  <a:srgbClr val="000000"/>
-                </a:solidFill>
-                <a:latin typeface="Times New Roman" panose="02020603050405020304"/>
-                <a:ea typeface="宋体" panose="02010600030101010101" pitchFamily="2" charset="-122"/>
-                <a:cs typeface="Times New Roman" panose="02020603050405020304"/>
-              </a:endParaRPr>
             </a:p>
           </p:txBody>
         </p:sp>
@@ -18560,14 +17288,6 @@
                 </a:rPr>
                 <a:t>23</a:t>
               </a:r>
-              <a:endParaRPr lang="en-US" sz="980" dirty="0">
-                <a:solidFill>
-                  <a:srgbClr val="8A92A0"/>
-                </a:solidFill>
-                <a:latin typeface="Times New Roman" panose="02020603050405020304"/>
-                <a:ea typeface="Times New Roman" panose="02020603050405020304"/>
-                <a:cs typeface="Times New Roman" panose="02020603050405020304"/>
-              </a:endParaRPr>
             </a:p>
           </p:txBody>
         </p:sp>
@@ -18647,14 +17367,6 @@
                 </a:rPr>
                 <a:t>24</a:t>
               </a:r>
-              <a:endParaRPr lang="en-US" sz="980" dirty="0">
-                <a:solidFill>
-                  <a:srgbClr val="8A92A0"/>
-                </a:solidFill>
-                <a:latin typeface="Times New Roman" panose="02020603050405020304"/>
-                <a:ea typeface="Times New Roman" panose="02020603050405020304"/>
-                <a:cs typeface="Times New Roman" panose="02020603050405020304"/>
-              </a:endParaRPr>
             </a:p>
           </p:txBody>
         </p:sp>
@@ -18734,14 +17446,6 @@
                 </a:rPr>
                 <a:t>25</a:t>
               </a:r>
-              <a:endParaRPr lang="en-US" sz="980" dirty="0">
-                <a:solidFill>
-                  <a:srgbClr val="8A92A0"/>
-                </a:solidFill>
-                <a:latin typeface="Times New Roman" panose="02020603050405020304"/>
-                <a:ea typeface="Times New Roman" panose="02020603050405020304"/>
-                <a:cs typeface="Times New Roman" panose="02020603050405020304"/>
-              </a:endParaRPr>
             </a:p>
           </p:txBody>
         </p:sp>
@@ -18821,14 +17525,6 @@
                 </a:rPr>
                 <a:t>26</a:t>
               </a:r>
-              <a:endParaRPr lang="en-US" sz="980" dirty="0">
-                <a:solidFill>
-                  <a:srgbClr val="8A92A0"/>
-                </a:solidFill>
-                <a:latin typeface="Times New Roman" panose="02020603050405020304"/>
-                <a:ea typeface="Times New Roman" panose="02020603050405020304"/>
-                <a:cs typeface="Times New Roman" panose="02020603050405020304"/>
-              </a:endParaRPr>
             </a:p>
           </p:txBody>
         </p:sp>
@@ -18908,14 +17604,6 @@
                 </a:rPr>
                 <a:t>27</a:t>
               </a:r>
-              <a:endParaRPr lang="en-US" sz="980" dirty="0">
-                <a:solidFill>
-                  <a:srgbClr val="8A92A0"/>
-                </a:solidFill>
-                <a:latin typeface="Times New Roman" panose="02020603050405020304"/>
-                <a:ea typeface="Times New Roman" panose="02020603050405020304"/>
-                <a:cs typeface="Times New Roman" panose="02020603050405020304"/>
-              </a:endParaRPr>
             </a:p>
           </p:txBody>
         </p:sp>
@@ -18995,14 +17683,6 @@
                 </a:rPr>
                 <a:t>28</a:t>
               </a:r>
-              <a:endParaRPr lang="en-US" sz="980" dirty="0">
-                <a:solidFill>
-                  <a:srgbClr val="8A92A0"/>
-                </a:solidFill>
-                <a:latin typeface="Times New Roman" panose="02020603050405020304"/>
-                <a:ea typeface="Times New Roman" panose="02020603050405020304"/>
-                <a:cs typeface="Times New Roman" panose="02020603050405020304"/>
-              </a:endParaRPr>
             </a:p>
           </p:txBody>
         </p:sp>
@@ -19082,14 +17762,6 @@
                 </a:rPr>
                 <a:t>29</a:t>
               </a:r>
-              <a:endParaRPr lang="en-US" sz="980" dirty="0">
-                <a:solidFill>
-                  <a:srgbClr val="8A92A0"/>
-                </a:solidFill>
-                <a:latin typeface="Times New Roman" panose="02020603050405020304"/>
-                <a:ea typeface="Times New Roman" panose="02020603050405020304"/>
-                <a:cs typeface="Times New Roman" panose="02020603050405020304"/>
-              </a:endParaRPr>
             </a:p>
           </p:txBody>
         </p:sp>
@@ -19130,14 +17802,6 @@
                 </a:rPr>
                 <a:t>recipe</a:t>
               </a:r>
-              <a:endParaRPr lang="en-US" sz="1120" dirty="0">
-                <a:solidFill>
-                  <a:srgbClr val="5A6478"/>
-                </a:solidFill>
-                <a:latin typeface="Arial" panose="020B0604020202020204"/>
-                <a:ea typeface="Arial" panose="020B0604020202020204"/>
-                <a:cs typeface="Arial" panose="020B0604020202020204"/>
-              </a:endParaRPr>
             </a:p>
           </p:txBody>
         </p:sp>
@@ -19178,14 +17842,6 @@
                 </a:rPr>
                 <a:t>operator</a:t>
               </a:r>
-              <a:endParaRPr lang="en-US" sz="1120" dirty="0">
-                <a:solidFill>
-                  <a:srgbClr val="5A6478"/>
-                </a:solidFill>
-                <a:latin typeface="Arial" panose="020B0604020202020204"/>
-                <a:ea typeface="Arial" panose="020B0604020202020204"/>
-                <a:cs typeface="Arial" panose="020B0604020202020204"/>
-              </a:endParaRPr>
             </a:p>
           </p:txBody>
         </p:sp>
@@ -19226,14 +17882,6 @@
                 </a:rPr>
                 <a:t>apc</a:t>
               </a:r>
-              <a:endParaRPr lang="en-US" sz="1120" dirty="0">
-                <a:solidFill>
-                  <a:srgbClr val="5A6478"/>
-                </a:solidFill>
-                <a:latin typeface="Arial" panose="020B0604020202020204"/>
-                <a:ea typeface="Arial" panose="020B0604020202020204"/>
-                <a:cs typeface="Arial" panose="020B0604020202020204"/>
-              </a:endParaRPr>
             </a:p>
           </p:txBody>
         </p:sp>
@@ -19274,14 +17922,6 @@
                 </a:rPr>
                 <a:t>total</a:t>
               </a:r>
-              <a:endParaRPr lang="en-US" sz="1120" dirty="0">
-                <a:solidFill>
-                  <a:srgbClr val="5A6478"/>
-                </a:solidFill>
-                <a:latin typeface="Arial" panose="020B0604020202020204"/>
-                <a:ea typeface="Arial" panose="020B0604020202020204"/>
-                <a:cs typeface="Arial" panose="020B0604020202020204"/>
-              </a:endParaRPr>
             </a:p>
           </p:txBody>
         </p:sp>
@@ -19801,14 +18441,6 @@
                 </a:rPr>
                 <a:t>模型预测</a:t>
               </a:r>
-              <a:endParaRPr lang="zh-CN" sz="1050" dirty="0">
-                <a:solidFill>
-                  <a:srgbClr val="5A6478"/>
-                </a:solidFill>
-                <a:latin typeface="Arial" panose="020B0604020202020204"/>
-                <a:ea typeface="微软雅黑" panose="020B0503020204020204" charset="-122"/>
-                <a:cs typeface="Arial" panose="020B0604020202020204"/>
-              </a:endParaRPr>
             </a:p>
           </p:txBody>
         </p:sp>
@@ -19907,14 +18539,6 @@
                 </a:rPr>
                 <a:t>校准后</a:t>
               </a:r>
-              <a:endParaRPr lang="zh-CN" sz="1050" dirty="0">
-                <a:solidFill>
-                  <a:srgbClr val="5A6478"/>
-                </a:solidFill>
-                <a:latin typeface="Arial" panose="020B0604020202020204"/>
-                <a:ea typeface="微软雅黑" panose="020B0503020204020204" charset="-122"/>
-                <a:cs typeface="Arial" panose="020B0604020202020204"/>
-              </a:endParaRPr>
             </a:p>
           </p:txBody>
         </p:sp>
@@ -20013,14 +18637,6 @@
                 </a:rPr>
                 <a:t>真实均值</a:t>
               </a:r>
-              <a:endParaRPr lang="zh-CN" sz="1050" dirty="0">
-                <a:solidFill>
-                  <a:srgbClr val="5A6478"/>
-                </a:solidFill>
-                <a:latin typeface="Arial" panose="020B0604020202020204"/>
-                <a:ea typeface="微软雅黑" panose="020B0503020204020204" charset="-122"/>
-                <a:cs typeface="Arial" panose="020B0604020202020204"/>
-              </a:endParaRPr>
             </a:p>
           </p:txBody>
         </p:sp>
@@ -20098,14 +18714,6 @@
               </a:rPr>
               <a:t>FOUR INNOVATIONS · 四大创新点</a:t>
             </a:r>
-            <a:endParaRPr lang="zh-CN" sz="1350" b="1" spc="75" dirty="0">
-              <a:solidFill>
-                <a:srgbClr val="C9962B"/>
-              </a:solidFill>
-              <a:latin typeface="Times New Roman" panose="02020603050405020304"/>
-              <a:ea typeface="微软雅黑" panose="020B0503020204020204" charset="-122"/>
-              <a:cs typeface="Times New Roman" panose="02020603050405020304"/>
-            </a:endParaRPr>
           </a:p>
         </p:txBody>
       </p:sp>
@@ -20420,14 +19028,6 @@
                   </a:rPr>
                   <a:t>①</a:t>
                 </a:r>
-                <a:endParaRPr lang="en-US" sz="1800" b="1" dirty="0">
-                  <a:solidFill>
-                    <a:srgbClr val="C9962B"/>
-                  </a:solidFill>
-                  <a:latin typeface="Times New Roman" panose="02020603050405020304"/>
-                  <a:ea typeface="Times New Roman" panose="02020603050405020304"/>
-                  <a:cs typeface="Times New Roman" panose="02020603050405020304"/>
-                </a:endParaRPr>
               </a:p>
             </p:txBody>
           </p:sp>
@@ -20468,14 +19068,6 @@
                   </a:rPr>
                   <a:t>CT 特异性建模</a:t>
                 </a:r>
-                <a:endParaRPr lang="zh-CN" sz="1650" b="1" dirty="0">
-                  <a:solidFill>
-                    <a:srgbClr val="1A3A6B"/>
-                  </a:solidFill>
-                  <a:latin typeface="Arial" panose="020B0604020202020204"/>
-                  <a:ea typeface="微软雅黑" panose="020B0503020204020204" charset="-122"/>
-                  <a:cs typeface="Arial" panose="020B0604020202020204"/>
-                </a:endParaRPr>
               </a:p>
             </p:txBody>
           </p:sp>
@@ -20516,14 +19108,6 @@
                   </a:rPr>
                   <a:t>按控制类型分别建模，捕捉 recipe / operator / apc 工艺差异</a:t>
                 </a:r>
-                <a:endParaRPr lang="zh-CN" sz="1280" dirty="0">
-                  <a:solidFill>
-                    <a:srgbClr val="5A6478"/>
-                  </a:solidFill>
-                  <a:latin typeface="Arial" panose="020B0604020202020204"/>
-                  <a:ea typeface="微软雅黑" panose="020B0503020204020204" charset="-122"/>
-                  <a:cs typeface="Arial" panose="020B0604020202020204"/>
-                </a:endParaRPr>
               </a:p>
             </p:txBody>
           </p:sp>
@@ -20564,14 +19148,6 @@
                   </a:rPr>
                   <a:t>核心决策点，驱动整个方案架构</a:t>
                 </a:r>
-                <a:endParaRPr lang="zh-CN" sz="1120" dirty="0">
-                  <a:solidFill>
-                    <a:srgbClr val="8A92A0"/>
-                  </a:solidFill>
-                  <a:latin typeface="Arial" panose="020B0604020202020204"/>
-                  <a:ea typeface="微软雅黑" panose="020B0503020204020204" charset="-122"/>
-                  <a:cs typeface="Arial" panose="020B0604020202020204"/>
-                </a:endParaRPr>
               </a:p>
             </p:txBody>
           </p:sp>
@@ -20694,14 +19270,6 @@
                   </a:rPr>
                   <a:t>②</a:t>
                 </a:r>
-                <a:endParaRPr lang="en-US" sz="1800" b="1" dirty="0">
-                  <a:solidFill>
-                    <a:srgbClr val="C9962B"/>
-                  </a:solidFill>
-                  <a:latin typeface="Times New Roman" panose="02020603050405020304"/>
-                  <a:ea typeface="Times New Roman" panose="02020603050405020304"/>
-                  <a:cs typeface="Times New Roman" panose="02020603050405020304"/>
-                </a:endParaRPr>
               </a:p>
             </p:txBody>
           </p:sp>
@@ -20742,14 +19310,6 @@
                   </a:rPr>
                   <a:t>自适应特征选择</a:t>
                 </a:r>
-                <a:endParaRPr lang="zh-CN" sz="1650" b="1" dirty="0">
-                  <a:solidFill>
-                    <a:srgbClr val="1A3A6B"/>
-                  </a:solidFill>
-                  <a:latin typeface="Arial" panose="020B0604020202020204"/>
-                  <a:ea typeface="微软雅黑" panose="020B0503020204020204" charset="-122"/>
-                  <a:cs typeface="Arial" panose="020B0604020202020204"/>
-                </a:endParaRPr>
               </a:p>
             </p:txBody>
           </p:sp>
@@ -20790,14 +19350,6 @@
                   </a:rPr>
                   <a:t>APC 全局排名，其他 CT 内排名；K 值按样本数自适应</a:t>
                 </a:r>
-                <a:endParaRPr lang="zh-CN" sz="1280" dirty="0">
-                  <a:solidFill>
-                    <a:srgbClr val="5A6478"/>
-                  </a:solidFill>
-                  <a:latin typeface="Arial" panose="020B0604020202020204"/>
-                  <a:ea typeface="微软雅黑" panose="020B0503020204020204" charset="-122"/>
-                  <a:cs typeface="Arial" panose="020B0604020202020204"/>
-                </a:endParaRPr>
               </a:p>
             </p:txBody>
           </p:sp>
@@ -20838,14 +19390,6 @@
                   </a:rPr>
                   <a:t>小样本 CT 更激进降维，防过拟合</a:t>
                 </a:r>
-                <a:endParaRPr lang="zh-CN" sz="1120" dirty="0">
-                  <a:solidFill>
-                    <a:srgbClr val="8A92A0"/>
-                  </a:solidFill>
-                  <a:latin typeface="Arial" panose="020B0604020202020204"/>
-                  <a:ea typeface="微软雅黑" panose="020B0503020204020204" charset="-122"/>
-                  <a:cs typeface="Arial" panose="020B0604020202020204"/>
-                </a:endParaRPr>
               </a:p>
             </p:txBody>
           </p:sp>
@@ -21125,14 +19669,6 @@
                   </a:rPr>
                   <a:t>③</a:t>
                 </a:r>
-                <a:endParaRPr lang="en-US" sz="1800" b="1" dirty="0">
-                  <a:solidFill>
-                    <a:srgbClr val="C9962B"/>
-                  </a:solidFill>
-                  <a:latin typeface="Times New Roman" panose="02020603050405020304"/>
-                  <a:ea typeface="Times New Roman" panose="02020603050405020304"/>
-                  <a:cs typeface="Times New Roman" panose="02020603050405020304"/>
-                </a:endParaRPr>
               </a:p>
             </p:txBody>
           </p:sp>
@@ -21173,14 +19709,6 @@
                   </a:rPr>
                   <a:t>分层校准</a:t>
                 </a:r>
-                <a:endParaRPr lang="zh-CN" sz="1650" b="1" dirty="0">
-                  <a:solidFill>
-                    <a:srgbClr val="1A3A6B"/>
-                  </a:solidFill>
-                  <a:latin typeface="Arial" panose="020B0604020202020204"/>
-                  <a:ea typeface="微软雅黑" panose="020B0503020204020204" charset="-122"/>
-                  <a:cs typeface="Arial" panose="020B0604020202020204"/>
-                </a:endParaRPr>
               </a:p>
             </p:txBody>
           </p:sp>
@@ -21221,14 +19749,6 @@
                   </a:rPr>
                   <a:t>OOF R² 差异化收缩：apc 70% vs recipe 35%</a:t>
                 </a:r>
-                <a:endParaRPr lang="zh-CN" sz="1280" dirty="0">
-                  <a:solidFill>
-                    <a:srgbClr val="5A6478"/>
-                  </a:solidFill>
-                  <a:latin typeface="Arial" panose="020B0604020202020204"/>
-                  <a:ea typeface="微软雅黑" panose="020B0503020204020204" charset="-122"/>
-                  <a:cs typeface="Arial" panose="020B0604020202020204"/>
-                </a:endParaRPr>
               </a:p>
             </p:txBody>
           </p:sp>
@@ -21269,14 +19789,6 @@
                   </a:rPr>
                   <a:t>低置信度预测向参考点回归，稳健输出</a:t>
                 </a:r>
-                <a:endParaRPr lang="zh-CN" sz="1120" dirty="0">
-                  <a:solidFill>
-                    <a:srgbClr val="8A92A0"/>
-                  </a:solidFill>
-                  <a:latin typeface="Arial" panose="020B0604020202020204"/>
-                  <a:ea typeface="微软雅黑" panose="020B0503020204020204" charset="-122"/>
-                  <a:cs typeface="Arial" panose="020B0604020202020204"/>
-                </a:endParaRPr>
               </a:p>
             </p:txBody>
           </p:sp>
@@ -21383,14 +19895,6 @@
                   </a:rPr>
                   <a:t>④</a:t>
                 </a:r>
-                <a:endParaRPr lang="en-US" sz="1800" b="1" dirty="0">
-                  <a:solidFill>
-                    <a:srgbClr val="C9962B"/>
-                  </a:solidFill>
-                  <a:latin typeface="Times New Roman" panose="02020603050405020304"/>
-                  <a:ea typeface="Times New Roman" panose="02020603050405020304"/>
-                  <a:cs typeface="Times New Roman" panose="02020603050405020304"/>
-                </a:endParaRPr>
               </a:p>
             </p:txBody>
           </p:sp>
@@ -21431,14 +19935,6 @@
                   </a:rPr>
                   <a:t>样本加权</a:t>
                 </a:r>
-                <a:endParaRPr lang="zh-CN" sz="1650" b="1" dirty="0">
-                  <a:solidFill>
-                    <a:srgbClr val="1A3A6B"/>
-                  </a:solidFill>
-                  <a:latin typeface="Arial" panose="020B0604020202020204"/>
-                  <a:ea typeface="微软雅黑" panose="020B0503020204020204" charset="-122"/>
-                  <a:cs typeface="Arial" panose="020B0604020202020204"/>
-                </a:endParaRPr>
               </a:p>
             </p:txBody>
           </p:sp>
@@ -21479,14 +19975,6 @@
                   </a:rPr>
                   <a:t>本 CT 样本 weight=2 + 30 seed Ensemble</a:t>
                 </a:r>
-                <a:endParaRPr lang="zh-CN" sz="1280" dirty="0">
-                  <a:solidFill>
-                    <a:srgbClr val="5A6478"/>
-                  </a:solidFill>
-                  <a:latin typeface="Arial" panose="020B0604020202020204"/>
-                  <a:ea typeface="微软雅黑" panose="020B0503020204020204" charset="-122"/>
-                  <a:cs typeface="Arial" panose="020B0604020202020204"/>
-                </a:endParaRPr>
               </a:p>
             </p:txBody>
           </p:sp>
@@ -21527,14 +20015,6 @@
                   </a:rPr>
                   <a:t>聚焦目标 CT 分布，稳定预测</a:t>
                 </a:r>
-                <a:endParaRPr lang="zh-CN" sz="1120" dirty="0">
-                  <a:solidFill>
-                    <a:srgbClr val="8A92A0"/>
-                  </a:solidFill>
-                  <a:latin typeface="Arial" panose="020B0604020202020204"/>
-                  <a:ea typeface="微软雅黑" panose="020B0503020204020204" charset="-122"/>
-                  <a:cs typeface="Arial" panose="020B0604020202020204"/>
-                </a:endParaRPr>
               </a:p>
             </p:txBody>
           </p:sp>
@@ -21627,14 +20107,6 @@
                 </a:rPr>
                 <a:t>MAE 3.67 = CT 特异性建模 + 分层校准 + 样本加权 + 自适应特征选择</a:t>
               </a:r>
-              <a:endParaRPr lang="zh-CN" sz="1200" dirty="0">
-                <a:solidFill>
-                  <a:srgbClr val="8A92A0"/>
-                </a:solidFill>
-                <a:latin typeface="Arial" panose="020B0604020202020204"/>
-                <a:ea typeface="微软雅黑" panose="020B0503020204020204" charset="-122"/>
-                <a:cs typeface="Arial" panose="020B0604020202020204"/>
-              </a:endParaRPr>
             </a:p>
           </p:txBody>
         </p:sp>
@@ -21675,14 +20147,6 @@
                 </a:rPr>
                 <a:t>05 / 05</a:t>
               </a:r>
-              <a:endParaRPr lang="en-US" sz="1200" dirty="0">
-                <a:solidFill>
-                  <a:srgbClr val="8A92A0"/>
-                </a:solidFill>
-                <a:latin typeface="Times New Roman" panose="02020603050405020304"/>
-                <a:ea typeface="Times New Roman" panose="02020603050405020304"/>
-                <a:cs typeface="Times New Roman" panose="02020603050405020304"/>
-              </a:endParaRPr>
             </a:p>
           </p:txBody>
         </p:sp>
@@ -21692,13 +20156,13 @@
   <p:clrMapOvr>
     <a:masterClrMapping/>
   </p:clrMapOvr>
-  <mc:AlternateContent xmlns:mc="http://schemas.openxmlformats.org/markup-compatibility/2006">
-    <mc:Choice xmlns:p14="http://schemas.microsoft.com/office/powerpoint/2010/main" Requires="p14">
+  <mc:AlternateContent xmlns:mc="http://schemas.openxmlformats.org/markup-compatibility/2006" xmlns:p14="http://schemas.microsoft.com/office/powerpoint/2010/main">
+    <mc:Choice Requires="p14">
       <p:transition p14:dur="400">
         <p:fade/>
       </p:transition>
     </mc:Choice>
-    <mc:Fallback>
+    <mc:Fallback xmlns="">
       <p:transition>
         <p:fade/>
       </p:transition>
@@ -22023,6 +20487,7 @@
       </a:style>
     </a:lnDef>
   </a:objectDefaults>
+  <a:extraClrSchemeLst/>
   <a:extLst>
     <a:ext uri="{05A4C25C-085E-4340-85A3-A5531E510DB2}">
       <thm15:themeFamily xmlns:thm15="http://schemas.microsoft.com/office/thememl/2012/main" name="Office Theme" id="{62F939B6-93AF-4DB8-9C6B-D6C7DFDC589F}" vid="{4A3C46E8-61CC-4603-A589-7422A47A8E4A}"/>
@@ -22347,6 +20812,7 @@
       </a:style>
     </a:lnDef>
   </a:objectDefaults>
+  <a:extraClrSchemeLst/>
   <a:extLst>
     <a:ext uri="{05A4C25C-085E-4340-85A3-A5531E510DB2}">
       <thm15:themeFamily xmlns:thm15="http://schemas.microsoft.com/office/thememl/2012/main" name="Office Theme" id="{62F939B6-93AF-4DB8-9C6B-D6C7DFDC589F}" vid="{4A3C46E8-61CC-4603-A589-7422A47A8E4A}"/>
